--- a/a7/packages/A7 Unit 4 - Solving Problems with Rational Numbers/Lessons/4.05/A7 4.05 Evaluating Expressions with Radicals - Slides.pptx
+++ b/a7/packages/A7 Unit 4 - Solving Problems with Rational Numbers/Lessons/4.05/A7 4.05 Evaluating Expressions with Radicals - Slides.pptx
@@ -3129,7 +3129,7 @@
         </p:nvSpPr>
         <p:spPr>
           <a:xfrm>
-            <a:off x="777240" y="1691640"/>
+            <a:off x="777240" y="2148840"/>
             <a:ext cx="10607040" cy="347472"/>
           </a:xfrm>
           <a:prstGeom prst="rect">
@@ -3164,7 +3164,7 @@
         </p:nvSpPr>
         <p:spPr>
           <a:xfrm>
-            <a:off x="777240" y="2048256"/>
+            <a:off x="777240" y="2505456"/>
             <a:ext cx="10607040" cy="1005840"/>
           </a:xfrm>
           <a:prstGeom prst="rect">
@@ -3199,7 +3199,7 @@
         </p:nvCxnSpPr>
         <p:spPr>
           <a:xfrm>
-            <a:off x="3291840" y="3255264"/>
+            <a:off x="3291840" y="3712464"/>
             <a:ext cx="5577840" cy="0"/>
           </a:xfrm>
           <a:prstGeom prst="line">
@@ -3234,7 +3234,7 @@
         </p:nvCxnSpPr>
         <p:spPr>
           <a:xfrm>
-            <a:off x="3291840" y="3337560"/>
+            <a:off x="3291840" y="3794760"/>
             <a:ext cx="5577840" cy="0"/>
           </a:xfrm>
           <a:prstGeom prst="line">
@@ -3269,7 +3269,7 @@
         </p:nvSpPr>
         <p:spPr>
           <a:xfrm>
-            <a:off x="777240" y="3502152"/>
+            <a:off x="777240" y="3959352"/>
             <a:ext cx="10607040" cy="310896"/>
           </a:xfrm>
           <a:prstGeom prst="rect">
@@ -3304,7 +3304,7 @@
         </p:nvSpPr>
         <p:spPr>
           <a:xfrm>
-            <a:off x="777240" y="3840480"/>
+            <a:off x="777240" y="4297680"/>
             <a:ext cx="10607040" cy="731520"/>
           </a:xfrm>
           <a:prstGeom prst="rect">
@@ -3327,129 +3327,13 @@
                 <a:latin typeface="Century Schoolbook"/>
               </a:rPr>
               <a:t>I can evaluate an expression that contains square roots, cube roots and integer exponents.</a:t>
-            </a:r>
-          </a:p>
-        </p:txBody>
-      </p:sp>
-      <p:sp>
-        <p:nvSpPr>
-          <p:cNvPr id="8" name="Rectangle 7"/>
-          <p:cNvSpPr/>
-          <p:nvPr/>
-        </p:nvSpPr>
-        <p:spPr>
-          <a:xfrm>
-            <a:off x="2377440" y="4736592"/>
-            <a:ext cx="7406640" cy="1051560"/>
-          </a:xfrm>
-          <a:prstGeom prst="rect">
-            <a:avLst/>
-          </a:prstGeom>
-          <a:solidFill>
-            <a:srgbClr val="F2F2F0"/>
-          </a:solidFill>
-          <a:ln w="9525">
-            <a:solidFill>
-              <a:srgbClr val="BFBFBF"/>
-            </a:solidFill>
-          </a:ln>
-          <a:effectLst/>
-        </p:spPr>
-        <p:style>
-          <a:lnRef idx="1">
-            <a:schemeClr val="accent1"/>
-          </a:lnRef>
-          <a:fillRef idx="3">
-            <a:schemeClr val="accent1"/>
-          </a:fillRef>
-          <a:effectRef idx="2">
-            <a:schemeClr val="accent1"/>
-          </a:effectRef>
-          <a:fontRef idx="minor">
-            <a:schemeClr val="lt1"/>
-          </a:fontRef>
-        </p:style>
-        <p:txBody>
-          <a:bodyPr rtlCol="0" anchor="ctr"/>
-          <a:lstStyle/>
-          <a:p>
-            <a:pPr algn="ctr"/>
-          </a:p>
-        </p:txBody>
-      </p:sp>
-      <p:sp>
-        <p:nvSpPr>
-          <p:cNvPr id="9" name="TextBox 8"/>
-          <p:cNvSpPr txBox="1"/>
-          <p:nvPr/>
-        </p:nvSpPr>
-        <p:spPr>
-          <a:xfrm>
-            <a:off x="2606040" y="4892040"/>
-            <a:ext cx="6949440" cy="365760"/>
-          </a:xfrm>
-          <a:prstGeom prst="rect">
-            <a:avLst/>
-          </a:prstGeom>
-          <a:noFill/>
-        </p:spPr>
-        <p:txBody>
-          <a:bodyPr wrap="square" lIns="45720" rIns="45720" tIns="18288" bIns="18288" anchor="t">
-            <a:spAutoFit/>
-          </a:bodyPr>
-          <a:lstStyle/>
-          <a:p>
-            <a:pPr algn="ctr"/>
-            <a:r>
-              <a:rPr sz="1700" b="0" i="1">
-                <a:solidFill>
-                  <a:srgbClr val="6B6B6B"/>
-                </a:solidFill>
-                <a:latin typeface="Century Schoolbook"/>
-              </a:rPr>
-              <a:t>Yesterday every number was a measurement.</a:t>
-            </a:r>
-          </a:p>
-        </p:txBody>
-      </p:sp>
-      <p:sp>
-        <p:nvSpPr>
-          <p:cNvPr id="10" name="TextBox 9"/>
-          <p:cNvSpPr txBox="1"/>
-          <p:nvPr/>
-        </p:nvSpPr>
-        <p:spPr>
-          <a:xfrm>
-            <a:off x="2606040" y="5276088"/>
-            <a:ext cx="6949440" cy="365760"/>
-          </a:xfrm>
-          <a:prstGeom prst="rect">
-            <a:avLst/>
-          </a:prstGeom>
-          <a:noFill/>
-        </p:spPr>
-        <p:txBody>
-          <a:bodyPr wrap="square" lIns="45720" rIns="45720" tIns="18288" bIns="18288" anchor="t">
-            <a:spAutoFit/>
-          </a:bodyPr>
-          <a:lstStyle/>
-          <a:p>
-            <a:pPr algn="ctr"/>
-            <a:r>
-              <a:rPr sz="1700" b="1" i="0">
-                <a:solidFill>
-                  <a:srgbClr val="1A1A1A"/>
-                </a:solidFill>
-                <a:latin typeface="Century Schoolbook"/>
-              </a:rPr>
-              <a:t>Today the radical returns — its bar is a grouping symbol.</a:t>
             </a:r>
           </a:p>
         </p:txBody>
       </p:sp>
       <p:cxnSp>
         <p:nvCxnSpPr>
-          <p:cNvPr id="11" name="Connector 10"/>
+          <p:cNvPr id="8" name="Connector 7"/>
           <p:cNvCxnSpPr/>
           <p:nvPr/>
         </p:nvCxnSpPr>
@@ -3484,7 +3368,7 @@
       </p:cxnSp>
       <p:sp>
         <p:nvSpPr>
-          <p:cNvPr id="12" name="TextBox 11"/>
+          <p:cNvPr id="9" name="TextBox 8"/>
           <p:cNvSpPr txBox="1"/>
           <p:nvPr/>
         </p:nvSpPr>
@@ -3519,7 +3403,7 @@
       </p:sp>
       <p:sp>
         <p:nvSpPr>
-          <p:cNvPr id="13" name="TextBox 12"/>
+          <p:cNvPr id="10" name="TextBox 9"/>
           <p:cNvSpPr txBox="1"/>
           <p:nvPr/>
         </p:nvSpPr>
@@ -3675,44 +3559,9 @@
           </a:fontRef>
         </p:style>
       </p:cxnSp>
-      <p:sp>
-        <p:nvSpPr>
-          <p:cNvPr id="5" name="TextBox 4"/>
-          <p:cNvSpPr txBox="1"/>
-          <p:nvPr/>
-        </p:nvSpPr>
-        <p:spPr>
-          <a:xfrm>
-            <a:off x="777240" y="1261872"/>
-            <a:ext cx="10607040" cy="310896"/>
-          </a:xfrm>
-          <a:prstGeom prst="rect">
-            <a:avLst/>
-          </a:prstGeom>
-          <a:noFill/>
-        </p:spPr>
-        <p:txBody>
-          <a:bodyPr wrap="square" lIns="45720" rIns="45720" tIns="18288" bIns="18288" anchor="t">
-            <a:spAutoFit/>
-          </a:bodyPr>
-          <a:lstStyle/>
-          <a:p>
-            <a:pPr algn="l"/>
-            <a:r>
-              <a:rPr sz="1700" b="0" i="1">
-                <a:solidFill>
-                  <a:srgbClr val="6B6B6B"/>
-                </a:solidFill>
-                <a:latin typeface="Century Schoolbook"/>
-              </a:rPr>
-              <a:t>Answer.</a:t>
-            </a:r>
-          </a:p>
-        </p:txBody>
-      </p:sp>
       <p:cxnSp>
         <p:nvCxnSpPr>
-          <p:cNvPr id="6" name="Connector 5"/>
+          <p:cNvPr id="5" name="Connector 4"/>
           <p:cNvCxnSpPr/>
           <p:nvPr/>
         </p:nvCxnSpPr>
@@ -3747,7 +3596,7 @@
       </p:cxnSp>
       <p:sp>
         <p:nvSpPr>
-          <p:cNvPr id="7" name="TextBox 6"/>
+          <p:cNvPr id="6" name="TextBox 5"/>
           <p:cNvSpPr txBox="1"/>
           <p:nvPr/>
         </p:nvSpPr>
@@ -3782,7 +3631,7 @@
       </p:sp>
       <p:sp>
         <p:nvSpPr>
-          <p:cNvPr id="8" name="TextBox 7"/>
+          <p:cNvPr id="7" name="TextBox 6"/>
           <p:cNvSpPr txBox="1"/>
           <p:nvPr/>
         </p:nvSpPr>
@@ -3817,7 +3666,7 @@
       </p:sp>
       <p:pic>
         <p:nvPicPr>
-          <p:cNvPr id="9" name="Picture 8" descr="b80aa59125558618.png"/>
+          <p:cNvPr id="8" name="Picture 7" descr="b80aa59125558618.png"/>
           <p:cNvPicPr>
             <a:picLocks noChangeAspect="1"/>
           </p:cNvPicPr>
@@ -3841,42 +3690,42 @@
       </p:pic>
       <p:sp>
         <p:nvSpPr>
+          <p:cNvPr id="9" name="TextBox 8"/>
+          <p:cNvSpPr txBox="1"/>
+          <p:nvPr/>
+        </p:nvSpPr>
+        <p:spPr>
+          <a:xfrm>
+            <a:off x="777240" y="3557016"/>
+            <a:ext cx="10607040" cy="429370"/>
+          </a:xfrm>
+          <a:prstGeom prst="rect">
+            <a:avLst/>
+          </a:prstGeom>
+          <a:noFill/>
+        </p:spPr>
+        <p:txBody>
+          <a:bodyPr wrap="square" lIns="45720" rIns="45720" tIns="18288" bIns="18288" anchor="t">
+            <a:spAutoFit/>
+          </a:bodyPr>
+          <a:lstStyle/>
+          <a:p>
+            <a:pPr algn="ctr"/>
+            <a:r>
+              <a:rPr sz="2400" b="1" i="0">
+                <a:solidFill>
+                  <a:srgbClr val="1A1A1A"/>
+                </a:solidFill>
+                <a:latin typeface="Century Schoolbook"/>
+              </a:rPr>
+              <a:t>Evaluate.</a:t>
+            </a:r>
+          </a:p>
+        </p:txBody>
+      </p:sp>
+      <p:sp>
+        <p:nvSpPr>
           <p:cNvPr id="10" name="TextBox 9"/>
-          <p:cNvSpPr txBox="1"/>
-          <p:nvPr/>
-        </p:nvSpPr>
-        <p:spPr>
-          <a:xfrm>
-            <a:off x="777240" y="3374136"/>
-            <a:ext cx="10607040" cy="429370"/>
-          </a:xfrm>
-          <a:prstGeom prst="rect">
-            <a:avLst/>
-          </a:prstGeom>
-          <a:noFill/>
-        </p:spPr>
-        <p:txBody>
-          <a:bodyPr wrap="square" lIns="45720" rIns="45720" tIns="18288" bIns="18288" anchor="t">
-            <a:spAutoFit/>
-          </a:bodyPr>
-          <a:lstStyle/>
-          <a:p>
-            <a:pPr algn="ctr"/>
-            <a:r>
-              <a:rPr sz="2400" b="0" i="0">
-                <a:solidFill>
-                  <a:srgbClr val="6B6B6B"/>
-                </a:solidFill>
-                <a:latin typeface="Century Schoolbook"/>
-              </a:rPr>
-              <a:t>1/9 minus 2</a:t>
-            </a:r>
-          </a:p>
-        </p:txBody>
-      </p:sp>
-      <p:sp>
-        <p:nvSpPr>
-          <p:cNvPr id="11" name="TextBox 10"/>
           <p:cNvSpPr txBox="1"/>
           <p:nvPr/>
         </p:nvSpPr>
@@ -4032,44 +3881,9 @@
           </a:fontRef>
         </p:style>
       </p:cxnSp>
-      <p:sp>
-        <p:nvSpPr>
-          <p:cNvPr id="5" name="TextBox 4"/>
-          <p:cNvSpPr txBox="1"/>
-          <p:nvPr/>
-        </p:nvSpPr>
-        <p:spPr>
-          <a:xfrm>
-            <a:off x="777240" y="1261872"/>
-            <a:ext cx="10607040" cy="310896"/>
-          </a:xfrm>
-          <a:prstGeom prst="rect">
-            <a:avLst/>
-          </a:prstGeom>
-          <a:noFill/>
-        </p:spPr>
-        <p:txBody>
-          <a:bodyPr wrap="square" lIns="45720" rIns="45720" tIns="18288" bIns="18288" anchor="t">
-            <a:spAutoFit/>
-          </a:bodyPr>
-          <a:lstStyle/>
-          <a:p>
-            <a:pPr algn="l"/>
-            <a:r>
-              <a:rPr sz="1700" b="0" i="1">
-                <a:solidFill>
-                  <a:srgbClr val="6B6B6B"/>
-                </a:solidFill>
-                <a:latin typeface="Century Schoolbook"/>
-              </a:rPr>
-              <a:t>A radical inside a product.</a:t>
-            </a:r>
-          </a:p>
-        </p:txBody>
-      </p:sp>
       <p:cxnSp>
         <p:nvCxnSpPr>
-          <p:cNvPr id="6" name="Connector 5"/>
+          <p:cNvPr id="5" name="Connector 4"/>
           <p:cNvCxnSpPr/>
           <p:nvPr/>
         </p:nvCxnSpPr>
@@ -4104,7 +3918,7 @@
       </p:cxnSp>
       <p:sp>
         <p:nvSpPr>
-          <p:cNvPr id="7" name="TextBox 6"/>
+          <p:cNvPr id="6" name="TextBox 5"/>
           <p:cNvSpPr txBox="1"/>
           <p:nvPr/>
         </p:nvSpPr>
@@ -4139,7 +3953,7 @@
       </p:sp>
       <p:sp>
         <p:nvSpPr>
-          <p:cNvPr id="8" name="TextBox 7"/>
+          <p:cNvPr id="7" name="TextBox 6"/>
           <p:cNvSpPr txBox="1"/>
           <p:nvPr/>
         </p:nvSpPr>
@@ -4174,7 +3988,7 @@
       </p:sp>
       <p:pic>
         <p:nvPicPr>
-          <p:cNvPr id="9" name="Picture 8" descr="47530fef4a5f2dcf.png"/>
+          <p:cNvPr id="8" name="Picture 7" descr="47530fef4a5f2dcf.png"/>
           <p:cNvPicPr>
             <a:picLocks noChangeAspect="1"/>
           </p:cNvPicPr>
@@ -4198,7 +4012,7 @@
       </p:pic>
       <p:sp>
         <p:nvSpPr>
-          <p:cNvPr id="10" name="TextBox 9"/>
+          <p:cNvPr id="9" name="TextBox 8"/>
           <p:cNvSpPr txBox="1"/>
           <p:nvPr/>
         </p:nvSpPr>
@@ -4354,44 +4168,9 @@
           </a:fontRef>
         </p:style>
       </p:cxnSp>
-      <p:sp>
-        <p:nvSpPr>
-          <p:cNvPr id="5" name="TextBox 4"/>
-          <p:cNvSpPr txBox="1"/>
-          <p:nvPr/>
-        </p:nvSpPr>
-        <p:spPr>
-          <a:xfrm>
-            <a:off x="777240" y="1261872"/>
-            <a:ext cx="10607040" cy="310896"/>
-          </a:xfrm>
-          <a:prstGeom prst="rect">
-            <a:avLst/>
-          </a:prstGeom>
-          <a:noFill/>
-        </p:spPr>
-        <p:txBody>
-          <a:bodyPr wrap="square" lIns="45720" rIns="45720" tIns="18288" bIns="18288" anchor="t">
-            <a:spAutoFit/>
-          </a:bodyPr>
-          <a:lstStyle/>
-          <a:p>
-            <a:pPr algn="l"/>
-            <a:r>
-              <a:rPr sz="1700" b="0" i="1">
-                <a:solidFill>
-                  <a:srgbClr val="6B6B6B"/>
-                </a:solidFill>
-                <a:latin typeface="Century Schoolbook"/>
-              </a:rPr>
-              <a:t>Worked.</a:t>
-            </a:r>
-          </a:p>
-        </p:txBody>
-      </p:sp>
       <p:cxnSp>
         <p:nvCxnSpPr>
-          <p:cNvPr id="6" name="Connector 5"/>
+          <p:cNvPr id="5" name="Connector 4"/>
           <p:cNvCxnSpPr/>
           <p:nvPr/>
         </p:nvCxnSpPr>
@@ -4426,7 +4205,7 @@
       </p:cxnSp>
       <p:sp>
         <p:nvSpPr>
-          <p:cNvPr id="7" name="TextBox 6"/>
+          <p:cNvPr id="6" name="TextBox 5"/>
           <p:cNvSpPr txBox="1"/>
           <p:nvPr/>
         </p:nvSpPr>
@@ -4461,7 +4240,7 @@
       </p:sp>
       <p:sp>
         <p:nvSpPr>
-          <p:cNvPr id="8" name="TextBox 7"/>
+          <p:cNvPr id="7" name="TextBox 6"/>
           <p:cNvSpPr txBox="1"/>
           <p:nvPr/>
         </p:nvSpPr>
@@ -4496,7 +4275,7 @@
       </p:sp>
       <p:pic>
         <p:nvPicPr>
-          <p:cNvPr id="9" name="Picture 8" descr="922b0a873b8b5f16.png"/>
+          <p:cNvPr id="8" name="Picture 7" descr="922b0a873b8b5f16.png"/>
           <p:cNvPicPr>
             <a:picLocks noChangeAspect="1"/>
           </p:cNvPicPr>
@@ -4518,44 +4297,9 @@
           </a:prstGeom>
         </p:spPr>
       </p:pic>
-      <p:sp>
-        <p:nvSpPr>
-          <p:cNvPr id="10" name="TextBox 9"/>
-          <p:cNvSpPr txBox="1"/>
-          <p:nvPr/>
-        </p:nvSpPr>
-        <p:spPr>
-          <a:xfrm>
-            <a:off x="6031992" y="1943100"/>
-            <a:ext cx="5352287" cy="502920"/>
-          </a:xfrm>
-          <a:prstGeom prst="rect">
-            <a:avLst/>
-          </a:prstGeom>
-          <a:noFill/>
-        </p:spPr>
-        <p:txBody>
-          <a:bodyPr wrap="square" lIns="45720" rIns="45720" tIns="18288" bIns="18288" anchor="ctr">
-            <a:spAutoFit/>
-          </a:bodyPr>
-          <a:lstStyle/>
-          <a:p>
-            <a:pPr algn="l"/>
-            <a:r>
-              <a:rPr sz="2100" b="0" i="1">
-                <a:solidFill>
-                  <a:srgbClr val="6B6B6B"/>
-                </a:solidFill>
-                <a:latin typeface="Century Schoolbook"/>
-              </a:rPr>
-              <a:t>the two innermost pieces</a:t>
-            </a:r>
-          </a:p>
-        </p:txBody>
-      </p:sp>
       <p:pic>
         <p:nvPicPr>
-          <p:cNvPr id="11" name="Picture 10" descr="eb44f304539690d6.png"/>
+          <p:cNvPr id="9" name="Picture 8" descr="eb44f304539690d6.png"/>
           <p:cNvPicPr>
             <a:picLocks noChangeAspect="1"/>
           </p:cNvPicPr>
@@ -4577,44 +4321,9 @@
           </a:prstGeom>
         </p:spPr>
       </p:pic>
-      <p:sp>
-        <p:nvSpPr>
-          <p:cNvPr id="12" name="TextBox 11"/>
-          <p:cNvSpPr txBox="1"/>
-          <p:nvPr/>
-        </p:nvSpPr>
-        <p:spPr>
-          <a:xfrm>
-            <a:off x="6135624" y="2720340"/>
-            <a:ext cx="5248655" cy="502920"/>
-          </a:xfrm>
-          <a:prstGeom prst="rect">
-            <a:avLst/>
-          </a:prstGeom>
-          <a:noFill/>
-        </p:spPr>
-        <p:txBody>
-          <a:bodyPr wrap="square" lIns="45720" rIns="45720" tIns="18288" bIns="18288" anchor="ctr">
-            <a:spAutoFit/>
-          </a:bodyPr>
-          <a:lstStyle/>
-          <a:p>
-            <a:pPr algn="l"/>
-            <a:r>
-              <a:rPr sz="2100" b="0" i="1">
-                <a:solidFill>
-                  <a:srgbClr val="6B6B6B"/>
-                </a:solidFill>
-                <a:latin typeface="Century Schoolbook"/>
-              </a:rPr>
-              <a:t>the root, then the product</a:t>
-            </a:r>
-          </a:p>
-        </p:txBody>
-      </p:sp>
       <p:pic>
         <p:nvPicPr>
-          <p:cNvPr id="13" name="Picture 12" descr="1e8b8e5b31eeb1aa.png"/>
+          <p:cNvPr id="10" name="Picture 9" descr="1e8b8e5b31eeb1aa.png"/>
           <p:cNvPicPr>
             <a:picLocks noChangeAspect="1"/>
           </p:cNvPicPr>
@@ -4638,42 +4347,7 @@
       </p:pic>
       <p:sp>
         <p:nvSpPr>
-          <p:cNvPr id="14" name="TextBox 13"/>
-          <p:cNvSpPr txBox="1"/>
-          <p:nvPr/>
-        </p:nvSpPr>
-        <p:spPr>
-          <a:xfrm>
-            <a:off x="4276344" y="3386328"/>
-            <a:ext cx="6400800" cy="502920"/>
-          </a:xfrm>
-          <a:prstGeom prst="rect">
-            <a:avLst/>
-          </a:prstGeom>
-          <a:noFill/>
-        </p:spPr>
-        <p:txBody>
-          <a:bodyPr wrap="square" lIns="45720" rIns="45720" tIns="18288" bIns="18288" anchor="ctr">
-            <a:spAutoFit/>
-          </a:bodyPr>
-          <a:lstStyle/>
-          <a:p>
-            <a:pPr algn="l"/>
-            <a:r>
-              <a:rPr sz="2100" b="0" i="1">
-                <a:solidFill>
-                  <a:srgbClr val="6B6B6B"/>
-                </a:solidFill>
-                <a:latin typeface="Century Schoolbook"/>
-              </a:rPr>
-              <a:t>subtract last</a:t>
-            </a:r>
-          </a:p>
-        </p:txBody>
-      </p:sp>
-      <p:sp>
-        <p:nvSpPr>
-          <p:cNvPr id="15" name="TextBox 14"/>
+          <p:cNvPr id="11" name="TextBox 10"/>
           <p:cNvSpPr txBox="1"/>
           <p:nvPr/>
         </p:nvSpPr>
@@ -4829,44 +4503,9 @@
           </a:fontRef>
         </p:style>
       </p:cxnSp>
-      <p:sp>
-        <p:nvSpPr>
-          <p:cNvPr id="5" name="TextBox 4"/>
-          <p:cNvSpPr txBox="1"/>
-          <p:nvPr/>
-        </p:nvSpPr>
-        <p:spPr>
-          <a:xfrm>
-            <a:off x="777240" y="1261872"/>
-            <a:ext cx="10607040" cy="310896"/>
-          </a:xfrm>
-          <a:prstGeom prst="rect">
-            <a:avLst/>
-          </a:prstGeom>
-          <a:noFill/>
-        </p:spPr>
-        <p:txBody>
-          <a:bodyPr wrap="square" lIns="45720" rIns="45720" tIns="18288" bIns="18288" anchor="t">
-            <a:spAutoFit/>
-          </a:bodyPr>
-          <a:lstStyle/>
-          <a:p>
-            <a:pPr algn="l"/>
-            <a:r>
-              <a:rPr sz="1700" b="0" i="1">
-                <a:solidFill>
-                  <a:srgbClr val="6B6B6B"/>
-                </a:solidFill>
-                <a:latin typeface="Century Schoolbook"/>
-              </a:rPr>
-              <a:t>Same steps, your numbers. Boards up when done.</a:t>
-            </a:r>
-          </a:p>
-        </p:txBody>
-      </p:sp>
       <p:cxnSp>
         <p:nvCxnSpPr>
-          <p:cNvPr id="6" name="Connector 5"/>
+          <p:cNvPr id="5" name="Connector 4"/>
           <p:cNvCxnSpPr/>
           <p:nvPr/>
         </p:nvCxnSpPr>
@@ -4901,7 +4540,7 @@
       </p:cxnSp>
       <p:sp>
         <p:nvSpPr>
-          <p:cNvPr id="7" name="TextBox 6"/>
+          <p:cNvPr id="6" name="TextBox 5"/>
           <p:cNvSpPr txBox="1"/>
           <p:nvPr/>
         </p:nvSpPr>
@@ -4936,7 +4575,7 @@
       </p:sp>
       <p:sp>
         <p:nvSpPr>
-          <p:cNvPr id="8" name="TextBox 7"/>
+          <p:cNvPr id="7" name="TextBox 6"/>
           <p:cNvSpPr txBox="1"/>
           <p:nvPr/>
         </p:nvSpPr>
@@ -4971,7 +4610,7 @@
       </p:sp>
       <p:pic>
         <p:nvPicPr>
-          <p:cNvPr id="9" name="Picture 8" descr="98a08d8a76531abc.png"/>
+          <p:cNvPr id="8" name="Picture 7" descr="98a08d8a76531abc.png"/>
           <p:cNvPicPr>
             <a:picLocks noChangeAspect="1"/>
           </p:cNvPicPr>
@@ -4993,6 +4632,41 @@
           </a:prstGeom>
         </p:spPr>
       </p:pic>
+      <p:sp>
+        <p:nvSpPr>
+          <p:cNvPr id="9" name="TextBox 8"/>
+          <p:cNvSpPr txBox="1"/>
+          <p:nvPr/>
+        </p:nvSpPr>
+        <p:spPr>
+          <a:xfrm>
+            <a:off x="777240" y="3355848"/>
+            <a:ext cx="10607040" cy="429370"/>
+          </a:xfrm>
+          <a:prstGeom prst="rect">
+            <a:avLst/>
+          </a:prstGeom>
+          <a:noFill/>
+        </p:spPr>
+        <p:txBody>
+          <a:bodyPr wrap="square" lIns="45720" rIns="45720" tIns="18288" bIns="18288" anchor="t">
+            <a:spAutoFit/>
+          </a:bodyPr>
+          <a:lstStyle/>
+          <a:p>
+            <a:pPr algn="ctr"/>
+            <a:r>
+              <a:rPr sz="2400" b="1" i="0">
+                <a:solidFill>
+                  <a:srgbClr val="1A1A1A"/>
+                </a:solidFill>
+                <a:latin typeface="Century Schoolbook"/>
+              </a:rPr>
+              <a:t>Evaluate.</a:t>
+            </a:r>
+          </a:p>
+        </p:txBody>
+      </p:sp>
     </p:spTree>
   </p:cSld>
   <p:clrMapOvr>
@@ -5116,44 +4790,9 @@
           </a:fontRef>
         </p:style>
       </p:cxnSp>
-      <p:sp>
-        <p:nvSpPr>
-          <p:cNvPr id="5" name="TextBox 4"/>
-          <p:cNvSpPr txBox="1"/>
-          <p:nvPr/>
-        </p:nvSpPr>
-        <p:spPr>
-          <a:xfrm>
-            <a:off x="777240" y="1261872"/>
-            <a:ext cx="10607040" cy="310896"/>
-          </a:xfrm>
-          <a:prstGeom prst="rect">
-            <a:avLst/>
-          </a:prstGeom>
-          <a:noFill/>
-        </p:spPr>
-        <p:txBody>
-          <a:bodyPr wrap="square" lIns="45720" rIns="45720" tIns="18288" bIns="18288" anchor="t">
-            <a:spAutoFit/>
-          </a:bodyPr>
-          <a:lstStyle/>
-          <a:p>
-            <a:pPr algn="l"/>
-            <a:r>
-              <a:rPr sz="1700" b="0" i="1">
-                <a:solidFill>
-                  <a:srgbClr val="6B6B6B"/>
-                </a:solidFill>
-                <a:latin typeface="Century Schoolbook"/>
-              </a:rPr>
-              <a:t>Answer.</a:t>
-            </a:r>
-          </a:p>
-        </p:txBody>
-      </p:sp>
       <p:cxnSp>
         <p:nvCxnSpPr>
-          <p:cNvPr id="6" name="Connector 5"/>
+          <p:cNvPr id="5" name="Connector 4"/>
           <p:cNvCxnSpPr/>
           <p:nvPr/>
         </p:nvCxnSpPr>
@@ -5188,7 +4827,7 @@
       </p:cxnSp>
       <p:sp>
         <p:nvSpPr>
-          <p:cNvPr id="7" name="TextBox 6"/>
+          <p:cNvPr id="6" name="TextBox 5"/>
           <p:cNvSpPr txBox="1"/>
           <p:nvPr/>
         </p:nvSpPr>
@@ -5223,7 +4862,7 @@
       </p:sp>
       <p:sp>
         <p:nvSpPr>
-          <p:cNvPr id="8" name="TextBox 7"/>
+          <p:cNvPr id="7" name="TextBox 6"/>
           <p:cNvSpPr txBox="1"/>
           <p:nvPr/>
         </p:nvSpPr>
@@ -5258,7 +4897,7 @@
       </p:sp>
       <p:pic>
         <p:nvPicPr>
-          <p:cNvPr id="9" name="Picture 8" descr="03f17111b774a658.png"/>
+          <p:cNvPr id="8" name="Picture 7" descr="03f17111b774a658.png"/>
           <p:cNvPicPr>
             <a:picLocks noChangeAspect="1"/>
           </p:cNvPicPr>
@@ -5282,42 +4921,42 @@
       </p:pic>
       <p:sp>
         <p:nvSpPr>
+          <p:cNvPr id="9" name="TextBox 8"/>
+          <p:cNvSpPr txBox="1"/>
+          <p:nvPr/>
+        </p:nvSpPr>
+        <p:spPr>
+          <a:xfrm>
+            <a:off x="777240" y="3358896"/>
+            <a:ext cx="10607040" cy="429370"/>
+          </a:xfrm>
+          <a:prstGeom prst="rect">
+            <a:avLst/>
+          </a:prstGeom>
+          <a:noFill/>
+        </p:spPr>
+        <p:txBody>
+          <a:bodyPr wrap="square" lIns="45720" rIns="45720" tIns="18288" bIns="18288" anchor="t">
+            <a:spAutoFit/>
+          </a:bodyPr>
+          <a:lstStyle/>
+          <a:p>
+            <a:pPr algn="ctr"/>
+            <a:r>
+              <a:rPr sz="2400" b="1" i="0">
+                <a:solidFill>
+                  <a:srgbClr val="1A1A1A"/>
+                </a:solidFill>
+                <a:latin typeface="Century Schoolbook"/>
+              </a:rPr>
+              <a:t>Evaluate.</a:t>
+            </a:r>
+          </a:p>
+        </p:txBody>
+      </p:sp>
+      <p:sp>
+        <p:nvSpPr>
           <p:cNvPr id="10" name="TextBox 9"/>
-          <p:cNvSpPr txBox="1"/>
-          <p:nvPr/>
-        </p:nvSpPr>
-        <p:spPr>
-          <a:xfrm>
-            <a:off x="777240" y="3176016"/>
-            <a:ext cx="10607040" cy="429370"/>
-          </a:xfrm>
-          <a:prstGeom prst="rect">
-            <a:avLst/>
-          </a:prstGeom>
-          <a:noFill/>
-        </p:spPr>
-        <p:txBody>
-          <a:bodyPr wrap="square" lIns="45720" rIns="45720" tIns="18288" bIns="18288" anchor="t">
-            <a:spAutoFit/>
-          </a:bodyPr>
-          <a:lstStyle/>
-          <a:p>
-            <a:pPr algn="ctr"/>
-            <a:r>
-              <a:rPr sz="2400" b="0" i="0">
-                <a:solidFill>
-                  <a:srgbClr val="6B6B6B"/>
-                </a:solidFill>
-                <a:latin typeface="Century Schoolbook"/>
-              </a:rPr>
-              <a:t>−2 plus 10</a:t>
-            </a:r>
-          </a:p>
-        </p:txBody>
-      </p:sp>
-      <p:sp>
-        <p:nvSpPr>
-          <p:cNvPr id="11" name="TextBox 10"/>
           <p:cNvSpPr txBox="1"/>
           <p:nvPr/>
         </p:nvSpPr>
@@ -5473,44 +5112,9 @@
           </a:fontRef>
         </p:style>
       </p:cxnSp>
-      <p:sp>
-        <p:nvSpPr>
-          <p:cNvPr id="5" name="TextBox 4"/>
-          <p:cNvSpPr txBox="1"/>
-          <p:nvPr/>
-        </p:nvSpPr>
-        <p:spPr>
-          <a:xfrm>
-            <a:off x="777240" y="1261872"/>
-            <a:ext cx="10607040" cy="310896"/>
-          </a:xfrm>
-          <a:prstGeom prst="rect">
-            <a:avLst/>
-          </a:prstGeom>
-          <a:noFill/>
-        </p:spPr>
-        <p:txBody>
-          <a:bodyPr wrap="square" lIns="45720" rIns="45720" tIns="18288" bIns="18288" anchor="t">
-            <a:spAutoFit/>
-          </a:bodyPr>
-          <a:lstStyle/>
-          <a:p>
-            <a:pPr algn="l"/>
-            <a:r>
-              <a:rPr sz="1700" b="0" i="1">
-                <a:solidFill>
-                  <a:srgbClr val="6B6B6B"/>
-                </a:solidFill>
-                <a:latin typeface="Century Schoolbook"/>
-              </a:rPr>
-              <a:t>Boards up on three.</a:t>
-            </a:r>
-          </a:p>
-        </p:txBody>
-      </p:sp>
       <p:cxnSp>
         <p:nvCxnSpPr>
-          <p:cNvPr id="6" name="Connector 5"/>
+          <p:cNvPr id="5" name="Connector 4"/>
           <p:cNvCxnSpPr/>
           <p:nvPr/>
         </p:nvCxnSpPr>
@@ -5545,7 +5149,7 @@
       </p:cxnSp>
       <p:sp>
         <p:nvSpPr>
-          <p:cNvPr id="7" name="TextBox 6"/>
+          <p:cNvPr id="6" name="TextBox 5"/>
           <p:cNvSpPr txBox="1"/>
           <p:nvPr/>
         </p:nvSpPr>
@@ -5580,7 +5184,7 @@
       </p:sp>
       <p:sp>
         <p:nvSpPr>
-          <p:cNvPr id="8" name="TextBox 7"/>
+          <p:cNvPr id="7" name="TextBox 6"/>
           <p:cNvSpPr txBox="1"/>
           <p:nvPr/>
         </p:nvSpPr>
@@ -5615,7 +5219,7 @@
       </p:sp>
       <p:pic>
         <p:nvPicPr>
-          <p:cNvPr id="9" name="Picture 8" descr="bba822fb928b22ac.png"/>
+          <p:cNvPr id="8" name="Picture 7" descr="bba822fb928b22ac.png"/>
           <p:cNvPicPr>
             <a:picLocks noChangeAspect="1"/>
           </p:cNvPicPr>
@@ -5639,7 +5243,7 @@
       </p:pic>
       <p:sp>
         <p:nvSpPr>
-          <p:cNvPr id="10" name="TextBox 9"/>
+          <p:cNvPr id="9" name="TextBox 8"/>
           <p:cNvSpPr txBox="1"/>
           <p:nvPr/>
         </p:nvSpPr>
@@ -5668,41 +5272,6 @@
                 <a:latin typeface="Century Schoolbook"/>
               </a:rPr>
               <a:t>Answer it.</a:t>
-            </a:r>
-          </a:p>
-        </p:txBody>
-      </p:sp>
-      <p:sp>
-        <p:nvSpPr>
-          <p:cNvPr id="11" name="TextBox 10"/>
-          <p:cNvSpPr txBox="1"/>
-          <p:nvPr/>
-        </p:nvSpPr>
-        <p:spPr>
-          <a:xfrm>
-            <a:off x="777240" y="4828032"/>
-            <a:ext cx="10607040" cy="365760"/>
-          </a:xfrm>
-          <a:prstGeom prst="rect">
-            <a:avLst/>
-          </a:prstGeom>
-          <a:noFill/>
-        </p:spPr>
-        <p:txBody>
-          <a:bodyPr wrap="square" lIns="45720" rIns="45720" tIns="18288" bIns="18288" anchor="t">
-            <a:spAutoFit/>
-          </a:bodyPr>
-          <a:lstStyle/>
-          <a:p>
-            <a:pPr algn="ctr"/>
-            <a:r>
-              <a:rPr sz="1900" b="0" i="1">
-                <a:solidFill>
-                  <a:srgbClr val="6B6B6B"/>
-                </a:solidFill>
-                <a:latin typeface="Century Schoolbook"/>
-              </a:rPr>
-              <a:t>What times itself?</a:t>
             </a:r>
           </a:p>
         </p:txBody>
@@ -5830,44 +5399,9 @@
           </a:fontRef>
         </p:style>
       </p:cxnSp>
-      <p:sp>
-        <p:nvSpPr>
-          <p:cNvPr id="5" name="TextBox 4"/>
-          <p:cNvSpPr txBox="1"/>
-          <p:nvPr/>
-        </p:nvSpPr>
-        <p:spPr>
-          <a:xfrm>
-            <a:off x="777240" y="1261872"/>
-            <a:ext cx="10607040" cy="310896"/>
-          </a:xfrm>
-          <a:prstGeom prst="rect">
-            <a:avLst/>
-          </a:prstGeom>
-          <a:noFill/>
-        </p:spPr>
-        <p:txBody>
-          <a:bodyPr wrap="square" lIns="45720" rIns="45720" tIns="18288" bIns="18288" anchor="t">
-            <a:spAutoFit/>
-          </a:bodyPr>
-          <a:lstStyle/>
-          <a:p>
-            <a:pPr algn="l"/>
-            <a:r>
-              <a:rPr sz="1700" b="0" i="1">
-                <a:solidFill>
-                  <a:srgbClr val="6B6B6B"/>
-                </a:solidFill>
-                <a:latin typeface="Century Schoolbook"/>
-              </a:rPr>
-              <a:t>Answer.</a:t>
-            </a:r>
-          </a:p>
-        </p:txBody>
-      </p:sp>
       <p:cxnSp>
         <p:nvCxnSpPr>
-          <p:cNvPr id="6" name="Connector 5"/>
+          <p:cNvPr id="5" name="Connector 4"/>
           <p:cNvCxnSpPr/>
           <p:nvPr/>
         </p:nvCxnSpPr>
@@ -5902,7 +5436,7 @@
       </p:cxnSp>
       <p:sp>
         <p:nvSpPr>
-          <p:cNvPr id="7" name="TextBox 6"/>
+          <p:cNvPr id="6" name="TextBox 5"/>
           <p:cNvSpPr txBox="1"/>
           <p:nvPr/>
         </p:nvSpPr>
@@ -5937,7 +5471,7 @@
       </p:sp>
       <p:sp>
         <p:nvSpPr>
-          <p:cNvPr id="8" name="TextBox 7"/>
+          <p:cNvPr id="7" name="TextBox 6"/>
           <p:cNvSpPr txBox="1"/>
           <p:nvPr/>
         </p:nvSpPr>
@@ -5972,7 +5506,7 @@
       </p:sp>
       <p:pic>
         <p:nvPicPr>
-          <p:cNvPr id="9" name="Picture 8" descr="a01c60804f53663f.png"/>
+          <p:cNvPr id="8" name="Picture 7" descr="a01c60804f53663f.png"/>
           <p:cNvPicPr>
             <a:picLocks noChangeAspect="1"/>
           </p:cNvPicPr>
@@ -5996,42 +5530,7 @@
       </p:pic>
       <p:sp>
         <p:nvSpPr>
-          <p:cNvPr id="10" name="TextBox 9"/>
-          <p:cNvSpPr txBox="1"/>
-          <p:nvPr/>
-        </p:nvSpPr>
-        <p:spPr>
-          <a:xfrm>
-            <a:off x="1828800" y="2926079"/>
-            <a:ext cx="8503920" cy="548640"/>
-          </a:xfrm>
-          <a:prstGeom prst="rect">
-            <a:avLst/>
-          </a:prstGeom>
-          <a:noFill/>
-        </p:spPr>
-        <p:txBody>
-          <a:bodyPr wrap="square" lIns="45720" rIns="45720" tIns="18288" bIns="18288" anchor="t">
-            <a:spAutoFit/>
-          </a:bodyPr>
-          <a:lstStyle/>
-          <a:p>
-            <a:pPr algn="ctr"/>
-            <a:r>
-              <a:rPr sz="2400" b="0" i="0">
-                <a:solidFill>
-                  <a:srgbClr val="6B6B6B"/>
-                </a:solidFill>
-                <a:latin typeface="Century Schoolbook"/>
-              </a:rPr>
-              <a:t>11 · 11</a:t>
-            </a:r>
-          </a:p>
-        </p:txBody>
-      </p:sp>
-      <p:sp>
-        <p:nvSpPr>
-          <p:cNvPr id="11" name="TextBox 10"/>
+          <p:cNvPr id="9" name="TextBox 8"/>
           <p:cNvSpPr txBox="1"/>
           <p:nvPr/>
         </p:nvSpPr>
@@ -6187,44 +5686,9 @@
           </a:fontRef>
         </p:style>
       </p:cxnSp>
-      <p:sp>
-        <p:nvSpPr>
-          <p:cNvPr id="5" name="TextBox 4"/>
-          <p:cNvSpPr txBox="1"/>
-          <p:nvPr/>
-        </p:nvSpPr>
-        <p:spPr>
-          <a:xfrm>
-            <a:off x="777240" y="1261872"/>
-            <a:ext cx="10607040" cy="310896"/>
-          </a:xfrm>
-          <a:prstGeom prst="rect">
-            <a:avLst/>
-          </a:prstGeom>
-          <a:noFill/>
-        </p:spPr>
-        <p:txBody>
-          <a:bodyPr wrap="square" lIns="45720" rIns="45720" tIns="18288" bIns="18288" anchor="t">
-            <a:spAutoFit/>
-          </a:bodyPr>
-          <a:lstStyle/>
-          <a:p>
-            <a:pPr algn="l"/>
-            <a:r>
-              <a:rPr sz="1700" b="0" i="1">
-                <a:solidFill>
-                  <a:srgbClr val="6B6B6B"/>
-                </a:solidFill>
-                <a:latin typeface="Century Schoolbook"/>
-              </a:rPr>
-              <a:t>Boards up on three.</a:t>
-            </a:r>
-          </a:p>
-        </p:txBody>
-      </p:sp>
       <p:cxnSp>
         <p:nvCxnSpPr>
-          <p:cNvPr id="6" name="Connector 5"/>
+          <p:cNvPr id="5" name="Connector 4"/>
           <p:cNvCxnSpPr/>
           <p:nvPr/>
         </p:nvCxnSpPr>
@@ -6259,7 +5723,7 @@
       </p:cxnSp>
       <p:sp>
         <p:nvSpPr>
-          <p:cNvPr id="7" name="TextBox 6"/>
+          <p:cNvPr id="6" name="TextBox 5"/>
           <p:cNvSpPr txBox="1"/>
           <p:nvPr/>
         </p:nvSpPr>
@@ -6294,7 +5758,7 @@
       </p:sp>
       <p:sp>
         <p:nvSpPr>
-          <p:cNvPr id="8" name="TextBox 7"/>
+          <p:cNvPr id="7" name="TextBox 6"/>
           <p:cNvSpPr txBox="1"/>
           <p:nvPr/>
         </p:nvSpPr>
@@ -6329,7 +5793,7 @@
       </p:sp>
       <p:sp>
         <p:nvSpPr>
-          <p:cNvPr id="9" name="TextBox 8"/>
+          <p:cNvPr id="8" name="TextBox 7"/>
           <p:cNvSpPr txBox="1"/>
           <p:nvPr/>
         </p:nvSpPr>
@@ -6364,7 +5828,7 @@
       </p:sp>
       <p:sp>
         <p:nvSpPr>
-          <p:cNvPr id="10" name="TextBox 9"/>
+          <p:cNvPr id="9" name="TextBox 8"/>
           <p:cNvSpPr txBox="1"/>
           <p:nvPr/>
         </p:nvSpPr>
@@ -6399,7 +5863,7 @@
       </p:sp>
       <p:sp>
         <p:nvSpPr>
-          <p:cNvPr id="11" name="TextBox 10"/>
+          <p:cNvPr id="10" name="TextBox 9"/>
           <p:cNvSpPr txBox="1"/>
           <p:nvPr/>
         </p:nvSpPr>
@@ -6434,7 +5898,7 @@
       </p:sp>
       <p:sp>
         <p:nvSpPr>
-          <p:cNvPr id="12" name="TextBox 11"/>
+          <p:cNvPr id="11" name="TextBox 10"/>
           <p:cNvSpPr txBox="1"/>
           <p:nvPr/>
         </p:nvSpPr>
@@ -6590,44 +6054,9 @@
           </a:fontRef>
         </p:style>
       </p:cxnSp>
-      <p:sp>
-        <p:nvSpPr>
-          <p:cNvPr id="5" name="TextBox 4"/>
-          <p:cNvSpPr txBox="1"/>
-          <p:nvPr/>
-        </p:nvSpPr>
-        <p:spPr>
-          <a:xfrm>
-            <a:off x="777240" y="1261872"/>
-            <a:ext cx="10607040" cy="310896"/>
-          </a:xfrm>
-          <a:prstGeom prst="rect">
-            <a:avLst/>
-          </a:prstGeom>
-          <a:noFill/>
-        </p:spPr>
-        <p:txBody>
-          <a:bodyPr wrap="square" lIns="45720" rIns="45720" tIns="18288" bIns="18288" anchor="t">
-            <a:spAutoFit/>
-          </a:bodyPr>
-          <a:lstStyle/>
-          <a:p>
-            <a:pPr algn="l"/>
-            <a:r>
-              <a:rPr sz="1700" b="0" i="1">
-                <a:solidFill>
-                  <a:srgbClr val="6B6B6B"/>
-                </a:solidFill>
-                <a:latin typeface="Century Schoolbook"/>
-              </a:rPr>
-              <a:t>Answer.</a:t>
-            </a:r>
-          </a:p>
-        </p:txBody>
-      </p:sp>
       <p:cxnSp>
         <p:nvCxnSpPr>
-          <p:cNvPr id="6" name="Connector 5"/>
+          <p:cNvPr id="5" name="Connector 4"/>
           <p:cNvCxnSpPr/>
           <p:nvPr/>
         </p:nvCxnSpPr>
@@ -6662,7 +6091,7 @@
       </p:cxnSp>
       <p:sp>
         <p:nvSpPr>
-          <p:cNvPr id="7" name="TextBox 6"/>
+          <p:cNvPr id="6" name="TextBox 5"/>
           <p:cNvSpPr txBox="1"/>
           <p:nvPr/>
         </p:nvSpPr>
@@ -6697,7 +6126,7 @@
       </p:sp>
       <p:sp>
         <p:nvSpPr>
-          <p:cNvPr id="8" name="TextBox 7"/>
+          <p:cNvPr id="7" name="TextBox 6"/>
           <p:cNvSpPr txBox="1"/>
           <p:nvPr/>
         </p:nvSpPr>
@@ -6732,7 +6161,7 @@
       </p:sp>
       <p:sp>
         <p:nvSpPr>
-          <p:cNvPr id="9" name="TextBox 8"/>
+          <p:cNvPr id="8" name="TextBox 7"/>
           <p:cNvSpPr txBox="1"/>
           <p:nvPr/>
         </p:nvSpPr>
@@ -6767,7 +6196,7 @@
       </p:sp>
       <p:sp>
         <p:nvSpPr>
-          <p:cNvPr id="10" name="TextBox 9"/>
+          <p:cNvPr id="9" name="TextBox 8"/>
           <p:cNvSpPr txBox="1"/>
           <p:nvPr/>
         </p:nvSpPr>
@@ -6802,7 +6231,7 @@
       </p:sp>
       <p:sp>
         <p:nvSpPr>
-          <p:cNvPr id="11" name="TextBox 10"/>
+          <p:cNvPr id="10" name="TextBox 9"/>
           <p:cNvSpPr txBox="1"/>
           <p:nvPr/>
         </p:nvSpPr>
@@ -6837,42 +6266,7 @@
       </p:sp>
       <p:sp>
         <p:nvSpPr>
-          <p:cNvPr id="12" name="TextBox 11"/>
-          <p:cNvSpPr txBox="1"/>
-          <p:nvPr/>
-        </p:nvSpPr>
-        <p:spPr>
-          <a:xfrm>
-            <a:off x="1828800" y="3583255"/>
-            <a:ext cx="8503920" cy="548640"/>
-          </a:xfrm>
-          <a:prstGeom prst="rect">
-            <a:avLst/>
-          </a:prstGeom>
-          <a:noFill/>
-        </p:spPr>
-        <p:txBody>
-          <a:bodyPr wrap="square" lIns="45720" rIns="45720" tIns="18288" bIns="18288" anchor="t">
-            <a:spAutoFit/>
-          </a:bodyPr>
-          <a:lstStyle/>
-          <a:p>
-            <a:pPr algn="ctr"/>
-            <a:r>
-              <a:rPr sz="2400" b="0" i="0">
-                <a:solidFill>
-                  <a:srgbClr val="6B6B6B"/>
-                </a:solidFill>
-                <a:latin typeface="Century Schoolbook"/>
-              </a:rPr>
-              <a:t>√169</a:t>
-            </a:r>
-          </a:p>
-        </p:txBody>
-      </p:sp>
-      <p:sp>
-        <p:nvSpPr>
-          <p:cNvPr id="13" name="TextBox 12"/>
+          <p:cNvPr id="11" name="TextBox 10"/>
           <p:cNvSpPr txBox="1"/>
           <p:nvPr/>
         </p:nvSpPr>
@@ -7028,44 +6422,9 @@
           </a:fontRef>
         </p:style>
       </p:cxnSp>
-      <p:sp>
-        <p:nvSpPr>
-          <p:cNvPr id="5" name="TextBox 4"/>
-          <p:cNvSpPr txBox="1"/>
-          <p:nvPr/>
-        </p:nvSpPr>
-        <p:spPr>
-          <a:xfrm>
-            <a:off x="777240" y="1261872"/>
-            <a:ext cx="10607040" cy="310896"/>
-          </a:xfrm>
-          <a:prstGeom prst="rect">
-            <a:avLst/>
-          </a:prstGeom>
-          <a:noFill/>
-        </p:spPr>
-        <p:txBody>
-          <a:bodyPr wrap="square" lIns="45720" rIns="45720" tIns="18288" bIns="18288" anchor="t">
-            <a:spAutoFit/>
-          </a:bodyPr>
-          <a:lstStyle/>
-          <a:p>
-            <a:pPr algn="l"/>
-            <a:r>
-              <a:rPr sz="1700" b="0" i="1">
-                <a:solidFill>
-                  <a:srgbClr val="6B6B6B"/>
-                </a:solidFill>
-                <a:latin typeface="Century Schoolbook"/>
-              </a:rPr>
-              <a:t>Boards up on three.</a:t>
-            </a:r>
-          </a:p>
-        </p:txBody>
-      </p:sp>
       <p:cxnSp>
         <p:nvCxnSpPr>
-          <p:cNvPr id="6" name="Connector 5"/>
+          <p:cNvPr id="5" name="Connector 4"/>
           <p:cNvCxnSpPr/>
           <p:nvPr/>
         </p:nvCxnSpPr>
@@ -7100,7 +6459,7 @@
       </p:cxnSp>
       <p:sp>
         <p:nvSpPr>
-          <p:cNvPr id="7" name="TextBox 6"/>
+          <p:cNvPr id="6" name="TextBox 5"/>
           <p:cNvSpPr txBox="1"/>
           <p:nvPr/>
         </p:nvSpPr>
@@ -7135,7 +6494,7 @@
       </p:sp>
       <p:sp>
         <p:nvSpPr>
-          <p:cNvPr id="8" name="TextBox 7"/>
+          <p:cNvPr id="7" name="TextBox 6"/>
           <p:cNvSpPr txBox="1"/>
           <p:nvPr/>
         </p:nvSpPr>
@@ -7170,7 +6529,7 @@
       </p:sp>
       <p:pic>
         <p:nvPicPr>
-          <p:cNvPr id="9" name="Picture 8" descr="a4ee34a66ada29c1.png"/>
+          <p:cNvPr id="8" name="Picture 7" descr="a4ee34a66ada29c1.png"/>
           <p:cNvPicPr>
             <a:picLocks noChangeAspect="1"/>
           </p:cNvPicPr>
@@ -7194,7 +6553,7 @@
       </p:pic>
       <p:sp>
         <p:nvSpPr>
-          <p:cNvPr id="10" name="TextBox 9"/>
+          <p:cNvPr id="9" name="TextBox 8"/>
           <p:cNvSpPr txBox="1"/>
           <p:nvPr/>
         </p:nvSpPr>
@@ -7223,41 +6582,6 @@
                 <a:latin typeface="Century Schoolbook"/>
               </a:rPr>
               <a:t>Answer it.</a:t>
-            </a:r>
-          </a:p>
-        </p:txBody>
-      </p:sp>
-      <p:sp>
-        <p:nvSpPr>
-          <p:cNvPr id="11" name="TextBox 10"/>
-          <p:cNvSpPr txBox="1"/>
-          <p:nvPr/>
-        </p:nvSpPr>
-        <p:spPr>
-          <a:xfrm>
-            <a:off x="777240" y="4828032"/>
-            <a:ext cx="10607040" cy="365760"/>
-          </a:xfrm>
-          <a:prstGeom prst="rect">
-            <a:avLst/>
-          </a:prstGeom>
-          <a:noFill/>
-        </p:spPr>
-        <p:txBody>
-          <a:bodyPr wrap="square" lIns="45720" rIns="45720" tIns="18288" bIns="18288" anchor="t">
-            <a:spAutoFit/>
-          </a:bodyPr>
-          <a:lstStyle/>
-          <a:p>
-            <a:pPr algn="ctr"/>
-            <a:r>
-              <a:rPr sz="1900" b="0" i="1">
-                <a:solidFill>
-                  <a:srgbClr val="6B6B6B"/>
-                </a:solidFill>
-                <a:latin typeface="Century Schoolbook"/>
-              </a:rPr>
-              <a:t>What number, three times?</a:t>
             </a:r>
           </a:p>
         </p:txBody>
@@ -7385,44 +6709,9 @@
           </a:fontRef>
         </p:style>
       </p:cxnSp>
-      <p:sp>
-        <p:nvSpPr>
-          <p:cNvPr id="5" name="TextBox 4"/>
-          <p:cNvSpPr txBox="1"/>
-          <p:nvPr/>
-        </p:nvSpPr>
-        <p:spPr>
-          <a:xfrm>
-            <a:off x="777240" y="1261872"/>
-            <a:ext cx="10607040" cy="310896"/>
-          </a:xfrm>
-          <a:prstGeom prst="rect">
-            <a:avLst/>
-          </a:prstGeom>
-          <a:noFill/>
-        </p:spPr>
-        <p:txBody>
-          <a:bodyPr wrap="square" lIns="45720" rIns="45720" tIns="18288" bIns="18288" anchor="t">
-            <a:spAutoFit/>
-          </a:bodyPr>
-          <a:lstStyle/>
-          <a:p>
-            <a:pPr algn="l"/>
-            <a:r>
-              <a:rPr sz="1700" b="0" i="1">
-                <a:solidFill>
-                  <a:srgbClr val="6B6B6B"/>
-                </a:solidFill>
-                <a:latin typeface="Century Schoolbook"/>
-              </a:rPr>
-              <a:t>On your own. Four minutes. No notes.</a:t>
-            </a:r>
-          </a:p>
-        </p:txBody>
-      </p:sp>
       <p:cxnSp>
         <p:nvCxnSpPr>
-          <p:cNvPr id="6" name="Connector 5"/>
+          <p:cNvPr id="5" name="Connector 4"/>
           <p:cNvCxnSpPr/>
           <p:nvPr/>
         </p:nvCxnSpPr>
@@ -7457,7 +6746,7 @@
       </p:cxnSp>
       <p:sp>
         <p:nvSpPr>
-          <p:cNvPr id="7" name="TextBox 6"/>
+          <p:cNvPr id="6" name="TextBox 5"/>
           <p:cNvSpPr txBox="1"/>
           <p:nvPr/>
         </p:nvSpPr>
@@ -7492,7 +6781,7 @@
       </p:sp>
       <p:sp>
         <p:nvSpPr>
-          <p:cNvPr id="8" name="TextBox 7"/>
+          <p:cNvPr id="7" name="TextBox 6"/>
           <p:cNvSpPr txBox="1"/>
           <p:nvPr/>
         </p:nvSpPr>
@@ -7527,13 +6816,13 @@
       </p:sp>
       <p:sp>
         <p:nvSpPr>
-          <p:cNvPr id="9" name="TextBox 8"/>
-          <p:cNvSpPr txBox="1"/>
-          <p:nvPr/>
-        </p:nvSpPr>
-        <p:spPr>
-          <a:xfrm>
-            <a:off x="1874519" y="1760220"/>
+          <p:cNvPr id="8" name="TextBox 7"/>
+          <p:cNvSpPr txBox="1"/>
+          <p:nvPr/>
+        </p:nvSpPr>
+        <p:spPr>
+          <a:xfrm>
+            <a:off x="1874519" y="1440180"/>
             <a:ext cx="6984958" cy="457200"/>
           </a:xfrm>
           <a:prstGeom prst="rect">
@@ -7562,13 +6851,13 @@
       </p:sp>
       <p:sp>
         <p:nvSpPr>
-          <p:cNvPr id="10" name="TextBox 9"/>
-          <p:cNvSpPr txBox="1"/>
-          <p:nvPr/>
-        </p:nvSpPr>
-        <p:spPr>
-          <a:xfrm>
-            <a:off x="1874519" y="2372868"/>
+          <p:cNvPr id="9" name="TextBox 8"/>
+          <p:cNvSpPr txBox="1"/>
+          <p:nvPr/>
+        </p:nvSpPr>
+        <p:spPr>
+          <a:xfrm>
+            <a:off x="1874519" y="2052828"/>
             <a:ext cx="726811" cy="457200"/>
           </a:xfrm>
           <a:prstGeom prst="rect">
@@ -7597,7 +6886,7 @@
       </p:sp>
       <p:pic>
         <p:nvPicPr>
-          <p:cNvPr id="11" name="Picture 10" descr="ca17b323d889e390.png"/>
+          <p:cNvPr id="10" name="Picture 9" descr="ca17b323d889e390.png"/>
           <p:cNvPicPr>
             <a:picLocks noChangeAspect="1"/>
           </p:cNvPicPr>
@@ -7611,7 +6900,7 @@
         </p:blipFill>
         <p:spPr>
           <a:xfrm>
-            <a:off x="2464171" y="2432304"/>
+            <a:off x="2464171" y="2112264"/>
             <a:ext cx="2441448" cy="338328"/>
           </a:xfrm>
           <a:prstGeom prst="rect">
@@ -7621,13 +6910,13 @@
       </p:pic>
       <p:sp>
         <p:nvSpPr>
-          <p:cNvPr id="12" name="TextBox 11"/>
-          <p:cNvSpPr txBox="1"/>
-          <p:nvPr/>
-        </p:nvSpPr>
-        <p:spPr>
-          <a:xfrm>
-            <a:off x="1874519" y="2985516"/>
+          <p:cNvPr id="11" name="TextBox 10"/>
+          <p:cNvSpPr txBox="1"/>
+          <p:nvPr/>
+        </p:nvSpPr>
+        <p:spPr>
+          <a:xfrm>
+            <a:off x="1874519" y="2665476"/>
             <a:ext cx="3064939" cy="457200"/>
           </a:xfrm>
           <a:prstGeom prst="rect">
@@ -7656,7 +6945,7 @@
       </p:sp>
       <p:pic>
         <p:nvPicPr>
-          <p:cNvPr id="13" name="Picture 12" descr="9fe57fc54286b299.png"/>
+          <p:cNvPr id="12" name="Picture 11" descr="9fe57fc54286b299.png"/>
           <p:cNvPicPr>
             <a:picLocks noChangeAspect="1"/>
           </p:cNvPicPr>
@@ -7670,7 +6959,7 @@
         </p:blipFill>
         <p:spPr>
           <a:xfrm>
-            <a:off x="4802299" y="3009900"/>
+            <a:off x="4802299" y="2689860"/>
             <a:ext cx="853440" cy="408432"/>
           </a:xfrm>
           <a:prstGeom prst="rect">
@@ -7680,13 +6969,13 @@
       </p:pic>
       <p:sp>
         <p:nvSpPr>
-          <p:cNvPr id="14" name="TextBox 13"/>
-          <p:cNvSpPr txBox="1"/>
-          <p:nvPr/>
-        </p:nvSpPr>
-        <p:spPr>
-          <a:xfrm>
-            <a:off x="1874519" y="3598164"/>
+          <p:cNvPr id="13" name="TextBox 12"/>
+          <p:cNvSpPr txBox="1"/>
+          <p:nvPr/>
+        </p:nvSpPr>
+        <p:spPr>
+          <a:xfrm>
+            <a:off x="1874519" y="3278124"/>
             <a:ext cx="2276518" cy="457200"/>
           </a:xfrm>
           <a:prstGeom prst="rect">
@@ -7715,7 +7004,7 @@
       </p:sp>
       <p:pic>
         <p:nvPicPr>
-          <p:cNvPr id="15" name="Picture 14" descr="72275cc2b2ecb2ca.png"/>
+          <p:cNvPr id="14" name="Picture 13" descr="72275cc2b2ecb2ca.png"/>
           <p:cNvPicPr>
             <a:picLocks noChangeAspect="1"/>
           </p:cNvPicPr>
@@ -7729,7 +7018,7 @@
         </p:blipFill>
         <p:spPr>
           <a:xfrm>
-            <a:off x="4013878" y="3710940"/>
+            <a:off x="4013878" y="3390900"/>
             <a:ext cx="1155192" cy="231648"/>
           </a:xfrm>
           <a:prstGeom prst="rect">
@@ -7860,44 +7149,9 @@
           </a:fontRef>
         </p:style>
       </p:cxnSp>
-      <p:sp>
-        <p:nvSpPr>
-          <p:cNvPr id="5" name="TextBox 4"/>
-          <p:cNvSpPr txBox="1"/>
-          <p:nvPr/>
-        </p:nvSpPr>
-        <p:spPr>
-          <a:xfrm>
-            <a:off x="777240" y="1261872"/>
-            <a:ext cx="10607040" cy="310896"/>
-          </a:xfrm>
-          <a:prstGeom prst="rect">
-            <a:avLst/>
-          </a:prstGeom>
-          <a:noFill/>
-        </p:spPr>
-        <p:txBody>
-          <a:bodyPr wrap="square" lIns="45720" rIns="45720" tIns="18288" bIns="18288" anchor="t">
-            <a:spAutoFit/>
-          </a:bodyPr>
-          <a:lstStyle/>
-          <a:p>
-            <a:pPr algn="l"/>
-            <a:r>
-              <a:rPr sz="1700" b="0" i="1">
-                <a:solidFill>
-                  <a:srgbClr val="6B6B6B"/>
-                </a:solidFill>
-                <a:latin typeface="Century Schoolbook"/>
-              </a:rPr>
-              <a:t>Answer.</a:t>
-            </a:r>
-          </a:p>
-        </p:txBody>
-      </p:sp>
       <p:cxnSp>
         <p:nvCxnSpPr>
-          <p:cNvPr id="6" name="Connector 5"/>
+          <p:cNvPr id="5" name="Connector 4"/>
           <p:cNvCxnSpPr/>
           <p:nvPr/>
         </p:nvCxnSpPr>
@@ -7932,7 +7186,7 @@
       </p:cxnSp>
       <p:sp>
         <p:nvSpPr>
-          <p:cNvPr id="7" name="TextBox 6"/>
+          <p:cNvPr id="6" name="TextBox 5"/>
           <p:cNvSpPr txBox="1"/>
           <p:nvPr/>
         </p:nvSpPr>
@@ -7967,7 +7221,7 @@
       </p:sp>
       <p:sp>
         <p:nvSpPr>
-          <p:cNvPr id="8" name="TextBox 7"/>
+          <p:cNvPr id="7" name="TextBox 6"/>
           <p:cNvSpPr txBox="1"/>
           <p:nvPr/>
         </p:nvSpPr>
@@ -8002,7 +7256,7 @@
       </p:sp>
       <p:pic>
         <p:nvPicPr>
-          <p:cNvPr id="9" name="Picture 8" descr="e9ce12ee5f035ada.png"/>
+          <p:cNvPr id="8" name="Picture 7" descr="e9ce12ee5f035ada.png"/>
           <p:cNvPicPr>
             <a:picLocks noChangeAspect="1"/>
           </p:cNvPicPr>
@@ -8026,42 +7280,7 @@
       </p:pic>
       <p:sp>
         <p:nvSpPr>
-          <p:cNvPr id="10" name="TextBox 9"/>
-          <p:cNvSpPr txBox="1"/>
-          <p:nvPr/>
-        </p:nvSpPr>
-        <p:spPr>
-          <a:xfrm>
-            <a:off x="1828800" y="2926079"/>
-            <a:ext cx="8503920" cy="548640"/>
-          </a:xfrm>
-          <a:prstGeom prst="rect">
-            <a:avLst/>
-          </a:prstGeom>
-          <a:noFill/>
-        </p:spPr>
-        <p:txBody>
-          <a:bodyPr wrap="square" lIns="45720" rIns="45720" tIns="18288" bIns="18288" anchor="t">
-            <a:spAutoFit/>
-          </a:bodyPr>
-          <a:lstStyle/>
-          <a:p>
-            <a:pPr algn="ctr"/>
-            <a:r>
-              <a:rPr sz="2400" b="0" i="0">
-                <a:solidFill>
-                  <a:srgbClr val="6B6B6B"/>
-                </a:solidFill>
-                <a:latin typeface="Century Schoolbook"/>
-              </a:rPr>
-              <a:t>(−5)(−5)(−5)</a:t>
-            </a:r>
-          </a:p>
-        </p:txBody>
-      </p:sp>
-      <p:sp>
-        <p:nvSpPr>
-          <p:cNvPr id="11" name="TextBox 10"/>
+          <p:cNvPr id="9" name="TextBox 8"/>
           <p:cNvSpPr txBox="1"/>
           <p:nvPr/>
         </p:nvSpPr>
@@ -8217,44 +7436,9 @@
           </a:fontRef>
         </p:style>
       </p:cxnSp>
-      <p:sp>
-        <p:nvSpPr>
-          <p:cNvPr id="5" name="TextBox 4"/>
-          <p:cNvSpPr txBox="1"/>
-          <p:nvPr/>
-        </p:nvSpPr>
-        <p:spPr>
-          <a:xfrm>
-            <a:off x="777240" y="1261872"/>
-            <a:ext cx="10607040" cy="310896"/>
-          </a:xfrm>
-          <a:prstGeom prst="rect">
-            <a:avLst/>
-          </a:prstGeom>
-          <a:noFill/>
-        </p:spPr>
-        <p:txBody>
-          <a:bodyPr wrap="square" lIns="45720" rIns="45720" tIns="18288" bIns="18288" anchor="t">
-            <a:spAutoFit/>
-          </a:bodyPr>
-          <a:lstStyle/>
-          <a:p>
-            <a:pPr algn="l"/>
-            <a:r>
-              <a:rPr sz="1700" b="0" i="1">
-                <a:solidFill>
-                  <a:srgbClr val="6B6B6B"/>
-                </a:solidFill>
-                <a:latin typeface="Century Schoolbook"/>
-              </a:rPr>
-              <a:t>Boards up on three.</a:t>
-            </a:r>
-          </a:p>
-        </p:txBody>
-      </p:sp>
       <p:cxnSp>
         <p:nvCxnSpPr>
-          <p:cNvPr id="6" name="Connector 5"/>
+          <p:cNvPr id="5" name="Connector 4"/>
           <p:cNvCxnSpPr/>
           <p:nvPr/>
         </p:nvCxnSpPr>
@@ -8289,7 +7473,7 @@
       </p:cxnSp>
       <p:sp>
         <p:nvSpPr>
-          <p:cNvPr id="7" name="TextBox 6"/>
+          <p:cNvPr id="6" name="TextBox 5"/>
           <p:cNvSpPr txBox="1"/>
           <p:nvPr/>
         </p:nvSpPr>
@@ -8324,7 +7508,7 @@
       </p:sp>
       <p:sp>
         <p:nvSpPr>
-          <p:cNvPr id="8" name="TextBox 7"/>
+          <p:cNvPr id="7" name="TextBox 6"/>
           <p:cNvSpPr txBox="1"/>
           <p:nvPr/>
         </p:nvSpPr>
@@ -8359,7 +7543,7 @@
       </p:sp>
       <p:pic>
         <p:nvPicPr>
-          <p:cNvPr id="9" name="Picture 8" descr="3f127ed15696cdab.png"/>
+          <p:cNvPr id="8" name="Picture 7" descr="3f127ed15696cdab.png"/>
           <p:cNvPicPr>
             <a:picLocks noChangeAspect="1"/>
           </p:cNvPicPr>
@@ -8383,7 +7567,7 @@
       </p:pic>
       <p:sp>
         <p:nvSpPr>
-          <p:cNvPr id="10" name="TextBox 9"/>
+          <p:cNvPr id="9" name="TextBox 8"/>
           <p:cNvSpPr txBox="1"/>
           <p:nvPr/>
         </p:nvSpPr>
@@ -8412,41 +7596,6 @@
                 <a:latin typeface="Century Schoolbook"/>
               </a:rPr>
               <a:t>Answer it.</a:t>
-            </a:r>
-          </a:p>
-        </p:txBody>
-      </p:sp>
-      <p:sp>
-        <p:nvSpPr>
-          <p:cNvPr id="11" name="TextBox 10"/>
-          <p:cNvSpPr txBox="1"/>
-          <p:nvPr/>
-        </p:nvSpPr>
-        <p:spPr>
-          <a:xfrm>
-            <a:off x="777240" y="4828032"/>
-            <a:ext cx="10607040" cy="365760"/>
-          </a:xfrm>
-          <a:prstGeom prst="rect">
-            <a:avLst/>
-          </a:prstGeom>
-          <a:noFill/>
-        </p:spPr>
-        <p:txBody>
-          <a:bodyPr wrap="square" lIns="45720" rIns="45720" tIns="18288" bIns="18288" anchor="t">
-            <a:spAutoFit/>
-          </a:bodyPr>
-          <a:lstStyle/>
-          <a:p>
-            <a:pPr algn="ctr"/>
-            <a:r>
-              <a:rPr sz="1900" b="0" i="1">
-                <a:solidFill>
-                  <a:srgbClr val="6B6B6B"/>
-                </a:solidFill>
-                <a:latin typeface="Century Schoolbook"/>
-              </a:rPr>
-              <a:t>Finish under the bar first.</a:t>
             </a:r>
           </a:p>
         </p:txBody>
@@ -8574,44 +7723,9 @@
           </a:fontRef>
         </p:style>
       </p:cxnSp>
-      <p:sp>
-        <p:nvSpPr>
-          <p:cNvPr id="5" name="TextBox 4"/>
-          <p:cNvSpPr txBox="1"/>
-          <p:nvPr/>
-        </p:nvSpPr>
-        <p:spPr>
-          <a:xfrm>
-            <a:off x="777240" y="1261872"/>
-            <a:ext cx="10607040" cy="310896"/>
-          </a:xfrm>
-          <a:prstGeom prst="rect">
-            <a:avLst/>
-          </a:prstGeom>
-          <a:noFill/>
-        </p:spPr>
-        <p:txBody>
-          <a:bodyPr wrap="square" lIns="45720" rIns="45720" tIns="18288" bIns="18288" anchor="t">
-            <a:spAutoFit/>
-          </a:bodyPr>
-          <a:lstStyle/>
-          <a:p>
-            <a:pPr algn="l"/>
-            <a:r>
-              <a:rPr sz="1700" b="0" i="1">
-                <a:solidFill>
-                  <a:srgbClr val="6B6B6B"/>
-                </a:solidFill>
-                <a:latin typeface="Century Schoolbook"/>
-              </a:rPr>
-              <a:t>Answer.</a:t>
-            </a:r>
-          </a:p>
-        </p:txBody>
-      </p:sp>
       <p:cxnSp>
         <p:nvCxnSpPr>
-          <p:cNvPr id="6" name="Connector 5"/>
+          <p:cNvPr id="5" name="Connector 4"/>
           <p:cNvCxnSpPr/>
           <p:nvPr/>
         </p:nvCxnSpPr>
@@ -8646,7 +7760,7 @@
       </p:cxnSp>
       <p:sp>
         <p:nvSpPr>
-          <p:cNvPr id="7" name="TextBox 6"/>
+          <p:cNvPr id="6" name="TextBox 5"/>
           <p:cNvSpPr txBox="1"/>
           <p:nvPr/>
         </p:nvSpPr>
@@ -8681,7 +7795,7 @@
       </p:sp>
       <p:sp>
         <p:nvSpPr>
-          <p:cNvPr id="8" name="TextBox 7"/>
+          <p:cNvPr id="7" name="TextBox 6"/>
           <p:cNvSpPr txBox="1"/>
           <p:nvPr/>
         </p:nvSpPr>
@@ -8716,7 +7830,7 @@
       </p:sp>
       <p:pic>
         <p:nvPicPr>
-          <p:cNvPr id="9" name="Picture 8" descr="e42a74bac51388c9.png"/>
+          <p:cNvPr id="8" name="Picture 7" descr="e42a74bac51388c9.png"/>
           <p:cNvPicPr>
             <a:picLocks noChangeAspect="1"/>
           </p:cNvPicPr>
@@ -8740,42 +7854,7 @@
       </p:pic>
       <p:sp>
         <p:nvSpPr>
-          <p:cNvPr id="10" name="TextBox 9"/>
-          <p:cNvSpPr txBox="1"/>
-          <p:nvPr/>
-        </p:nvSpPr>
-        <p:spPr>
-          <a:xfrm>
-            <a:off x="1828800" y="2926079"/>
-            <a:ext cx="8503920" cy="548640"/>
-          </a:xfrm>
-          <a:prstGeom prst="rect">
-            <a:avLst/>
-          </a:prstGeom>
-          <a:noFill/>
-        </p:spPr>
-        <p:txBody>
-          <a:bodyPr wrap="square" lIns="45720" rIns="45720" tIns="18288" bIns="18288" anchor="t">
-            <a:spAutoFit/>
-          </a:bodyPr>
-          <a:lstStyle/>
-          <a:p>
-            <a:pPr algn="ctr"/>
-            <a:r>
-              <a:rPr sz="2400" b="0" i="0">
-                <a:solidFill>
-                  <a:srgbClr val="6B6B6B"/>
-                </a:solidFill>
-                <a:latin typeface="Century Schoolbook"/>
-              </a:rPr>
-              <a:t>8 + 17 = 25</a:t>
-            </a:r>
-          </a:p>
-        </p:txBody>
-      </p:sp>
-      <p:sp>
-        <p:nvSpPr>
-          <p:cNvPr id="11" name="TextBox 10"/>
+          <p:cNvPr id="9" name="TextBox 8"/>
           <p:cNvSpPr txBox="1"/>
           <p:nvPr/>
         </p:nvSpPr>
@@ -8931,44 +8010,9 @@
           </a:fontRef>
         </p:style>
       </p:cxnSp>
-      <p:sp>
-        <p:nvSpPr>
-          <p:cNvPr id="5" name="TextBox 4"/>
-          <p:cNvSpPr txBox="1"/>
-          <p:nvPr/>
-        </p:nvSpPr>
-        <p:spPr>
-          <a:xfrm>
-            <a:off x="777240" y="1261872"/>
-            <a:ext cx="10607040" cy="310896"/>
-          </a:xfrm>
-          <a:prstGeom prst="rect">
-            <a:avLst/>
-          </a:prstGeom>
-          <a:noFill/>
-        </p:spPr>
-        <p:txBody>
-          <a:bodyPr wrap="square" lIns="45720" rIns="45720" tIns="18288" bIns="18288" anchor="t">
-            <a:spAutoFit/>
-          </a:bodyPr>
-          <a:lstStyle/>
-          <a:p>
-            <a:pPr algn="l"/>
-            <a:r>
-              <a:rPr sz="1700" b="0" i="1">
-                <a:solidFill>
-                  <a:srgbClr val="6B6B6B"/>
-                </a:solidFill>
-                <a:latin typeface="Century Schoolbook"/>
-              </a:rPr>
-              <a:t>Boards up on three.</a:t>
-            </a:r>
-          </a:p>
-        </p:txBody>
-      </p:sp>
       <p:cxnSp>
         <p:nvCxnSpPr>
-          <p:cNvPr id="6" name="Connector 5"/>
+          <p:cNvPr id="5" name="Connector 4"/>
           <p:cNvCxnSpPr/>
           <p:nvPr/>
         </p:nvCxnSpPr>
@@ -9003,7 +8047,7 @@
       </p:cxnSp>
       <p:sp>
         <p:nvSpPr>
-          <p:cNvPr id="7" name="TextBox 6"/>
+          <p:cNvPr id="6" name="TextBox 5"/>
           <p:cNvSpPr txBox="1"/>
           <p:nvPr/>
         </p:nvSpPr>
@@ -9038,7 +8082,7 @@
       </p:sp>
       <p:sp>
         <p:nvSpPr>
-          <p:cNvPr id="8" name="TextBox 7"/>
+          <p:cNvPr id="7" name="TextBox 6"/>
           <p:cNvSpPr txBox="1"/>
           <p:nvPr/>
         </p:nvSpPr>
@@ -9073,7 +8117,7 @@
       </p:sp>
       <p:pic>
         <p:nvPicPr>
-          <p:cNvPr id="9" name="Picture 8" descr="3abe49e5e121038a.png"/>
+          <p:cNvPr id="8" name="Picture 7" descr="3abe49e5e121038a.png"/>
           <p:cNvPicPr>
             <a:picLocks noChangeAspect="1"/>
           </p:cNvPicPr>
@@ -9097,7 +8141,7 @@
       </p:pic>
       <p:sp>
         <p:nvSpPr>
-          <p:cNvPr id="10" name="TextBox 9"/>
+          <p:cNvPr id="9" name="TextBox 8"/>
           <p:cNvSpPr txBox="1"/>
           <p:nvPr/>
         </p:nvSpPr>
@@ -9132,7 +8176,7 @@
       </p:sp>
       <p:sp>
         <p:nvSpPr>
-          <p:cNvPr id="11" name="TextBox 10"/>
+          <p:cNvPr id="10" name="TextBox 9"/>
           <p:cNvSpPr txBox="1"/>
           <p:nvPr/>
         </p:nvSpPr>
@@ -9176,7 +8220,7 @@
       </p:sp>
       <p:sp>
         <p:nvSpPr>
-          <p:cNvPr id="12" name="TextBox 11"/>
+          <p:cNvPr id="11" name="TextBox 10"/>
           <p:cNvSpPr txBox="1"/>
           <p:nvPr/>
         </p:nvSpPr>
@@ -9220,7 +8264,7 @@
       </p:sp>
       <p:sp>
         <p:nvSpPr>
-          <p:cNvPr id="13" name="TextBox 12"/>
+          <p:cNvPr id="12" name="TextBox 11"/>
           <p:cNvSpPr txBox="1"/>
           <p:nvPr/>
         </p:nvSpPr>
@@ -9264,7 +8308,7 @@
       </p:sp>
       <p:sp>
         <p:nvSpPr>
-          <p:cNvPr id="14" name="TextBox 13"/>
+          <p:cNvPr id="13" name="TextBox 12"/>
           <p:cNvSpPr txBox="1"/>
           <p:nvPr/>
         </p:nvSpPr>
@@ -9308,7 +8352,7 @@
       </p:sp>
       <p:sp>
         <p:nvSpPr>
-          <p:cNvPr id="15" name="TextBox 14"/>
+          <p:cNvPr id="14" name="TextBox 13"/>
           <p:cNvSpPr txBox="1"/>
           <p:nvPr/>
         </p:nvSpPr>
@@ -9464,44 +8508,9 @@
           </a:fontRef>
         </p:style>
       </p:cxnSp>
-      <p:sp>
-        <p:nvSpPr>
-          <p:cNvPr id="5" name="TextBox 4"/>
-          <p:cNvSpPr txBox="1"/>
-          <p:nvPr/>
-        </p:nvSpPr>
-        <p:spPr>
-          <a:xfrm>
-            <a:off x="777240" y="1261872"/>
-            <a:ext cx="10607040" cy="310896"/>
-          </a:xfrm>
-          <a:prstGeom prst="rect">
-            <a:avLst/>
-          </a:prstGeom>
-          <a:noFill/>
-        </p:spPr>
-        <p:txBody>
-          <a:bodyPr wrap="square" lIns="45720" rIns="45720" tIns="18288" bIns="18288" anchor="t">
-            <a:spAutoFit/>
-          </a:bodyPr>
-          <a:lstStyle/>
-          <a:p>
-            <a:pPr algn="l"/>
-            <a:r>
-              <a:rPr sz="1700" b="0" i="1">
-                <a:solidFill>
-                  <a:srgbClr val="6B6B6B"/>
-                </a:solidFill>
-                <a:latin typeface="Century Schoolbook"/>
-              </a:rPr>
-              <a:t>Answer.</a:t>
-            </a:r>
-          </a:p>
-        </p:txBody>
-      </p:sp>
       <p:cxnSp>
         <p:nvCxnSpPr>
-          <p:cNvPr id="6" name="Connector 5"/>
+          <p:cNvPr id="5" name="Connector 4"/>
           <p:cNvCxnSpPr/>
           <p:nvPr/>
         </p:nvCxnSpPr>
@@ -9536,7 +8545,7 @@
       </p:cxnSp>
       <p:sp>
         <p:nvSpPr>
-          <p:cNvPr id="7" name="TextBox 6"/>
+          <p:cNvPr id="6" name="TextBox 5"/>
           <p:cNvSpPr txBox="1"/>
           <p:nvPr/>
         </p:nvSpPr>
@@ -9571,7 +8580,7 @@
       </p:sp>
       <p:sp>
         <p:nvSpPr>
-          <p:cNvPr id="8" name="TextBox 7"/>
+          <p:cNvPr id="7" name="TextBox 6"/>
           <p:cNvSpPr txBox="1"/>
           <p:nvPr/>
         </p:nvSpPr>
@@ -9606,7 +8615,7 @@
       </p:sp>
       <p:pic>
         <p:nvPicPr>
-          <p:cNvPr id="9" name="Picture 8" descr="3c30f316583cb146.png"/>
+          <p:cNvPr id="8" name="Picture 7" descr="3c30f316583cb146.png"/>
           <p:cNvPicPr>
             <a:picLocks noChangeAspect="1"/>
           </p:cNvPicPr>
@@ -9630,7 +8639,7 @@
       </p:pic>
       <p:sp>
         <p:nvSpPr>
-          <p:cNvPr id="10" name="TextBox 9"/>
+          <p:cNvPr id="9" name="TextBox 8"/>
           <p:cNvSpPr txBox="1"/>
           <p:nvPr/>
         </p:nvSpPr>
@@ -9665,7 +8674,7 @@
       </p:sp>
       <p:sp>
         <p:nvSpPr>
-          <p:cNvPr id="11" name="TextBox 10"/>
+          <p:cNvPr id="10" name="TextBox 9"/>
           <p:cNvSpPr txBox="1"/>
           <p:nvPr/>
         </p:nvSpPr>
@@ -9709,7 +8718,7 @@
       </p:sp>
       <p:sp>
         <p:nvSpPr>
-          <p:cNvPr id="12" name="TextBox 11"/>
+          <p:cNvPr id="11" name="TextBox 10"/>
           <p:cNvSpPr txBox="1"/>
           <p:nvPr/>
         </p:nvSpPr>
@@ -9753,7 +8762,7 @@
       </p:sp>
       <p:sp>
         <p:nvSpPr>
-          <p:cNvPr id="13" name="TextBox 12"/>
+          <p:cNvPr id="12" name="TextBox 11"/>
           <p:cNvSpPr txBox="1"/>
           <p:nvPr/>
         </p:nvSpPr>
@@ -9797,7 +8806,7 @@
       </p:sp>
       <p:sp>
         <p:nvSpPr>
-          <p:cNvPr id="14" name="TextBox 13"/>
+          <p:cNvPr id="13" name="TextBox 12"/>
           <p:cNvSpPr txBox="1"/>
           <p:nvPr/>
         </p:nvSpPr>
@@ -9841,7 +8850,7 @@
       </p:sp>
       <p:sp>
         <p:nvSpPr>
-          <p:cNvPr id="15" name="TextBox 14"/>
+          <p:cNvPr id="14" name="TextBox 13"/>
           <p:cNvSpPr txBox="1"/>
           <p:nvPr/>
         </p:nvSpPr>
@@ -9997,44 +9006,9 @@
           </a:fontRef>
         </p:style>
       </p:cxnSp>
-      <p:sp>
-        <p:nvSpPr>
-          <p:cNvPr id="5" name="TextBox 4"/>
-          <p:cNvSpPr txBox="1"/>
-          <p:nvPr/>
-        </p:nvSpPr>
-        <p:spPr>
-          <a:xfrm>
-            <a:off x="777240" y="1261872"/>
-            <a:ext cx="10607040" cy="310896"/>
-          </a:xfrm>
-          <a:prstGeom prst="rect">
-            <a:avLst/>
-          </a:prstGeom>
-          <a:noFill/>
-        </p:spPr>
-        <p:txBody>
-          <a:bodyPr wrap="square" lIns="45720" rIns="45720" tIns="18288" bIns="18288" anchor="t">
-            <a:spAutoFit/>
-          </a:bodyPr>
-          <a:lstStyle/>
-          <a:p>
-            <a:pPr algn="l"/>
-            <a:r>
-              <a:rPr sz="1700" b="0" i="1">
-                <a:solidFill>
-                  <a:srgbClr val="6B6B6B"/>
-                </a:solidFill>
-                <a:latin typeface="Century Schoolbook"/>
-              </a:rPr>
-              <a:t>Boards up on three.</a:t>
-            </a:r>
-          </a:p>
-        </p:txBody>
-      </p:sp>
       <p:cxnSp>
         <p:nvCxnSpPr>
-          <p:cNvPr id="6" name="Connector 5"/>
+          <p:cNvPr id="5" name="Connector 4"/>
           <p:cNvCxnSpPr/>
           <p:nvPr/>
         </p:nvCxnSpPr>
@@ -10069,7 +9043,7 @@
       </p:cxnSp>
       <p:sp>
         <p:nvSpPr>
-          <p:cNvPr id="7" name="TextBox 6"/>
+          <p:cNvPr id="6" name="TextBox 5"/>
           <p:cNvSpPr txBox="1"/>
           <p:nvPr/>
         </p:nvSpPr>
@@ -10104,7 +9078,7 @@
       </p:sp>
       <p:sp>
         <p:nvSpPr>
-          <p:cNvPr id="8" name="TextBox 7"/>
+          <p:cNvPr id="7" name="TextBox 6"/>
           <p:cNvSpPr txBox="1"/>
           <p:nvPr/>
         </p:nvSpPr>
@@ -10139,7 +9113,7 @@
       </p:sp>
       <p:pic>
         <p:nvPicPr>
-          <p:cNvPr id="9" name="Picture 8" descr="6e1bf63989c69b23.png"/>
+          <p:cNvPr id="8" name="Picture 7" descr="6e1bf63989c69b23.png"/>
           <p:cNvPicPr>
             <a:picLocks noChangeAspect="1"/>
           </p:cNvPicPr>
@@ -10163,7 +9137,7 @@
       </p:pic>
       <p:sp>
         <p:nvSpPr>
-          <p:cNvPr id="10" name="TextBox 9"/>
+          <p:cNvPr id="9" name="TextBox 8"/>
           <p:cNvSpPr txBox="1"/>
           <p:nvPr/>
         </p:nvSpPr>
@@ -10198,7 +9172,7 @@
       </p:sp>
       <p:sp>
         <p:nvSpPr>
-          <p:cNvPr id="11" name="TextBox 10"/>
+          <p:cNvPr id="10" name="TextBox 9"/>
           <p:cNvSpPr txBox="1"/>
           <p:nvPr/>
         </p:nvSpPr>
@@ -10242,7 +9216,7 @@
       </p:sp>
       <p:sp>
         <p:nvSpPr>
-          <p:cNvPr id="12" name="TextBox 11"/>
+          <p:cNvPr id="11" name="TextBox 10"/>
           <p:cNvSpPr txBox="1"/>
           <p:nvPr/>
         </p:nvSpPr>
@@ -10286,7 +9260,7 @@
       </p:sp>
       <p:sp>
         <p:nvSpPr>
-          <p:cNvPr id="13" name="TextBox 12"/>
+          <p:cNvPr id="12" name="TextBox 11"/>
           <p:cNvSpPr txBox="1"/>
           <p:nvPr/>
         </p:nvSpPr>
@@ -10330,7 +9304,7 @@
       </p:sp>
       <p:sp>
         <p:nvSpPr>
-          <p:cNvPr id="14" name="TextBox 13"/>
+          <p:cNvPr id="13" name="TextBox 12"/>
           <p:cNvSpPr txBox="1"/>
           <p:nvPr/>
         </p:nvSpPr>
@@ -10374,7 +9348,7 @@
       </p:sp>
       <p:sp>
         <p:nvSpPr>
-          <p:cNvPr id="15" name="TextBox 14"/>
+          <p:cNvPr id="14" name="TextBox 13"/>
           <p:cNvSpPr txBox="1"/>
           <p:nvPr/>
         </p:nvSpPr>
@@ -10530,44 +9504,9 @@
           </a:fontRef>
         </p:style>
       </p:cxnSp>
-      <p:sp>
-        <p:nvSpPr>
-          <p:cNvPr id="5" name="TextBox 4"/>
-          <p:cNvSpPr txBox="1"/>
-          <p:nvPr/>
-        </p:nvSpPr>
-        <p:spPr>
-          <a:xfrm>
-            <a:off x="777240" y="1261872"/>
-            <a:ext cx="10607040" cy="310896"/>
-          </a:xfrm>
-          <a:prstGeom prst="rect">
-            <a:avLst/>
-          </a:prstGeom>
-          <a:noFill/>
-        </p:spPr>
-        <p:txBody>
-          <a:bodyPr wrap="square" lIns="45720" rIns="45720" tIns="18288" bIns="18288" anchor="t">
-            <a:spAutoFit/>
-          </a:bodyPr>
-          <a:lstStyle/>
-          <a:p>
-            <a:pPr algn="l"/>
-            <a:r>
-              <a:rPr sz="1700" b="0" i="1">
-                <a:solidFill>
-                  <a:srgbClr val="6B6B6B"/>
-                </a:solidFill>
-                <a:latin typeface="Century Schoolbook"/>
-              </a:rPr>
-              <a:t>Answer.</a:t>
-            </a:r>
-          </a:p>
-        </p:txBody>
-      </p:sp>
       <p:cxnSp>
         <p:nvCxnSpPr>
-          <p:cNvPr id="6" name="Connector 5"/>
+          <p:cNvPr id="5" name="Connector 4"/>
           <p:cNvCxnSpPr/>
           <p:nvPr/>
         </p:nvCxnSpPr>
@@ -10602,7 +9541,7 @@
       </p:cxnSp>
       <p:sp>
         <p:nvSpPr>
-          <p:cNvPr id="7" name="TextBox 6"/>
+          <p:cNvPr id="6" name="TextBox 5"/>
           <p:cNvSpPr txBox="1"/>
           <p:nvPr/>
         </p:nvSpPr>
@@ -10637,7 +9576,7 @@
       </p:sp>
       <p:sp>
         <p:nvSpPr>
-          <p:cNvPr id="8" name="TextBox 7"/>
+          <p:cNvPr id="7" name="TextBox 6"/>
           <p:cNvSpPr txBox="1"/>
           <p:nvPr/>
         </p:nvSpPr>
@@ -10672,7 +9611,7 @@
       </p:sp>
       <p:pic>
         <p:nvPicPr>
-          <p:cNvPr id="9" name="Picture 8" descr="e2d33019ea26f919.png"/>
+          <p:cNvPr id="8" name="Picture 7" descr="e2d33019ea26f919.png"/>
           <p:cNvPicPr>
             <a:picLocks noChangeAspect="1"/>
           </p:cNvPicPr>
@@ -10696,7 +9635,7 @@
       </p:pic>
       <p:sp>
         <p:nvSpPr>
-          <p:cNvPr id="10" name="TextBox 9"/>
+          <p:cNvPr id="9" name="TextBox 8"/>
           <p:cNvSpPr txBox="1"/>
           <p:nvPr/>
         </p:nvSpPr>
@@ -10731,7 +9670,7 @@
       </p:sp>
       <p:sp>
         <p:nvSpPr>
-          <p:cNvPr id="11" name="TextBox 10"/>
+          <p:cNvPr id="10" name="TextBox 9"/>
           <p:cNvSpPr txBox="1"/>
           <p:nvPr/>
         </p:nvSpPr>
@@ -10775,7 +9714,7 @@
       </p:sp>
       <p:sp>
         <p:nvSpPr>
-          <p:cNvPr id="12" name="TextBox 11"/>
+          <p:cNvPr id="11" name="TextBox 10"/>
           <p:cNvSpPr txBox="1"/>
           <p:nvPr/>
         </p:nvSpPr>
@@ -10819,7 +9758,7 @@
       </p:sp>
       <p:sp>
         <p:nvSpPr>
-          <p:cNvPr id="13" name="TextBox 12"/>
+          <p:cNvPr id="12" name="TextBox 11"/>
           <p:cNvSpPr txBox="1"/>
           <p:nvPr/>
         </p:nvSpPr>
@@ -10863,7 +9802,7 @@
       </p:sp>
       <p:sp>
         <p:nvSpPr>
-          <p:cNvPr id="14" name="TextBox 13"/>
+          <p:cNvPr id="13" name="TextBox 12"/>
           <p:cNvSpPr txBox="1"/>
           <p:nvPr/>
         </p:nvSpPr>
@@ -10907,7 +9846,7 @@
       </p:sp>
       <p:sp>
         <p:nvSpPr>
-          <p:cNvPr id="15" name="TextBox 14"/>
+          <p:cNvPr id="14" name="TextBox 13"/>
           <p:cNvSpPr txBox="1"/>
           <p:nvPr/>
         </p:nvSpPr>
@@ -11063,44 +10002,9 @@
           </a:fontRef>
         </p:style>
       </p:cxnSp>
-      <p:sp>
-        <p:nvSpPr>
-          <p:cNvPr id="5" name="TextBox 4"/>
-          <p:cNvSpPr txBox="1"/>
-          <p:nvPr/>
-        </p:nvSpPr>
-        <p:spPr>
-          <a:xfrm>
-            <a:off x="777240" y="1261872"/>
-            <a:ext cx="10607040" cy="310896"/>
-          </a:xfrm>
-          <a:prstGeom prst="rect">
-            <a:avLst/>
-          </a:prstGeom>
-          <a:noFill/>
-        </p:spPr>
-        <p:txBody>
-          <a:bodyPr wrap="square" lIns="45720" rIns="45720" tIns="18288" bIns="18288" anchor="t">
-            <a:spAutoFit/>
-          </a:bodyPr>
-          <a:lstStyle/>
-          <a:p>
-            <a:pPr algn="l"/>
-            <a:r>
-              <a:rPr sz="1700" b="0" i="1">
-                <a:solidFill>
-                  <a:srgbClr val="6B6B6B"/>
-                </a:solidFill>
-                <a:latin typeface="Century Schoolbook"/>
-              </a:rPr>
-              <a:t>Boards up on three.</a:t>
-            </a:r>
-          </a:p>
-        </p:txBody>
-      </p:sp>
       <p:cxnSp>
         <p:nvCxnSpPr>
-          <p:cNvPr id="6" name="Connector 5"/>
+          <p:cNvPr id="5" name="Connector 4"/>
           <p:cNvCxnSpPr/>
           <p:nvPr/>
         </p:nvCxnSpPr>
@@ -11135,7 +10039,7 @@
       </p:cxnSp>
       <p:sp>
         <p:nvSpPr>
-          <p:cNvPr id="7" name="TextBox 6"/>
+          <p:cNvPr id="6" name="TextBox 5"/>
           <p:cNvSpPr txBox="1"/>
           <p:nvPr/>
         </p:nvSpPr>
@@ -11170,7 +10074,7 @@
       </p:sp>
       <p:sp>
         <p:nvSpPr>
-          <p:cNvPr id="8" name="TextBox 7"/>
+          <p:cNvPr id="7" name="TextBox 6"/>
           <p:cNvSpPr txBox="1"/>
           <p:nvPr/>
         </p:nvSpPr>
@@ -11205,7 +10109,7 @@
       </p:sp>
       <p:pic>
         <p:nvPicPr>
-          <p:cNvPr id="9" name="Picture 8" descr="a9ee2603fdcbc1fc.png"/>
+          <p:cNvPr id="8" name="Picture 7" descr="a9ee2603fdcbc1fc.png"/>
           <p:cNvPicPr>
             <a:picLocks noChangeAspect="1"/>
           </p:cNvPicPr>
@@ -11229,7 +10133,7 @@
       </p:pic>
       <p:sp>
         <p:nvSpPr>
-          <p:cNvPr id="10" name="TextBox 9"/>
+          <p:cNvPr id="9" name="TextBox 8"/>
           <p:cNvSpPr txBox="1"/>
           <p:nvPr/>
         </p:nvSpPr>
@@ -11258,41 +10162,6 @@
                 <a:latin typeface="Century Schoolbook"/>
               </a:rPr>
               <a:t>Answer it.</a:t>
-            </a:r>
-          </a:p>
-        </p:txBody>
-      </p:sp>
-      <p:sp>
-        <p:nvSpPr>
-          <p:cNvPr id="11" name="TextBox 10"/>
-          <p:cNvSpPr txBox="1"/>
-          <p:nvPr/>
-        </p:nvSpPr>
-        <p:spPr>
-          <a:xfrm>
-            <a:off x="777240" y="4828032"/>
-            <a:ext cx="10607040" cy="365760"/>
-          </a:xfrm>
-          <a:prstGeom prst="rect">
-            <a:avLst/>
-          </a:prstGeom>
-          <a:noFill/>
-        </p:spPr>
-        <p:txBody>
-          <a:bodyPr wrap="square" lIns="45720" rIns="45720" tIns="18288" bIns="18288" anchor="t">
-            <a:spAutoFit/>
-          </a:bodyPr>
-          <a:lstStyle/>
-          <a:p>
-            <a:pPr algn="ctr"/>
-            <a:r>
-              <a:rPr sz="1900" b="0" i="1">
-                <a:solidFill>
-                  <a:srgbClr val="6B6B6B"/>
-                </a:solidFill>
-                <a:latin typeface="Century Schoolbook"/>
-              </a:rPr>
-              <a:t>Top and bottom each get the root.</a:t>
             </a:r>
           </a:p>
         </p:txBody>
@@ -11420,44 +10289,9 @@
           </a:fontRef>
         </p:style>
       </p:cxnSp>
-      <p:sp>
-        <p:nvSpPr>
-          <p:cNvPr id="5" name="TextBox 4"/>
-          <p:cNvSpPr txBox="1"/>
-          <p:nvPr/>
-        </p:nvSpPr>
-        <p:spPr>
-          <a:xfrm>
-            <a:off x="777240" y="1261872"/>
-            <a:ext cx="10607040" cy="310896"/>
-          </a:xfrm>
-          <a:prstGeom prst="rect">
-            <a:avLst/>
-          </a:prstGeom>
-          <a:noFill/>
-        </p:spPr>
-        <p:txBody>
-          <a:bodyPr wrap="square" lIns="45720" rIns="45720" tIns="18288" bIns="18288" anchor="t">
-            <a:spAutoFit/>
-          </a:bodyPr>
-          <a:lstStyle/>
-          <a:p>
-            <a:pPr algn="l"/>
-            <a:r>
-              <a:rPr sz="1700" b="0" i="1">
-                <a:solidFill>
-                  <a:srgbClr val="6B6B6B"/>
-                </a:solidFill>
-                <a:latin typeface="Century Schoolbook"/>
-              </a:rPr>
-              <a:t>Answer.</a:t>
-            </a:r>
-          </a:p>
-        </p:txBody>
-      </p:sp>
       <p:cxnSp>
         <p:nvCxnSpPr>
-          <p:cNvPr id="6" name="Connector 5"/>
+          <p:cNvPr id="5" name="Connector 4"/>
           <p:cNvCxnSpPr/>
           <p:nvPr/>
         </p:nvCxnSpPr>
@@ -11492,7 +10326,7 @@
       </p:cxnSp>
       <p:sp>
         <p:nvSpPr>
-          <p:cNvPr id="7" name="TextBox 6"/>
+          <p:cNvPr id="6" name="TextBox 5"/>
           <p:cNvSpPr txBox="1"/>
           <p:nvPr/>
         </p:nvSpPr>
@@ -11527,7 +10361,7 @@
       </p:sp>
       <p:sp>
         <p:nvSpPr>
-          <p:cNvPr id="8" name="TextBox 7"/>
+          <p:cNvPr id="7" name="TextBox 6"/>
           <p:cNvSpPr txBox="1"/>
           <p:nvPr/>
         </p:nvSpPr>
@@ -11562,7 +10396,7 @@
       </p:sp>
       <p:pic>
         <p:nvPicPr>
-          <p:cNvPr id="9" name="Picture 8" descr="641b2a864f99c54b.png"/>
+          <p:cNvPr id="8" name="Picture 7" descr="641b2a864f99c54b.png"/>
           <p:cNvPicPr>
             <a:picLocks noChangeAspect="1"/>
           </p:cNvPicPr>
@@ -11586,42 +10420,7 @@
       </p:pic>
       <p:sp>
         <p:nvSpPr>
-          <p:cNvPr id="10" name="TextBox 9"/>
-          <p:cNvSpPr txBox="1"/>
-          <p:nvPr/>
-        </p:nvSpPr>
-        <p:spPr>
-          <a:xfrm>
-            <a:off x="1828800" y="3243071"/>
-            <a:ext cx="8503920" cy="548640"/>
-          </a:xfrm>
-          <a:prstGeom prst="rect">
-            <a:avLst/>
-          </a:prstGeom>
-          <a:noFill/>
-        </p:spPr>
-        <p:txBody>
-          <a:bodyPr wrap="square" lIns="45720" rIns="45720" tIns="18288" bIns="18288" anchor="t">
-            <a:spAutoFit/>
-          </a:bodyPr>
-          <a:lstStyle/>
-          <a:p>
-            <a:pPr algn="ctr"/>
-            <a:r>
-              <a:rPr sz="2400" b="0" i="0">
-                <a:solidFill>
-                  <a:srgbClr val="6B6B6B"/>
-                </a:solidFill>
-                <a:latin typeface="Century Schoolbook"/>
-              </a:rPr>
-              <a:t>1/3 and 1/3</a:t>
-            </a:r>
-          </a:p>
-        </p:txBody>
-      </p:sp>
-      <p:sp>
-        <p:nvSpPr>
-          <p:cNvPr id="11" name="TextBox 10"/>
+          <p:cNvPr id="9" name="TextBox 8"/>
           <p:cNvSpPr txBox="1"/>
           <p:nvPr/>
         </p:nvSpPr>
@@ -11777,44 +10576,9 @@
           </a:fontRef>
         </p:style>
       </p:cxnSp>
-      <p:sp>
-        <p:nvSpPr>
-          <p:cNvPr id="5" name="TextBox 4"/>
-          <p:cNvSpPr txBox="1"/>
-          <p:nvPr/>
-        </p:nvSpPr>
-        <p:spPr>
-          <a:xfrm>
-            <a:off x="777240" y="1261872"/>
-            <a:ext cx="10607040" cy="310896"/>
-          </a:xfrm>
-          <a:prstGeom prst="rect">
-            <a:avLst/>
-          </a:prstGeom>
-          <a:noFill/>
-        </p:spPr>
-        <p:txBody>
-          <a:bodyPr wrap="square" lIns="45720" rIns="45720" tIns="18288" bIns="18288" anchor="t">
-            <a:spAutoFit/>
-          </a:bodyPr>
-          <a:lstStyle/>
-          <a:p>
-            <a:pPr algn="l"/>
-            <a:r>
-              <a:rPr sz="1700" b="0" i="1">
-                <a:solidFill>
-                  <a:srgbClr val="6B6B6B"/>
-                </a:solidFill>
-                <a:latin typeface="Century Schoolbook"/>
-              </a:rPr>
-              <a:t>Boards up on three.</a:t>
-            </a:r>
-          </a:p>
-        </p:txBody>
-      </p:sp>
       <p:cxnSp>
         <p:nvCxnSpPr>
-          <p:cNvPr id="6" name="Connector 5"/>
+          <p:cNvPr id="5" name="Connector 4"/>
           <p:cNvCxnSpPr/>
           <p:nvPr/>
         </p:nvCxnSpPr>
@@ -11849,7 +10613,7 @@
       </p:cxnSp>
       <p:sp>
         <p:nvSpPr>
-          <p:cNvPr id="7" name="TextBox 6"/>
+          <p:cNvPr id="6" name="TextBox 5"/>
           <p:cNvSpPr txBox="1"/>
           <p:nvPr/>
         </p:nvSpPr>
@@ -11884,7 +10648,7 @@
       </p:sp>
       <p:sp>
         <p:nvSpPr>
-          <p:cNvPr id="8" name="TextBox 7"/>
+          <p:cNvPr id="7" name="TextBox 6"/>
           <p:cNvSpPr txBox="1"/>
           <p:nvPr/>
         </p:nvSpPr>
@@ -11919,7 +10683,7 @@
       </p:sp>
       <p:pic>
         <p:nvPicPr>
-          <p:cNvPr id="9" name="Picture 8" descr="2ee0db6a490ede41.png"/>
+          <p:cNvPr id="8" name="Picture 7" descr="2ee0db6a490ede41.png"/>
           <p:cNvPicPr>
             <a:picLocks noChangeAspect="1"/>
           </p:cNvPicPr>
@@ -11943,7 +10707,7 @@
       </p:pic>
       <p:sp>
         <p:nvSpPr>
-          <p:cNvPr id="10" name="TextBox 9"/>
+          <p:cNvPr id="9" name="TextBox 8"/>
           <p:cNvSpPr txBox="1"/>
           <p:nvPr/>
         </p:nvSpPr>
@@ -11972,41 +10736,6 @@
                 <a:latin typeface="Century Schoolbook"/>
               </a:rPr>
               <a:t>Answer it.</a:t>
-            </a:r>
-          </a:p>
-        </p:txBody>
-      </p:sp>
-      <p:sp>
-        <p:nvSpPr>
-          <p:cNvPr id="11" name="TextBox 10"/>
-          <p:cNvSpPr txBox="1"/>
-          <p:nvPr/>
-        </p:nvSpPr>
-        <p:spPr>
-          <a:xfrm>
-            <a:off x="777240" y="4828032"/>
-            <a:ext cx="10607040" cy="365760"/>
-          </a:xfrm>
-          <a:prstGeom prst="rect">
-            <a:avLst/>
-          </a:prstGeom>
-          <a:noFill/>
-        </p:spPr>
-        <p:txBody>
-          <a:bodyPr wrap="square" lIns="45720" rIns="45720" tIns="18288" bIns="18288" anchor="t">
-            <a:spAutoFit/>
-          </a:bodyPr>
-          <a:lstStyle/>
-          <a:p>
-            <a:pPr algn="ctr"/>
-            <a:r>
-              <a:rPr sz="1900" b="0" i="1">
-                <a:solidFill>
-                  <a:srgbClr val="6B6B6B"/>
-                </a:solidFill>
-                <a:latin typeface="Century Schoolbook"/>
-              </a:rPr>
-              <a:t>Finish each piece, then multiply.</a:t>
             </a:r>
           </a:p>
         </p:txBody>
@@ -12134,44 +10863,9 @@
           </a:fontRef>
         </p:style>
       </p:cxnSp>
-      <p:sp>
-        <p:nvSpPr>
-          <p:cNvPr id="5" name="TextBox 4"/>
-          <p:cNvSpPr txBox="1"/>
-          <p:nvPr/>
-        </p:nvSpPr>
-        <p:spPr>
-          <a:xfrm>
-            <a:off x="777240" y="1261872"/>
-            <a:ext cx="10607040" cy="310896"/>
-          </a:xfrm>
-          <a:prstGeom prst="rect">
-            <a:avLst/>
-          </a:prstGeom>
-          <a:noFill/>
-        </p:spPr>
-        <p:txBody>
-          <a:bodyPr wrap="square" lIns="45720" rIns="45720" tIns="18288" bIns="18288" anchor="t">
-            <a:spAutoFit/>
-          </a:bodyPr>
-          <a:lstStyle/>
-          <a:p>
-            <a:pPr algn="l"/>
-            <a:r>
-              <a:rPr sz="1700" b="0" i="1">
-                <a:solidFill>
-                  <a:srgbClr val="6B6B6B"/>
-                </a:solidFill>
-                <a:latin typeface="Century Schoolbook"/>
-              </a:rPr>
-              <a:t>Answers.</a:t>
-            </a:r>
-          </a:p>
-        </p:txBody>
-      </p:sp>
       <p:cxnSp>
         <p:nvCxnSpPr>
-          <p:cNvPr id="6" name="Connector 5"/>
+          <p:cNvPr id="5" name="Connector 4"/>
           <p:cNvCxnSpPr/>
           <p:nvPr/>
         </p:nvCxnSpPr>
@@ -12206,7 +10900,7 @@
       </p:cxnSp>
       <p:sp>
         <p:nvSpPr>
-          <p:cNvPr id="7" name="TextBox 6"/>
+          <p:cNvPr id="6" name="TextBox 5"/>
           <p:cNvSpPr txBox="1"/>
           <p:nvPr/>
         </p:nvSpPr>
@@ -12241,7 +10935,7 @@
       </p:sp>
       <p:sp>
         <p:nvSpPr>
-          <p:cNvPr id="8" name="TextBox 7"/>
+          <p:cNvPr id="7" name="TextBox 6"/>
           <p:cNvSpPr txBox="1"/>
           <p:nvPr/>
         </p:nvSpPr>
@@ -12276,13 +10970,13 @@
       </p:sp>
       <p:sp>
         <p:nvSpPr>
-          <p:cNvPr id="9" name="TextBox 8"/>
-          <p:cNvSpPr txBox="1"/>
-          <p:nvPr/>
-        </p:nvSpPr>
-        <p:spPr>
-          <a:xfrm>
-            <a:off x="1874519" y="1760220"/>
+          <p:cNvPr id="8" name="TextBox 7"/>
+          <p:cNvSpPr txBox="1"/>
+          <p:nvPr/>
+        </p:nvSpPr>
+        <p:spPr>
+          <a:xfrm>
+            <a:off x="1874519" y="1440180"/>
             <a:ext cx="6984958" cy="457200"/>
           </a:xfrm>
           <a:prstGeom prst="rect">
@@ -12311,13 +11005,13 @@
       </p:sp>
       <p:sp>
         <p:nvSpPr>
-          <p:cNvPr id="10" name="TextBox 9"/>
-          <p:cNvSpPr txBox="1"/>
-          <p:nvPr/>
-        </p:nvSpPr>
-        <p:spPr>
-          <a:xfrm>
-            <a:off x="9270958" y="1760220"/>
+          <p:cNvPr id="9" name="TextBox 8"/>
+          <p:cNvSpPr txBox="1"/>
+          <p:nvPr/>
+        </p:nvSpPr>
+        <p:spPr>
+          <a:xfrm>
+            <a:off x="9270958" y="1440180"/>
             <a:ext cx="388052" cy="457200"/>
           </a:xfrm>
           <a:prstGeom prst="rect">
@@ -12346,13 +11040,13 @@
       </p:sp>
       <p:sp>
         <p:nvSpPr>
-          <p:cNvPr id="11" name="TextBox 10"/>
-          <p:cNvSpPr txBox="1"/>
-          <p:nvPr/>
-        </p:nvSpPr>
-        <p:spPr>
-          <a:xfrm>
-            <a:off x="1874519" y="2372868"/>
+          <p:cNvPr id="10" name="TextBox 9"/>
+          <p:cNvSpPr txBox="1"/>
+          <p:nvPr/>
+        </p:nvSpPr>
+        <p:spPr>
+          <a:xfrm>
+            <a:off x="1874519" y="2052828"/>
             <a:ext cx="726811" cy="457200"/>
           </a:xfrm>
           <a:prstGeom prst="rect">
@@ -12381,7 +11075,7 @@
       </p:sp>
       <p:pic>
         <p:nvPicPr>
-          <p:cNvPr id="12" name="Picture 11" descr="ca17b323d889e390.png"/>
+          <p:cNvPr id="11" name="Picture 10" descr="ca17b323d889e390.png"/>
           <p:cNvPicPr>
             <a:picLocks noChangeAspect="1"/>
           </p:cNvPicPr>
@@ -12395,7 +11089,7 @@
         </p:blipFill>
         <p:spPr>
           <a:xfrm>
-            <a:off x="2464171" y="2432304"/>
+            <a:off x="2464171" y="2112264"/>
             <a:ext cx="2441448" cy="338328"/>
           </a:xfrm>
           <a:prstGeom prst="rect">
@@ -12405,13 +11099,13 @@
       </p:pic>
       <p:sp>
         <p:nvSpPr>
-          <p:cNvPr id="13" name="TextBox 12"/>
-          <p:cNvSpPr txBox="1"/>
-          <p:nvPr/>
-        </p:nvSpPr>
-        <p:spPr>
-          <a:xfrm>
-            <a:off x="5454259" y="2372868"/>
+          <p:cNvPr id="12" name="TextBox 11"/>
+          <p:cNvSpPr txBox="1"/>
+          <p:nvPr/>
+        </p:nvSpPr>
+        <p:spPr>
+          <a:xfrm>
+            <a:off x="5454259" y="2052828"/>
             <a:ext cx="1302101" cy="457200"/>
           </a:xfrm>
           <a:prstGeom prst="rect">
@@ -12449,13 +11143,13 @@
       </p:sp>
       <p:sp>
         <p:nvSpPr>
-          <p:cNvPr id="14" name="TextBox 13"/>
-          <p:cNvSpPr txBox="1"/>
-          <p:nvPr/>
-        </p:nvSpPr>
-        <p:spPr>
-          <a:xfrm>
-            <a:off x="1874519" y="2985516"/>
+          <p:cNvPr id="13" name="TextBox 12"/>
+          <p:cNvSpPr txBox="1"/>
+          <p:nvPr/>
+        </p:nvSpPr>
+        <p:spPr>
+          <a:xfrm>
+            <a:off x="1874519" y="2665476"/>
             <a:ext cx="3064939" cy="457200"/>
           </a:xfrm>
           <a:prstGeom prst="rect">
@@ -12484,7 +11178,7 @@
       </p:sp>
       <p:pic>
         <p:nvPicPr>
-          <p:cNvPr id="15" name="Picture 14" descr="9fe57fc54286b299.png"/>
+          <p:cNvPr id="14" name="Picture 13" descr="9fe57fc54286b299.png"/>
           <p:cNvPicPr>
             <a:picLocks noChangeAspect="1"/>
           </p:cNvPicPr>
@@ -12498,7 +11192,7 @@
         </p:blipFill>
         <p:spPr>
           <a:xfrm>
-            <a:off x="4802299" y="3009900"/>
+            <a:off x="4802299" y="2689860"/>
             <a:ext cx="853440" cy="408432"/>
           </a:xfrm>
           <a:prstGeom prst="rect">
@@ -12508,13 +11202,13 @@
       </p:pic>
       <p:sp>
         <p:nvSpPr>
-          <p:cNvPr id="16" name="TextBox 15"/>
-          <p:cNvSpPr txBox="1"/>
-          <p:nvPr/>
-        </p:nvSpPr>
-        <p:spPr>
-          <a:xfrm>
-            <a:off x="6204379" y="2985516"/>
+          <p:cNvPr id="15" name="TextBox 14"/>
+          <p:cNvSpPr txBox="1"/>
+          <p:nvPr/>
+        </p:nvSpPr>
+        <p:spPr>
+          <a:xfrm>
+            <a:off x="6204379" y="2665476"/>
             <a:ext cx="565792" cy="457200"/>
           </a:xfrm>
           <a:prstGeom prst="rect">
@@ -12543,13 +11237,13 @@
       </p:sp>
       <p:sp>
         <p:nvSpPr>
-          <p:cNvPr id="17" name="TextBox 16"/>
-          <p:cNvSpPr txBox="1"/>
-          <p:nvPr/>
-        </p:nvSpPr>
-        <p:spPr>
-          <a:xfrm>
-            <a:off x="1874519" y="3598164"/>
+          <p:cNvPr id="16" name="TextBox 15"/>
+          <p:cNvSpPr txBox="1"/>
+          <p:nvPr/>
+        </p:nvSpPr>
+        <p:spPr>
+          <a:xfrm>
+            <a:off x="1874519" y="3278124"/>
             <a:ext cx="2276518" cy="457200"/>
           </a:xfrm>
           <a:prstGeom prst="rect">
@@ -12578,7 +11272,7 @@
       </p:sp>
       <p:pic>
         <p:nvPicPr>
-          <p:cNvPr id="18" name="Picture 17" descr="72275cc2b2ecb2ca.png"/>
+          <p:cNvPr id="17" name="Picture 16" descr="72275cc2b2ecb2ca.png"/>
           <p:cNvPicPr>
             <a:picLocks noChangeAspect="1"/>
           </p:cNvPicPr>
@@ -12592,7 +11286,7 @@
         </p:blipFill>
         <p:spPr>
           <a:xfrm>
-            <a:off x="4013878" y="3710940"/>
+            <a:off x="4013878" y="3390900"/>
             <a:ext cx="1155192" cy="231648"/>
           </a:xfrm>
           <a:prstGeom prst="rect">
@@ -12602,13 +11296,13 @@
       </p:pic>
       <p:sp>
         <p:nvSpPr>
-          <p:cNvPr id="19" name="TextBox 18"/>
-          <p:cNvSpPr txBox="1"/>
-          <p:nvPr/>
-        </p:nvSpPr>
-        <p:spPr>
-          <a:xfrm>
-            <a:off x="5717710" y="3598164"/>
+          <p:cNvPr id="18" name="TextBox 17"/>
+          <p:cNvSpPr txBox="1"/>
+          <p:nvPr/>
+        </p:nvSpPr>
+        <p:spPr>
+          <a:xfrm>
+            <a:off x="5717710" y="3278124"/>
             <a:ext cx="388052" cy="457200"/>
           </a:xfrm>
           <a:prstGeom prst="rect">
@@ -12758,44 +11452,9 @@
           </a:fontRef>
         </p:style>
       </p:cxnSp>
-      <p:sp>
-        <p:nvSpPr>
-          <p:cNvPr id="5" name="TextBox 4"/>
-          <p:cNvSpPr txBox="1"/>
-          <p:nvPr/>
-        </p:nvSpPr>
-        <p:spPr>
-          <a:xfrm>
-            <a:off x="777240" y="1261872"/>
-            <a:ext cx="10607040" cy="310896"/>
-          </a:xfrm>
-          <a:prstGeom prst="rect">
-            <a:avLst/>
-          </a:prstGeom>
-          <a:noFill/>
-        </p:spPr>
-        <p:txBody>
-          <a:bodyPr wrap="square" lIns="45720" rIns="45720" tIns="18288" bIns="18288" anchor="t">
-            <a:spAutoFit/>
-          </a:bodyPr>
-          <a:lstStyle/>
-          <a:p>
-            <a:pPr algn="l"/>
-            <a:r>
-              <a:rPr sz="1700" b="0" i="1">
-                <a:solidFill>
-                  <a:srgbClr val="6B6B6B"/>
-                </a:solidFill>
-                <a:latin typeface="Century Schoolbook"/>
-              </a:rPr>
-              <a:t>Answer.</a:t>
-            </a:r>
-          </a:p>
-        </p:txBody>
-      </p:sp>
       <p:cxnSp>
         <p:nvCxnSpPr>
-          <p:cNvPr id="6" name="Connector 5"/>
+          <p:cNvPr id="5" name="Connector 4"/>
           <p:cNvCxnSpPr/>
           <p:nvPr/>
         </p:nvCxnSpPr>
@@ -12830,7 +11489,7 @@
       </p:cxnSp>
       <p:sp>
         <p:nvSpPr>
-          <p:cNvPr id="7" name="TextBox 6"/>
+          <p:cNvPr id="6" name="TextBox 5"/>
           <p:cNvSpPr txBox="1"/>
           <p:nvPr/>
         </p:nvSpPr>
@@ -12865,7 +11524,7 @@
       </p:sp>
       <p:sp>
         <p:nvSpPr>
-          <p:cNvPr id="8" name="TextBox 7"/>
+          <p:cNvPr id="7" name="TextBox 6"/>
           <p:cNvSpPr txBox="1"/>
           <p:nvPr/>
         </p:nvSpPr>
@@ -12900,7 +11559,7 @@
       </p:sp>
       <p:pic>
         <p:nvPicPr>
-          <p:cNvPr id="9" name="Picture 8" descr="a56781a24b5677bc.png"/>
+          <p:cNvPr id="8" name="Picture 7" descr="a56781a24b5677bc.png"/>
           <p:cNvPicPr>
             <a:picLocks noChangeAspect="1"/>
           </p:cNvPicPr>
@@ -12924,42 +11583,7 @@
       </p:pic>
       <p:sp>
         <p:nvSpPr>
-          <p:cNvPr id="10" name="TextBox 9"/>
-          <p:cNvSpPr txBox="1"/>
-          <p:nvPr/>
-        </p:nvSpPr>
-        <p:spPr>
-          <a:xfrm>
-            <a:off x="1828800" y="2926079"/>
-            <a:ext cx="8503920" cy="548640"/>
-          </a:xfrm>
-          <a:prstGeom prst="rect">
-            <a:avLst/>
-          </a:prstGeom>
-          <a:noFill/>
-        </p:spPr>
-        <p:txBody>
-          <a:bodyPr wrap="square" lIns="45720" rIns="45720" tIns="18288" bIns="18288" anchor="t">
-            <a:spAutoFit/>
-          </a:bodyPr>
-          <a:lstStyle/>
-          <a:p>
-            <a:pPr algn="ctr"/>
-            <a:r>
-              <a:rPr sz="2400" b="0" i="0">
-                <a:solidFill>
-                  <a:srgbClr val="6B6B6B"/>
-                </a:solidFill>
-                <a:latin typeface="Century Schoolbook"/>
-              </a:rPr>
-              <a:t>5 times one hundred twenty-fifth</a:t>
-            </a:r>
-          </a:p>
-        </p:txBody>
-      </p:sp>
-      <p:sp>
-        <p:nvSpPr>
-          <p:cNvPr id="11" name="TextBox 10"/>
+          <p:cNvPr id="9" name="TextBox 8"/>
           <p:cNvSpPr txBox="1"/>
           <p:nvPr/>
         </p:nvSpPr>
@@ -13115,44 +11739,9 @@
           </a:fontRef>
         </p:style>
       </p:cxnSp>
-      <p:sp>
-        <p:nvSpPr>
-          <p:cNvPr id="5" name="TextBox 4"/>
-          <p:cNvSpPr txBox="1"/>
-          <p:nvPr/>
-        </p:nvSpPr>
-        <p:spPr>
-          <a:xfrm>
-            <a:off x="777240" y="1261872"/>
-            <a:ext cx="10607040" cy="310896"/>
-          </a:xfrm>
-          <a:prstGeom prst="rect">
-            <a:avLst/>
-          </a:prstGeom>
-          <a:noFill/>
-        </p:spPr>
-        <p:txBody>
-          <a:bodyPr wrap="square" lIns="45720" rIns="45720" tIns="18288" bIns="18288" anchor="t">
-            <a:spAutoFit/>
-          </a:bodyPr>
-          <a:lstStyle/>
-          <a:p>
-            <a:pPr algn="l"/>
-            <a:r>
-              <a:rPr sz="1700" b="0" i="1">
-                <a:solidFill>
-                  <a:srgbClr val="6B6B6B"/>
-                </a:solidFill>
-                <a:latin typeface="Century Schoolbook"/>
-              </a:rPr>
-              <a:t>Take your time. Boards up when you have written it.</a:t>
-            </a:r>
-          </a:p>
-        </p:txBody>
-      </p:sp>
       <p:cxnSp>
         <p:nvCxnSpPr>
-          <p:cNvPr id="6" name="Connector 5"/>
+          <p:cNvPr id="5" name="Connector 4"/>
           <p:cNvCxnSpPr/>
           <p:nvPr/>
         </p:nvCxnSpPr>
@@ -13187,7 +11776,7 @@
       </p:cxnSp>
       <p:sp>
         <p:nvSpPr>
-          <p:cNvPr id="7" name="TextBox 6"/>
+          <p:cNvPr id="6" name="TextBox 5"/>
           <p:cNvSpPr txBox="1"/>
           <p:nvPr/>
         </p:nvSpPr>
@@ -13222,7 +11811,7 @@
       </p:sp>
       <p:sp>
         <p:nvSpPr>
-          <p:cNvPr id="8" name="TextBox 7"/>
+          <p:cNvPr id="7" name="TextBox 6"/>
           <p:cNvSpPr txBox="1"/>
           <p:nvPr/>
         </p:nvSpPr>
@@ -13257,7 +11846,7 @@
       </p:sp>
       <p:sp>
         <p:nvSpPr>
-          <p:cNvPr id="9" name="TextBox 8"/>
+          <p:cNvPr id="8" name="TextBox 7"/>
           <p:cNvSpPr txBox="1"/>
           <p:nvPr/>
         </p:nvSpPr>
@@ -13292,7 +11881,7 @@
       </p:sp>
       <p:pic>
         <p:nvPicPr>
-          <p:cNvPr id="10" name="Picture 9" descr="81cf988981787399.png"/>
+          <p:cNvPr id="9" name="Picture 8" descr="81cf988981787399.png"/>
           <p:cNvPicPr>
             <a:picLocks noChangeAspect="1"/>
           </p:cNvPicPr>
@@ -13316,7 +11905,7 @@
       </p:pic>
       <p:sp>
         <p:nvSpPr>
-          <p:cNvPr id="11" name="TextBox 10"/>
+          <p:cNvPr id="10" name="TextBox 9"/>
           <p:cNvSpPr txBox="1"/>
           <p:nvPr/>
         </p:nvSpPr>
@@ -13351,7 +11940,7 @@
       </p:sp>
       <p:sp>
         <p:nvSpPr>
-          <p:cNvPr id="12" name="TextBox 11"/>
+          <p:cNvPr id="11" name="TextBox 10"/>
           <p:cNvSpPr txBox="1"/>
           <p:nvPr/>
         </p:nvSpPr>
@@ -13386,7 +11975,7 @@
       </p:sp>
       <p:sp>
         <p:nvSpPr>
-          <p:cNvPr id="13" name="TextBox 12"/>
+          <p:cNvPr id="12" name="TextBox 11"/>
           <p:cNvSpPr txBox="1"/>
           <p:nvPr/>
         </p:nvSpPr>
@@ -13421,7 +12010,7 @@
       </p:sp>
       <p:sp>
         <p:nvSpPr>
-          <p:cNvPr id="14" name="TextBox 13"/>
+          <p:cNvPr id="13" name="TextBox 12"/>
           <p:cNvSpPr txBox="1"/>
           <p:nvPr/>
         </p:nvSpPr>
@@ -13450,41 +12039,6 @@
                 <a:latin typeface="Century Schoolbook"/>
               </a:rPr>
               <a:t>Write your answer in sentences.</a:t>
-            </a:r>
-          </a:p>
-        </p:txBody>
-      </p:sp>
-      <p:sp>
-        <p:nvSpPr>
-          <p:cNvPr id="15" name="TextBox 14"/>
-          <p:cNvSpPr txBox="1"/>
-          <p:nvPr/>
-        </p:nvSpPr>
-        <p:spPr>
-          <a:xfrm>
-            <a:off x="777240" y="4828032"/>
-            <a:ext cx="10607040" cy="365760"/>
-          </a:xfrm>
-          <a:prstGeom prst="rect">
-            <a:avLst/>
-          </a:prstGeom>
-          <a:noFill/>
-        </p:spPr>
-        <p:txBody>
-          <a:bodyPr wrap="square" lIns="45720" rIns="45720" tIns="18288" bIns="18288" anchor="t">
-            <a:spAutoFit/>
-          </a:bodyPr>
-          <a:lstStyle/>
-          <a:p>
-            <a:pPr algn="ctr"/>
-            <a:r>
-              <a:rPr sz="1900" b="0" i="1">
-                <a:solidFill>
-                  <a:srgbClr val="6B6B6B"/>
-                </a:solidFill>
-                <a:latin typeface="Century Schoolbook"/>
-              </a:rPr>
-              <a:t>Which root is he thinking of?</a:t>
             </a:r>
           </a:p>
         </p:txBody>
@@ -13612,44 +12166,9 @@
           </a:fontRef>
         </p:style>
       </p:cxnSp>
-      <p:sp>
-        <p:nvSpPr>
-          <p:cNvPr id="5" name="TextBox 4"/>
-          <p:cNvSpPr txBox="1"/>
-          <p:nvPr/>
-        </p:nvSpPr>
-        <p:spPr>
-          <a:xfrm>
-            <a:off x="777240" y="1261872"/>
-            <a:ext cx="10607040" cy="310896"/>
-          </a:xfrm>
-          <a:prstGeom prst="rect">
-            <a:avLst/>
-          </a:prstGeom>
-          <a:noFill/>
-        </p:spPr>
-        <p:txBody>
-          <a:bodyPr wrap="square" lIns="45720" rIns="45720" tIns="18288" bIns="18288" anchor="t">
-            <a:spAutoFit/>
-          </a:bodyPr>
-          <a:lstStyle/>
-          <a:p>
-            <a:pPr algn="l"/>
-            <a:r>
-              <a:rPr sz="1700" b="0" i="1">
-                <a:solidFill>
-                  <a:srgbClr val="6B6B6B"/>
-                </a:solidFill>
-                <a:latin typeface="Century Schoolbook"/>
-              </a:rPr>
-              <a:t>Answer.</a:t>
-            </a:r>
-          </a:p>
-        </p:txBody>
-      </p:sp>
       <p:cxnSp>
         <p:nvCxnSpPr>
-          <p:cNvPr id="6" name="Connector 5"/>
+          <p:cNvPr id="5" name="Connector 4"/>
           <p:cNvCxnSpPr/>
           <p:nvPr/>
         </p:nvCxnSpPr>
@@ -13684,7 +12203,7 @@
       </p:cxnSp>
       <p:sp>
         <p:nvSpPr>
-          <p:cNvPr id="7" name="TextBox 6"/>
+          <p:cNvPr id="6" name="TextBox 5"/>
           <p:cNvSpPr txBox="1"/>
           <p:nvPr/>
         </p:nvSpPr>
@@ -13719,7 +12238,7 @@
       </p:sp>
       <p:sp>
         <p:nvSpPr>
-          <p:cNvPr id="8" name="TextBox 7"/>
+          <p:cNvPr id="7" name="TextBox 6"/>
           <p:cNvSpPr txBox="1"/>
           <p:nvPr/>
         </p:nvSpPr>
@@ -13754,7 +12273,7 @@
       </p:sp>
       <p:sp>
         <p:nvSpPr>
-          <p:cNvPr id="9" name="TextBox 8"/>
+          <p:cNvPr id="8" name="TextBox 7"/>
           <p:cNvSpPr txBox="1"/>
           <p:nvPr/>
         </p:nvSpPr>
@@ -13789,7 +12308,7 @@
       </p:sp>
       <p:pic>
         <p:nvPicPr>
-          <p:cNvPr id="10" name="Picture 9" descr="1d8dbae40789857d.png"/>
+          <p:cNvPr id="9" name="Picture 8" descr="1d8dbae40789857d.png"/>
           <p:cNvPicPr>
             <a:picLocks noChangeAspect="1"/>
           </p:cNvPicPr>
@@ -13813,7 +12332,7 @@
       </p:pic>
       <p:sp>
         <p:nvSpPr>
-          <p:cNvPr id="11" name="TextBox 10"/>
+          <p:cNvPr id="10" name="TextBox 9"/>
           <p:cNvSpPr txBox="1"/>
           <p:nvPr/>
         </p:nvSpPr>
@@ -13848,7 +12367,7 @@
       </p:sp>
       <p:sp>
         <p:nvSpPr>
-          <p:cNvPr id="12" name="TextBox 11"/>
+          <p:cNvPr id="11" name="TextBox 10"/>
           <p:cNvSpPr txBox="1"/>
           <p:nvPr/>
         </p:nvSpPr>
@@ -13883,7 +12402,7 @@
       </p:sp>
       <p:sp>
         <p:nvSpPr>
-          <p:cNvPr id="13" name="TextBox 12"/>
+          <p:cNvPr id="12" name="TextBox 11"/>
           <p:cNvSpPr txBox="1"/>
           <p:nvPr/>
         </p:nvSpPr>
@@ -13918,48 +12437,13 @@
       </p:sp>
       <p:sp>
         <p:nvSpPr>
-          <p:cNvPr id="14" name="TextBox 13"/>
-          <p:cNvSpPr txBox="1"/>
-          <p:nvPr/>
-        </p:nvSpPr>
-        <p:spPr>
-          <a:xfrm>
-            <a:off x="1828800" y="4075838"/>
-            <a:ext cx="8503920" cy="548640"/>
-          </a:xfrm>
-          <a:prstGeom prst="rect">
-            <a:avLst/>
-          </a:prstGeom>
-          <a:noFill/>
-        </p:spPr>
-        <p:txBody>
-          <a:bodyPr wrap="square" lIns="45720" rIns="45720" tIns="18288" bIns="18288" anchor="t">
-            <a:spAutoFit/>
-          </a:bodyPr>
-          <a:lstStyle/>
-          <a:p>
-            <a:pPr algn="ctr"/>
-            <a:r>
-              <a:rPr sz="2400" b="0" i="0">
-                <a:solidFill>
-                  <a:srgbClr val="6B6B6B"/>
-                </a:solidFill>
-                <a:latin typeface="Century Schoolbook"/>
-              </a:rPr>
-              <a:t>a cube root is not a square root</a:t>
-            </a:r>
-          </a:p>
-        </p:txBody>
-      </p:sp>
-      <p:sp>
-        <p:nvSpPr>
-          <p:cNvPr id="15" name="TextBox 14"/>
-          <p:cNvSpPr txBox="1"/>
-          <p:nvPr/>
-        </p:nvSpPr>
-        <p:spPr>
-          <a:xfrm>
-            <a:off x="777240" y="4807358"/>
+          <p:cNvPr id="13" name="TextBox 12"/>
+          <p:cNvSpPr txBox="1"/>
+          <p:nvPr/>
+        </p:nvSpPr>
+        <p:spPr>
+          <a:xfrm>
+            <a:off x="777240" y="4663440"/>
             <a:ext cx="10607040" cy="548640"/>
           </a:xfrm>
           <a:prstGeom prst="rect">
@@ -14109,44 +12593,9 @@
           </a:fontRef>
         </p:style>
       </p:cxnSp>
-      <p:sp>
-        <p:nvSpPr>
-          <p:cNvPr id="5" name="TextBox 4"/>
-          <p:cNvSpPr txBox="1"/>
-          <p:nvPr/>
-        </p:nvSpPr>
-        <p:spPr>
-          <a:xfrm>
-            <a:off x="777240" y="1261872"/>
-            <a:ext cx="10607040" cy="310896"/>
-          </a:xfrm>
-          <a:prstGeom prst="rect">
-            <a:avLst/>
-          </a:prstGeom>
-          <a:noFill/>
-        </p:spPr>
-        <p:txBody>
-          <a:bodyPr wrap="square" lIns="45720" rIns="45720" tIns="18288" bIns="18288" anchor="t">
-            <a:spAutoFit/>
-          </a:bodyPr>
-          <a:lstStyle/>
-          <a:p>
-            <a:pPr algn="l"/>
-            <a:r>
-              <a:rPr sz="1700" b="0" i="1">
-                <a:solidFill>
-                  <a:srgbClr val="6B6B6B"/>
-                </a:solidFill>
-                <a:latin typeface="Century Schoolbook"/>
-              </a:rPr>
-              <a:t>Six questions. On your own, in silence.</a:t>
-            </a:r>
-          </a:p>
-        </p:txBody>
-      </p:sp>
       <p:cxnSp>
         <p:nvCxnSpPr>
-          <p:cNvPr id="6" name="Connector 5"/>
+          <p:cNvPr id="5" name="Connector 4"/>
           <p:cNvCxnSpPr/>
           <p:nvPr/>
         </p:nvCxnSpPr>
@@ -14181,7 +12630,7 @@
       </p:cxnSp>
       <p:sp>
         <p:nvSpPr>
-          <p:cNvPr id="7" name="TextBox 6"/>
+          <p:cNvPr id="6" name="TextBox 5"/>
           <p:cNvSpPr txBox="1"/>
           <p:nvPr/>
         </p:nvSpPr>
@@ -14216,7 +12665,7 @@
       </p:sp>
       <p:sp>
         <p:nvSpPr>
-          <p:cNvPr id="8" name="TextBox 7"/>
+          <p:cNvPr id="7" name="TextBox 6"/>
           <p:cNvSpPr txBox="1"/>
           <p:nvPr/>
         </p:nvSpPr>
@@ -14251,7 +12700,7 @@
       </p:sp>
       <p:sp>
         <p:nvSpPr>
-          <p:cNvPr id="9" name="TextBox 8"/>
+          <p:cNvPr id="8" name="TextBox 7"/>
           <p:cNvSpPr txBox="1"/>
           <p:nvPr/>
         </p:nvSpPr>
@@ -14286,7 +12735,7 @@
       </p:sp>
       <p:sp>
         <p:nvSpPr>
-          <p:cNvPr id="10" name="TextBox 9"/>
+          <p:cNvPr id="9" name="TextBox 8"/>
           <p:cNvSpPr txBox="1"/>
           <p:nvPr/>
         </p:nvSpPr>
@@ -14321,7 +12770,7 @@
       </p:sp>
       <p:sp>
         <p:nvSpPr>
-          <p:cNvPr id="11" name="TextBox 10"/>
+          <p:cNvPr id="10" name="TextBox 9"/>
           <p:cNvSpPr txBox="1"/>
           <p:nvPr/>
         </p:nvSpPr>
@@ -14356,7 +12805,7 @@
       </p:sp>
       <p:sp>
         <p:nvSpPr>
-          <p:cNvPr id="12" name="TextBox 11"/>
+          <p:cNvPr id="11" name="TextBox 10"/>
           <p:cNvSpPr txBox="1"/>
           <p:nvPr/>
         </p:nvSpPr>
@@ -14391,7 +12840,7 @@
       </p:sp>
       <p:sp>
         <p:nvSpPr>
-          <p:cNvPr id="13" name="TextBox 12"/>
+          <p:cNvPr id="12" name="TextBox 11"/>
           <p:cNvSpPr txBox="1"/>
           <p:nvPr/>
         </p:nvSpPr>
@@ -14426,7 +12875,7 @@
       </p:sp>
       <p:sp>
         <p:nvSpPr>
-          <p:cNvPr id="14" name="TextBox 13"/>
+          <p:cNvPr id="13" name="TextBox 12"/>
           <p:cNvSpPr txBox="1"/>
           <p:nvPr/>
         </p:nvSpPr>
@@ -14582,44 +13031,9 @@
           </a:fontRef>
         </p:style>
       </p:cxnSp>
-      <p:sp>
-        <p:nvSpPr>
-          <p:cNvPr id="5" name="TextBox 4"/>
-          <p:cNvSpPr txBox="1"/>
-          <p:nvPr/>
-        </p:nvSpPr>
-        <p:spPr>
-          <a:xfrm>
-            <a:off x="777240" y="1261872"/>
-            <a:ext cx="10607040" cy="310896"/>
-          </a:xfrm>
-          <a:prstGeom prst="rect">
-            <a:avLst/>
-          </a:prstGeom>
-          <a:noFill/>
-        </p:spPr>
-        <p:txBody>
-          <a:bodyPr wrap="square" lIns="45720" rIns="45720" tIns="18288" bIns="18288" anchor="t">
-            <a:spAutoFit/>
-          </a:bodyPr>
-          <a:lstStyle/>
-          <a:p>
-            <a:pPr algn="l"/>
-            <a:r>
-              <a:rPr sz="1700" b="0" i="1">
-                <a:solidFill>
-                  <a:srgbClr val="6B6B6B"/>
-                </a:solidFill>
-                <a:latin typeface="Century Schoolbook"/>
-              </a:rPr>
-              <a:t>Last five minutes.</a:t>
-            </a:r>
-          </a:p>
-        </p:txBody>
-      </p:sp>
       <p:cxnSp>
         <p:nvCxnSpPr>
-          <p:cNvPr id="6" name="Connector 5"/>
+          <p:cNvPr id="5" name="Connector 4"/>
           <p:cNvCxnSpPr/>
           <p:nvPr/>
         </p:nvCxnSpPr>
@@ -14654,7 +13068,7 @@
       </p:cxnSp>
       <p:sp>
         <p:nvSpPr>
-          <p:cNvPr id="7" name="TextBox 6"/>
+          <p:cNvPr id="6" name="TextBox 5"/>
           <p:cNvSpPr txBox="1"/>
           <p:nvPr/>
         </p:nvSpPr>
@@ -14689,7 +13103,7 @@
       </p:sp>
       <p:sp>
         <p:nvSpPr>
-          <p:cNvPr id="8" name="TextBox 7"/>
+          <p:cNvPr id="7" name="TextBox 6"/>
           <p:cNvSpPr txBox="1"/>
           <p:nvPr/>
         </p:nvSpPr>
@@ -14724,7 +13138,7 @@
       </p:sp>
       <p:sp>
         <p:nvSpPr>
-          <p:cNvPr id="9" name="TextBox 8"/>
+          <p:cNvPr id="8" name="TextBox 7"/>
           <p:cNvSpPr txBox="1"/>
           <p:nvPr/>
         </p:nvSpPr>
@@ -14759,7 +13173,7 @@
       </p:sp>
       <p:sp>
         <p:nvSpPr>
-          <p:cNvPr id="10" name="TextBox 9"/>
+          <p:cNvPr id="9" name="TextBox 8"/>
           <p:cNvSpPr txBox="1"/>
           <p:nvPr/>
         </p:nvSpPr>
@@ -14794,7 +13208,7 @@
       </p:sp>
       <p:sp>
         <p:nvSpPr>
-          <p:cNvPr id="11" name="TextBox 10"/>
+          <p:cNvPr id="10" name="TextBox 9"/>
           <p:cNvSpPr txBox="1"/>
           <p:nvPr/>
         </p:nvSpPr>
@@ -14829,7 +13243,7 @@
       </p:sp>
       <p:sp>
         <p:nvSpPr>
-          <p:cNvPr id="12" name="TextBox 11"/>
+          <p:cNvPr id="11" name="TextBox 10"/>
           <p:cNvSpPr txBox="1"/>
           <p:nvPr/>
         </p:nvSpPr>
@@ -14864,7 +13278,7 @@
       </p:sp>
       <p:sp>
         <p:nvSpPr>
-          <p:cNvPr id="13" name="TextBox 12"/>
+          <p:cNvPr id="12" name="TextBox 11"/>
           <p:cNvSpPr txBox="1"/>
           <p:nvPr/>
         </p:nvSpPr>
@@ -14899,7 +13313,7 @@
       </p:sp>
       <p:sp>
         <p:nvSpPr>
-          <p:cNvPr id="14" name="TextBox 13"/>
+          <p:cNvPr id="13" name="TextBox 12"/>
           <p:cNvSpPr txBox="1"/>
           <p:nvPr/>
         </p:nvSpPr>
@@ -14934,7 +13348,7 @@
       </p:sp>
       <p:sp>
         <p:nvSpPr>
-          <p:cNvPr id="15" name="TextBox 14"/>
+          <p:cNvPr id="14" name="TextBox 13"/>
           <p:cNvSpPr txBox="1"/>
           <p:nvPr/>
         </p:nvSpPr>
@@ -14969,7 +13383,7 @@
       </p:sp>
       <p:sp>
         <p:nvSpPr>
-          <p:cNvPr id="16" name="TextBox 15"/>
+          <p:cNvPr id="15" name="TextBox 14"/>
           <p:cNvSpPr txBox="1"/>
           <p:nvPr/>
         </p:nvSpPr>
@@ -15125,44 +13539,9 @@
           </a:fontRef>
         </p:style>
       </p:cxnSp>
-      <p:sp>
-        <p:nvSpPr>
-          <p:cNvPr id="5" name="TextBox 4"/>
-          <p:cNvSpPr txBox="1"/>
-          <p:nvPr/>
-        </p:nvSpPr>
-        <p:spPr>
-          <a:xfrm>
-            <a:off x="777240" y="1261872"/>
-            <a:ext cx="10607040" cy="310896"/>
-          </a:xfrm>
-          <a:prstGeom prst="rect">
-            <a:avLst/>
-          </a:prstGeom>
-          <a:noFill/>
-        </p:spPr>
-        <p:txBody>
-          <a:bodyPr wrap="square" lIns="45720" rIns="45720" tIns="18288" bIns="18288" anchor="t">
-            <a:spAutoFit/>
-          </a:bodyPr>
-          <a:lstStyle/>
-          <a:p>
-            <a:pPr algn="l"/>
-            <a:r>
-              <a:rPr sz="1700" b="0" i="1">
-                <a:solidFill>
-                  <a:srgbClr val="6B6B6B"/>
-                </a:solidFill>
-                <a:latin typeface="Century Schoolbook"/>
-              </a:rPr>
-              <a:t>Copy all three lines.</a:t>
-            </a:r>
-          </a:p>
-        </p:txBody>
-      </p:sp>
       <p:cxnSp>
         <p:nvCxnSpPr>
-          <p:cNvPr id="6" name="Connector 5"/>
+          <p:cNvPr id="5" name="Connector 4"/>
           <p:cNvCxnSpPr/>
           <p:nvPr/>
         </p:nvCxnSpPr>
@@ -15197,7 +13576,7 @@
       </p:cxnSp>
       <p:sp>
         <p:nvSpPr>
-          <p:cNvPr id="7" name="TextBox 6"/>
+          <p:cNvPr id="6" name="TextBox 5"/>
           <p:cNvSpPr txBox="1"/>
           <p:nvPr/>
         </p:nvSpPr>
@@ -15232,7 +13611,7 @@
       </p:sp>
       <p:sp>
         <p:nvSpPr>
-          <p:cNvPr id="8" name="TextBox 7"/>
+          <p:cNvPr id="7" name="TextBox 6"/>
           <p:cNvSpPr txBox="1"/>
           <p:nvPr/>
         </p:nvSpPr>
@@ -15267,13 +13646,13 @@
       </p:sp>
       <p:sp>
         <p:nvSpPr>
-          <p:cNvPr id="9" name="TextBox 8"/>
-          <p:cNvSpPr txBox="1"/>
-          <p:nvPr/>
-        </p:nvSpPr>
-        <p:spPr>
-          <a:xfrm>
-            <a:off x="777240" y="1737360"/>
+          <p:cNvPr id="8" name="TextBox 7"/>
+          <p:cNvSpPr txBox="1"/>
+          <p:nvPr/>
+        </p:nvSpPr>
+        <p:spPr>
+          <a:xfrm>
+            <a:off x="777240" y="1389888"/>
             <a:ext cx="10607040" cy="402336"/>
           </a:xfrm>
           <a:prstGeom prst="rect">
@@ -15302,13 +13681,13 @@
       </p:sp>
       <p:cxnSp>
         <p:nvCxnSpPr>
-          <p:cNvPr id="10" name="Connector 9"/>
+          <p:cNvPr id="9" name="Connector 8"/>
           <p:cNvCxnSpPr/>
           <p:nvPr/>
         </p:nvCxnSpPr>
         <p:spPr>
           <a:xfrm>
-            <a:off x="777240" y="2176272"/>
+            <a:off x="777240" y="1828800"/>
             <a:ext cx="10607040" cy="0"/>
           </a:xfrm>
           <a:prstGeom prst="line">
@@ -15337,7 +13716,7 @@
       </p:cxnSp>
       <p:pic>
         <p:nvPicPr>
-          <p:cNvPr id="11" name="Picture 10" descr="6f10aaba5b6e762d.png"/>
+          <p:cNvPr id="10" name="Picture 9" descr="6f10aaba5b6e762d.png"/>
           <p:cNvPicPr>
             <a:picLocks noChangeAspect="1"/>
           </p:cNvPicPr>
@@ -15351,7 +13730,7 @@
         </p:blipFill>
         <p:spPr>
           <a:xfrm>
-            <a:off x="3287268" y="2340864"/>
+            <a:off x="3287268" y="1993392"/>
             <a:ext cx="5586984" cy="502920"/>
           </a:xfrm>
           <a:prstGeom prst="rect">
@@ -15361,7 +13740,7 @@
       </p:pic>
       <p:pic>
         <p:nvPicPr>
-          <p:cNvPr id="12" name="Picture 11" descr="0f750478274c693a.png"/>
+          <p:cNvPr id="11" name="Picture 10" descr="0f750478274c693a.png"/>
           <p:cNvPicPr>
             <a:picLocks noChangeAspect="1"/>
           </p:cNvPicPr>
@@ -15375,7 +13754,7 @@
         </p:blipFill>
         <p:spPr>
           <a:xfrm>
-            <a:off x="4442459" y="3118104"/>
+            <a:off x="4442459" y="2770632"/>
             <a:ext cx="3276600" cy="502920"/>
           </a:xfrm>
           <a:prstGeom prst="rect">
@@ -15385,7 +13764,7 @@
       </p:pic>
       <p:pic>
         <p:nvPicPr>
-          <p:cNvPr id="13" name="Picture 12" descr="38c1b22d8ba50cd8.png"/>
+          <p:cNvPr id="12" name="Picture 11" descr="38c1b22d8ba50cd8.png"/>
           <p:cNvPicPr>
             <a:picLocks noChangeAspect="1"/>
           </p:cNvPicPr>
@@ -15399,7 +13778,7 @@
         </p:blipFill>
         <p:spPr>
           <a:xfrm>
-            <a:off x="3171715" y="3895344"/>
+            <a:off x="3171715" y="3547872"/>
             <a:ext cx="3294888" cy="502920"/>
           </a:xfrm>
           <a:prstGeom prst="rect">
@@ -15409,13 +13788,13 @@
       </p:pic>
       <p:sp>
         <p:nvSpPr>
-          <p:cNvPr id="14" name="TextBox 13"/>
-          <p:cNvSpPr txBox="1"/>
-          <p:nvPr/>
-        </p:nvSpPr>
-        <p:spPr>
-          <a:xfrm>
-            <a:off x="6466603" y="3918204"/>
+          <p:cNvPr id="13" name="TextBox 12"/>
+          <p:cNvSpPr txBox="1"/>
+          <p:nvPr/>
+        </p:nvSpPr>
+        <p:spPr>
+          <a:xfrm>
+            <a:off x="6466603" y="3570732"/>
             <a:ext cx="1880073" cy="457200"/>
           </a:xfrm>
           <a:prstGeom prst="rect">
@@ -15444,7 +13823,7 @@
       </p:sp>
       <p:pic>
         <p:nvPicPr>
-          <p:cNvPr id="15" name="Picture 14" descr="af23067c54651ce4.png"/>
+          <p:cNvPr id="14" name="Picture 13" descr="af23067c54651ce4.png"/>
           <p:cNvPicPr>
             <a:picLocks noChangeAspect="1"/>
           </p:cNvPicPr>
@@ -15458,7 +13837,7 @@
         </p:blipFill>
         <p:spPr>
           <a:xfrm>
-            <a:off x="8209516" y="4002024"/>
+            <a:off x="8209516" y="3654552"/>
             <a:ext cx="780288" cy="289560"/>
           </a:xfrm>
           <a:prstGeom prst="rect">
@@ -15468,13 +13847,13 @@
       </p:pic>
       <p:sp>
         <p:nvSpPr>
-          <p:cNvPr id="16" name="TextBox 15"/>
-          <p:cNvSpPr txBox="1"/>
-          <p:nvPr/>
-        </p:nvSpPr>
-        <p:spPr>
-          <a:xfrm>
-            <a:off x="987552" y="4736592"/>
+          <p:cNvPr id="15" name="TextBox 14"/>
+          <p:cNvSpPr txBox="1"/>
+          <p:nvPr/>
+        </p:nvSpPr>
+        <p:spPr>
+          <a:xfrm>
+            <a:off x="987552" y="4389120"/>
             <a:ext cx="10131551" cy="475488"/>
           </a:xfrm>
           <a:prstGeom prst="rect">
@@ -15737,7 +14116,7 @@
         </p:nvSpPr>
         <p:spPr>
           <a:xfrm>
-            <a:off x="777240" y="1737360"/>
+            <a:off x="777240" y="1389888"/>
             <a:ext cx="10607040" cy="402336"/>
           </a:xfrm>
           <a:prstGeom prst="rect">
@@ -15772,7 +14151,7 @@
         </p:nvCxnSpPr>
         <p:spPr>
           <a:xfrm>
-            <a:off x="777240" y="2176272"/>
+            <a:off x="777240" y="1828800"/>
             <a:ext cx="10607040" cy="0"/>
           </a:xfrm>
           <a:prstGeom prst="line">
@@ -15815,7 +14194,7 @@
         </p:blipFill>
         <p:spPr>
           <a:xfrm>
-            <a:off x="2613132" y="2340864"/>
+            <a:off x="2613132" y="1993392"/>
             <a:ext cx="1420368" cy="502920"/>
           </a:xfrm>
           <a:prstGeom prst="rect">
@@ -15831,7 +14210,7 @@
         </p:nvSpPr>
         <p:spPr>
           <a:xfrm>
-            <a:off x="4033500" y="2363724"/>
+            <a:off x="4033500" y="2016252"/>
             <a:ext cx="1183151" cy="457200"/>
           </a:xfrm>
           <a:prstGeom prst="rect">
@@ -15874,7 +14253,7 @@
         </p:blipFill>
         <p:spPr>
           <a:xfrm>
-            <a:off x="5079492" y="2340864"/>
+            <a:off x="5079492" y="1993392"/>
             <a:ext cx="1432560" cy="502920"/>
           </a:xfrm>
           <a:prstGeom prst="rect">
@@ -15890,7 +14269,7 @@
         </p:nvSpPr>
         <p:spPr>
           <a:xfrm>
-            <a:off x="6512051" y="2363724"/>
+            <a:off x="6512051" y="2016252"/>
             <a:ext cx="1183151" cy="457200"/>
           </a:xfrm>
           <a:prstGeom prst="rect">
@@ -15933,7 +14312,7 @@
         </p:blipFill>
         <p:spPr>
           <a:xfrm>
-            <a:off x="7558043" y="2340864"/>
+            <a:off x="7558043" y="1993392"/>
             <a:ext cx="1990344" cy="502920"/>
           </a:xfrm>
           <a:prstGeom prst="rect">
@@ -15957,7 +14336,7 @@
         </p:blipFill>
         <p:spPr>
           <a:xfrm>
-            <a:off x="4067292" y="3122676"/>
+            <a:off x="4067292" y="2775204"/>
             <a:ext cx="1289304" cy="813816"/>
           </a:xfrm>
           <a:prstGeom prst="rect">
@@ -15973,7 +14352,7 @@
         </p:nvSpPr>
         <p:spPr>
           <a:xfrm>
-            <a:off x="5356596" y="3300984"/>
+            <a:off x="5356596" y="2953512"/>
             <a:ext cx="1183151" cy="457200"/>
           </a:xfrm>
           <a:prstGeom prst="rect">
@@ -16016,7 +14395,7 @@
         </p:blipFill>
         <p:spPr>
           <a:xfrm>
-            <a:off x="6402587" y="3118104"/>
+            <a:off x="6402587" y="2770632"/>
             <a:ext cx="1691640" cy="822960"/>
           </a:xfrm>
           <a:prstGeom prst="rect">
@@ -16032,7 +14411,7 @@
         </p:nvSpPr>
         <p:spPr>
           <a:xfrm>
-            <a:off x="987552" y="4279392"/>
+            <a:off x="987552" y="3931920"/>
             <a:ext cx="10131551" cy="950976"/>
           </a:xfrm>
           <a:prstGeom prst="rect">
@@ -16295,7 +14674,7 @@
         </p:nvSpPr>
         <p:spPr>
           <a:xfrm>
-            <a:off x="777240" y="1737360"/>
+            <a:off x="777240" y="1389888"/>
             <a:ext cx="10607040" cy="402336"/>
           </a:xfrm>
           <a:prstGeom prst="rect">
@@ -16330,7 +14709,7 @@
         </p:nvCxnSpPr>
         <p:spPr>
           <a:xfrm>
-            <a:off x="777240" y="2176272"/>
+            <a:off x="777240" y="1828800"/>
             <a:ext cx="10607040" cy="0"/>
           </a:xfrm>
           <a:prstGeom prst="line">
@@ -16373,7 +14752,7 @@
         </p:blipFill>
         <p:spPr>
           <a:xfrm>
-            <a:off x="2639304" y="2340864"/>
+            <a:off x="2639304" y="1993392"/>
             <a:ext cx="2374392" cy="740664"/>
           </a:xfrm>
           <a:prstGeom prst="rect">
@@ -16389,7 +14768,7 @@
         </p:nvSpPr>
         <p:spPr>
           <a:xfrm>
-            <a:off x="5013696" y="2482596"/>
+            <a:off x="5013696" y="2135124"/>
             <a:ext cx="1183151" cy="457200"/>
           </a:xfrm>
           <a:prstGeom prst="rect">
@@ -16432,7 +14811,7 @@
         </p:blipFill>
         <p:spPr>
           <a:xfrm>
-            <a:off x="6059687" y="2459736"/>
+            <a:off x="6059687" y="2112264"/>
             <a:ext cx="3462528" cy="502920"/>
           </a:xfrm>
           <a:prstGeom prst="rect">
@@ -16456,7 +14835,7 @@
         </p:blipFill>
         <p:spPr>
           <a:xfrm>
-            <a:off x="3730752" y="3355848"/>
+            <a:off x="3730752" y="3008376"/>
             <a:ext cx="4700016" cy="685800"/>
           </a:xfrm>
           <a:prstGeom prst="rect">
@@ -16472,7 +14851,7 @@
         </p:nvSpPr>
         <p:spPr>
           <a:xfrm>
-            <a:off x="987552" y="4379976"/>
+            <a:off x="987552" y="4032504"/>
             <a:ext cx="10131551" cy="475488"/>
           </a:xfrm>
           <a:prstGeom prst="rect">
@@ -16622,44 +15001,9 @@
           </a:fontRef>
         </p:style>
       </p:cxnSp>
-      <p:sp>
-        <p:nvSpPr>
-          <p:cNvPr id="5" name="TextBox 4"/>
-          <p:cNvSpPr txBox="1"/>
-          <p:nvPr/>
-        </p:nvSpPr>
-        <p:spPr>
-          <a:xfrm>
-            <a:off x="777240" y="1261872"/>
-            <a:ext cx="10607040" cy="310896"/>
-          </a:xfrm>
-          <a:prstGeom prst="rect">
-            <a:avLst/>
-          </a:prstGeom>
-          <a:noFill/>
-        </p:spPr>
-        <p:txBody>
-          <a:bodyPr wrap="square" lIns="45720" rIns="45720" tIns="18288" bIns="18288" anchor="t">
-            <a:spAutoFit/>
-          </a:bodyPr>
-          <a:lstStyle/>
-          <a:p>
-            <a:pPr algn="l"/>
-            <a:r>
-              <a:rPr sz="1700" b="0" i="1">
-                <a:solidFill>
-                  <a:srgbClr val="6B6B6B"/>
-                </a:solidFill>
-                <a:latin typeface="Century Schoolbook"/>
-              </a:rPr>
-              <a:t>A power and a radical in one expression.</a:t>
-            </a:r>
-          </a:p>
-        </p:txBody>
-      </p:sp>
       <p:cxnSp>
         <p:nvCxnSpPr>
-          <p:cNvPr id="6" name="Connector 5"/>
+          <p:cNvPr id="5" name="Connector 4"/>
           <p:cNvCxnSpPr/>
           <p:nvPr/>
         </p:nvCxnSpPr>
@@ -16694,7 +15038,7 @@
       </p:cxnSp>
       <p:sp>
         <p:nvSpPr>
-          <p:cNvPr id="7" name="TextBox 6"/>
+          <p:cNvPr id="6" name="TextBox 5"/>
           <p:cNvSpPr txBox="1"/>
           <p:nvPr/>
         </p:nvSpPr>
@@ -16729,7 +15073,7 @@
       </p:sp>
       <p:sp>
         <p:nvSpPr>
-          <p:cNvPr id="8" name="TextBox 7"/>
+          <p:cNvPr id="7" name="TextBox 6"/>
           <p:cNvSpPr txBox="1"/>
           <p:nvPr/>
         </p:nvSpPr>
@@ -16764,7 +15108,7 @@
       </p:sp>
       <p:pic>
         <p:nvPicPr>
-          <p:cNvPr id="9" name="Picture 8" descr="9bb1c8a15b2d7bbe.png"/>
+          <p:cNvPr id="8" name="Picture 7" descr="9bb1c8a15b2d7bbe.png"/>
           <p:cNvPicPr>
             <a:picLocks noChangeAspect="1"/>
           </p:cNvPicPr>
@@ -16788,7 +15132,7 @@
       </p:pic>
       <p:sp>
         <p:nvSpPr>
-          <p:cNvPr id="10" name="TextBox 9"/>
+          <p:cNvPr id="9" name="TextBox 8"/>
           <p:cNvSpPr txBox="1"/>
           <p:nvPr/>
         </p:nvSpPr>
@@ -16944,44 +15288,9 @@
           </a:fontRef>
         </p:style>
       </p:cxnSp>
-      <p:sp>
-        <p:nvSpPr>
-          <p:cNvPr id="5" name="TextBox 4"/>
-          <p:cNvSpPr txBox="1"/>
-          <p:nvPr/>
-        </p:nvSpPr>
-        <p:spPr>
-          <a:xfrm>
-            <a:off x="777240" y="1261872"/>
-            <a:ext cx="10607040" cy="310896"/>
-          </a:xfrm>
-          <a:prstGeom prst="rect">
-            <a:avLst/>
-          </a:prstGeom>
-          <a:noFill/>
-        </p:spPr>
-        <p:txBody>
-          <a:bodyPr wrap="square" lIns="45720" rIns="45720" tIns="18288" bIns="18288" anchor="t">
-            <a:spAutoFit/>
-          </a:bodyPr>
-          <a:lstStyle/>
-          <a:p>
-            <a:pPr algn="l"/>
-            <a:r>
-              <a:rPr sz="1700" b="0" i="1">
-                <a:solidFill>
-                  <a:srgbClr val="6B6B6B"/>
-                </a:solidFill>
-                <a:latin typeface="Century Schoolbook"/>
-              </a:rPr>
-              <a:t>Worked.</a:t>
-            </a:r>
-          </a:p>
-        </p:txBody>
-      </p:sp>
       <p:cxnSp>
         <p:nvCxnSpPr>
-          <p:cNvPr id="6" name="Connector 5"/>
+          <p:cNvPr id="5" name="Connector 4"/>
           <p:cNvCxnSpPr/>
           <p:nvPr/>
         </p:nvCxnSpPr>
@@ -17016,7 +15325,7 @@
       </p:cxnSp>
       <p:sp>
         <p:nvSpPr>
-          <p:cNvPr id="7" name="TextBox 6"/>
+          <p:cNvPr id="6" name="TextBox 5"/>
           <p:cNvSpPr txBox="1"/>
           <p:nvPr/>
         </p:nvSpPr>
@@ -17051,7 +15360,7 @@
       </p:sp>
       <p:sp>
         <p:nvSpPr>
-          <p:cNvPr id="8" name="TextBox 7"/>
+          <p:cNvPr id="7" name="TextBox 6"/>
           <p:cNvSpPr txBox="1"/>
           <p:nvPr/>
         </p:nvSpPr>
@@ -17086,7 +15395,7 @@
       </p:sp>
       <p:pic>
         <p:nvPicPr>
-          <p:cNvPr id="9" name="Picture 8" descr="888f9d60545f0d0f.png"/>
+          <p:cNvPr id="8" name="Picture 7" descr="888f9d60545f0d0f.png"/>
           <p:cNvPicPr>
             <a:picLocks noChangeAspect="1"/>
           </p:cNvPicPr>
@@ -17108,44 +15417,9 @@
           </a:prstGeom>
         </p:spPr>
       </p:pic>
-      <p:sp>
-        <p:nvSpPr>
-          <p:cNvPr id="10" name="TextBox 9"/>
-          <p:cNvSpPr txBox="1"/>
-          <p:nvPr/>
-        </p:nvSpPr>
-        <p:spPr>
-          <a:xfrm>
-            <a:off x="3971544" y="2029968"/>
-            <a:ext cx="6400800" cy="502920"/>
-          </a:xfrm>
-          <a:prstGeom prst="rect">
-            <a:avLst/>
-          </a:prstGeom>
-          <a:noFill/>
-        </p:spPr>
-        <p:txBody>
-          <a:bodyPr wrap="square" lIns="45720" rIns="45720" tIns="18288" bIns="18288" anchor="ctr">
-            <a:spAutoFit/>
-          </a:bodyPr>
-          <a:lstStyle/>
-          <a:p>
-            <a:pPr algn="l"/>
-            <a:r>
-              <a:rPr sz="2100" b="0" i="1">
-                <a:solidFill>
-                  <a:srgbClr val="6B6B6B"/>
-                </a:solidFill>
-                <a:latin typeface="Century Schoolbook"/>
-              </a:rPr>
-              <a:t>square the whole base, sign included</a:t>
-            </a:r>
-          </a:p>
-        </p:txBody>
-      </p:sp>
       <p:pic>
         <p:nvPicPr>
-          <p:cNvPr id="11" name="Picture 10" descr="0f750478274c693a.png"/>
+          <p:cNvPr id="9" name="Picture 8" descr="0f750478274c693a.png"/>
           <p:cNvPicPr>
             <a:picLocks noChangeAspect="1"/>
           </p:cNvPicPr>
@@ -17167,44 +15441,9 @@
           </a:prstGeom>
         </p:spPr>
       </p:pic>
-      <p:sp>
-        <p:nvSpPr>
-          <p:cNvPr id="12" name="TextBox 11"/>
-          <p:cNvSpPr txBox="1"/>
-          <p:nvPr/>
-        </p:nvSpPr>
-        <p:spPr>
-          <a:xfrm>
-            <a:off x="5562600" y="2894075"/>
-            <a:ext cx="5821679" cy="502920"/>
-          </a:xfrm>
-          <a:prstGeom prst="rect">
-            <a:avLst/>
-          </a:prstGeom>
-          <a:noFill/>
-        </p:spPr>
-        <p:txBody>
-          <a:bodyPr wrap="square" lIns="45720" rIns="45720" tIns="18288" bIns="18288" anchor="ctr">
-            <a:spAutoFit/>
-          </a:bodyPr>
-          <a:lstStyle/>
-          <a:p>
-            <a:pPr algn="l"/>
-            <a:r>
-              <a:rPr sz="2100" b="0" i="1">
-                <a:solidFill>
-                  <a:srgbClr val="6B6B6B"/>
-                </a:solidFill>
-                <a:latin typeface="Century Schoolbook"/>
-              </a:rPr>
-              <a:t>finish under the bar, then take the root</a:t>
-            </a:r>
-          </a:p>
-        </p:txBody>
-      </p:sp>
       <p:pic>
         <p:nvPicPr>
-          <p:cNvPr id="13" name="Picture 12" descr="bdab02e30458e0d1.png"/>
+          <p:cNvPr id="10" name="Picture 9" descr="bdab02e30458e0d1.png"/>
           <p:cNvPicPr>
             <a:picLocks noChangeAspect="1"/>
           </p:cNvPicPr>
@@ -17228,42 +15467,7 @@
       </p:pic>
       <p:sp>
         <p:nvSpPr>
-          <p:cNvPr id="14" name="TextBox 13"/>
-          <p:cNvSpPr txBox="1"/>
-          <p:nvPr/>
-        </p:nvSpPr>
-        <p:spPr>
-          <a:xfrm>
-            <a:off x="3941064" y="3759707"/>
-            <a:ext cx="6400800" cy="502920"/>
-          </a:xfrm>
-          <a:prstGeom prst="rect">
-            <a:avLst/>
-          </a:prstGeom>
-          <a:noFill/>
-        </p:spPr>
-        <p:txBody>
-          <a:bodyPr wrap="square" lIns="45720" rIns="45720" tIns="18288" bIns="18288" anchor="ctr">
-            <a:spAutoFit/>
-          </a:bodyPr>
-          <a:lstStyle/>
-          <a:p>
-            <a:pPr algn="l"/>
-            <a:r>
-              <a:rPr sz="2100" b="0" i="1">
-                <a:solidFill>
-                  <a:srgbClr val="6B6B6B"/>
-                </a:solidFill>
-                <a:latin typeface="Century Schoolbook"/>
-              </a:rPr>
-              <a:t>combine</a:t>
-            </a:r>
-          </a:p>
-        </p:txBody>
-      </p:sp>
-      <p:sp>
-        <p:nvSpPr>
-          <p:cNvPr id="15" name="TextBox 14"/>
+          <p:cNvPr id="11" name="TextBox 10"/>
           <p:cNvSpPr txBox="1"/>
           <p:nvPr/>
         </p:nvSpPr>
@@ -17419,44 +15623,9 @@
           </a:fontRef>
         </p:style>
       </p:cxnSp>
-      <p:sp>
-        <p:nvSpPr>
-          <p:cNvPr id="5" name="TextBox 4"/>
-          <p:cNvSpPr txBox="1"/>
-          <p:nvPr/>
-        </p:nvSpPr>
-        <p:spPr>
-          <a:xfrm>
-            <a:off x="777240" y="1261872"/>
-            <a:ext cx="10607040" cy="310896"/>
-          </a:xfrm>
-          <a:prstGeom prst="rect">
-            <a:avLst/>
-          </a:prstGeom>
-          <a:noFill/>
-        </p:spPr>
-        <p:txBody>
-          <a:bodyPr wrap="square" lIns="45720" rIns="45720" tIns="18288" bIns="18288" anchor="t">
-            <a:spAutoFit/>
-          </a:bodyPr>
-          <a:lstStyle/>
-          <a:p>
-            <a:pPr algn="l"/>
-            <a:r>
-              <a:rPr sz="1700" b="0" i="1">
-                <a:solidFill>
-                  <a:srgbClr val="6B6B6B"/>
-                </a:solidFill>
-                <a:latin typeface="Century Schoolbook"/>
-              </a:rPr>
-              <a:t>Same steps, your numbers. Boards up when done.</a:t>
-            </a:r>
-          </a:p>
-        </p:txBody>
-      </p:sp>
       <p:cxnSp>
         <p:nvCxnSpPr>
-          <p:cNvPr id="6" name="Connector 5"/>
+          <p:cNvPr id="5" name="Connector 4"/>
           <p:cNvCxnSpPr/>
           <p:nvPr/>
         </p:nvCxnSpPr>
@@ -17491,7 +15660,7 @@
       </p:cxnSp>
       <p:sp>
         <p:nvSpPr>
-          <p:cNvPr id="7" name="TextBox 6"/>
+          <p:cNvPr id="6" name="TextBox 5"/>
           <p:cNvSpPr txBox="1"/>
           <p:nvPr/>
         </p:nvSpPr>
@@ -17526,7 +15695,7 @@
       </p:sp>
       <p:sp>
         <p:nvSpPr>
-          <p:cNvPr id="8" name="TextBox 7"/>
+          <p:cNvPr id="7" name="TextBox 6"/>
           <p:cNvSpPr txBox="1"/>
           <p:nvPr/>
         </p:nvSpPr>
@@ -17561,7 +15730,7 @@
       </p:sp>
       <p:pic>
         <p:nvPicPr>
-          <p:cNvPr id="9" name="Picture 8" descr="951716e95210eae7.png"/>
+          <p:cNvPr id="8" name="Picture 7" descr="951716e95210eae7.png"/>
           <p:cNvPicPr>
             <a:picLocks noChangeAspect="1"/>
           </p:cNvPicPr>
@@ -17583,6 +15752,41 @@
           </a:prstGeom>
         </p:spPr>
       </p:pic>
+      <p:sp>
+        <p:nvSpPr>
+          <p:cNvPr id="9" name="TextBox 8"/>
+          <p:cNvSpPr txBox="1"/>
+          <p:nvPr/>
+        </p:nvSpPr>
+        <p:spPr>
+          <a:xfrm>
+            <a:off x="777240" y="3557016"/>
+            <a:ext cx="10607040" cy="429370"/>
+          </a:xfrm>
+          <a:prstGeom prst="rect">
+            <a:avLst/>
+          </a:prstGeom>
+          <a:noFill/>
+        </p:spPr>
+        <p:txBody>
+          <a:bodyPr wrap="square" lIns="45720" rIns="45720" tIns="18288" bIns="18288" anchor="t">
+            <a:spAutoFit/>
+          </a:bodyPr>
+          <a:lstStyle/>
+          <a:p>
+            <a:pPr algn="ctr"/>
+            <a:r>
+              <a:rPr sz="2400" b="1" i="0">
+                <a:solidFill>
+                  <a:srgbClr val="1A1A1A"/>
+                </a:solidFill>
+                <a:latin typeface="Century Schoolbook"/>
+              </a:rPr>
+              <a:t>Evaluate.</a:t>
+            </a:r>
+          </a:p>
+        </p:txBody>
+      </p:sp>
     </p:spTree>
   </p:cSld>
   <p:clrMapOvr>

--- a/a7/packages/A7 Unit 4 - Solving Problems with Rational Numbers/Lessons/4.05/A7 4.05 Evaluating Expressions with Radicals - Slides.pptx
+++ b/a7/packages/A7 Unit 4 - Solving Problems with Rational Numbers/Lessons/4.05/A7 4.05 Evaluating Expressions with Radicals - Slides.pptx
@@ -12706,23 +12706,23 @@
         </p:nvSpPr>
         <p:spPr>
           <a:xfrm>
-            <a:off x="960120" y="2011680"/>
-            <a:ext cx="548640" cy="356616"/>
-          </a:xfrm>
-          <a:prstGeom prst="rect">
-            <a:avLst/>
-          </a:prstGeom>
-          <a:noFill/>
-        </p:spPr>
-        <p:txBody>
-          <a:bodyPr wrap="square" lIns="45720" rIns="45720" tIns="18288" bIns="18288" anchor="t">
+            <a:off x="960120" y="1495043"/>
+            <a:ext cx="548640" cy="457200"/>
+          </a:xfrm>
+          <a:prstGeom prst="rect">
+            <a:avLst/>
+          </a:prstGeom>
+          <a:noFill/>
+        </p:spPr>
+        <p:txBody>
+          <a:bodyPr wrap="square" lIns="45720" rIns="45720" tIns="18288" bIns="18288" anchor="ctr">
             <a:spAutoFit/>
           </a:bodyPr>
           <a:lstStyle/>
           <a:p>
             <a:pPr algn="l"/>
             <a:r>
-              <a:rPr sz="2100" b="1" i="0">
+              <a:rPr sz="2300" b="1" i="0">
                 <a:solidFill>
                   <a:srgbClr val="0B5394"/>
                 </a:solidFill>
@@ -12733,181 +12733,325 @@
           </a:p>
         </p:txBody>
       </p:sp>
-      <p:sp>
-        <p:nvSpPr>
-          <p:cNvPr id="9" name="TextBox 8"/>
-          <p:cNvSpPr txBox="1"/>
-          <p:nvPr/>
-        </p:nvSpPr>
-        <p:spPr>
-          <a:xfrm>
-            <a:off x="1554480" y="2011680"/>
-            <a:ext cx="9829800" cy="411480"/>
-          </a:xfrm>
-          <a:prstGeom prst="rect">
-            <a:avLst/>
-          </a:prstGeom>
-          <a:noFill/>
-        </p:spPr>
-        <p:txBody>
-          <a:bodyPr wrap="square" lIns="45720" rIns="45720" tIns="18288" bIns="18288" anchor="t">
+      <p:pic>
+        <p:nvPicPr>
+          <p:cNvPr id="9" name="Picture 8" descr="6917906ce232438c.png"/>
+          <p:cNvPicPr>
+            <a:picLocks noChangeAspect="1"/>
+          </p:cNvPicPr>
+          <p:nvPr/>
+        </p:nvPicPr>
+        <p:blipFill>
+          <a:blip r:embed="rId2"/>
+          <a:stretch>
+            <a:fillRect/>
+          </a:stretch>
+        </p:blipFill>
+        <p:spPr>
+          <a:xfrm>
+            <a:off x="1627632" y="1519428"/>
+            <a:ext cx="853440" cy="408432"/>
+          </a:xfrm>
+          <a:prstGeom prst="rect">
+            <a:avLst/>
+          </a:prstGeom>
+        </p:spPr>
+      </p:pic>
+      <p:sp>
+        <p:nvSpPr>
+          <p:cNvPr id="10" name="TextBox 9"/>
+          <p:cNvSpPr txBox="1"/>
+          <p:nvPr/>
+        </p:nvSpPr>
+        <p:spPr>
+          <a:xfrm>
+            <a:off x="960120" y="2089403"/>
+            <a:ext cx="548640" cy="457200"/>
+          </a:xfrm>
+          <a:prstGeom prst="rect">
+            <a:avLst/>
+          </a:prstGeom>
+          <a:noFill/>
+        </p:spPr>
+        <p:txBody>
+          <a:bodyPr wrap="square" lIns="45720" rIns="45720" tIns="18288" bIns="18288" anchor="ctr">
             <a:spAutoFit/>
           </a:bodyPr>
           <a:lstStyle/>
           <a:p>
             <a:pPr algn="l"/>
             <a:r>
-              <a:rPr sz="2100" b="0" i="0">
-                <a:solidFill>
-                  <a:srgbClr val="1A1A1A"/>
-                </a:solidFill>
-                <a:latin typeface="Century Schoolbook"/>
-              </a:rPr>
-              <a:t>Six questions. Work down the page.</a:t>
-            </a:r>
-          </a:p>
-        </p:txBody>
-      </p:sp>
-      <p:sp>
-        <p:nvSpPr>
-          <p:cNvPr id="10" name="TextBox 9"/>
-          <p:cNvSpPr txBox="1"/>
-          <p:nvPr/>
-        </p:nvSpPr>
-        <p:spPr>
-          <a:xfrm>
-            <a:off x="960120" y="2551176"/>
-            <a:ext cx="548640" cy="356616"/>
-          </a:xfrm>
-          <a:prstGeom prst="rect">
-            <a:avLst/>
-          </a:prstGeom>
-          <a:noFill/>
-        </p:spPr>
-        <p:txBody>
-          <a:bodyPr wrap="square" lIns="45720" rIns="45720" tIns="18288" bIns="18288" anchor="t">
+              <a:rPr sz="2300" b="1" i="0">
+                <a:solidFill>
+                  <a:srgbClr val="0B5394"/>
+                </a:solidFill>
+                <a:latin typeface="Century Schoolbook"/>
+              </a:rPr>
+              <a:t>2.</a:t>
+            </a:r>
+          </a:p>
+        </p:txBody>
+      </p:sp>
+      <p:pic>
+        <p:nvPicPr>
+          <p:cNvPr id="11" name="Picture 10" descr="38e9b447bed4dddc.png"/>
+          <p:cNvPicPr>
+            <a:picLocks noChangeAspect="1"/>
+          </p:cNvPicPr>
+          <p:nvPr/>
+        </p:nvPicPr>
+        <p:blipFill>
+          <a:blip r:embed="rId3"/>
+          <a:stretch>
+            <a:fillRect/>
+          </a:stretch>
+        </p:blipFill>
+        <p:spPr>
+          <a:xfrm>
+            <a:off x="1627632" y="2113787"/>
+            <a:ext cx="914400" cy="408432"/>
+          </a:xfrm>
+          <a:prstGeom prst="rect">
+            <a:avLst/>
+          </a:prstGeom>
+        </p:spPr>
+      </p:pic>
+      <p:sp>
+        <p:nvSpPr>
+          <p:cNvPr id="12" name="TextBox 11"/>
+          <p:cNvSpPr txBox="1"/>
+          <p:nvPr/>
+        </p:nvSpPr>
+        <p:spPr>
+          <a:xfrm>
+            <a:off x="960120" y="2683763"/>
+            <a:ext cx="548640" cy="457200"/>
+          </a:xfrm>
+          <a:prstGeom prst="rect">
+            <a:avLst/>
+          </a:prstGeom>
+          <a:noFill/>
+        </p:spPr>
+        <p:txBody>
+          <a:bodyPr wrap="square" lIns="45720" rIns="45720" tIns="18288" bIns="18288" anchor="ctr">
             <a:spAutoFit/>
           </a:bodyPr>
           <a:lstStyle/>
           <a:p>
             <a:pPr algn="l"/>
             <a:r>
-              <a:rPr sz="2100" b="1" i="0">
+              <a:rPr sz="2300" b="1" i="0">
                 <a:solidFill>
                   <a:srgbClr val="0B5394"/>
                 </a:solidFill>
                 <a:latin typeface="Century Schoolbook"/>
               </a:rPr>
-              <a:t>2.</a:t>
-            </a:r>
-          </a:p>
-        </p:txBody>
-      </p:sp>
-      <p:sp>
-        <p:nvSpPr>
-          <p:cNvPr id="11" name="TextBox 10"/>
-          <p:cNvSpPr txBox="1"/>
-          <p:nvPr/>
-        </p:nvSpPr>
-        <p:spPr>
-          <a:xfrm>
-            <a:off x="1554480" y="2551176"/>
-            <a:ext cx="9829800" cy="411480"/>
-          </a:xfrm>
-          <a:prstGeom prst="rect">
-            <a:avLst/>
-          </a:prstGeom>
-          <a:noFill/>
-        </p:spPr>
-        <p:txBody>
-          <a:bodyPr wrap="square" lIns="45720" rIns="45720" tIns="18288" bIns="18288" anchor="t">
+              <a:t>3.</a:t>
+            </a:r>
+          </a:p>
+        </p:txBody>
+      </p:sp>
+      <p:pic>
+        <p:nvPicPr>
+          <p:cNvPr id="13" name="Picture 12" descr="9d8d0abecd2df022.png"/>
+          <p:cNvPicPr>
+            <a:picLocks noChangeAspect="1"/>
+          </p:cNvPicPr>
+          <p:nvPr/>
+        </p:nvPicPr>
+        <p:blipFill>
+          <a:blip r:embed="rId4"/>
+          <a:stretch>
+            <a:fillRect/>
+          </a:stretch>
+        </p:blipFill>
+        <p:spPr>
+          <a:xfrm>
+            <a:off x="1627632" y="2708147"/>
+            <a:ext cx="1310640" cy="408432"/>
+          </a:xfrm>
+          <a:prstGeom prst="rect">
+            <a:avLst/>
+          </a:prstGeom>
+        </p:spPr>
+      </p:pic>
+      <p:sp>
+        <p:nvSpPr>
+          <p:cNvPr id="14" name="TextBox 13"/>
+          <p:cNvSpPr txBox="1"/>
+          <p:nvPr/>
+        </p:nvSpPr>
+        <p:spPr>
+          <a:xfrm>
+            <a:off x="960120" y="3403091"/>
+            <a:ext cx="548640" cy="457200"/>
+          </a:xfrm>
+          <a:prstGeom prst="rect">
+            <a:avLst/>
+          </a:prstGeom>
+          <a:noFill/>
+        </p:spPr>
+        <p:txBody>
+          <a:bodyPr wrap="square" lIns="45720" rIns="45720" tIns="18288" bIns="18288" anchor="ctr">
             <a:spAutoFit/>
           </a:bodyPr>
           <a:lstStyle/>
           <a:p>
             <a:pPr algn="l"/>
             <a:r>
-              <a:rPr sz="2100" b="0" i="0">
-                <a:solidFill>
-                  <a:srgbClr val="1A1A1A"/>
-                </a:solidFill>
-                <a:latin typeface="Century Schoolbook"/>
-              </a:rPr>
-              <a:t>Show the step that does the work, not just the answer.</a:t>
-            </a:r>
-          </a:p>
-        </p:txBody>
-      </p:sp>
-      <p:sp>
-        <p:nvSpPr>
-          <p:cNvPr id="12" name="TextBox 11"/>
-          <p:cNvSpPr txBox="1"/>
-          <p:nvPr/>
-        </p:nvSpPr>
-        <p:spPr>
-          <a:xfrm>
-            <a:off x="960120" y="3090672"/>
-            <a:ext cx="548640" cy="356616"/>
-          </a:xfrm>
-          <a:prstGeom prst="rect">
-            <a:avLst/>
-          </a:prstGeom>
-          <a:noFill/>
-        </p:spPr>
-        <p:txBody>
-          <a:bodyPr wrap="square" lIns="45720" rIns="45720" tIns="18288" bIns="18288" anchor="t">
+              <a:rPr sz="2300" b="1" i="0">
+                <a:solidFill>
+                  <a:srgbClr val="0B5394"/>
+                </a:solidFill>
+                <a:latin typeface="Century Schoolbook"/>
+              </a:rPr>
+              <a:t>4.</a:t>
+            </a:r>
+          </a:p>
+        </p:txBody>
+      </p:sp>
+      <p:pic>
+        <p:nvPicPr>
+          <p:cNvPr id="15" name="Picture 14" descr="89915d7fda969e55.png"/>
+          <p:cNvPicPr>
+            <a:picLocks noChangeAspect="1"/>
+          </p:cNvPicPr>
+          <p:nvPr/>
+        </p:nvPicPr>
+        <p:blipFill>
+          <a:blip r:embed="rId5"/>
+          <a:stretch>
+            <a:fillRect/>
+          </a:stretch>
+        </p:blipFill>
+        <p:spPr>
+          <a:xfrm>
+            <a:off x="1627632" y="3300983"/>
+            <a:ext cx="563880" cy="661416"/>
+          </a:xfrm>
+          <a:prstGeom prst="rect">
+            <a:avLst/>
+          </a:prstGeom>
+        </p:spPr>
+      </p:pic>
+      <p:sp>
+        <p:nvSpPr>
+          <p:cNvPr id="16" name="TextBox 15"/>
+          <p:cNvSpPr txBox="1"/>
+          <p:nvPr/>
+        </p:nvSpPr>
+        <p:spPr>
+          <a:xfrm>
+            <a:off x="960120" y="4122419"/>
+            <a:ext cx="548640" cy="457200"/>
+          </a:xfrm>
+          <a:prstGeom prst="rect">
+            <a:avLst/>
+          </a:prstGeom>
+          <a:noFill/>
+        </p:spPr>
+        <p:txBody>
+          <a:bodyPr wrap="square" lIns="45720" rIns="45720" tIns="18288" bIns="18288" anchor="ctr">
             <a:spAutoFit/>
           </a:bodyPr>
           <a:lstStyle/>
           <a:p>
             <a:pPr algn="l"/>
             <a:r>
-              <a:rPr sz="2100" b="1" i="0">
+              <a:rPr sz="2300" b="1" i="0">
                 <a:solidFill>
                   <a:srgbClr val="0B5394"/>
                 </a:solidFill>
                 <a:latin typeface="Century Schoolbook"/>
               </a:rPr>
-              <a:t>3.</a:t>
-            </a:r>
-          </a:p>
-        </p:txBody>
-      </p:sp>
-      <p:sp>
-        <p:nvSpPr>
-          <p:cNvPr id="13" name="TextBox 12"/>
-          <p:cNvSpPr txBox="1"/>
-          <p:nvPr/>
-        </p:nvSpPr>
-        <p:spPr>
-          <a:xfrm>
-            <a:off x="1554480" y="3090672"/>
-            <a:ext cx="9829800" cy="411480"/>
-          </a:xfrm>
-          <a:prstGeom prst="rect">
-            <a:avLst/>
-          </a:prstGeom>
-          <a:noFill/>
-        </p:spPr>
-        <p:txBody>
-          <a:bodyPr wrap="square" lIns="45720" rIns="45720" tIns="18288" bIns="18288" anchor="t">
+              <a:t>5.</a:t>
+            </a:r>
+          </a:p>
+        </p:txBody>
+      </p:sp>
+      <p:pic>
+        <p:nvPicPr>
+          <p:cNvPr id="17" name="Picture 16" descr="45776c96e77cc391.png"/>
+          <p:cNvPicPr>
+            <a:picLocks noChangeAspect="1"/>
+          </p:cNvPicPr>
+          <p:nvPr/>
+        </p:nvPicPr>
+        <p:blipFill>
+          <a:blip r:embed="rId6"/>
+          <a:stretch>
+            <a:fillRect/>
+          </a:stretch>
+        </p:blipFill>
+        <p:spPr>
+          <a:xfrm>
+            <a:off x="1627632" y="4146804"/>
+            <a:ext cx="1466088" cy="408432"/>
+          </a:xfrm>
+          <a:prstGeom prst="rect">
+            <a:avLst/>
+          </a:prstGeom>
+        </p:spPr>
+      </p:pic>
+      <p:sp>
+        <p:nvSpPr>
+          <p:cNvPr id="18" name="TextBox 17"/>
+          <p:cNvSpPr txBox="1"/>
+          <p:nvPr/>
+        </p:nvSpPr>
+        <p:spPr>
+          <a:xfrm>
+            <a:off x="960120" y="4785360"/>
+            <a:ext cx="548640" cy="457200"/>
+          </a:xfrm>
+          <a:prstGeom prst="rect">
+            <a:avLst/>
+          </a:prstGeom>
+          <a:noFill/>
+        </p:spPr>
+        <p:txBody>
+          <a:bodyPr wrap="square" lIns="45720" rIns="45720" tIns="18288" bIns="18288" anchor="ctr">
             <a:spAutoFit/>
           </a:bodyPr>
           <a:lstStyle/>
           <a:p>
             <a:pPr algn="l"/>
             <a:r>
-              <a:rPr sz="2100" b="0" i="0">
-                <a:solidFill>
-                  <a:srgbClr val="1A1A1A"/>
-                </a:solidFill>
-                <a:latin typeface="Century Schoolbook"/>
-              </a:rPr>
-              <a:t>Silence until the six minutes are up.</a:t>
-            </a:r>
-          </a:p>
-        </p:txBody>
-      </p:sp>
+              <a:rPr sz="2300" b="1" i="0">
+                <a:solidFill>
+                  <a:srgbClr val="0B5394"/>
+                </a:solidFill>
+                <a:latin typeface="Century Schoolbook"/>
+              </a:rPr>
+              <a:t>6.</a:t>
+            </a:r>
+          </a:p>
+        </p:txBody>
+      </p:sp>
+      <p:pic>
+        <p:nvPicPr>
+          <p:cNvPr id="19" name="Picture 18" descr="db016c3e3a507b57.png"/>
+          <p:cNvPicPr>
+            <a:picLocks noChangeAspect="1"/>
+          </p:cNvPicPr>
+          <p:nvPr/>
+        </p:nvPicPr>
+        <p:blipFill>
+          <a:blip r:embed="rId7"/>
+          <a:stretch>
+            <a:fillRect/>
+          </a:stretch>
+        </p:blipFill>
+        <p:spPr>
+          <a:xfrm>
+            <a:off x="1627632" y="4739640"/>
+            <a:ext cx="2386584" cy="548640"/>
+          </a:xfrm>
+          <a:prstGeom prst="rect">
+            <a:avLst/>
+          </a:prstGeom>
+        </p:spPr>
+      </p:pic>
     </p:spTree>
   </p:cSld>
   <p:clrMapOvr>

--- a/a7/packages/A7 Unit 4 - Solving Problems with Rational Numbers/Lessons/4.05/A7 4.05 Evaluating Expressions with Radicals - Slides.pptx
+++ b/a7/packages/A7 Unit 4 - Solving Problems with Rational Numbers/Lessons/4.05/A7 4.05 Evaluating Expressions with Radicals - Slides.pptx
@@ -3145,11 +3145,11 @@
           <a:p>
             <a:pPr algn="ctr"/>
             <a:r>
-              <a:rPr sz="1500" b="0" i="0">
+              <a:rPr sz="1420" b="0" i="0">
                 <a:solidFill>
                   <a:srgbClr val="6B6B6B"/>
                 </a:solidFill>
-                <a:latin typeface="Century Schoolbook"/>
+                <a:latin typeface="Lexend"/>
               </a:rPr>
               <a:t>GRADE 7 ACCELERATED  ·  UNIT 4  ·  LESSON 5</a:t>
             </a:r>
@@ -3180,11 +3180,11 @@
           <a:p>
             <a:pPr algn="ctr"/>
             <a:r>
-              <a:rPr sz="3400" b="1" i="0">
+              <a:rPr sz="3229" b="1" i="0">
                 <a:solidFill>
                   <a:srgbClr val="1A1A1A"/>
                 </a:solidFill>
-                <a:latin typeface="Century Schoolbook"/>
+                <a:latin typeface="Lexend"/>
               </a:rPr>
               <a:t>Evaluating Expressions with Radicals</a:t>
             </a:r>
@@ -3285,11 +3285,11 @@
           <a:p>
             <a:pPr algn="ctr"/>
             <a:r>
-              <a:rPr sz="1600" b="1" i="0">
+              <a:rPr sz="1520" b="1" i="0">
                 <a:solidFill>
                   <a:srgbClr val="1A1A1A"/>
                 </a:solidFill>
-                <a:latin typeface="Century Schoolbook"/>
+                <a:latin typeface="Lexend"/>
               </a:rPr>
               <a:t>MA.8.NSO.1.7</a:t>
             </a:r>
@@ -3320,11 +3320,11 @@
           <a:p>
             <a:pPr algn="ctr"/>
             <a:r>
-              <a:rPr sz="1900" b="0" i="1">
+              <a:rPr sz="1810" b="0" i="0">
                 <a:solidFill>
                   <a:srgbClr val="1A1A1A"/>
                 </a:solidFill>
-                <a:latin typeface="Century Schoolbook"/>
+                <a:latin typeface="Lexend"/>
               </a:rPr>
               <a:t>I can evaluate an expression that contains square roots, cube roots and integer exponents.</a:t>
             </a:r>
@@ -3390,11 +3390,11 @@
           <a:p>
             <a:pPr algn="l"/>
             <a:r>
-              <a:rPr sz="1100" b="0" i="1">
+              <a:rPr sz="1040" b="0" i="0">
                 <a:solidFill>
                   <a:srgbClr val="6B6B6B"/>
                 </a:solidFill>
-                <a:latin typeface="Century Schoolbook"/>
+                <a:latin typeface="Lexend"/>
               </a:rPr>
               <a:t>Grade 7 Accelerated · Unit 4 · Lesson 5 — Evaluating Expressions with Radicals</a:t>
             </a:r>
@@ -3425,11 +3425,11 @@
           <a:p>
             <a:pPr algn="r"/>
             <a:r>
-              <a:rPr sz="1100" b="0" i="0">
+              <a:rPr sz="1040" b="0" i="0">
                 <a:solidFill>
                   <a:srgbClr val="6B6B6B"/>
                 </a:solidFill>
-                <a:latin typeface="Century Schoolbook"/>
+                <a:latin typeface="Lexend"/>
               </a:rPr>
               <a:t>1</a:t>
             </a:r>
@@ -3478,11 +3478,11 @@
           <a:p>
             <a:pPr algn="l"/>
             <a:r>
-              <a:rPr sz="3600" b="1" i="0">
+              <a:rPr sz="3420" b="1" i="0">
                 <a:solidFill>
                   <a:srgbClr val="1A1A1A"/>
                 </a:solidFill>
-                <a:latin typeface="Century Schoolbook"/>
+                <a:latin typeface="Lexend"/>
               </a:rPr>
               <a:t>Your Turn</a:t>
             </a:r>
@@ -3618,11 +3618,11 @@
           <a:p>
             <a:pPr algn="l"/>
             <a:r>
-              <a:rPr sz="1100" b="0" i="1">
+              <a:rPr sz="1040" b="0" i="0">
                 <a:solidFill>
                   <a:srgbClr val="6B6B6B"/>
                 </a:solidFill>
-                <a:latin typeface="Century Schoolbook"/>
+                <a:latin typeface="Lexend"/>
               </a:rPr>
               <a:t>Grade 7 Accelerated · Unit 4 · Lesson 5 — Evaluating Expressions with Radicals</a:t>
             </a:r>
@@ -3653,11 +3653,11 @@
           <a:p>
             <a:pPr algn="r"/>
             <a:r>
-              <a:rPr sz="1100" b="0" i="0">
+              <a:rPr sz="1040" b="0" i="0">
                 <a:solidFill>
                   <a:srgbClr val="6B6B6B"/>
                 </a:solidFill>
-                <a:latin typeface="Century Schoolbook"/>
+                <a:latin typeface="Lexend"/>
               </a:rPr>
               <a:t>10</a:t>
             </a:r>
@@ -3666,7 +3666,7 @@
       </p:sp>
       <p:pic>
         <p:nvPicPr>
-          <p:cNvPr id="8" name="Picture 7" descr="b80aa59125558618.png"/>
+          <p:cNvPr id="8" name="Picture 7" descr="39a98bd65ba9c0b4.png"/>
           <p:cNvPicPr>
             <a:picLocks noChangeAspect="1"/>
           </p:cNvPicPr>
@@ -3680,8 +3680,8 @@
         </p:blipFill>
         <p:spPr>
           <a:xfrm>
-            <a:off x="4303775" y="2194560"/>
-            <a:ext cx="3553968" cy="859536"/>
+            <a:off x="4364735" y="1600200"/>
+            <a:ext cx="3432048" cy="841248"/>
           </a:xfrm>
           <a:prstGeom prst="rect">
             <a:avLst/>
@@ -3696,7 +3696,7 @@
         </p:nvSpPr>
         <p:spPr>
           <a:xfrm>
-            <a:off x="777240" y="3557016"/>
+            <a:off x="777240" y="2944368"/>
             <a:ext cx="10607040" cy="429370"/>
           </a:xfrm>
           <a:prstGeom prst="rect">
@@ -3712,26 +3712,98 @@
           <a:p>
             <a:pPr algn="ctr"/>
             <a:r>
-              <a:rPr sz="2400" b="1" i="0">
+              <a:rPr sz="2280" b="1" i="0">
                 <a:solidFill>
                   <a:srgbClr val="1A1A1A"/>
                 </a:solidFill>
-                <a:latin typeface="Century Schoolbook"/>
+                <a:latin typeface="Lexend"/>
               </a:rPr>
               <a:t>Evaluate.</a:t>
             </a:r>
           </a:p>
         </p:txBody>
       </p:sp>
-      <p:sp>
-        <p:nvSpPr>
-          <p:cNvPr id="10" name="TextBox 9"/>
-          <p:cNvSpPr txBox="1"/>
-          <p:nvPr/>
-        </p:nvSpPr>
-        <p:spPr>
-          <a:xfrm>
-            <a:off x="777240" y="4572000"/>
+      <p:pic>
+        <p:nvPicPr>
+          <p:cNvPr id="10" name="Picture 9" descr="6dcdcd24bba74583.png"/>
+          <p:cNvPicPr>
+            <a:picLocks noChangeAspect="1"/>
+          </p:cNvPicPr>
+          <p:nvPr/>
+        </p:nvPicPr>
+        <p:blipFill>
+          <a:blip r:embed="rId3"/>
+          <a:stretch>
+            <a:fillRect/>
+          </a:stretch>
+        </p:blipFill>
+        <p:spPr>
+          <a:xfrm>
+            <a:off x="5020055" y="3556618"/>
+            <a:ext cx="1219200" cy="515112"/>
+          </a:xfrm>
+          <a:prstGeom prst="rect">
+            <a:avLst/>
+          </a:prstGeom>
+        </p:spPr>
+      </p:pic>
+      <p:pic>
+        <p:nvPicPr>
+          <p:cNvPr id="11" name="Picture 10" descr="56c69e6e26de48c6.png"/>
+          <p:cNvPicPr>
+            <a:picLocks noChangeAspect="1"/>
+          </p:cNvPicPr>
+          <p:nvPr/>
+        </p:nvPicPr>
+        <p:blipFill>
+          <a:blip r:embed="rId4"/>
+          <a:stretch>
+            <a:fillRect/>
+          </a:stretch>
+        </p:blipFill>
+        <p:spPr>
+          <a:xfrm>
+            <a:off x="5020055" y="4184506"/>
+            <a:ext cx="2234184" cy="368808"/>
+          </a:xfrm>
+          <a:prstGeom prst="rect">
+            <a:avLst/>
+          </a:prstGeom>
+        </p:spPr>
+      </p:pic>
+      <p:pic>
+        <p:nvPicPr>
+          <p:cNvPr id="12" name="Picture 11" descr="a96b4c18555835ff.png"/>
+          <p:cNvPicPr>
+            <a:picLocks noChangeAspect="1"/>
+          </p:cNvPicPr>
+          <p:nvPr/>
+        </p:nvPicPr>
+        <p:blipFill>
+          <a:blip r:embed="rId5"/>
+          <a:stretch>
+            <a:fillRect/>
+          </a:stretch>
+        </p:blipFill>
+        <p:spPr>
+          <a:xfrm>
+            <a:off x="5020055" y="4666090"/>
+            <a:ext cx="1399032" cy="515112"/>
+          </a:xfrm>
+          <a:prstGeom prst="rect">
+            <a:avLst/>
+          </a:prstGeom>
+        </p:spPr>
+      </p:pic>
+      <p:sp>
+        <p:nvSpPr>
+          <p:cNvPr id="13" name="TextBox 12"/>
+          <p:cNvSpPr txBox="1"/>
+          <p:nvPr/>
+        </p:nvSpPr>
+        <p:spPr>
+          <a:xfrm>
+            <a:off x="777240" y="5318362"/>
             <a:ext cx="10607040" cy="548640"/>
           </a:xfrm>
           <a:prstGeom prst="rect">
@@ -3747,11 +3819,11 @@
           <a:p>
             <a:pPr algn="ctr"/>
             <a:r>
-              <a:rPr sz="3200" b="1" i="0">
+              <a:rPr sz="3040" b="1" i="0">
                 <a:solidFill>
                   <a:srgbClr val="9E1B32"/>
                 </a:solidFill>
-                <a:latin typeface="Century Schoolbook"/>
+                <a:latin typeface="Lexend"/>
               </a:rPr>
               <a:t>Answer:   −17/9</a:t>
             </a:r>
@@ -3800,11 +3872,11 @@
           <a:p>
             <a:pPr algn="l"/>
             <a:r>
-              <a:rPr sz="3600" b="1" i="0">
+              <a:rPr sz="3420" b="1" i="0">
                 <a:solidFill>
                   <a:srgbClr val="1A1A1A"/>
                 </a:solidFill>
-                <a:latin typeface="Century Schoolbook"/>
+                <a:latin typeface="Lexend"/>
               </a:rPr>
               <a:t>Example 2</a:t>
             </a:r>
@@ -3940,11 +4012,11 @@
           <a:p>
             <a:pPr algn="l"/>
             <a:r>
-              <a:rPr sz="1100" b="0" i="1">
+              <a:rPr sz="1040" b="0" i="0">
                 <a:solidFill>
                   <a:srgbClr val="6B6B6B"/>
                 </a:solidFill>
-                <a:latin typeface="Century Schoolbook"/>
+                <a:latin typeface="Lexend"/>
               </a:rPr>
               <a:t>Grade 7 Accelerated · Unit 4 · Lesson 5 — Evaluating Expressions with Radicals</a:t>
             </a:r>
@@ -3975,11 +4047,11 @@
           <a:p>
             <a:pPr algn="r"/>
             <a:r>
-              <a:rPr sz="1100" b="0" i="0">
+              <a:rPr sz="1040" b="0" i="0">
                 <a:solidFill>
                   <a:srgbClr val="6B6B6B"/>
                 </a:solidFill>
-                <a:latin typeface="Century Schoolbook"/>
+                <a:latin typeface="Lexend"/>
               </a:rPr>
               <a:t>11</a:t>
             </a:r>
@@ -3988,7 +4060,7 @@
       </p:sp>
       <p:pic>
         <p:nvPicPr>
-          <p:cNvPr id="8" name="Picture 7" descr="47530fef4a5f2dcf.png"/>
+          <p:cNvPr id="8" name="Picture 7" descr="8d7699a30e9dd19c.png"/>
           <p:cNvPicPr>
             <a:picLocks noChangeAspect="1"/>
           </p:cNvPicPr>
@@ -4002,8 +4074,8 @@
         </p:blipFill>
         <p:spPr>
           <a:xfrm>
-            <a:off x="4314444" y="2103120"/>
-            <a:ext cx="3532632" cy="533400"/>
+            <a:off x="4357116" y="2103120"/>
+            <a:ext cx="3447288" cy="499871"/>
           </a:xfrm>
           <a:prstGeom prst="rect">
             <a:avLst/>
@@ -4018,7 +4090,7 @@
         </p:nvSpPr>
         <p:spPr>
           <a:xfrm>
-            <a:off x="777240" y="3139440"/>
+            <a:off x="777240" y="3105912"/>
             <a:ext cx="10607040" cy="429370"/>
           </a:xfrm>
           <a:prstGeom prst="rect">
@@ -4034,11 +4106,11 @@
           <a:p>
             <a:pPr algn="ctr"/>
             <a:r>
-              <a:rPr sz="2400" b="1" i="0">
+              <a:rPr sz="2280" b="1" i="0">
                 <a:solidFill>
                   <a:srgbClr val="1A1A1A"/>
                 </a:solidFill>
-                <a:latin typeface="Century Schoolbook"/>
+                <a:latin typeface="Lexend"/>
               </a:rPr>
               <a:t>Evaluate.</a:t>
             </a:r>
@@ -4087,11 +4159,11 @@
           <a:p>
             <a:pPr algn="l"/>
             <a:r>
-              <a:rPr sz="3600" b="1" i="0">
+              <a:rPr sz="3420" b="1" i="0">
                 <a:solidFill>
                   <a:srgbClr val="1A1A1A"/>
                 </a:solidFill>
-                <a:latin typeface="Century Schoolbook"/>
+                <a:latin typeface="Lexend"/>
               </a:rPr>
               <a:t>Example 2</a:t>
             </a:r>
@@ -4227,11 +4299,11 @@
           <a:p>
             <a:pPr algn="l"/>
             <a:r>
-              <a:rPr sz="1100" b="0" i="1">
+              <a:rPr sz="1040" b="0" i="0">
                 <a:solidFill>
                   <a:srgbClr val="6B6B6B"/>
                 </a:solidFill>
-                <a:latin typeface="Century Schoolbook"/>
+                <a:latin typeface="Lexend"/>
               </a:rPr>
               <a:t>Grade 7 Accelerated · Unit 4 · Lesson 5 — Evaluating Expressions with Radicals</a:t>
             </a:r>
@@ -4262,11 +4334,11 @@
           <a:p>
             <a:pPr algn="r"/>
             <a:r>
-              <a:rPr sz="1100" b="0" i="0">
+              <a:rPr sz="1040" b="0" i="0">
                 <a:solidFill>
                   <a:srgbClr val="6B6B6B"/>
                 </a:solidFill>
-                <a:latin typeface="Century Schoolbook"/>
+                <a:latin typeface="Lexend"/>
               </a:rPr>
               <a:t>12</a:t>
             </a:r>
@@ -4275,7 +4347,7 @@
       </p:sp>
       <p:pic>
         <p:nvPicPr>
-          <p:cNvPr id="8" name="Picture 7" descr="922b0a873b8b5f16.png"/>
+          <p:cNvPr id="8" name="Picture 7" descr="0e80ddb964149cd1.png"/>
           <p:cNvPicPr>
             <a:picLocks noChangeAspect="1"/>
           </p:cNvPicPr>
@@ -4290,7 +4362,7 @@
         <p:spPr>
           <a:xfrm>
             <a:off x="1828800" y="1920240"/>
-            <a:ext cx="3745992" cy="502920"/>
+            <a:ext cx="3822191" cy="478536"/>
           </a:xfrm>
           <a:prstGeom prst="rect">
             <a:avLst/>
@@ -4299,7 +4371,7 @@
       </p:pic>
       <p:pic>
         <p:nvPicPr>
-          <p:cNvPr id="9" name="Picture 8" descr="eb44f304539690d6.png"/>
+          <p:cNvPr id="9" name="Picture 8" descr="a2a1fa108c11dcc5.png"/>
           <p:cNvPicPr>
             <a:picLocks noChangeAspect="1"/>
           </p:cNvPicPr>
@@ -4313,8 +4385,8 @@
         </p:blipFill>
         <p:spPr>
           <a:xfrm>
-            <a:off x="1828800" y="2697480"/>
-            <a:ext cx="3849624" cy="502920"/>
+            <a:off x="1828800" y="2673096"/>
+            <a:ext cx="3989832" cy="478536"/>
           </a:xfrm>
           <a:prstGeom prst="rect">
             <a:avLst/>
@@ -4323,7 +4395,7 @@
       </p:pic>
       <p:pic>
         <p:nvPicPr>
-          <p:cNvPr id="10" name="Picture 9" descr="1e8b8e5b31eeb1aa.png"/>
+          <p:cNvPr id="10" name="Picture 9" descr="64f4a386edd00985.png"/>
           <p:cNvPicPr>
             <a:picLocks noChangeAspect="1"/>
           </p:cNvPicPr>
@@ -4337,8 +4409,8 @@
         </p:blipFill>
         <p:spPr>
           <a:xfrm>
-            <a:off x="1828800" y="3474720"/>
-            <a:ext cx="1990344" cy="280416"/>
+            <a:off x="1828800" y="3425952"/>
+            <a:ext cx="1972056" cy="277368"/>
           </a:xfrm>
           <a:prstGeom prst="rect">
             <a:avLst/>
@@ -4369,11 +4441,11 @@
           <a:p>
             <a:pPr algn="ctr"/>
             <a:r>
-              <a:rPr sz="3200" b="1" i="0">
+              <a:rPr sz="3040" b="1" i="0">
                 <a:solidFill>
                   <a:srgbClr val="9E1B32"/>
                 </a:solidFill>
-                <a:latin typeface="Century Schoolbook"/>
+                <a:latin typeface="Lexend"/>
               </a:rPr>
               <a:t>Answer:   0.2</a:t>
             </a:r>
@@ -4422,11 +4494,11 @@
           <a:p>
             <a:pPr algn="l"/>
             <a:r>
-              <a:rPr sz="3600" b="1" i="0">
+              <a:rPr sz="3420" b="1" i="0">
                 <a:solidFill>
                   <a:srgbClr val="1A1A1A"/>
                 </a:solidFill>
-                <a:latin typeface="Century Schoolbook"/>
+                <a:latin typeface="Lexend"/>
               </a:rPr>
               <a:t>Your Turn</a:t>
             </a:r>
@@ -4562,11 +4634,11 @@
           <a:p>
             <a:pPr algn="l"/>
             <a:r>
-              <a:rPr sz="1100" b="0" i="1">
+              <a:rPr sz="1040" b="0" i="0">
                 <a:solidFill>
                   <a:srgbClr val="6B6B6B"/>
                 </a:solidFill>
-                <a:latin typeface="Century Schoolbook"/>
+                <a:latin typeface="Lexend"/>
               </a:rPr>
               <a:t>Grade 7 Accelerated · Unit 4 · Lesson 5 — Evaluating Expressions with Radicals</a:t>
             </a:r>
@@ -4597,11 +4669,11 @@
           <a:p>
             <a:pPr algn="r"/>
             <a:r>
-              <a:rPr sz="1100" b="0" i="0">
+              <a:rPr sz="1040" b="0" i="0">
                 <a:solidFill>
                   <a:srgbClr val="6B6B6B"/>
                 </a:solidFill>
-                <a:latin typeface="Century Schoolbook"/>
+                <a:latin typeface="Lexend"/>
               </a:rPr>
               <a:t>13</a:t>
             </a:r>
@@ -4610,7 +4682,7 @@
       </p:sp>
       <p:pic>
         <p:nvPicPr>
-          <p:cNvPr id="8" name="Picture 7" descr="98a08d8a76531abc.png"/>
+          <p:cNvPr id="8" name="Picture 7" descr="d6d7dee63e8529a6.png"/>
           <p:cNvPicPr>
             <a:picLocks noChangeAspect="1"/>
           </p:cNvPicPr>
@@ -4624,8 +4696,8 @@
         </p:blipFill>
         <p:spPr>
           <a:xfrm>
-            <a:off x="3828288" y="2194560"/>
-            <a:ext cx="4504944" cy="658368"/>
+            <a:off x="3901440" y="1600200"/>
+            <a:ext cx="4358640" cy="624840"/>
           </a:xfrm>
           <a:prstGeom prst="rect">
             <a:avLst/>
@@ -4640,7 +4712,7 @@
         </p:nvSpPr>
         <p:spPr>
           <a:xfrm>
-            <a:off x="777240" y="3355848"/>
+            <a:off x="777240" y="2727960"/>
             <a:ext cx="10607040" cy="429370"/>
           </a:xfrm>
           <a:prstGeom prst="rect">
@@ -4656,11 +4728,11 @@
           <a:p>
             <a:pPr algn="ctr"/>
             <a:r>
-              <a:rPr sz="2400" b="1" i="0">
+              <a:rPr sz="2280" b="1" i="0">
                 <a:solidFill>
                   <a:srgbClr val="1A1A1A"/>
                 </a:solidFill>
-                <a:latin typeface="Century Schoolbook"/>
+                <a:latin typeface="Lexend"/>
               </a:rPr>
               <a:t>Evaluate.</a:t>
             </a:r>
@@ -4709,11 +4781,11 @@
           <a:p>
             <a:pPr algn="l"/>
             <a:r>
-              <a:rPr sz="3600" b="1" i="0">
+              <a:rPr sz="3420" b="1" i="0">
                 <a:solidFill>
                   <a:srgbClr val="1A1A1A"/>
                 </a:solidFill>
-                <a:latin typeface="Century Schoolbook"/>
+                <a:latin typeface="Lexend"/>
               </a:rPr>
               <a:t>Your Turn</a:t>
             </a:r>
@@ -4849,11 +4921,11 @@
           <a:p>
             <a:pPr algn="l"/>
             <a:r>
-              <a:rPr sz="1100" b="0" i="1">
+              <a:rPr sz="1040" b="0" i="0">
                 <a:solidFill>
                   <a:srgbClr val="6B6B6B"/>
                 </a:solidFill>
-                <a:latin typeface="Century Schoolbook"/>
+                <a:latin typeface="Lexend"/>
               </a:rPr>
               <a:t>Grade 7 Accelerated · Unit 4 · Lesson 5 — Evaluating Expressions with Radicals</a:t>
             </a:r>
@@ -4884,11 +4956,11 @@
           <a:p>
             <a:pPr algn="r"/>
             <a:r>
-              <a:rPr sz="1100" b="0" i="0">
+              <a:rPr sz="1040" b="0" i="0">
                 <a:solidFill>
                   <a:srgbClr val="6B6B6B"/>
                 </a:solidFill>
-                <a:latin typeface="Century Schoolbook"/>
+                <a:latin typeface="Lexend"/>
               </a:rPr>
               <a:t>14</a:t>
             </a:r>
@@ -4897,7 +4969,7 @@
       </p:sp>
       <p:pic>
         <p:nvPicPr>
-          <p:cNvPr id="8" name="Picture 7" descr="03f17111b774a658.png"/>
+          <p:cNvPr id="8" name="Picture 7" descr="7e55928de2d14c9d.png"/>
           <p:cNvPicPr>
             <a:picLocks noChangeAspect="1"/>
           </p:cNvPicPr>
@@ -4911,8 +4983,8 @@
         </p:blipFill>
         <p:spPr>
           <a:xfrm>
-            <a:off x="3826763" y="2194560"/>
-            <a:ext cx="4507992" cy="661416"/>
+            <a:off x="3899915" y="1600200"/>
+            <a:ext cx="4361688" cy="624840"/>
           </a:xfrm>
           <a:prstGeom prst="rect">
             <a:avLst/>
@@ -4927,7 +4999,7 @@
         </p:nvSpPr>
         <p:spPr>
           <a:xfrm>
-            <a:off x="777240" y="3358896"/>
+            <a:off x="777240" y="2727960"/>
             <a:ext cx="10607040" cy="429370"/>
           </a:xfrm>
           <a:prstGeom prst="rect">
@@ -4943,26 +5015,98 @@
           <a:p>
             <a:pPr algn="ctr"/>
             <a:r>
-              <a:rPr sz="2400" b="1" i="0">
+              <a:rPr sz="2280" b="1" i="0">
                 <a:solidFill>
                   <a:srgbClr val="1A1A1A"/>
                 </a:solidFill>
-                <a:latin typeface="Century Schoolbook"/>
+                <a:latin typeface="Lexend"/>
               </a:rPr>
               <a:t>Evaluate.</a:t>
             </a:r>
           </a:p>
         </p:txBody>
       </p:sp>
-      <p:sp>
-        <p:nvSpPr>
-          <p:cNvPr id="10" name="TextBox 9"/>
-          <p:cNvSpPr txBox="1"/>
-          <p:nvPr/>
-        </p:nvSpPr>
-        <p:spPr>
-          <a:xfrm>
-            <a:off x="777240" y="4572000"/>
+      <p:pic>
+        <p:nvPicPr>
+          <p:cNvPr id="10" name="Picture 9" descr="3d08e3b9f0cd1290.png"/>
+          <p:cNvPicPr>
+            <a:picLocks noChangeAspect="1"/>
+          </p:cNvPicPr>
+          <p:nvPr/>
+        </p:nvPicPr>
+        <p:blipFill>
+          <a:blip r:embed="rId3"/>
+          <a:stretch>
+            <a:fillRect/>
+          </a:stretch>
+        </p:blipFill>
+        <p:spPr>
+          <a:xfrm>
+            <a:off x="4591811" y="3361546"/>
+            <a:ext cx="1261872" cy="368808"/>
+          </a:xfrm>
+          <a:prstGeom prst="rect">
+            <a:avLst/>
+          </a:prstGeom>
+        </p:spPr>
+      </p:pic>
+      <p:pic>
+        <p:nvPicPr>
+          <p:cNvPr id="11" name="Picture 10" descr="97af87df177bbd26.png"/>
+          <p:cNvPicPr>
+            <a:picLocks noChangeAspect="1"/>
+          </p:cNvPicPr>
+          <p:nvPr/>
+        </p:nvPicPr>
+        <p:blipFill>
+          <a:blip r:embed="rId4"/>
+          <a:stretch>
+            <a:fillRect/>
+          </a:stretch>
+        </p:blipFill>
+        <p:spPr>
+          <a:xfrm>
+            <a:off x="4591811" y="3864466"/>
+            <a:ext cx="2438400" cy="368808"/>
+          </a:xfrm>
+          <a:prstGeom prst="rect">
+            <a:avLst/>
+          </a:prstGeom>
+        </p:spPr>
+      </p:pic>
+      <p:pic>
+        <p:nvPicPr>
+          <p:cNvPr id="12" name="Picture 11" descr="dbd85bfcc6699fc2.png"/>
+          <p:cNvPicPr>
+            <a:picLocks noChangeAspect="1"/>
+          </p:cNvPicPr>
+          <p:nvPr/>
+        </p:nvPicPr>
+        <p:blipFill>
+          <a:blip r:embed="rId5"/>
+          <a:stretch>
+            <a:fillRect/>
+          </a:stretch>
+        </p:blipFill>
+        <p:spPr>
+          <a:xfrm>
+            <a:off x="4591811" y="4445110"/>
+            <a:ext cx="3087624" cy="213360"/>
+          </a:xfrm>
+          <a:prstGeom prst="rect">
+            <a:avLst/>
+          </a:prstGeom>
+        </p:spPr>
+      </p:pic>
+      <p:sp>
+        <p:nvSpPr>
+          <p:cNvPr id="13" name="TextBox 12"/>
+          <p:cNvSpPr txBox="1"/>
+          <p:nvPr/>
+        </p:nvSpPr>
+        <p:spPr>
+          <a:xfrm>
+            <a:off x="777240" y="4894690"/>
             <a:ext cx="10607040" cy="548640"/>
           </a:xfrm>
           <a:prstGeom prst="rect">
@@ -4978,11 +5122,11 @@
           <a:p>
             <a:pPr algn="ctr"/>
             <a:r>
-              <a:rPr sz="3200" b="1" i="0">
+              <a:rPr sz="3040" b="1" i="0">
                 <a:solidFill>
                   <a:srgbClr val="9E1B32"/>
                 </a:solidFill>
-                <a:latin typeface="Century Schoolbook"/>
+                <a:latin typeface="Lexend"/>
               </a:rPr>
               <a:t>Answer:   8</a:t>
             </a:r>
@@ -5031,11 +5175,11 @@
           <a:p>
             <a:pPr algn="l"/>
             <a:r>
-              <a:rPr sz="3400" b="1" i="0">
+              <a:rPr sz="3229" b="1" i="0">
                 <a:solidFill>
                   <a:srgbClr val="1A1A1A"/>
                 </a:solidFill>
-                <a:latin typeface="Century Schoolbook"/>
+                <a:latin typeface="Lexend"/>
               </a:rPr>
               <a:t>Whiteboards   ·   Question 1 of 9</a:t>
             </a:r>
@@ -5171,11 +5315,11 @@
           <a:p>
             <a:pPr algn="l"/>
             <a:r>
-              <a:rPr sz="1100" b="0" i="1">
+              <a:rPr sz="1040" b="0" i="0">
                 <a:solidFill>
                   <a:srgbClr val="6B6B6B"/>
                 </a:solidFill>
-                <a:latin typeface="Century Schoolbook"/>
+                <a:latin typeface="Lexend"/>
               </a:rPr>
               <a:t>Grade 7 Accelerated · Unit 4 · Lesson 5 — Evaluating Expressions with Radicals</a:t>
             </a:r>
@@ -5206,11 +5350,11 @@
           <a:p>
             <a:pPr algn="r"/>
             <a:r>
-              <a:rPr sz="1100" b="0" i="0">
+              <a:rPr sz="1040" b="0" i="0">
                 <a:solidFill>
                   <a:srgbClr val="6B6B6B"/>
                 </a:solidFill>
-                <a:latin typeface="Century Schoolbook"/>
+                <a:latin typeface="Lexend"/>
               </a:rPr>
               <a:t>15</a:t>
             </a:r>
@@ -5219,7 +5363,7 @@
       </p:sp>
       <p:pic>
         <p:nvPicPr>
-          <p:cNvPr id="8" name="Picture 7" descr="bba822fb928b22ac.png"/>
+          <p:cNvPr id="8" name="Picture 7" descr="ea03e9b9b6d50897.png"/>
           <p:cNvPicPr>
             <a:picLocks noChangeAspect="1"/>
           </p:cNvPicPr>
@@ -5233,8 +5377,8 @@
         </p:blipFill>
         <p:spPr>
           <a:xfrm>
-            <a:off x="5554979" y="2194560"/>
-            <a:ext cx="1051560" cy="502920"/>
+            <a:off x="5573268" y="2194560"/>
+            <a:ext cx="1014984" cy="478536"/>
           </a:xfrm>
           <a:prstGeom prst="rect">
             <a:avLst/>
@@ -5265,11 +5409,11 @@
           <a:p>
             <a:pPr algn="ctr"/>
             <a:r>
-              <a:rPr sz="2600" b="1" i="0">
+              <a:rPr sz="2470" b="1" i="0">
                 <a:solidFill>
                   <a:srgbClr val="1A1A1A"/>
                 </a:solidFill>
-                <a:latin typeface="Century Schoolbook"/>
+                <a:latin typeface="Lexend"/>
               </a:rPr>
               <a:t>Answer it.</a:t>
             </a:r>
@@ -5318,11 +5462,11 @@
           <a:p>
             <a:pPr algn="l"/>
             <a:r>
-              <a:rPr sz="3400" b="1" i="0">
+              <a:rPr sz="3229" b="1" i="0">
                 <a:solidFill>
                   <a:srgbClr val="1A1A1A"/>
                 </a:solidFill>
-                <a:latin typeface="Century Schoolbook"/>
+                <a:latin typeface="Lexend"/>
               </a:rPr>
               <a:t>Whiteboards   ·   Question 1 of 9</a:t>
             </a:r>
@@ -5458,11 +5602,11 @@
           <a:p>
             <a:pPr algn="l"/>
             <a:r>
-              <a:rPr sz="1100" b="0" i="1">
+              <a:rPr sz="1040" b="0" i="0">
                 <a:solidFill>
                   <a:srgbClr val="6B6B6B"/>
                 </a:solidFill>
-                <a:latin typeface="Century Schoolbook"/>
+                <a:latin typeface="Lexend"/>
               </a:rPr>
               <a:t>Grade 7 Accelerated · Unit 4 · Lesson 5 — Evaluating Expressions with Radicals</a:t>
             </a:r>
@@ -5493,11 +5637,11 @@
           <a:p>
             <a:pPr algn="r"/>
             <a:r>
-              <a:rPr sz="1100" b="0" i="0">
+              <a:rPr sz="1040" b="0" i="0">
                 <a:solidFill>
                   <a:srgbClr val="6B6B6B"/>
                 </a:solidFill>
-                <a:latin typeface="Century Schoolbook"/>
+                <a:latin typeface="Lexend"/>
               </a:rPr>
               <a:t>16</a:t>
             </a:r>
@@ -5506,7 +5650,7 @@
       </p:sp>
       <p:pic>
         <p:nvPicPr>
-          <p:cNvPr id="8" name="Picture 7" descr="a01c60804f53663f.png"/>
+          <p:cNvPr id="8" name="Picture 7" descr="6c4a40349de610b1.png"/>
           <p:cNvPicPr>
             <a:picLocks noChangeAspect="1"/>
           </p:cNvPicPr>
@@ -5520,17 +5664,100 @@
         </p:blipFill>
         <p:spPr>
           <a:xfrm>
-            <a:off x="5559551" y="2103120"/>
-            <a:ext cx="1042415" cy="502920"/>
+            <a:off x="5576315" y="2103120"/>
+            <a:ext cx="1008888" cy="478536"/>
           </a:xfrm>
           <a:prstGeom prst="rect">
             <a:avLst/>
           </a:prstGeom>
         </p:spPr>
       </p:pic>
-      <p:sp>
-        <p:nvSpPr>
-          <p:cNvPr id="9" name="TextBox 8"/>
+      <p:pic>
+        <p:nvPicPr>
+          <p:cNvPr id="9" name="Picture 8" descr="e345b1c8704f7bb5.png"/>
+          <p:cNvPicPr>
+            <a:picLocks noChangeAspect="1"/>
+          </p:cNvPicPr>
+          <p:nvPr/>
+        </p:nvPicPr>
+        <p:blipFill>
+          <a:blip r:embed="rId3"/>
+          <a:stretch>
+            <a:fillRect/>
+          </a:stretch>
+        </p:blipFill>
+        <p:spPr>
+          <a:xfrm>
+            <a:off x="3840399" y="3020568"/>
+            <a:ext cx="1819656" cy="249935"/>
+          </a:xfrm>
+          <a:prstGeom prst="rect">
+            <a:avLst/>
+          </a:prstGeom>
+        </p:spPr>
+      </p:pic>
+      <p:sp>
+        <p:nvSpPr>
+          <p:cNvPr id="10" name="TextBox 9"/>
+          <p:cNvSpPr txBox="1"/>
+          <p:nvPr/>
+        </p:nvSpPr>
+        <p:spPr>
+          <a:xfrm>
+            <a:off x="5660055" y="2916936"/>
+            <a:ext cx="1338233" cy="457200"/>
+          </a:xfrm>
+          <a:prstGeom prst="rect">
+            <a:avLst/>
+          </a:prstGeom>
+          <a:noFill/>
+        </p:spPr>
+        <p:txBody>
+          <a:bodyPr wrap="none" lIns="45720" rIns="45720" tIns="18288" bIns="18288" anchor="ctr">
+            <a:noAutofit/>
+          </a:bodyPr>
+          <a:lstStyle/>
+          <a:p>
+            <a:pPr algn="l"/>
+            <a:r>
+              <a:rPr sz="2750" b="0" i="0">
+                <a:solidFill>
+                  <a:srgbClr val="1A1A1A"/>
+                </a:solidFill>
+                <a:latin typeface="Lexend"/>
+              </a:rPr>
+              <a:t>,   so   </a:t>
+            </a:r>
+          </a:p>
+        </p:txBody>
+      </p:sp>
+      <p:pic>
+        <p:nvPicPr>
+          <p:cNvPr id="11" name="Picture 10" descr="ca3e1ca339eb783d.png"/>
+          <p:cNvPicPr>
+            <a:picLocks noChangeAspect="1"/>
+          </p:cNvPicPr>
+          <p:nvPr/>
+        </p:nvPicPr>
+        <p:blipFill>
+          <a:blip r:embed="rId4"/>
+          <a:stretch>
+            <a:fillRect/>
+          </a:stretch>
+        </p:blipFill>
+        <p:spPr>
+          <a:xfrm>
+            <a:off x="6861128" y="2929128"/>
+            <a:ext cx="1572768" cy="432816"/>
+          </a:xfrm>
+          <a:prstGeom prst="rect">
+            <a:avLst/>
+          </a:prstGeom>
+        </p:spPr>
+      </p:pic>
+      <p:sp>
+        <p:nvSpPr>
+          <p:cNvPr id="12" name="TextBox 11"/>
           <p:cNvSpPr txBox="1"/>
           <p:nvPr/>
         </p:nvSpPr>
@@ -5552,11 +5779,11 @@
           <a:p>
             <a:pPr algn="ctr"/>
             <a:r>
-              <a:rPr sz="3200" b="1" i="0">
+              <a:rPr sz="3040" b="1" i="0">
                 <a:solidFill>
                   <a:srgbClr val="9E1B32"/>
                 </a:solidFill>
-                <a:latin typeface="Century Schoolbook"/>
+                <a:latin typeface="Lexend"/>
               </a:rPr>
               <a:t>Answer:   11</a:t>
             </a:r>
@@ -5605,11 +5832,11 @@
           <a:p>
             <a:pPr algn="l"/>
             <a:r>
-              <a:rPr sz="3400" b="1" i="0">
+              <a:rPr sz="3229" b="1" i="0">
                 <a:solidFill>
                   <a:srgbClr val="1A1A1A"/>
                 </a:solidFill>
-                <a:latin typeface="Century Schoolbook"/>
+                <a:latin typeface="Lexend"/>
               </a:rPr>
               <a:t>Whiteboards   ·   Question 2 of 9</a:t>
             </a:r>
@@ -5745,11 +5972,11 @@
           <a:p>
             <a:pPr algn="l"/>
             <a:r>
-              <a:rPr sz="1100" b="0" i="1">
+              <a:rPr sz="1040" b="0" i="0">
                 <a:solidFill>
                   <a:srgbClr val="6B6B6B"/>
                 </a:solidFill>
-                <a:latin typeface="Century Schoolbook"/>
+                <a:latin typeface="Lexend"/>
               </a:rPr>
               <a:t>Grade 7 Accelerated · Unit 4 · Lesson 5 — Evaluating Expressions with Radicals</a:t>
             </a:r>
@@ -5780,11 +6007,11 @@
           <a:p>
             <a:pPr algn="r"/>
             <a:r>
-              <a:rPr sz="1100" b="0" i="0">
+              <a:rPr sz="1040" b="0" i="0">
                 <a:solidFill>
                   <a:srgbClr val="6B6B6B"/>
                 </a:solidFill>
-                <a:latin typeface="Century Schoolbook"/>
+                <a:latin typeface="Lexend"/>
               </a:rPr>
               <a:t>17</a:t>
             </a:r>
@@ -5815,11 +6042,11 @@
           <a:p>
             <a:pPr algn="l"/>
             <a:r>
-              <a:rPr sz="2400" b="0" i="0">
+              <a:rPr sz="2280" b="0" i="0">
                 <a:solidFill>
                   <a:srgbClr val="1A1A1A"/>
                 </a:solidFill>
-                <a:latin typeface="Century Schoolbook"/>
+                <a:latin typeface="Lexend"/>
               </a:rPr>
               <a:t>A square patio has an area of  169  square feet.</a:t>
             </a:r>
@@ -5850,11 +6077,11 @@
           <a:p>
             <a:pPr algn="l"/>
             <a:r>
-              <a:rPr sz="2400" b="0" i="0">
+              <a:rPr sz="2280" b="0" i="0">
                 <a:solidFill>
                   <a:srgbClr val="1A1A1A"/>
                 </a:solidFill>
-                <a:latin typeface="Century Schoolbook"/>
+                <a:latin typeface="Lexend"/>
               </a:rPr>
               <a:t>Fencing for it costs 12 dollars a foot.</a:t>
             </a:r>
@@ -5885,11 +6112,11 @@
           <a:p>
             <a:pPr algn="l"/>
             <a:r>
-              <a:rPr sz="2400" b="1" i="0">
+              <a:rPr sz="2280" b="1" i="0">
                 <a:solidFill>
                   <a:srgbClr val="1A1A1A"/>
                 </a:solidFill>
-                <a:latin typeface="Century Schoolbook"/>
+                <a:latin typeface="Lexend"/>
               </a:rPr>
               <a:t>How long is one side of the patio?</a:t>
             </a:r>
@@ -5920,11 +6147,11 @@
           <a:p>
             <a:pPr algn="ctr"/>
             <a:r>
-              <a:rPr sz="2600" b="1" i="0">
+              <a:rPr sz="2470" b="1" i="0">
                 <a:solidFill>
                   <a:srgbClr val="1A1A1A"/>
                 </a:solidFill>
-                <a:latin typeface="Century Schoolbook"/>
+                <a:latin typeface="Lexend"/>
               </a:rPr>
               <a:t>Answer it.</a:t>
             </a:r>
@@ -5973,11 +6200,11 @@
           <a:p>
             <a:pPr algn="l"/>
             <a:r>
-              <a:rPr sz="3400" b="1" i="0">
+              <a:rPr sz="3229" b="1" i="0">
                 <a:solidFill>
                   <a:srgbClr val="1A1A1A"/>
                 </a:solidFill>
-                <a:latin typeface="Century Schoolbook"/>
+                <a:latin typeface="Lexend"/>
               </a:rPr>
               <a:t>Whiteboards   ·   Question 2 of 9</a:t>
             </a:r>
@@ -6113,11 +6340,11 @@
           <a:p>
             <a:pPr algn="l"/>
             <a:r>
-              <a:rPr sz="1100" b="0" i="1">
+              <a:rPr sz="1040" b="0" i="0">
                 <a:solidFill>
                   <a:srgbClr val="6B6B6B"/>
                 </a:solidFill>
-                <a:latin typeface="Century Schoolbook"/>
+                <a:latin typeface="Lexend"/>
               </a:rPr>
               <a:t>Grade 7 Accelerated · Unit 4 · Lesson 5 — Evaluating Expressions with Radicals</a:t>
             </a:r>
@@ -6148,11 +6375,11 @@
           <a:p>
             <a:pPr algn="r"/>
             <a:r>
-              <a:rPr sz="1100" b="0" i="0">
+              <a:rPr sz="1040" b="0" i="0">
                 <a:solidFill>
                   <a:srgbClr val="6B6B6B"/>
                 </a:solidFill>
-                <a:latin typeface="Century Schoolbook"/>
+                <a:latin typeface="Lexend"/>
               </a:rPr>
               <a:t>18</a:t>
             </a:r>
@@ -6183,11 +6410,11 @@
           <a:p>
             <a:pPr algn="l"/>
             <a:r>
-              <a:rPr sz="2400" b="0" i="0">
+              <a:rPr sz="2280" b="0" i="0">
                 <a:solidFill>
                   <a:srgbClr val="1A1A1A"/>
                 </a:solidFill>
-                <a:latin typeface="Century Schoolbook"/>
+                <a:latin typeface="Lexend"/>
               </a:rPr>
               <a:t>A square patio has an area of  169  square feet.</a:t>
             </a:r>
@@ -6218,11 +6445,11 @@
           <a:p>
             <a:pPr algn="l"/>
             <a:r>
-              <a:rPr sz="2400" b="0" i="0">
+              <a:rPr sz="2280" b="0" i="0">
                 <a:solidFill>
                   <a:srgbClr val="1A1A1A"/>
                 </a:solidFill>
-                <a:latin typeface="Century Schoolbook"/>
+                <a:latin typeface="Lexend"/>
               </a:rPr>
               <a:t>Fencing for it costs 12 dollars a foot.</a:t>
             </a:r>
@@ -6253,11 +6480,11 @@
           <a:p>
             <a:pPr algn="l"/>
             <a:r>
-              <a:rPr sz="2400" b="1" i="0">
+              <a:rPr sz="2280" b="1" i="0">
                 <a:solidFill>
                   <a:srgbClr val="1A1A1A"/>
                 </a:solidFill>
-                <a:latin typeface="Century Schoolbook"/>
+                <a:latin typeface="Lexend"/>
               </a:rPr>
               <a:t>How long is one side of the patio?</a:t>
             </a:r>
@@ -6272,7 +6499,125 @@
         </p:nvSpPr>
         <p:spPr>
           <a:xfrm>
-            <a:off x="777240" y="4663440"/>
+            <a:off x="3739815" y="3587827"/>
+            <a:ext cx="3131776" cy="457200"/>
+          </a:xfrm>
+          <a:prstGeom prst="rect">
+            <a:avLst/>
+          </a:prstGeom>
+          <a:noFill/>
+        </p:spPr>
+        <p:txBody>
+          <a:bodyPr wrap="none" lIns="45720" rIns="45720" tIns="18288" bIns="18288" anchor="ctr">
+            <a:noAutofit/>
+          </a:bodyPr>
+          <a:lstStyle/>
+          <a:p>
+            <a:pPr algn="l"/>
+            <a:r>
+              <a:rPr sz="2750" b="0" i="0">
+                <a:solidFill>
+                  <a:srgbClr val="1A1A1A"/>
+                </a:solidFill>
+                <a:latin typeface="Lexend"/>
+              </a:rPr>
+              <a:t>Side × side = 169</a:t>
+            </a:r>
+          </a:p>
+        </p:txBody>
+      </p:sp>
+      <p:pic>
+        <p:nvPicPr>
+          <p:cNvPr id="12" name="Picture 11" descr="389a35c8a608274e.png"/>
+          <p:cNvPicPr>
+            <a:picLocks noChangeAspect="1"/>
+          </p:cNvPicPr>
+          <p:nvPr/>
+        </p:nvPicPr>
+        <p:blipFill>
+          <a:blip r:embed="rId2"/>
+          <a:stretch>
+            <a:fillRect/>
+          </a:stretch>
+        </p:blipFill>
+        <p:spPr>
+          <a:xfrm>
+            <a:off x="3794679" y="4238575"/>
+            <a:ext cx="1868424" cy="256032"/>
+          </a:xfrm>
+          <a:prstGeom prst="rect">
+            <a:avLst/>
+          </a:prstGeom>
+        </p:spPr>
+      </p:pic>
+      <p:sp>
+        <p:nvSpPr>
+          <p:cNvPr id="13" name="TextBox 12"/>
+          <p:cNvSpPr txBox="1"/>
+          <p:nvPr/>
+        </p:nvSpPr>
+        <p:spPr>
+          <a:xfrm>
+            <a:off x="5663103" y="4137991"/>
+            <a:ext cx="1338233" cy="457200"/>
+          </a:xfrm>
+          <a:prstGeom prst="rect">
+            <a:avLst/>
+          </a:prstGeom>
+          <a:noFill/>
+        </p:spPr>
+        <p:txBody>
+          <a:bodyPr wrap="none" lIns="45720" rIns="45720" tIns="18288" bIns="18288" anchor="ctr">
+            <a:noAutofit/>
+          </a:bodyPr>
+          <a:lstStyle/>
+          <a:p>
+            <a:pPr algn="l"/>
+            <a:r>
+              <a:rPr sz="2750" b="0" i="0">
+                <a:solidFill>
+                  <a:srgbClr val="1A1A1A"/>
+                </a:solidFill>
+                <a:latin typeface="Lexend"/>
+              </a:rPr>
+              <a:t>,   so   </a:t>
+            </a:r>
+          </a:p>
+        </p:txBody>
+      </p:sp>
+      <p:pic>
+        <p:nvPicPr>
+          <p:cNvPr id="14" name="Picture 13" descr="296c25346e41fa21.png"/>
+          <p:cNvPicPr>
+            <a:picLocks noChangeAspect="1"/>
+          </p:cNvPicPr>
+          <p:nvPr/>
+        </p:nvPicPr>
+        <p:blipFill>
+          <a:blip r:embed="rId3"/>
+          <a:stretch>
+            <a:fillRect/>
+          </a:stretch>
+        </p:blipFill>
+        <p:spPr>
+          <a:xfrm>
+            <a:off x="6864176" y="4150183"/>
+            <a:ext cx="1612392" cy="432816"/>
+          </a:xfrm>
+          <a:prstGeom prst="rect">
+            <a:avLst/>
+          </a:prstGeom>
+        </p:spPr>
+      </p:pic>
+      <p:sp>
+        <p:nvSpPr>
+          <p:cNvPr id="15" name="TextBox 14"/>
+          <p:cNvSpPr txBox="1"/>
+          <p:nvPr/>
+        </p:nvSpPr>
+        <p:spPr>
+          <a:xfrm>
+            <a:off x="777240" y="4720159"/>
             <a:ext cx="10607040" cy="548640"/>
           </a:xfrm>
           <a:prstGeom prst="rect">
@@ -6288,11 +6633,11 @@
           <a:p>
             <a:pPr algn="ctr"/>
             <a:r>
-              <a:rPr sz="3200" b="1" i="0">
+              <a:rPr sz="3040" b="1" i="0">
                 <a:solidFill>
                   <a:srgbClr val="9E1B32"/>
                 </a:solidFill>
-                <a:latin typeface="Century Schoolbook"/>
+                <a:latin typeface="Lexend"/>
               </a:rPr>
               <a:t>Answer:   13 feet</a:t>
             </a:r>
@@ -6341,11 +6686,11 @@
           <a:p>
             <a:pPr algn="l"/>
             <a:r>
-              <a:rPr sz="3400" b="1" i="0">
+              <a:rPr sz="3229" b="1" i="0">
                 <a:solidFill>
                   <a:srgbClr val="1A1A1A"/>
                 </a:solidFill>
-                <a:latin typeface="Century Schoolbook"/>
+                <a:latin typeface="Lexend"/>
               </a:rPr>
               <a:t>Whiteboards   ·   Question 3 of 9</a:t>
             </a:r>
@@ -6481,11 +6826,11 @@
           <a:p>
             <a:pPr algn="l"/>
             <a:r>
-              <a:rPr sz="1100" b="0" i="1">
+              <a:rPr sz="1040" b="0" i="0">
                 <a:solidFill>
                   <a:srgbClr val="6B6B6B"/>
                 </a:solidFill>
-                <a:latin typeface="Century Schoolbook"/>
+                <a:latin typeface="Lexend"/>
               </a:rPr>
               <a:t>Grade 7 Accelerated · Unit 4 · Lesson 5 — Evaluating Expressions with Radicals</a:t>
             </a:r>
@@ -6516,11 +6861,11 @@
           <a:p>
             <a:pPr algn="r"/>
             <a:r>
-              <a:rPr sz="1100" b="0" i="0">
+              <a:rPr sz="1040" b="0" i="0">
                 <a:solidFill>
                   <a:srgbClr val="6B6B6B"/>
                 </a:solidFill>
-                <a:latin typeface="Century Schoolbook"/>
+                <a:latin typeface="Lexend"/>
               </a:rPr>
               <a:t>19</a:t>
             </a:r>
@@ -6529,7 +6874,7 @@
       </p:sp>
       <p:pic>
         <p:nvPicPr>
-          <p:cNvPr id="8" name="Picture 7" descr="a4ee34a66ada29c1.png"/>
+          <p:cNvPr id="8" name="Picture 7" descr="33a9e56c707a61f1.png"/>
           <p:cNvPicPr>
             <a:picLocks noChangeAspect="1"/>
           </p:cNvPicPr>
@@ -6543,8 +6888,8 @@
         </p:blipFill>
         <p:spPr>
           <a:xfrm>
-            <a:off x="5417820" y="2194560"/>
-            <a:ext cx="1325880" cy="502920"/>
+            <a:off x="5448300" y="2194560"/>
+            <a:ext cx="1264920" cy="478536"/>
           </a:xfrm>
           <a:prstGeom prst="rect">
             <a:avLst/>
@@ -6575,11 +6920,11 @@
           <a:p>
             <a:pPr algn="ctr"/>
             <a:r>
-              <a:rPr sz="2600" b="1" i="0">
+              <a:rPr sz="2470" b="1" i="0">
                 <a:solidFill>
                   <a:srgbClr val="1A1A1A"/>
                 </a:solidFill>
-                <a:latin typeface="Century Schoolbook"/>
+                <a:latin typeface="Lexend"/>
               </a:rPr>
               <a:t>Answer it.</a:t>
             </a:r>
@@ -6628,11 +6973,11 @@
           <a:p>
             <a:pPr algn="l"/>
             <a:r>
-              <a:rPr sz="3600" b="1" i="0">
+              <a:rPr sz="3420" b="1" i="0">
                 <a:solidFill>
                   <a:srgbClr val="1A1A1A"/>
                 </a:solidFill>
-                <a:latin typeface="Century Schoolbook"/>
+                <a:latin typeface="Lexend"/>
               </a:rPr>
               <a:t>Warm-Up</a:t>
             </a:r>
@@ -6768,11 +7113,11 @@
           <a:p>
             <a:pPr algn="l"/>
             <a:r>
-              <a:rPr sz="1100" b="0" i="1">
+              <a:rPr sz="1040" b="0" i="0">
                 <a:solidFill>
                   <a:srgbClr val="6B6B6B"/>
                 </a:solidFill>
-                <a:latin typeface="Century Schoolbook"/>
+                <a:latin typeface="Lexend"/>
               </a:rPr>
               <a:t>Grade 7 Accelerated · Unit 4 · Lesson 5 — Evaluating Expressions with Radicals</a:t>
             </a:r>
@@ -6803,11 +7148,11 @@
           <a:p>
             <a:pPr algn="r"/>
             <a:r>
-              <a:rPr sz="1100" b="0" i="0">
+              <a:rPr sz="1040" b="0" i="0">
                 <a:solidFill>
                   <a:srgbClr val="6B6B6B"/>
                 </a:solidFill>
-                <a:latin typeface="Century Schoolbook"/>
+                <a:latin typeface="Lexend"/>
               </a:rPr>
               <a:t>2</a:t>
             </a:r>
@@ -6823,7 +7168,7 @@
         <p:spPr>
           <a:xfrm>
             <a:off x="1874519" y="1440180"/>
-            <a:ext cx="6984958" cy="457200"/>
+            <a:ext cx="6874777" cy="457200"/>
           </a:xfrm>
           <a:prstGeom prst="rect">
             <a:avLst/>
@@ -6838,11 +7183,11 @@
           <a:p>
             <a:pPr algn="l"/>
             <a:r>
-              <a:rPr sz="2300" b="0" i="0">
+              <a:rPr sz="2180" b="0" i="0">
                 <a:solidFill>
                   <a:srgbClr val="1A1A1A"/>
                 </a:solidFill>
-                <a:latin typeface="Century Schoolbook"/>
+                <a:latin typeface="Lexend"/>
               </a:rPr>
               <a:t>1.   How many significant digits are in  0.0250 ?</a:t>
             </a:r>
@@ -6858,7 +7203,7 @@
         <p:spPr>
           <a:xfrm>
             <a:off x="1874519" y="2052828"/>
-            <a:ext cx="726811" cy="457200"/>
+            <a:ext cx="685699" cy="457200"/>
           </a:xfrm>
           <a:prstGeom prst="rect">
             <a:avLst/>
@@ -6873,11 +7218,11 @@
           <a:p>
             <a:pPr algn="l"/>
             <a:r>
-              <a:rPr sz="2300" b="0" i="0">
+              <a:rPr sz="2180" b="0" i="0">
                 <a:solidFill>
                   <a:srgbClr val="1A1A1A"/>
                 </a:solidFill>
-                <a:latin typeface="Century Schoolbook"/>
+                <a:latin typeface="Lexend"/>
               </a:rPr>
               <a:t>2.   </a:t>
             </a:r>
@@ -6886,7 +7231,7 @@
       </p:sp>
       <p:pic>
         <p:nvPicPr>
-          <p:cNvPr id="10" name="Picture 9" descr="ca17b323d889e390.png"/>
+          <p:cNvPr id="10" name="Picture 9" descr="56d20e268514a0eb.png"/>
           <p:cNvPicPr>
             <a:picLocks noChangeAspect="1"/>
           </p:cNvPicPr>
@@ -6900,8 +7245,8 @@
         </p:blipFill>
         <p:spPr>
           <a:xfrm>
-            <a:off x="2464171" y="2112264"/>
-            <a:ext cx="2441448" cy="338328"/>
+            <a:off x="2423059" y="2116836"/>
+            <a:ext cx="2404872" cy="329184"/>
           </a:xfrm>
           <a:prstGeom prst="rect">
             <a:avLst/>
@@ -6917,7 +7262,7 @@
         <p:spPr>
           <a:xfrm>
             <a:off x="1874519" y="2665476"/>
-            <a:ext cx="3064939" cy="457200"/>
+            <a:ext cx="2930351" cy="457200"/>
           </a:xfrm>
           <a:prstGeom prst="rect">
             <a:avLst/>
@@ -6932,11 +7277,11 @@
           <a:p>
             <a:pPr algn="l"/>
             <a:r>
-              <a:rPr sz="2300" b="0" i="0">
+              <a:rPr sz="2180" b="0" i="0">
                 <a:solidFill>
                   <a:srgbClr val="1A1A1A"/>
                 </a:solidFill>
-                <a:latin typeface="Century Schoolbook"/>
+                <a:latin typeface="Lexend"/>
               </a:rPr>
               <a:t>3.   Find the value:  </a:t>
             </a:r>
@@ -6945,7 +7290,7 @@
       </p:sp>
       <p:pic>
         <p:nvPicPr>
-          <p:cNvPr id="12" name="Picture 11" descr="9fe57fc54286b299.png"/>
+          <p:cNvPr id="12" name="Picture 11" descr="97c530a75d29d302.png"/>
           <p:cNvPicPr>
             <a:picLocks noChangeAspect="1"/>
           </p:cNvPicPr>
@@ -6959,8 +7304,8 @@
         </p:blipFill>
         <p:spPr>
           <a:xfrm>
-            <a:off x="4802299" y="2689860"/>
-            <a:ext cx="853440" cy="408432"/>
+            <a:off x="4667711" y="2699004"/>
+            <a:ext cx="844296" cy="390144"/>
           </a:xfrm>
           <a:prstGeom prst="rect">
             <a:avLst/>
@@ -6976,7 +7321,7 @@
         <p:spPr>
           <a:xfrm>
             <a:off x="1874519" y="3278124"/>
-            <a:ext cx="2276518" cy="457200"/>
+            <a:ext cx="2185597" cy="457200"/>
           </a:xfrm>
           <a:prstGeom prst="rect">
             <a:avLst/>
@@ -6991,11 +7336,11 @@
           <a:p>
             <a:pPr algn="l"/>
             <a:r>
-              <a:rPr sz="2300" b="0" i="0">
+              <a:rPr sz="2180" b="0" i="0">
                 <a:solidFill>
                   <a:srgbClr val="1A1A1A"/>
                 </a:solidFill>
-                <a:latin typeface="Century Schoolbook"/>
+                <a:latin typeface="Lexend"/>
               </a:rPr>
               <a:t>4.   Evaluate:  </a:t>
             </a:r>
@@ -7004,7 +7349,7 @@
       </p:sp>
       <p:pic>
         <p:nvPicPr>
-          <p:cNvPr id="14" name="Picture 13" descr="72275cc2b2ecb2ca.png"/>
+          <p:cNvPr id="14" name="Picture 13" descr="b791e832d65b0b80.png"/>
           <p:cNvPicPr>
             <a:picLocks noChangeAspect="1"/>
           </p:cNvPicPr>
@@ -7018,8 +7363,8 @@
         </p:blipFill>
         <p:spPr>
           <a:xfrm>
-            <a:off x="4013878" y="3390900"/>
-            <a:ext cx="1155192" cy="231648"/>
+            <a:off x="3922957" y="3393948"/>
+            <a:ext cx="1182624" cy="225552"/>
           </a:xfrm>
           <a:prstGeom prst="rect">
             <a:avLst/>
@@ -7068,11 +7413,11 @@
           <a:p>
             <a:pPr algn="l"/>
             <a:r>
-              <a:rPr sz="3400" b="1" i="0">
+              <a:rPr sz="3229" b="1" i="0">
                 <a:solidFill>
                   <a:srgbClr val="1A1A1A"/>
                 </a:solidFill>
-                <a:latin typeface="Century Schoolbook"/>
+                <a:latin typeface="Lexend"/>
               </a:rPr>
               <a:t>Whiteboards   ·   Question 3 of 9</a:t>
             </a:r>
@@ -7208,11 +7553,11 @@
           <a:p>
             <a:pPr algn="l"/>
             <a:r>
-              <a:rPr sz="1100" b="0" i="1">
+              <a:rPr sz="1040" b="0" i="0">
                 <a:solidFill>
                   <a:srgbClr val="6B6B6B"/>
                 </a:solidFill>
-                <a:latin typeface="Century Schoolbook"/>
+                <a:latin typeface="Lexend"/>
               </a:rPr>
               <a:t>Grade 7 Accelerated · Unit 4 · Lesson 5 — Evaluating Expressions with Radicals</a:t>
             </a:r>
@@ -7243,11 +7588,11 @@
           <a:p>
             <a:pPr algn="r"/>
             <a:r>
-              <a:rPr sz="1100" b="0" i="0">
+              <a:rPr sz="1040" b="0" i="0">
                 <a:solidFill>
                   <a:srgbClr val="6B6B6B"/>
                 </a:solidFill>
-                <a:latin typeface="Century Schoolbook"/>
+                <a:latin typeface="Lexend"/>
               </a:rPr>
               <a:t>20</a:t>
             </a:r>
@@ -7256,7 +7601,7 @@
       </p:sp>
       <p:pic>
         <p:nvPicPr>
-          <p:cNvPr id="8" name="Picture 7" descr="e9ce12ee5f035ada.png"/>
+          <p:cNvPr id="8" name="Picture 7" descr="84e87a07475feba9.png"/>
           <p:cNvPicPr>
             <a:picLocks noChangeAspect="1"/>
           </p:cNvPicPr>
@@ -7270,17 +7615,100 @@
         </p:blipFill>
         <p:spPr>
           <a:xfrm>
-            <a:off x="5420867" y="2103120"/>
-            <a:ext cx="1319784" cy="502920"/>
+            <a:off x="5451347" y="2103120"/>
+            <a:ext cx="1258824" cy="478536"/>
           </a:xfrm>
           <a:prstGeom prst="rect">
             <a:avLst/>
           </a:prstGeom>
         </p:spPr>
       </p:pic>
-      <p:sp>
-        <p:nvSpPr>
-          <p:cNvPr id="9" name="TextBox 8"/>
+      <p:pic>
+        <p:nvPicPr>
+          <p:cNvPr id="9" name="Picture 8" descr="6b0304793847f9ae.png"/>
+          <p:cNvPicPr>
+            <a:picLocks noChangeAspect="1"/>
+          </p:cNvPicPr>
+          <p:nvPr/>
+        </p:nvPicPr>
+        <p:blipFill>
+          <a:blip r:embed="rId3"/>
+          <a:stretch>
+            <a:fillRect/>
+          </a:stretch>
+        </p:blipFill>
+        <p:spPr>
+          <a:xfrm>
+            <a:off x="2794935" y="2987040"/>
+            <a:ext cx="3630168" cy="316992"/>
+          </a:xfrm>
+          <a:prstGeom prst="rect">
+            <a:avLst/>
+          </a:prstGeom>
+        </p:spPr>
+      </p:pic>
+      <p:sp>
+        <p:nvSpPr>
+          <p:cNvPr id="10" name="TextBox 9"/>
+          <p:cNvSpPr txBox="1"/>
+          <p:nvPr/>
+        </p:nvSpPr>
+        <p:spPr>
+          <a:xfrm>
+            <a:off x="6425103" y="2916936"/>
+            <a:ext cx="1338233" cy="457200"/>
+          </a:xfrm>
+          <a:prstGeom prst="rect">
+            <a:avLst/>
+          </a:prstGeom>
+          <a:noFill/>
+        </p:spPr>
+        <p:txBody>
+          <a:bodyPr wrap="none" lIns="45720" rIns="45720" tIns="18288" bIns="18288" anchor="ctr">
+            <a:noAutofit/>
+          </a:bodyPr>
+          <a:lstStyle/>
+          <a:p>
+            <a:pPr algn="l"/>
+            <a:r>
+              <a:rPr sz="2750" b="0" i="0">
+                <a:solidFill>
+                  <a:srgbClr val="1A1A1A"/>
+                </a:solidFill>
+                <a:latin typeface="Lexend"/>
+              </a:rPr>
+              <a:t>,   so   </a:t>
+            </a:r>
+          </a:p>
+        </p:txBody>
+      </p:sp>
+      <p:pic>
+        <p:nvPicPr>
+          <p:cNvPr id="11" name="Picture 10" descr="754dfe5956abcf18.png"/>
+          <p:cNvPicPr>
+            <a:picLocks noChangeAspect="1"/>
+          </p:cNvPicPr>
+          <p:nvPr/>
+        </p:nvPicPr>
+        <p:blipFill>
+          <a:blip r:embed="rId4"/>
+          <a:stretch>
+            <a:fillRect/>
+          </a:stretch>
+        </p:blipFill>
+        <p:spPr>
+          <a:xfrm>
+            <a:off x="7626176" y="2929128"/>
+            <a:ext cx="1853184" cy="432816"/>
+          </a:xfrm>
+          <a:prstGeom prst="rect">
+            <a:avLst/>
+          </a:prstGeom>
+        </p:spPr>
+      </p:pic>
+      <p:sp>
+        <p:nvSpPr>
+          <p:cNvPr id="12" name="TextBox 11"/>
           <p:cNvSpPr txBox="1"/>
           <p:nvPr/>
         </p:nvSpPr>
@@ -7302,11 +7730,11 @@
           <a:p>
             <a:pPr algn="ctr"/>
             <a:r>
-              <a:rPr sz="3200" b="1" i="0">
+              <a:rPr sz="3040" b="1" i="0">
                 <a:solidFill>
                   <a:srgbClr val="9E1B32"/>
                 </a:solidFill>
-                <a:latin typeface="Century Schoolbook"/>
+                <a:latin typeface="Lexend"/>
               </a:rPr>
               <a:t>Answer:   −5</a:t>
             </a:r>
@@ -7355,11 +7783,11 @@
           <a:p>
             <a:pPr algn="l"/>
             <a:r>
-              <a:rPr sz="3400" b="1" i="0">
+              <a:rPr sz="3229" b="1" i="0">
                 <a:solidFill>
                   <a:srgbClr val="1A1A1A"/>
                 </a:solidFill>
-                <a:latin typeface="Century Schoolbook"/>
+                <a:latin typeface="Lexend"/>
               </a:rPr>
               <a:t>Whiteboards   ·   Question 4 of 9</a:t>
             </a:r>
@@ -7495,11 +7923,11 @@
           <a:p>
             <a:pPr algn="l"/>
             <a:r>
-              <a:rPr sz="1100" b="0" i="1">
+              <a:rPr sz="1040" b="0" i="0">
                 <a:solidFill>
                   <a:srgbClr val="6B6B6B"/>
                 </a:solidFill>
-                <a:latin typeface="Century Schoolbook"/>
+                <a:latin typeface="Lexend"/>
               </a:rPr>
               <a:t>Grade 7 Accelerated · Unit 4 · Lesson 5 — Evaluating Expressions with Radicals</a:t>
             </a:r>
@@ -7530,11 +7958,11 @@
           <a:p>
             <a:pPr algn="r"/>
             <a:r>
-              <a:rPr sz="1100" b="0" i="0">
+              <a:rPr sz="1040" b="0" i="0">
                 <a:solidFill>
                   <a:srgbClr val="6B6B6B"/>
                 </a:solidFill>
-                <a:latin typeface="Century Schoolbook"/>
+                <a:latin typeface="Lexend"/>
               </a:rPr>
               <a:t>21</a:t>
             </a:r>
@@ -7543,7 +7971,7 @@
       </p:sp>
       <p:pic>
         <p:nvPicPr>
-          <p:cNvPr id="8" name="Picture 7" descr="3f127ed15696cdab.png"/>
+          <p:cNvPr id="8" name="Picture 7" descr="7058abdbd1529243.png"/>
           <p:cNvPicPr>
             <a:picLocks noChangeAspect="1"/>
           </p:cNvPicPr>
@@ -7557,8 +7985,8 @@
         </p:blipFill>
         <p:spPr>
           <a:xfrm>
-            <a:off x="5274563" y="2194560"/>
-            <a:ext cx="1612392" cy="502920"/>
+            <a:off x="5301996" y="2194560"/>
+            <a:ext cx="1557528" cy="478536"/>
           </a:xfrm>
           <a:prstGeom prst="rect">
             <a:avLst/>
@@ -7589,11 +8017,11 @@
           <a:p>
             <a:pPr algn="ctr"/>
             <a:r>
-              <a:rPr sz="2600" b="1" i="0">
+              <a:rPr sz="2470" b="1" i="0">
                 <a:solidFill>
                   <a:srgbClr val="1A1A1A"/>
                 </a:solidFill>
-                <a:latin typeface="Century Schoolbook"/>
+                <a:latin typeface="Lexend"/>
               </a:rPr>
               <a:t>Answer it.</a:t>
             </a:r>
@@ -7642,11 +8070,11 @@
           <a:p>
             <a:pPr algn="l"/>
             <a:r>
-              <a:rPr sz="3400" b="1" i="0">
+              <a:rPr sz="3229" b="1" i="0">
                 <a:solidFill>
                   <a:srgbClr val="1A1A1A"/>
                 </a:solidFill>
-                <a:latin typeface="Century Schoolbook"/>
+                <a:latin typeface="Lexend"/>
               </a:rPr>
               <a:t>Whiteboards   ·   Question 4 of 9</a:t>
             </a:r>
@@ -7782,11 +8210,11 @@
           <a:p>
             <a:pPr algn="l"/>
             <a:r>
-              <a:rPr sz="1100" b="0" i="1">
+              <a:rPr sz="1040" b="0" i="0">
                 <a:solidFill>
                   <a:srgbClr val="6B6B6B"/>
                 </a:solidFill>
-                <a:latin typeface="Century Schoolbook"/>
+                <a:latin typeface="Lexend"/>
               </a:rPr>
               <a:t>Grade 7 Accelerated · Unit 4 · Lesson 5 — Evaluating Expressions with Radicals</a:t>
             </a:r>
@@ -7817,11 +8245,11 @@
           <a:p>
             <a:pPr algn="r"/>
             <a:r>
-              <a:rPr sz="1100" b="0" i="0">
+              <a:rPr sz="1040" b="0" i="0">
                 <a:solidFill>
                   <a:srgbClr val="6B6B6B"/>
                 </a:solidFill>
-                <a:latin typeface="Century Schoolbook"/>
+                <a:latin typeface="Lexend"/>
               </a:rPr>
               <a:t>22</a:t>
             </a:r>
@@ -7830,7 +8258,7 @@
       </p:sp>
       <p:pic>
         <p:nvPicPr>
-          <p:cNvPr id="8" name="Picture 7" descr="e42a74bac51388c9.png"/>
+          <p:cNvPr id="8" name="Picture 7" descr="074bb924378dc964.png"/>
           <p:cNvPicPr>
             <a:picLocks noChangeAspect="1"/>
           </p:cNvPicPr>
@@ -7844,8 +8272,8 @@
         </p:blipFill>
         <p:spPr>
           <a:xfrm>
-            <a:off x="5277612" y="2103120"/>
-            <a:ext cx="1606296" cy="502920"/>
+            <a:off x="5305043" y="2103120"/>
+            <a:ext cx="1551432" cy="478536"/>
           </a:xfrm>
           <a:prstGeom prst="rect">
             <a:avLst/>
@@ -7855,6 +8283,89 @@
       <p:sp>
         <p:nvSpPr>
           <p:cNvPr id="9" name="TextBox 8"/>
+          <p:cNvSpPr txBox="1"/>
+          <p:nvPr/>
+        </p:nvSpPr>
+        <p:spPr>
+          <a:xfrm>
+            <a:off x="2763194" y="2906268"/>
+            <a:ext cx="3827922" cy="457200"/>
+          </a:xfrm>
+          <a:prstGeom prst="rect">
+            <a:avLst/>
+          </a:prstGeom>
+          <a:noFill/>
+        </p:spPr>
+        <p:txBody>
+          <a:bodyPr wrap="none" lIns="45720" rIns="45720" tIns="18288" bIns="18288" anchor="ctr">
+            <a:noAutofit/>
+          </a:bodyPr>
+          <a:lstStyle/>
+          <a:p>
+            <a:pPr algn="l"/>
+            <a:r>
+              <a:rPr sz="2750" b="0" i="0">
+                <a:solidFill>
+                  <a:srgbClr val="1A1A1A"/>
+                </a:solidFill>
+                <a:latin typeface="Lexend"/>
+              </a:rPr>
+              <a:t>Under the bar first:  </a:t>
+            </a:r>
+          </a:p>
+        </p:txBody>
+      </p:sp>
+      <p:pic>
+        <p:nvPicPr>
+          <p:cNvPr id="10" name="Picture 9" descr="5105a5010efd4535.png"/>
+          <p:cNvPicPr>
+            <a:picLocks noChangeAspect="1"/>
+          </p:cNvPicPr>
+          <p:nvPr/>
+        </p:nvPicPr>
+        <p:blipFill>
+          <a:blip r:embed="rId3"/>
+          <a:stretch>
+            <a:fillRect/>
+          </a:stretch>
+        </p:blipFill>
+        <p:spPr>
+          <a:xfrm>
+            <a:off x="6453957" y="2982468"/>
+            <a:ext cx="2944368" cy="304800"/>
+          </a:xfrm>
+          <a:prstGeom prst="rect">
+            <a:avLst/>
+          </a:prstGeom>
+        </p:spPr>
+      </p:pic>
+      <p:pic>
+        <p:nvPicPr>
+          <p:cNvPr id="11" name="Picture 10" descr="5127a0c173e39499.png"/>
+          <p:cNvPicPr>
+            <a:picLocks noChangeAspect="1"/>
+          </p:cNvPicPr>
+          <p:nvPr/>
+        </p:nvPicPr>
+        <p:blipFill>
+          <a:blip r:embed="rId4"/>
+          <a:stretch>
+            <a:fillRect/>
+          </a:stretch>
+        </p:blipFill>
+        <p:spPr>
+          <a:xfrm>
+            <a:off x="2818058" y="3468623"/>
+            <a:ext cx="1271016" cy="432816"/>
+          </a:xfrm>
+          <a:prstGeom prst="rect">
+            <a:avLst/>
+          </a:prstGeom>
+        </p:spPr>
+      </p:pic>
+      <p:sp>
+        <p:nvSpPr>
+          <p:cNvPr id="12" name="TextBox 11"/>
           <p:cNvSpPr txBox="1"/>
           <p:nvPr/>
         </p:nvSpPr>
@@ -7876,11 +8387,11 @@
           <a:p>
             <a:pPr algn="ctr"/>
             <a:r>
-              <a:rPr sz="3200" b="1" i="0">
+              <a:rPr sz="3040" b="1" i="0">
                 <a:solidFill>
                   <a:srgbClr val="9E1B32"/>
                 </a:solidFill>
-                <a:latin typeface="Century Schoolbook"/>
+                <a:latin typeface="Lexend"/>
               </a:rPr>
               <a:t>Answer:   5</a:t>
             </a:r>
@@ -7929,11 +8440,11 @@
           <a:p>
             <a:pPr algn="l"/>
             <a:r>
-              <a:rPr sz="3400" b="1" i="0">
+              <a:rPr sz="3229" b="1" i="0">
                 <a:solidFill>
                   <a:srgbClr val="1A1A1A"/>
                 </a:solidFill>
-                <a:latin typeface="Century Schoolbook"/>
+                <a:latin typeface="Lexend"/>
               </a:rPr>
               <a:t>Whiteboards   ·   Question 5 of 9</a:t>
             </a:r>
@@ -8069,11 +8580,11 @@
           <a:p>
             <a:pPr algn="l"/>
             <a:r>
-              <a:rPr sz="1100" b="0" i="1">
+              <a:rPr sz="1040" b="0" i="0">
                 <a:solidFill>
                   <a:srgbClr val="6B6B6B"/>
                 </a:solidFill>
-                <a:latin typeface="Century Schoolbook"/>
+                <a:latin typeface="Lexend"/>
               </a:rPr>
               <a:t>Grade 7 Accelerated · Unit 4 · Lesson 5 — Evaluating Expressions with Radicals</a:t>
             </a:r>
@@ -8104,11 +8615,11 @@
           <a:p>
             <a:pPr algn="r"/>
             <a:r>
-              <a:rPr sz="1100" b="0" i="0">
+              <a:rPr sz="1040" b="0" i="0">
                 <a:solidFill>
                   <a:srgbClr val="6B6B6B"/>
                 </a:solidFill>
-                <a:latin typeface="Century Schoolbook"/>
+                <a:latin typeface="Lexend"/>
               </a:rPr>
               <a:t>23</a:t>
             </a:r>
@@ -8117,7 +8628,7 @@
       </p:sp>
       <p:pic>
         <p:nvPicPr>
-          <p:cNvPr id="8" name="Picture 7" descr="3abe49e5e121038a.png"/>
+          <p:cNvPr id="8" name="Picture 7" descr="9180b5fd8586da4a.png"/>
           <p:cNvPicPr>
             <a:picLocks noChangeAspect="1"/>
           </p:cNvPicPr>
@@ -8131,8 +8642,8 @@
         </p:blipFill>
         <p:spPr>
           <a:xfrm>
-            <a:off x="5356859" y="2194560"/>
-            <a:ext cx="1447800" cy="502920"/>
+            <a:off x="5376671" y="2194560"/>
+            <a:ext cx="1408176" cy="478536"/>
           </a:xfrm>
           <a:prstGeom prst="rect">
             <a:avLst/>
@@ -8147,7 +8658,7 @@
         </p:nvSpPr>
         <p:spPr>
           <a:xfrm>
-            <a:off x="777240" y="2971800"/>
+            <a:off x="777240" y="2947416"/>
             <a:ext cx="10607040" cy="465151"/>
           </a:xfrm>
           <a:prstGeom prst="rect">
@@ -8163,11 +8674,11 @@
           <a:p>
             <a:pPr algn="ctr"/>
             <a:r>
-              <a:rPr sz="2600" b="0" i="0">
+              <a:rPr sz="2470" b="0" i="0">
                 <a:solidFill>
                   <a:srgbClr val="1A1A1A"/>
                 </a:solidFill>
-                <a:latin typeface="Century Schoolbook"/>
+                <a:latin typeface="Lexend"/>
               </a:rPr>
               <a:t>Which is the value?</a:t>
             </a:r>
@@ -8182,7 +8693,7 @@
         </p:nvSpPr>
         <p:spPr>
           <a:xfrm>
-            <a:off x="1874519" y="3638119"/>
+            <a:off x="1874519" y="3613735"/>
             <a:ext cx="4572000" cy="548640"/>
           </a:xfrm>
           <a:prstGeom prst="rect">
@@ -8198,20 +8709,20 @@
           <a:p>
             <a:pPr algn="l"/>
             <a:r>
-              <a:rPr sz="2400" b="1" i="0">
+              <a:rPr sz="2280" b="1" i="0">
                 <a:solidFill>
                   <a:srgbClr val="1A1A1A"/>
                 </a:solidFill>
-                <a:latin typeface="Century Schoolbook"/>
+                <a:latin typeface="Lexend"/>
               </a:rPr>
               <a:t>A.   </a:t>
             </a:r>
             <a:r>
-              <a:rPr sz="2400" b="0" i="0">
+              <a:rPr sz="2280" b="0" i="0">
                 <a:solidFill>
                   <a:srgbClr val="1A1A1A"/>
                 </a:solidFill>
-                <a:latin typeface="Century Schoolbook"/>
+                <a:latin typeface="Lexend"/>
               </a:rPr>
               <a:t>7</a:t>
             </a:r>
@@ -8226,7 +8737,7 @@
         </p:nvSpPr>
         <p:spPr>
           <a:xfrm>
-            <a:off x="6629400" y="3638119"/>
+            <a:off x="6629400" y="3613735"/>
             <a:ext cx="4572000" cy="548640"/>
           </a:xfrm>
           <a:prstGeom prst="rect">
@@ -8242,20 +8753,20 @@
           <a:p>
             <a:pPr algn="l"/>
             <a:r>
-              <a:rPr sz="2400" b="1" i="0">
+              <a:rPr sz="2280" b="1" i="0">
                 <a:solidFill>
                   <a:srgbClr val="1A1A1A"/>
                 </a:solidFill>
-                <a:latin typeface="Century Schoolbook"/>
+                <a:latin typeface="Lexend"/>
               </a:rPr>
               <a:t>B.   </a:t>
             </a:r>
             <a:r>
-              <a:rPr sz="2400" b="0" i="0">
+              <a:rPr sz="2280" b="0" i="0">
                 <a:solidFill>
                   <a:srgbClr val="1A1A1A"/>
                 </a:solidFill>
-                <a:latin typeface="Century Schoolbook"/>
+                <a:latin typeface="Lexend"/>
               </a:rPr>
               <a:t>25</a:t>
             </a:r>
@@ -8270,7 +8781,7 @@
         </p:nvSpPr>
         <p:spPr>
           <a:xfrm>
-            <a:off x="1874519" y="4323919"/>
+            <a:off x="1874519" y="4299535"/>
             <a:ext cx="4572000" cy="548640"/>
           </a:xfrm>
           <a:prstGeom prst="rect">
@@ -8286,20 +8797,20 @@
           <a:p>
             <a:pPr algn="l"/>
             <a:r>
-              <a:rPr sz="2400" b="1" i="0">
+              <a:rPr sz="2280" b="1" i="0">
                 <a:solidFill>
                   <a:srgbClr val="1A1A1A"/>
                 </a:solidFill>
-                <a:latin typeface="Century Schoolbook"/>
+                <a:latin typeface="Lexend"/>
               </a:rPr>
               <a:t>C.   </a:t>
             </a:r>
             <a:r>
-              <a:rPr sz="2400" b="0" i="0">
+              <a:rPr sz="2280" b="0" i="0">
                 <a:solidFill>
                   <a:srgbClr val="1A1A1A"/>
                 </a:solidFill>
-                <a:latin typeface="Century Schoolbook"/>
+                <a:latin typeface="Lexend"/>
               </a:rPr>
               <a:t>12.5</a:t>
             </a:r>
@@ -8314,7 +8825,7 @@
         </p:nvSpPr>
         <p:spPr>
           <a:xfrm>
-            <a:off x="6629400" y="4323919"/>
+            <a:off x="6629400" y="4299535"/>
             <a:ext cx="4572000" cy="548640"/>
           </a:xfrm>
           <a:prstGeom prst="rect">
@@ -8330,20 +8841,20 @@
           <a:p>
             <a:pPr algn="l"/>
             <a:r>
-              <a:rPr sz="2400" b="1" i="0">
+              <a:rPr sz="2280" b="1" i="0">
                 <a:solidFill>
                   <a:srgbClr val="1A1A1A"/>
                 </a:solidFill>
-                <a:latin typeface="Century Schoolbook"/>
+                <a:latin typeface="Lexend"/>
               </a:rPr>
               <a:t>D.   </a:t>
             </a:r>
             <a:r>
-              <a:rPr sz="2400" b="0" i="0">
+              <a:rPr sz="2280" b="0" i="0">
                 <a:solidFill>
                   <a:srgbClr val="1A1A1A"/>
                 </a:solidFill>
-                <a:latin typeface="Century Schoolbook"/>
+                <a:latin typeface="Lexend"/>
               </a:rPr>
               <a:t>5</a:t>
             </a:r>
@@ -8358,7 +8869,7 @@
         </p:nvSpPr>
         <p:spPr>
           <a:xfrm>
-            <a:off x="777240" y="5329759"/>
+            <a:off x="777240" y="5305375"/>
             <a:ext cx="10607040" cy="457200"/>
           </a:xfrm>
           <a:prstGeom prst="rect">
@@ -8374,11 +8885,11 @@
           <a:p>
             <a:pPr algn="ctr"/>
             <a:r>
-              <a:rPr sz="2600" b="1" i="0">
+              <a:rPr sz="2470" b="1" i="0">
                 <a:solidFill>
                   <a:srgbClr val="1A1A1A"/>
                 </a:solidFill>
-                <a:latin typeface="Century Schoolbook"/>
+                <a:latin typeface="Lexend"/>
               </a:rPr>
               <a:t>Answer it.</a:t>
             </a:r>
@@ -8427,11 +8938,11 @@
           <a:p>
             <a:pPr algn="l"/>
             <a:r>
-              <a:rPr sz="3400" b="1" i="0">
+              <a:rPr sz="3229" b="1" i="0">
                 <a:solidFill>
                   <a:srgbClr val="1A1A1A"/>
                 </a:solidFill>
-                <a:latin typeface="Century Schoolbook"/>
+                <a:latin typeface="Lexend"/>
               </a:rPr>
               <a:t>Whiteboards   ·   Question 5 of 9</a:t>
             </a:r>
@@ -8567,11 +9078,11 @@
           <a:p>
             <a:pPr algn="l"/>
             <a:r>
-              <a:rPr sz="1100" b="0" i="1">
+              <a:rPr sz="1040" b="0" i="0">
                 <a:solidFill>
                   <a:srgbClr val="6B6B6B"/>
                 </a:solidFill>
-                <a:latin typeface="Century Schoolbook"/>
+                <a:latin typeface="Lexend"/>
               </a:rPr>
               <a:t>Grade 7 Accelerated · Unit 4 · Lesson 5 — Evaluating Expressions with Radicals</a:t>
             </a:r>
@@ -8602,11 +9113,11 @@
           <a:p>
             <a:pPr algn="r"/>
             <a:r>
-              <a:rPr sz="1100" b="0" i="0">
+              <a:rPr sz="1040" b="0" i="0">
                 <a:solidFill>
                   <a:srgbClr val="6B6B6B"/>
                 </a:solidFill>
-                <a:latin typeface="Century Schoolbook"/>
+                <a:latin typeface="Lexend"/>
               </a:rPr>
               <a:t>24</a:t>
             </a:r>
@@ -8615,7 +9126,7 @@
       </p:sp>
       <p:pic>
         <p:nvPicPr>
-          <p:cNvPr id="8" name="Picture 7" descr="3c30f316583cb146.png"/>
+          <p:cNvPr id="8" name="Picture 7" descr="af6863b3a9216dbf.png"/>
           <p:cNvPicPr>
             <a:picLocks noChangeAspect="1"/>
           </p:cNvPicPr>
@@ -8629,8 +9140,8 @@
         </p:blipFill>
         <p:spPr>
           <a:xfrm>
-            <a:off x="5361432" y="2103120"/>
-            <a:ext cx="1438656" cy="502920"/>
+            <a:off x="5379720" y="2103120"/>
+            <a:ext cx="1402080" cy="478536"/>
           </a:xfrm>
           <a:prstGeom prst="rect">
             <a:avLst/>
@@ -8645,7 +9156,7 @@
         </p:nvSpPr>
         <p:spPr>
           <a:xfrm>
-            <a:off x="777240" y="2880359"/>
+            <a:off x="777240" y="2855975"/>
             <a:ext cx="10607040" cy="465151"/>
           </a:xfrm>
           <a:prstGeom prst="rect">
@@ -8661,11 +9172,11 @@
           <a:p>
             <a:pPr algn="ctr"/>
             <a:r>
-              <a:rPr sz="2600" b="0" i="0">
+              <a:rPr sz="2470" b="0" i="0">
                 <a:solidFill>
                   <a:srgbClr val="1A1A1A"/>
                 </a:solidFill>
-                <a:latin typeface="Century Schoolbook"/>
+                <a:latin typeface="Lexend"/>
               </a:rPr>
               <a:t>Which is the value?</a:t>
             </a:r>
@@ -8680,8 +9191,91 @@
         </p:nvSpPr>
         <p:spPr>
           <a:xfrm>
-            <a:off x="1874519" y="3546679"/>
-            <a:ext cx="4572000" cy="548640"/>
+            <a:off x="3442898" y="3481147"/>
+            <a:ext cx="3827922" cy="457200"/>
+          </a:xfrm>
+          <a:prstGeom prst="rect">
+            <a:avLst/>
+          </a:prstGeom>
+          <a:noFill/>
+        </p:spPr>
+        <p:txBody>
+          <a:bodyPr wrap="none" lIns="45720" rIns="45720" tIns="18288" bIns="18288" anchor="ctr">
+            <a:noAutofit/>
+          </a:bodyPr>
+          <a:lstStyle/>
+          <a:p>
+            <a:pPr algn="l"/>
+            <a:r>
+              <a:rPr sz="2750" b="0" i="0">
+                <a:solidFill>
+                  <a:srgbClr val="1A1A1A"/>
+                </a:solidFill>
+                <a:latin typeface="Lexend"/>
+              </a:rPr>
+              <a:t>Under the bar first:  </a:t>
+            </a:r>
+          </a:p>
+        </p:txBody>
+      </p:sp>
+      <p:pic>
+        <p:nvPicPr>
+          <p:cNvPr id="11" name="Picture 10" descr="bf2df4e3775dcca4.png"/>
+          <p:cNvPicPr>
+            <a:picLocks noChangeAspect="1"/>
+          </p:cNvPicPr>
+          <p:nvPr/>
+        </p:nvPicPr>
+        <p:blipFill>
+          <a:blip r:embed="rId3"/>
+          <a:stretch>
+            <a:fillRect/>
+          </a:stretch>
+        </p:blipFill>
+        <p:spPr>
+          <a:xfrm>
+            <a:off x="7133661" y="3581731"/>
+            <a:ext cx="1584960" cy="256032"/>
+          </a:xfrm>
+          <a:prstGeom prst="rect">
+            <a:avLst/>
+          </a:prstGeom>
+        </p:spPr>
+      </p:pic>
+      <p:pic>
+        <p:nvPicPr>
+          <p:cNvPr id="12" name="Picture 11" descr="5127a0c173e39499.png"/>
+          <p:cNvPicPr>
+            <a:picLocks noChangeAspect="1"/>
+          </p:cNvPicPr>
+          <p:nvPr/>
+        </p:nvPicPr>
+        <p:blipFill>
+          <a:blip r:embed="rId4"/>
+          <a:stretch>
+            <a:fillRect/>
+          </a:stretch>
+        </p:blipFill>
+        <p:spPr>
+          <a:xfrm>
+            <a:off x="3497762" y="4043503"/>
+            <a:ext cx="1271016" cy="432816"/>
+          </a:xfrm>
+          <a:prstGeom prst="rect">
+            <a:avLst/>
+          </a:prstGeom>
+        </p:spPr>
+      </p:pic>
+      <p:sp>
+        <p:nvSpPr>
+          <p:cNvPr id="13" name="TextBox 12"/>
+          <p:cNvSpPr txBox="1"/>
+          <p:nvPr/>
+        </p:nvSpPr>
+        <p:spPr>
+          <a:xfrm>
+            <a:off x="777240" y="4663440"/>
+            <a:ext cx="10607040" cy="548640"/>
           </a:xfrm>
           <a:prstGeom prst="rect">
             <a:avLst/>
@@ -8694,189 +9288,13 @@
           </a:bodyPr>
           <a:lstStyle/>
           <a:p>
-            <a:pPr algn="l"/>
-            <a:r>
-              <a:rPr sz="2400" b="1" i="0">
-                <a:solidFill>
-                  <a:srgbClr val="1A1A1A"/>
-                </a:solidFill>
-                <a:latin typeface="Century Schoolbook"/>
-              </a:rPr>
-              <a:t>A.   </a:t>
-            </a:r>
-            <a:r>
-              <a:rPr sz="2400" b="0" i="0">
-                <a:solidFill>
-                  <a:srgbClr val="1A1A1A"/>
-                </a:solidFill>
-                <a:latin typeface="Century Schoolbook"/>
-              </a:rPr>
-              <a:t>7</a:t>
-            </a:r>
-          </a:p>
-        </p:txBody>
-      </p:sp>
-      <p:sp>
-        <p:nvSpPr>
-          <p:cNvPr id="11" name="TextBox 10"/>
-          <p:cNvSpPr txBox="1"/>
-          <p:nvPr/>
-        </p:nvSpPr>
-        <p:spPr>
-          <a:xfrm>
-            <a:off x="6629400" y="3546679"/>
-            <a:ext cx="4572000" cy="548640"/>
-          </a:xfrm>
-          <a:prstGeom prst="rect">
-            <a:avLst/>
-          </a:prstGeom>
-          <a:noFill/>
-        </p:spPr>
-        <p:txBody>
-          <a:bodyPr wrap="square" lIns="45720" rIns="45720" tIns="18288" bIns="18288" anchor="t">
-            <a:spAutoFit/>
-          </a:bodyPr>
-          <a:lstStyle/>
-          <a:p>
-            <a:pPr algn="l"/>
-            <a:r>
-              <a:rPr sz="2400" b="1" i="0">
-                <a:solidFill>
-                  <a:srgbClr val="1A1A1A"/>
-                </a:solidFill>
-                <a:latin typeface="Century Schoolbook"/>
-              </a:rPr>
-              <a:t>B.   </a:t>
-            </a:r>
-            <a:r>
-              <a:rPr sz="2400" b="0" i="0">
-                <a:solidFill>
-                  <a:srgbClr val="1A1A1A"/>
-                </a:solidFill>
-                <a:latin typeface="Century Schoolbook"/>
-              </a:rPr>
-              <a:t>25</a:t>
-            </a:r>
-          </a:p>
-        </p:txBody>
-      </p:sp>
-      <p:sp>
-        <p:nvSpPr>
-          <p:cNvPr id="12" name="TextBox 11"/>
-          <p:cNvSpPr txBox="1"/>
-          <p:nvPr/>
-        </p:nvSpPr>
-        <p:spPr>
-          <a:xfrm>
-            <a:off x="1874519" y="4232479"/>
-            <a:ext cx="4572000" cy="548640"/>
-          </a:xfrm>
-          <a:prstGeom prst="rect">
-            <a:avLst/>
-          </a:prstGeom>
-          <a:noFill/>
-        </p:spPr>
-        <p:txBody>
-          <a:bodyPr wrap="square" lIns="45720" rIns="45720" tIns="18288" bIns="18288" anchor="t">
-            <a:spAutoFit/>
-          </a:bodyPr>
-          <a:lstStyle/>
-          <a:p>
-            <a:pPr algn="l"/>
-            <a:r>
-              <a:rPr sz="2400" b="1" i="0">
-                <a:solidFill>
-                  <a:srgbClr val="1A1A1A"/>
-                </a:solidFill>
-                <a:latin typeface="Century Schoolbook"/>
-              </a:rPr>
-              <a:t>C.   </a:t>
-            </a:r>
-            <a:r>
-              <a:rPr sz="2400" b="0" i="0">
-                <a:solidFill>
-                  <a:srgbClr val="1A1A1A"/>
-                </a:solidFill>
-                <a:latin typeface="Century Schoolbook"/>
-              </a:rPr>
-              <a:t>12.5</a:t>
-            </a:r>
-          </a:p>
-        </p:txBody>
-      </p:sp>
-      <p:sp>
-        <p:nvSpPr>
-          <p:cNvPr id="13" name="TextBox 12"/>
-          <p:cNvSpPr txBox="1"/>
-          <p:nvPr/>
-        </p:nvSpPr>
-        <p:spPr>
-          <a:xfrm>
-            <a:off x="6629400" y="4232479"/>
-            <a:ext cx="4572000" cy="548640"/>
-          </a:xfrm>
-          <a:prstGeom prst="rect">
-            <a:avLst/>
-          </a:prstGeom>
-          <a:noFill/>
-        </p:spPr>
-        <p:txBody>
-          <a:bodyPr wrap="square" lIns="45720" rIns="45720" tIns="18288" bIns="18288" anchor="t">
-            <a:spAutoFit/>
-          </a:bodyPr>
-          <a:lstStyle/>
-          <a:p>
-            <a:pPr algn="l"/>
-            <a:r>
-              <a:rPr sz="2400" b="1" i="0">
+            <a:pPr algn="ctr"/>
+            <a:r>
+              <a:rPr sz="3040" b="1" i="0">
                 <a:solidFill>
                   <a:srgbClr val="9E1B32"/>
                 </a:solidFill>
-                <a:latin typeface="Century Schoolbook"/>
-              </a:rPr>
-              <a:t>D.   </a:t>
-            </a:r>
-            <a:r>
-              <a:rPr sz="2400" b="1" i="0">
-                <a:solidFill>
-                  <a:srgbClr val="9E1B32"/>
-                </a:solidFill>
-                <a:latin typeface="Century Schoolbook"/>
-              </a:rPr>
-              <a:t>5</a:t>
-            </a:r>
-          </a:p>
-        </p:txBody>
-      </p:sp>
-      <p:sp>
-        <p:nvSpPr>
-          <p:cNvPr id="14" name="TextBox 13"/>
-          <p:cNvSpPr txBox="1"/>
-          <p:nvPr/>
-        </p:nvSpPr>
-        <p:spPr>
-          <a:xfrm>
-            <a:off x="777240" y="5238319"/>
-            <a:ext cx="10607040" cy="548640"/>
-          </a:xfrm>
-          <a:prstGeom prst="rect">
-            <a:avLst/>
-          </a:prstGeom>
-          <a:noFill/>
-        </p:spPr>
-        <p:txBody>
-          <a:bodyPr wrap="square" lIns="45720" rIns="45720" tIns="18288" bIns="18288" anchor="t">
-            <a:spAutoFit/>
-          </a:bodyPr>
-          <a:lstStyle/>
-          <a:p>
-            <a:pPr algn="ctr"/>
-            <a:r>
-              <a:rPr sz="3200" b="1" i="0">
-                <a:solidFill>
-                  <a:srgbClr val="9E1B32"/>
-                </a:solidFill>
-                <a:latin typeface="Century Schoolbook"/>
+                <a:latin typeface="Lexend"/>
               </a:rPr>
               <a:t>Answer:   D — 5</a:t>
             </a:r>
@@ -8925,11 +9343,11 @@
           <a:p>
             <a:pPr algn="l"/>
             <a:r>
-              <a:rPr sz="3400" b="1" i="0">
+              <a:rPr sz="3229" b="1" i="0">
                 <a:solidFill>
                   <a:srgbClr val="1A1A1A"/>
                 </a:solidFill>
-                <a:latin typeface="Century Schoolbook"/>
+                <a:latin typeface="Lexend"/>
               </a:rPr>
               <a:t>Whiteboards   ·   Question 6 of 9</a:t>
             </a:r>
@@ -9065,11 +9483,11 @@
           <a:p>
             <a:pPr algn="l"/>
             <a:r>
-              <a:rPr sz="1100" b="0" i="1">
+              <a:rPr sz="1040" b="0" i="0">
                 <a:solidFill>
                   <a:srgbClr val="6B6B6B"/>
                 </a:solidFill>
-                <a:latin typeface="Century Schoolbook"/>
+                <a:latin typeface="Lexend"/>
               </a:rPr>
               <a:t>Grade 7 Accelerated · Unit 4 · Lesson 5 — Evaluating Expressions with Radicals</a:t>
             </a:r>
@@ -9100,11 +9518,11 @@
           <a:p>
             <a:pPr algn="r"/>
             <a:r>
-              <a:rPr sz="1100" b="0" i="0">
+              <a:rPr sz="1040" b="0" i="0">
                 <a:solidFill>
                   <a:srgbClr val="6B6B6B"/>
                 </a:solidFill>
-                <a:latin typeface="Century Schoolbook"/>
+                <a:latin typeface="Lexend"/>
               </a:rPr>
               <a:t>25</a:t>
             </a:r>
@@ -9113,7 +9531,7 @@
       </p:sp>
       <p:pic>
         <p:nvPicPr>
-          <p:cNvPr id="8" name="Picture 7" descr="6e1bf63989c69b23.png"/>
+          <p:cNvPr id="8" name="Picture 7" descr="65ed02bc6c30adaa.png"/>
           <p:cNvPicPr>
             <a:picLocks noChangeAspect="1"/>
           </p:cNvPicPr>
@@ -9127,8 +9545,8 @@
         </p:blipFill>
         <p:spPr>
           <a:xfrm>
-            <a:off x="5519928" y="2194560"/>
-            <a:ext cx="1121664" cy="502920"/>
+            <a:off x="5533643" y="2194560"/>
+            <a:ext cx="1094232" cy="478536"/>
           </a:xfrm>
           <a:prstGeom prst="rect">
             <a:avLst/>
@@ -9143,7 +9561,7 @@
         </p:nvSpPr>
         <p:spPr>
           <a:xfrm>
-            <a:off x="777240" y="2971800"/>
+            <a:off x="777240" y="2947416"/>
             <a:ext cx="10607040" cy="465151"/>
           </a:xfrm>
           <a:prstGeom prst="rect">
@@ -9159,11 +9577,11 @@
           <a:p>
             <a:pPr algn="ctr"/>
             <a:r>
-              <a:rPr sz="2600" b="0" i="0">
+              <a:rPr sz="2470" b="0" i="0">
                 <a:solidFill>
                   <a:srgbClr val="1A1A1A"/>
                 </a:solidFill>
-                <a:latin typeface="Century Schoolbook"/>
+                <a:latin typeface="Lexend"/>
               </a:rPr>
               <a:t>Which is the value?</a:t>
             </a:r>
@@ -9178,7 +9596,7 @@
         </p:nvSpPr>
         <p:spPr>
           <a:xfrm>
-            <a:off x="1874519" y="3638119"/>
+            <a:off x="1874519" y="3613735"/>
             <a:ext cx="4572000" cy="548640"/>
           </a:xfrm>
           <a:prstGeom prst="rect">
@@ -9194,20 +9612,20 @@
           <a:p>
             <a:pPr algn="l"/>
             <a:r>
-              <a:rPr sz="2400" b="1" i="0">
+              <a:rPr sz="2280" b="1" i="0">
                 <a:solidFill>
                   <a:srgbClr val="1A1A1A"/>
                 </a:solidFill>
-                <a:latin typeface="Century Schoolbook"/>
+                <a:latin typeface="Lexend"/>
               </a:rPr>
               <a:t>A.   </a:t>
             </a:r>
             <a:r>
-              <a:rPr sz="2400" b="0" i="0">
+              <a:rPr sz="2280" b="0" i="0">
                 <a:solidFill>
                   <a:srgbClr val="1A1A1A"/>
                 </a:solidFill>
-                <a:latin typeface="Century Schoolbook"/>
+                <a:latin typeface="Lexend"/>
               </a:rPr>
               <a:t>−4</a:t>
             </a:r>
@@ -9222,7 +9640,7 @@
         </p:nvSpPr>
         <p:spPr>
           <a:xfrm>
-            <a:off x="6629400" y="3638119"/>
+            <a:off x="6629400" y="3613735"/>
             <a:ext cx="4572000" cy="548640"/>
           </a:xfrm>
           <a:prstGeom prst="rect">
@@ -9238,20 +9656,20 @@
           <a:p>
             <a:pPr algn="l"/>
             <a:r>
-              <a:rPr sz="2400" b="1" i="0">
+              <a:rPr sz="2280" b="1" i="0">
                 <a:solidFill>
                   <a:srgbClr val="1A1A1A"/>
                 </a:solidFill>
-                <a:latin typeface="Century Schoolbook"/>
+                <a:latin typeface="Lexend"/>
               </a:rPr>
               <a:t>B.   </a:t>
             </a:r>
             <a:r>
-              <a:rPr sz="2400" b="0" i="0">
+              <a:rPr sz="2280" b="0" i="0">
                 <a:solidFill>
                   <a:srgbClr val="1A1A1A"/>
                 </a:solidFill>
-                <a:latin typeface="Century Schoolbook"/>
+                <a:latin typeface="Lexend"/>
               </a:rPr>
               <a:t>not a real number</a:t>
             </a:r>
@@ -9266,7 +9684,7 @@
         </p:nvSpPr>
         <p:spPr>
           <a:xfrm>
-            <a:off x="1874519" y="4323919"/>
+            <a:off x="1874519" y="4299535"/>
             <a:ext cx="4572000" cy="548640"/>
           </a:xfrm>
           <a:prstGeom prst="rect">
@@ -9282,20 +9700,20 @@
           <a:p>
             <a:pPr algn="l"/>
             <a:r>
-              <a:rPr sz="2400" b="1" i="0">
+              <a:rPr sz="2280" b="1" i="0">
                 <a:solidFill>
                   <a:srgbClr val="1A1A1A"/>
                 </a:solidFill>
-                <a:latin typeface="Century Schoolbook"/>
+                <a:latin typeface="Lexend"/>
               </a:rPr>
               <a:t>C.   </a:t>
             </a:r>
             <a:r>
-              <a:rPr sz="2400" b="0" i="0">
+              <a:rPr sz="2280" b="0" i="0">
                 <a:solidFill>
                   <a:srgbClr val="1A1A1A"/>
                 </a:solidFill>
-                <a:latin typeface="Century Schoolbook"/>
+                <a:latin typeface="Lexend"/>
               </a:rPr>
               <a:t>−8</a:t>
             </a:r>
@@ -9310,7 +9728,7 @@
         </p:nvSpPr>
         <p:spPr>
           <a:xfrm>
-            <a:off x="6629400" y="4323919"/>
+            <a:off x="6629400" y="4299535"/>
             <a:ext cx="4572000" cy="548640"/>
           </a:xfrm>
           <a:prstGeom prst="rect">
@@ -9326,20 +9744,20 @@
           <a:p>
             <a:pPr algn="l"/>
             <a:r>
-              <a:rPr sz="2400" b="1" i="0">
+              <a:rPr sz="2280" b="1" i="0">
                 <a:solidFill>
                   <a:srgbClr val="1A1A1A"/>
                 </a:solidFill>
-                <a:latin typeface="Century Schoolbook"/>
+                <a:latin typeface="Lexend"/>
               </a:rPr>
               <a:t>D.   </a:t>
             </a:r>
             <a:r>
-              <a:rPr sz="2400" b="0" i="0">
+              <a:rPr sz="2280" b="0" i="0">
                 <a:solidFill>
                   <a:srgbClr val="1A1A1A"/>
                 </a:solidFill>
-                <a:latin typeface="Century Schoolbook"/>
+                <a:latin typeface="Lexend"/>
               </a:rPr>
               <a:t>4</a:t>
             </a:r>
@@ -9354,7 +9772,7 @@
         </p:nvSpPr>
         <p:spPr>
           <a:xfrm>
-            <a:off x="777240" y="5329759"/>
+            <a:off x="777240" y="5305375"/>
             <a:ext cx="10607040" cy="457200"/>
           </a:xfrm>
           <a:prstGeom prst="rect">
@@ -9370,11 +9788,11 @@
           <a:p>
             <a:pPr algn="ctr"/>
             <a:r>
-              <a:rPr sz="2600" b="1" i="0">
+              <a:rPr sz="2470" b="1" i="0">
                 <a:solidFill>
                   <a:srgbClr val="1A1A1A"/>
                 </a:solidFill>
-                <a:latin typeface="Century Schoolbook"/>
+                <a:latin typeface="Lexend"/>
               </a:rPr>
               <a:t>Answer it.</a:t>
             </a:r>
@@ -9423,11 +9841,11 @@
           <a:p>
             <a:pPr algn="l"/>
             <a:r>
-              <a:rPr sz="3400" b="1" i="0">
+              <a:rPr sz="3229" b="1" i="0">
                 <a:solidFill>
                   <a:srgbClr val="1A1A1A"/>
                 </a:solidFill>
-                <a:latin typeface="Century Schoolbook"/>
+                <a:latin typeface="Lexend"/>
               </a:rPr>
               <a:t>Whiteboards   ·   Question 6 of 9</a:t>
             </a:r>
@@ -9563,11 +9981,11 @@
           <a:p>
             <a:pPr algn="l"/>
             <a:r>
-              <a:rPr sz="1100" b="0" i="1">
+              <a:rPr sz="1040" b="0" i="0">
                 <a:solidFill>
                   <a:srgbClr val="6B6B6B"/>
                 </a:solidFill>
-                <a:latin typeface="Century Schoolbook"/>
+                <a:latin typeface="Lexend"/>
               </a:rPr>
               <a:t>Grade 7 Accelerated · Unit 4 · Lesson 5 — Evaluating Expressions with Radicals</a:t>
             </a:r>
@@ -9598,11 +10016,11 @@
           <a:p>
             <a:pPr algn="r"/>
             <a:r>
-              <a:rPr sz="1100" b="0" i="0">
+              <a:rPr sz="1040" b="0" i="0">
                 <a:solidFill>
                   <a:srgbClr val="6B6B6B"/>
                 </a:solidFill>
-                <a:latin typeface="Century Schoolbook"/>
+                <a:latin typeface="Lexend"/>
               </a:rPr>
               <a:t>26</a:t>
             </a:r>
@@ -9611,7 +10029,7 @@
       </p:sp>
       <p:pic>
         <p:nvPicPr>
-          <p:cNvPr id="8" name="Picture 7" descr="e2d33019ea26f919.png"/>
+          <p:cNvPr id="8" name="Picture 7" descr="c05f88468ec8db72.png"/>
           <p:cNvPicPr>
             <a:picLocks noChangeAspect="1"/>
           </p:cNvPicPr>
@@ -9625,8 +10043,8 @@
         </p:blipFill>
         <p:spPr>
           <a:xfrm>
-            <a:off x="5521452" y="2103120"/>
-            <a:ext cx="1118616" cy="502920"/>
+            <a:off x="5535167" y="2103120"/>
+            <a:ext cx="1091184" cy="478536"/>
           </a:xfrm>
           <a:prstGeom prst="rect">
             <a:avLst/>
@@ -9641,7 +10059,7 @@
         </p:nvSpPr>
         <p:spPr>
           <a:xfrm>
-            <a:off x="777240" y="2880359"/>
+            <a:off x="777240" y="2855975"/>
             <a:ext cx="10607040" cy="465151"/>
           </a:xfrm>
           <a:prstGeom prst="rect">
@@ -9657,27 +10075,110 @@
           <a:p>
             <a:pPr algn="ctr"/>
             <a:r>
-              <a:rPr sz="2600" b="0" i="0">
+              <a:rPr sz="2470" b="0" i="0">
                 <a:solidFill>
                   <a:srgbClr val="1A1A1A"/>
                 </a:solidFill>
-                <a:latin typeface="Century Schoolbook"/>
+                <a:latin typeface="Lexend"/>
               </a:rPr>
               <a:t>Which is the value?</a:t>
             </a:r>
           </a:p>
         </p:txBody>
       </p:sp>
-      <p:sp>
-        <p:nvSpPr>
-          <p:cNvPr id="10" name="TextBox 9"/>
-          <p:cNvSpPr txBox="1"/>
-          <p:nvPr/>
-        </p:nvSpPr>
-        <p:spPr>
-          <a:xfrm>
-            <a:off x="1874519" y="3546679"/>
-            <a:ext cx="4572000" cy="548640"/>
+      <p:pic>
+        <p:nvPicPr>
+          <p:cNvPr id="10" name="Picture 9" descr="fcf33c76384f23a0.png"/>
+          <p:cNvPicPr>
+            <a:picLocks noChangeAspect="1"/>
+          </p:cNvPicPr>
+          <p:nvPr/>
+        </p:nvPicPr>
+        <p:blipFill>
+          <a:blip r:embed="rId3"/>
+          <a:stretch>
+            <a:fillRect/>
+          </a:stretch>
+        </p:blipFill>
+        <p:spPr>
+          <a:xfrm>
+            <a:off x="2906187" y="3560395"/>
+            <a:ext cx="3538728" cy="320040"/>
+          </a:xfrm>
+          <a:prstGeom prst="rect">
+            <a:avLst/>
+          </a:prstGeom>
+        </p:spPr>
+      </p:pic>
+      <p:sp>
+        <p:nvSpPr>
+          <p:cNvPr id="11" name="TextBox 10"/>
+          <p:cNvSpPr txBox="1"/>
+          <p:nvPr/>
+        </p:nvSpPr>
+        <p:spPr>
+          <a:xfrm>
+            <a:off x="6444915" y="3491815"/>
+            <a:ext cx="1338233" cy="457200"/>
+          </a:xfrm>
+          <a:prstGeom prst="rect">
+            <a:avLst/>
+          </a:prstGeom>
+          <a:noFill/>
+        </p:spPr>
+        <p:txBody>
+          <a:bodyPr wrap="none" lIns="45720" rIns="45720" tIns="18288" bIns="18288" anchor="ctr">
+            <a:noAutofit/>
+          </a:bodyPr>
+          <a:lstStyle/>
+          <a:p>
+            <a:pPr algn="l"/>
+            <a:r>
+              <a:rPr sz="2750" b="0" i="0">
+                <a:solidFill>
+                  <a:srgbClr val="1A1A1A"/>
+                </a:solidFill>
+                <a:latin typeface="Lexend"/>
+              </a:rPr>
+              <a:t>,   so   </a:t>
+            </a:r>
+          </a:p>
+        </p:txBody>
+      </p:sp>
+      <p:pic>
+        <p:nvPicPr>
+          <p:cNvPr id="12" name="Picture 11" descr="8c7dac3379df930d.png"/>
+          <p:cNvPicPr>
+            <a:picLocks noChangeAspect="1"/>
+          </p:cNvPicPr>
+          <p:nvPr/>
+        </p:nvPicPr>
+        <p:blipFill>
+          <a:blip r:embed="rId4"/>
+          <a:stretch>
+            <a:fillRect/>
+          </a:stretch>
+        </p:blipFill>
+        <p:spPr>
+          <a:xfrm>
+            <a:off x="7645988" y="3504007"/>
+            <a:ext cx="1725168" cy="432816"/>
+          </a:xfrm>
+          <a:prstGeom prst="rect">
+            <a:avLst/>
+          </a:prstGeom>
+        </p:spPr>
+      </p:pic>
+      <p:sp>
+        <p:nvSpPr>
+          <p:cNvPr id="13" name="TextBox 12"/>
+          <p:cNvSpPr txBox="1"/>
+          <p:nvPr/>
+        </p:nvSpPr>
+        <p:spPr>
+          <a:xfrm>
+            <a:off x="777240" y="4663440"/>
+            <a:ext cx="10607040" cy="548640"/>
           </a:xfrm>
           <a:prstGeom prst="rect">
             <a:avLst/>
@@ -9690,189 +10191,13 @@
           </a:bodyPr>
           <a:lstStyle/>
           <a:p>
-            <a:pPr algn="l"/>
-            <a:r>
-              <a:rPr sz="2400" b="1" i="0">
+            <a:pPr algn="ctr"/>
+            <a:r>
+              <a:rPr sz="3040" b="1" i="0">
                 <a:solidFill>
                   <a:srgbClr val="9E1B32"/>
                 </a:solidFill>
-                <a:latin typeface="Century Schoolbook"/>
-              </a:rPr>
-              <a:t>A.   </a:t>
-            </a:r>
-            <a:r>
-              <a:rPr sz="2400" b="1" i="0">
-                <a:solidFill>
-                  <a:srgbClr val="9E1B32"/>
-                </a:solidFill>
-                <a:latin typeface="Century Schoolbook"/>
-              </a:rPr>
-              <a:t>−4</a:t>
-            </a:r>
-          </a:p>
-        </p:txBody>
-      </p:sp>
-      <p:sp>
-        <p:nvSpPr>
-          <p:cNvPr id="11" name="TextBox 10"/>
-          <p:cNvSpPr txBox="1"/>
-          <p:nvPr/>
-        </p:nvSpPr>
-        <p:spPr>
-          <a:xfrm>
-            <a:off x="6629400" y="3546679"/>
-            <a:ext cx="4572000" cy="548640"/>
-          </a:xfrm>
-          <a:prstGeom prst="rect">
-            <a:avLst/>
-          </a:prstGeom>
-          <a:noFill/>
-        </p:spPr>
-        <p:txBody>
-          <a:bodyPr wrap="square" lIns="45720" rIns="45720" tIns="18288" bIns="18288" anchor="t">
-            <a:spAutoFit/>
-          </a:bodyPr>
-          <a:lstStyle/>
-          <a:p>
-            <a:pPr algn="l"/>
-            <a:r>
-              <a:rPr sz="2400" b="1" i="0">
-                <a:solidFill>
-                  <a:srgbClr val="1A1A1A"/>
-                </a:solidFill>
-                <a:latin typeface="Century Schoolbook"/>
-              </a:rPr>
-              <a:t>B.   </a:t>
-            </a:r>
-            <a:r>
-              <a:rPr sz="2400" b="0" i="0">
-                <a:solidFill>
-                  <a:srgbClr val="1A1A1A"/>
-                </a:solidFill>
-                <a:latin typeface="Century Schoolbook"/>
-              </a:rPr>
-              <a:t>not a real number</a:t>
-            </a:r>
-          </a:p>
-        </p:txBody>
-      </p:sp>
-      <p:sp>
-        <p:nvSpPr>
-          <p:cNvPr id="12" name="TextBox 11"/>
-          <p:cNvSpPr txBox="1"/>
-          <p:nvPr/>
-        </p:nvSpPr>
-        <p:spPr>
-          <a:xfrm>
-            <a:off x="1874519" y="4232479"/>
-            <a:ext cx="4572000" cy="548640"/>
-          </a:xfrm>
-          <a:prstGeom prst="rect">
-            <a:avLst/>
-          </a:prstGeom>
-          <a:noFill/>
-        </p:spPr>
-        <p:txBody>
-          <a:bodyPr wrap="square" lIns="45720" rIns="45720" tIns="18288" bIns="18288" anchor="t">
-            <a:spAutoFit/>
-          </a:bodyPr>
-          <a:lstStyle/>
-          <a:p>
-            <a:pPr algn="l"/>
-            <a:r>
-              <a:rPr sz="2400" b="1" i="0">
-                <a:solidFill>
-                  <a:srgbClr val="1A1A1A"/>
-                </a:solidFill>
-                <a:latin typeface="Century Schoolbook"/>
-              </a:rPr>
-              <a:t>C.   </a:t>
-            </a:r>
-            <a:r>
-              <a:rPr sz="2400" b="0" i="0">
-                <a:solidFill>
-                  <a:srgbClr val="1A1A1A"/>
-                </a:solidFill>
-                <a:latin typeface="Century Schoolbook"/>
-              </a:rPr>
-              <a:t>−8</a:t>
-            </a:r>
-          </a:p>
-        </p:txBody>
-      </p:sp>
-      <p:sp>
-        <p:nvSpPr>
-          <p:cNvPr id="13" name="TextBox 12"/>
-          <p:cNvSpPr txBox="1"/>
-          <p:nvPr/>
-        </p:nvSpPr>
-        <p:spPr>
-          <a:xfrm>
-            <a:off x="6629400" y="4232479"/>
-            <a:ext cx="4572000" cy="548640"/>
-          </a:xfrm>
-          <a:prstGeom prst="rect">
-            <a:avLst/>
-          </a:prstGeom>
-          <a:noFill/>
-        </p:spPr>
-        <p:txBody>
-          <a:bodyPr wrap="square" lIns="45720" rIns="45720" tIns="18288" bIns="18288" anchor="t">
-            <a:spAutoFit/>
-          </a:bodyPr>
-          <a:lstStyle/>
-          <a:p>
-            <a:pPr algn="l"/>
-            <a:r>
-              <a:rPr sz="2400" b="1" i="0">
-                <a:solidFill>
-                  <a:srgbClr val="1A1A1A"/>
-                </a:solidFill>
-                <a:latin typeface="Century Schoolbook"/>
-              </a:rPr>
-              <a:t>D.   </a:t>
-            </a:r>
-            <a:r>
-              <a:rPr sz="2400" b="0" i="0">
-                <a:solidFill>
-                  <a:srgbClr val="1A1A1A"/>
-                </a:solidFill>
-                <a:latin typeface="Century Schoolbook"/>
-              </a:rPr>
-              <a:t>4</a:t>
-            </a:r>
-          </a:p>
-        </p:txBody>
-      </p:sp>
-      <p:sp>
-        <p:nvSpPr>
-          <p:cNvPr id="14" name="TextBox 13"/>
-          <p:cNvSpPr txBox="1"/>
-          <p:nvPr/>
-        </p:nvSpPr>
-        <p:spPr>
-          <a:xfrm>
-            <a:off x="777240" y="5238319"/>
-            <a:ext cx="10607040" cy="548640"/>
-          </a:xfrm>
-          <a:prstGeom prst="rect">
-            <a:avLst/>
-          </a:prstGeom>
-          <a:noFill/>
-        </p:spPr>
-        <p:txBody>
-          <a:bodyPr wrap="square" lIns="45720" rIns="45720" tIns="18288" bIns="18288" anchor="t">
-            <a:spAutoFit/>
-          </a:bodyPr>
-          <a:lstStyle/>
-          <a:p>
-            <a:pPr algn="ctr"/>
-            <a:r>
-              <a:rPr sz="3200" b="1" i="0">
-                <a:solidFill>
-                  <a:srgbClr val="9E1B32"/>
-                </a:solidFill>
-                <a:latin typeface="Century Schoolbook"/>
+                <a:latin typeface="Lexend"/>
               </a:rPr>
               <a:t>Answer:   A — −4</a:t>
             </a:r>
@@ -9921,11 +10246,11 @@
           <a:p>
             <a:pPr algn="l"/>
             <a:r>
-              <a:rPr sz="3400" b="1" i="0">
+              <a:rPr sz="3229" b="1" i="0">
                 <a:solidFill>
                   <a:srgbClr val="1A1A1A"/>
                 </a:solidFill>
-                <a:latin typeface="Century Schoolbook"/>
+                <a:latin typeface="Lexend"/>
               </a:rPr>
               <a:t>Whiteboards   ·   Question 7 of 9</a:t>
             </a:r>
@@ -10061,11 +10386,11 @@
           <a:p>
             <a:pPr algn="l"/>
             <a:r>
-              <a:rPr sz="1100" b="0" i="1">
+              <a:rPr sz="1040" b="0" i="0">
                 <a:solidFill>
                   <a:srgbClr val="6B6B6B"/>
                 </a:solidFill>
-                <a:latin typeface="Century Schoolbook"/>
+                <a:latin typeface="Lexend"/>
               </a:rPr>
               <a:t>Grade 7 Accelerated · Unit 4 · Lesson 5 — Evaluating Expressions with Radicals</a:t>
             </a:r>
@@ -10096,11 +10421,11 @@
           <a:p>
             <a:pPr algn="r"/>
             <a:r>
-              <a:rPr sz="1100" b="0" i="0">
+              <a:rPr sz="1040" b="0" i="0">
                 <a:solidFill>
                   <a:srgbClr val="6B6B6B"/>
                 </a:solidFill>
-                <a:latin typeface="Century Schoolbook"/>
+                <a:latin typeface="Lexend"/>
               </a:rPr>
               <a:t>27</a:t>
             </a:r>
@@ -10109,7 +10434,7 @@
       </p:sp>
       <p:pic>
         <p:nvPicPr>
-          <p:cNvPr id="8" name="Picture 7" descr="a9ee2603fdcbc1fc.png"/>
+          <p:cNvPr id="8" name="Picture 7" descr="a2c664b248cf7d61.png"/>
           <p:cNvPicPr>
             <a:picLocks noChangeAspect="1"/>
           </p:cNvPicPr>
@@ -10123,8 +10448,8 @@
         </p:blipFill>
         <p:spPr>
           <a:xfrm>
-            <a:off x="5113019" y="2194560"/>
-            <a:ext cx="1935480" cy="813816"/>
+            <a:off x="5129783" y="2194560"/>
+            <a:ext cx="1901952" cy="792480"/>
           </a:xfrm>
           <a:prstGeom prst="rect">
             <a:avLst/>
@@ -10155,11 +10480,11 @@
           <a:p>
             <a:pPr algn="ctr"/>
             <a:r>
-              <a:rPr sz="2600" b="1" i="0">
+              <a:rPr sz="2470" b="1" i="0">
                 <a:solidFill>
                   <a:srgbClr val="1A1A1A"/>
                 </a:solidFill>
-                <a:latin typeface="Century Schoolbook"/>
+                <a:latin typeface="Lexend"/>
               </a:rPr>
               <a:t>Answer it.</a:t>
             </a:r>
@@ -10208,11 +10533,11 @@
           <a:p>
             <a:pPr algn="l"/>
             <a:r>
-              <a:rPr sz="3400" b="1" i="0">
+              <a:rPr sz="3229" b="1" i="0">
                 <a:solidFill>
                   <a:srgbClr val="1A1A1A"/>
                 </a:solidFill>
-                <a:latin typeface="Century Schoolbook"/>
+                <a:latin typeface="Lexend"/>
               </a:rPr>
               <a:t>Whiteboards   ·   Question 7 of 9</a:t>
             </a:r>
@@ -10348,11 +10673,11 @@
           <a:p>
             <a:pPr algn="l"/>
             <a:r>
-              <a:rPr sz="1100" b="0" i="1">
+              <a:rPr sz="1040" b="0" i="0">
                 <a:solidFill>
                   <a:srgbClr val="6B6B6B"/>
                 </a:solidFill>
-                <a:latin typeface="Century Schoolbook"/>
+                <a:latin typeface="Lexend"/>
               </a:rPr>
               <a:t>Grade 7 Accelerated · Unit 4 · Lesson 5 — Evaluating Expressions with Radicals</a:t>
             </a:r>
@@ -10383,11 +10708,11 @@
           <a:p>
             <a:pPr algn="r"/>
             <a:r>
-              <a:rPr sz="1100" b="0" i="0">
+              <a:rPr sz="1040" b="0" i="0">
                 <a:solidFill>
                   <a:srgbClr val="6B6B6B"/>
                 </a:solidFill>
-                <a:latin typeface="Century Schoolbook"/>
+                <a:latin typeface="Lexend"/>
               </a:rPr>
               <a:t>28</a:t>
             </a:r>
@@ -10396,7 +10721,7 @@
       </p:sp>
       <p:pic>
         <p:nvPicPr>
-          <p:cNvPr id="8" name="Picture 7" descr="641b2a864f99c54b.png"/>
+          <p:cNvPr id="8" name="Picture 7" descr="69810e14e0abf5cf.png"/>
           <p:cNvPicPr>
             <a:picLocks noChangeAspect="1"/>
           </p:cNvPicPr>
@@ -10410,23 +10735,130 @@
         </p:blipFill>
         <p:spPr>
           <a:xfrm>
-            <a:off x="5116068" y="2103120"/>
-            <a:ext cx="1929384" cy="819912"/>
+            <a:off x="5131308" y="2103120"/>
+            <a:ext cx="1898904" cy="789432"/>
           </a:xfrm>
           <a:prstGeom prst="rect">
             <a:avLst/>
           </a:prstGeom>
         </p:spPr>
       </p:pic>
-      <p:sp>
-        <p:nvSpPr>
-          <p:cNvPr id="9" name="TextBox 8"/>
-          <p:cNvSpPr txBox="1"/>
-          <p:nvPr/>
-        </p:nvSpPr>
-        <p:spPr>
-          <a:xfrm>
-            <a:off x="777240" y="4663440"/>
+      <p:pic>
+        <p:nvPicPr>
+          <p:cNvPr id="9" name="Picture 8" descr="d5959474f07c9a8e.png"/>
+          <p:cNvPicPr>
+            <a:picLocks noChangeAspect="1"/>
+          </p:cNvPicPr>
+          <p:nvPr/>
+        </p:nvPicPr>
+        <p:blipFill>
+          <a:blip r:embed="rId3"/>
+          <a:stretch>
+            <a:fillRect/>
+          </a:stretch>
+        </p:blipFill>
+        <p:spPr>
+          <a:xfrm>
+            <a:off x="4003081" y="3240023"/>
+            <a:ext cx="1133856" cy="716280"/>
+          </a:xfrm>
+          <a:prstGeom prst="rect">
+            <a:avLst/>
+          </a:prstGeom>
+        </p:spPr>
+      </p:pic>
+      <p:sp>
+        <p:nvSpPr>
+          <p:cNvPr id="10" name="TextBox 9"/>
+          <p:cNvSpPr txBox="1"/>
+          <p:nvPr/>
+        </p:nvSpPr>
+        <p:spPr>
+          <a:xfrm>
+            <a:off x="5136937" y="3369563"/>
+            <a:ext cx="1939461" cy="457200"/>
+          </a:xfrm>
+          <a:prstGeom prst="rect">
+            <a:avLst/>
+          </a:prstGeom>
+          <a:noFill/>
+        </p:spPr>
+        <p:txBody>
+          <a:bodyPr wrap="none" lIns="45720" rIns="45720" tIns="18288" bIns="18288" anchor="ctr">
+            <a:noAutofit/>
+          </a:bodyPr>
+          <a:lstStyle/>
+          <a:p>
+            <a:pPr algn="l"/>
+            <a:r>
+              <a:rPr sz="2750" b="0" i="0">
+                <a:solidFill>
+                  <a:srgbClr val="1A1A1A"/>
+                </a:solidFill>
+                <a:latin typeface="Lexend"/>
+              </a:rPr>
+              <a:t>     and     </a:t>
+            </a:r>
+          </a:p>
+        </p:txBody>
+      </p:sp>
+      <p:pic>
+        <p:nvPicPr>
+          <p:cNvPr id="11" name="Picture 10" descr="3da34b52f30f550d.png"/>
+          <p:cNvPicPr>
+            <a:picLocks noChangeAspect="1"/>
+          </p:cNvPicPr>
+          <p:nvPr/>
+        </p:nvPicPr>
+        <p:blipFill>
+          <a:blip r:embed="rId4"/>
+          <a:stretch>
+            <a:fillRect/>
+          </a:stretch>
+        </p:blipFill>
+        <p:spPr>
+          <a:xfrm>
+            <a:off x="6939238" y="3240023"/>
+            <a:ext cx="1316736" cy="716280"/>
+          </a:xfrm>
+          <a:prstGeom prst="rect">
+            <a:avLst/>
+          </a:prstGeom>
+        </p:spPr>
+      </p:pic>
+      <p:pic>
+        <p:nvPicPr>
+          <p:cNvPr id="12" name="Picture 11" descr="bf4ec778f3c995cc.png"/>
+          <p:cNvPicPr>
+            <a:picLocks noChangeAspect="1"/>
+          </p:cNvPicPr>
+          <p:nvPr/>
+        </p:nvPicPr>
+        <p:blipFill>
+          <a:blip r:embed="rId5"/>
+          <a:stretch>
+            <a:fillRect/>
+          </a:stretch>
+        </p:blipFill>
+        <p:spPr>
+          <a:xfrm>
+            <a:off x="4003081" y="4084320"/>
+            <a:ext cx="1310640" cy="606552"/>
+          </a:xfrm>
+          <a:prstGeom prst="rect">
+            <a:avLst/>
+          </a:prstGeom>
+        </p:spPr>
+      </p:pic>
+      <p:sp>
+        <p:nvSpPr>
+          <p:cNvPr id="13" name="TextBox 12"/>
+          <p:cNvSpPr txBox="1"/>
+          <p:nvPr/>
+        </p:nvSpPr>
+        <p:spPr>
+          <a:xfrm>
+            <a:off x="777240" y="4828032"/>
             <a:ext cx="10607040" cy="548640"/>
           </a:xfrm>
           <a:prstGeom prst="rect">
@@ -10442,11 +10874,11 @@
           <a:p>
             <a:pPr algn="ctr"/>
             <a:r>
-              <a:rPr sz="3200" b="1" i="0">
+              <a:rPr sz="3040" b="1" i="0">
                 <a:solidFill>
                   <a:srgbClr val="9E1B32"/>
                 </a:solidFill>
-                <a:latin typeface="Century Schoolbook"/>
+                <a:latin typeface="Lexend"/>
               </a:rPr>
               <a:t>Answer:   2/3</a:t>
             </a:r>
@@ -10495,11 +10927,11 @@
           <a:p>
             <a:pPr algn="l"/>
             <a:r>
-              <a:rPr sz="3400" b="1" i="0">
+              <a:rPr sz="3229" b="1" i="0">
                 <a:solidFill>
                   <a:srgbClr val="1A1A1A"/>
                 </a:solidFill>
-                <a:latin typeface="Century Schoolbook"/>
+                <a:latin typeface="Lexend"/>
               </a:rPr>
               <a:t>Whiteboards   ·   Question 8 of 9</a:t>
             </a:r>
@@ -10635,11 +11067,11 @@
           <a:p>
             <a:pPr algn="l"/>
             <a:r>
-              <a:rPr sz="1100" b="0" i="1">
+              <a:rPr sz="1040" b="0" i="0">
                 <a:solidFill>
                   <a:srgbClr val="6B6B6B"/>
                 </a:solidFill>
-                <a:latin typeface="Century Schoolbook"/>
+                <a:latin typeface="Lexend"/>
               </a:rPr>
               <a:t>Grade 7 Accelerated · Unit 4 · Lesson 5 — Evaluating Expressions with Radicals</a:t>
             </a:r>
@@ -10670,11 +11102,11 @@
           <a:p>
             <a:pPr algn="r"/>
             <a:r>
-              <a:rPr sz="1100" b="0" i="0">
+              <a:rPr sz="1040" b="0" i="0">
                 <a:solidFill>
                   <a:srgbClr val="6B6B6B"/>
                 </a:solidFill>
-                <a:latin typeface="Century Schoolbook"/>
+                <a:latin typeface="Lexend"/>
               </a:rPr>
               <a:t>29</a:t>
             </a:r>
@@ -10683,7 +11115,7 @@
       </p:sp>
       <p:pic>
         <p:nvPicPr>
-          <p:cNvPr id="8" name="Picture 7" descr="2ee0db6a490ede41.png"/>
+          <p:cNvPr id="8" name="Picture 7" descr="00016760c7ea4b37.png"/>
           <p:cNvPicPr>
             <a:picLocks noChangeAspect="1"/>
           </p:cNvPicPr>
@@ -10697,8 +11129,8 @@
         </p:blipFill>
         <p:spPr>
           <a:xfrm>
-            <a:off x="4895087" y="2194560"/>
-            <a:ext cx="2371344" cy="502920"/>
+            <a:off x="4911851" y="2194560"/>
+            <a:ext cx="2337816" cy="478536"/>
           </a:xfrm>
           <a:prstGeom prst="rect">
             <a:avLst/>
@@ -10729,11 +11161,11 @@
           <a:p>
             <a:pPr algn="ctr"/>
             <a:r>
-              <a:rPr sz="2600" b="1" i="0">
+              <a:rPr sz="2470" b="1" i="0">
                 <a:solidFill>
                   <a:srgbClr val="1A1A1A"/>
                 </a:solidFill>
-                <a:latin typeface="Century Schoolbook"/>
+                <a:latin typeface="Lexend"/>
               </a:rPr>
               <a:t>Answer it.</a:t>
             </a:r>
@@ -10782,11 +11214,11 @@
           <a:p>
             <a:pPr algn="l"/>
             <a:r>
-              <a:rPr sz="3600" b="1" i="0">
+              <a:rPr sz="3420" b="1" i="0">
                 <a:solidFill>
                   <a:srgbClr val="1A1A1A"/>
                 </a:solidFill>
-                <a:latin typeface="Century Schoolbook"/>
+                <a:latin typeface="Lexend"/>
               </a:rPr>
               <a:t>Warm-Up</a:t>
             </a:r>
@@ -10922,11 +11354,11 @@
           <a:p>
             <a:pPr algn="l"/>
             <a:r>
-              <a:rPr sz="1100" b="0" i="1">
+              <a:rPr sz="1040" b="0" i="0">
                 <a:solidFill>
                   <a:srgbClr val="6B6B6B"/>
                 </a:solidFill>
-                <a:latin typeface="Century Schoolbook"/>
+                <a:latin typeface="Lexend"/>
               </a:rPr>
               <a:t>Grade 7 Accelerated · Unit 4 · Lesson 5 — Evaluating Expressions with Radicals</a:t>
             </a:r>
@@ -10957,11 +11389,11 @@
           <a:p>
             <a:pPr algn="r"/>
             <a:r>
-              <a:rPr sz="1100" b="0" i="0">
+              <a:rPr sz="1040" b="0" i="0">
                 <a:solidFill>
                   <a:srgbClr val="6B6B6B"/>
                 </a:solidFill>
-                <a:latin typeface="Century Schoolbook"/>
+                <a:latin typeface="Lexend"/>
               </a:rPr>
               <a:t>3</a:t>
             </a:r>
@@ -10977,7 +11409,7 @@
         <p:spPr>
           <a:xfrm>
             <a:off x="1874519" y="1440180"/>
-            <a:ext cx="6984958" cy="457200"/>
+            <a:ext cx="6874777" cy="457200"/>
           </a:xfrm>
           <a:prstGeom prst="rect">
             <a:avLst/>
@@ -10992,11 +11424,11 @@
           <a:p>
             <a:pPr algn="l"/>
             <a:r>
-              <a:rPr sz="2300" b="0" i="0">
+              <a:rPr sz="2180" b="0" i="0">
                 <a:solidFill>
                   <a:srgbClr val="1A1A1A"/>
                 </a:solidFill>
-                <a:latin typeface="Century Schoolbook"/>
+                <a:latin typeface="Lexend"/>
               </a:rPr>
               <a:t>1.   How many significant digits are in  0.0250 ?</a:t>
             </a:r>
@@ -11011,8 +11443,8 @@
         </p:nvSpPr>
         <p:spPr>
           <a:xfrm>
-            <a:off x="9270958" y="1440180"/>
-            <a:ext cx="388052" cy="457200"/>
+            <a:off x="9160777" y="1440180"/>
+            <a:ext cx="384161" cy="457200"/>
           </a:xfrm>
           <a:prstGeom prst="rect">
             <a:avLst/>
@@ -11027,11 +11459,11 @@
           <a:p>
             <a:pPr algn="l"/>
             <a:r>
-              <a:rPr sz="2300" b="1" i="0">
+              <a:rPr sz="2180" b="1" i="0">
                 <a:solidFill>
                   <a:srgbClr val="9E1B32"/>
                 </a:solidFill>
-                <a:latin typeface="Century Schoolbook"/>
+                <a:latin typeface="Lexend"/>
               </a:rPr>
               <a:t>3</a:t>
             </a:r>
@@ -11047,7 +11479,7 @@
         <p:spPr>
           <a:xfrm>
             <a:off x="1874519" y="2052828"/>
-            <a:ext cx="726811" cy="457200"/>
+            <a:ext cx="685699" cy="457200"/>
           </a:xfrm>
           <a:prstGeom prst="rect">
             <a:avLst/>
@@ -11062,11 +11494,11 @@
           <a:p>
             <a:pPr algn="l"/>
             <a:r>
-              <a:rPr sz="2300" b="0" i="0">
+              <a:rPr sz="2180" b="0" i="0">
                 <a:solidFill>
                   <a:srgbClr val="1A1A1A"/>
                 </a:solidFill>
-                <a:latin typeface="Century Schoolbook"/>
+                <a:latin typeface="Lexend"/>
               </a:rPr>
               <a:t>2.   </a:t>
             </a:r>
@@ -11075,7 +11507,7 @@
       </p:sp>
       <p:pic>
         <p:nvPicPr>
-          <p:cNvPr id="11" name="Picture 10" descr="ca17b323d889e390.png"/>
+          <p:cNvPr id="11" name="Picture 10" descr="56d20e268514a0eb.png"/>
           <p:cNvPicPr>
             <a:picLocks noChangeAspect="1"/>
           </p:cNvPicPr>
@@ -11089,8 +11521,8 @@
         </p:blipFill>
         <p:spPr>
           <a:xfrm>
-            <a:off x="2464171" y="2112264"/>
-            <a:ext cx="2441448" cy="338328"/>
+            <a:off x="2423059" y="2116836"/>
+            <a:ext cx="2404872" cy="329184"/>
           </a:xfrm>
           <a:prstGeom prst="rect">
             <a:avLst/>
@@ -11105,8 +11537,8 @@
         </p:nvSpPr>
         <p:spPr>
           <a:xfrm>
-            <a:off x="5454259" y="2052828"/>
-            <a:ext cx="1302101" cy="457200"/>
+            <a:off x="5376571" y="2052828"/>
+            <a:ext cx="1365359" cy="457200"/>
           </a:xfrm>
           <a:prstGeom prst="rect">
             <a:avLst/>
@@ -11121,20 +11553,20 @@
           <a:p>
             <a:pPr algn="l"/>
             <a:r>
-              <a:rPr sz="2300" b="1" i="0">
+              <a:rPr sz="2180" b="1" i="0">
                 <a:solidFill>
                   <a:srgbClr val="9E1B32"/>
                 </a:solidFill>
-                <a:latin typeface="Century Schoolbook"/>
+                <a:latin typeface="Lexend"/>
               </a:rPr>
               <a:t>6 × 10</a:t>
             </a:r>
             <a:r>
-              <a:rPr sz="2300" b="1" i="0" baseline="30000">
+              <a:rPr sz="2180" b="1" i="0" baseline="30000">
                 <a:solidFill>
                   <a:srgbClr val="9E1B32"/>
                 </a:solidFill>
-                <a:latin typeface="Century Schoolbook"/>
+                <a:latin typeface="Lexend"/>
               </a:rPr>
               <a:t>-3</a:t>
             </a:r>
@@ -11150,7 +11582,7 @@
         <p:spPr>
           <a:xfrm>
             <a:off x="1874519" y="2665476"/>
-            <a:ext cx="3064939" cy="457200"/>
+            <a:ext cx="2930351" cy="457200"/>
           </a:xfrm>
           <a:prstGeom prst="rect">
             <a:avLst/>
@@ -11165,11 +11597,11 @@
           <a:p>
             <a:pPr algn="l"/>
             <a:r>
-              <a:rPr sz="2300" b="0" i="0">
+              <a:rPr sz="2180" b="0" i="0">
                 <a:solidFill>
                   <a:srgbClr val="1A1A1A"/>
                 </a:solidFill>
-                <a:latin typeface="Century Schoolbook"/>
+                <a:latin typeface="Lexend"/>
               </a:rPr>
               <a:t>3.   Find the value:  </a:t>
             </a:r>
@@ -11178,7 +11610,7 @@
       </p:sp>
       <p:pic>
         <p:nvPicPr>
-          <p:cNvPr id="14" name="Picture 13" descr="9fe57fc54286b299.png"/>
+          <p:cNvPr id="14" name="Picture 13" descr="97c530a75d29d302.png"/>
           <p:cNvPicPr>
             <a:picLocks noChangeAspect="1"/>
           </p:cNvPicPr>
@@ -11192,8 +11624,8 @@
         </p:blipFill>
         <p:spPr>
           <a:xfrm>
-            <a:off x="4802299" y="2689860"/>
-            <a:ext cx="853440" cy="408432"/>
+            <a:off x="4667711" y="2699004"/>
+            <a:ext cx="844296" cy="390144"/>
           </a:xfrm>
           <a:prstGeom prst="rect">
             <a:avLst/>
@@ -11208,8 +11640,8 @@
         </p:nvSpPr>
         <p:spPr>
           <a:xfrm>
-            <a:off x="6204379" y="2665476"/>
-            <a:ext cx="565792" cy="457200"/>
+            <a:off x="6060647" y="2665476"/>
+            <a:ext cx="570049" cy="457200"/>
           </a:xfrm>
           <a:prstGeom prst="rect">
             <a:avLst/>
@@ -11224,11 +11656,11 @@
           <a:p>
             <a:pPr algn="l"/>
             <a:r>
-              <a:rPr sz="2300" b="1" i="0">
+              <a:rPr sz="2180" b="1" i="0">
                 <a:solidFill>
                   <a:srgbClr val="9E1B32"/>
                 </a:solidFill>
-                <a:latin typeface="Century Schoolbook"/>
+                <a:latin typeface="Lexend"/>
               </a:rPr>
               <a:t>14</a:t>
             </a:r>
@@ -11244,7 +11676,7 @@
         <p:spPr>
           <a:xfrm>
             <a:off x="1874519" y="3278124"/>
-            <a:ext cx="2276518" cy="457200"/>
+            <a:ext cx="2185597" cy="457200"/>
           </a:xfrm>
           <a:prstGeom prst="rect">
             <a:avLst/>
@@ -11259,11 +11691,11 @@
           <a:p>
             <a:pPr algn="l"/>
             <a:r>
-              <a:rPr sz="2300" b="0" i="0">
+              <a:rPr sz="2180" b="0" i="0">
                 <a:solidFill>
                   <a:srgbClr val="1A1A1A"/>
                 </a:solidFill>
-                <a:latin typeface="Century Schoolbook"/>
+                <a:latin typeface="Lexend"/>
               </a:rPr>
               <a:t>4.   Evaluate:  </a:t>
             </a:r>
@@ -11272,7 +11704,7 @@
       </p:sp>
       <p:pic>
         <p:nvPicPr>
-          <p:cNvPr id="17" name="Picture 16" descr="72275cc2b2ecb2ca.png"/>
+          <p:cNvPr id="17" name="Picture 16" descr="b791e832d65b0b80.png"/>
           <p:cNvPicPr>
             <a:picLocks noChangeAspect="1"/>
           </p:cNvPicPr>
@@ -11286,8 +11718,8 @@
         </p:blipFill>
         <p:spPr>
           <a:xfrm>
-            <a:off x="4013878" y="3390900"/>
-            <a:ext cx="1155192" cy="231648"/>
+            <a:off x="3922957" y="3393948"/>
+            <a:ext cx="1182624" cy="225552"/>
           </a:xfrm>
           <a:prstGeom prst="rect">
             <a:avLst/>
@@ -11302,8 +11734,8 @@
         </p:nvSpPr>
         <p:spPr>
           <a:xfrm>
-            <a:off x="5717710" y="3278124"/>
-            <a:ext cx="388052" cy="457200"/>
+            <a:off x="5654221" y="3278124"/>
+            <a:ext cx="386509" cy="457200"/>
           </a:xfrm>
           <a:prstGeom prst="rect">
             <a:avLst/>
@@ -11318,11 +11750,11 @@
           <a:p>
             <a:pPr algn="l"/>
             <a:r>
-              <a:rPr sz="2300" b="1" i="0">
+              <a:rPr sz="2180" b="1" i="0">
                 <a:solidFill>
                   <a:srgbClr val="9E1B32"/>
                 </a:solidFill>
-                <a:latin typeface="Century Schoolbook"/>
+                <a:latin typeface="Lexend"/>
               </a:rPr>
               <a:t>8</a:t>
             </a:r>
@@ -11371,11 +11803,11 @@
           <a:p>
             <a:pPr algn="l"/>
             <a:r>
-              <a:rPr sz="3400" b="1" i="0">
+              <a:rPr sz="3229" b="1" i="0">
                 <a:solidFill>
                   <a:srgbClr val="1A1A1A"/>
                 </a:solidFill>
-                <a:latin typeface="Century Schoolbook"/>
+                <a:latin typeface="Lexend"/>
               </a:rPr>
               <a:t>Whiteboards   ·   Question 8 of 9</a:t>
             </a:r>
@@ -11511,11 +11943,11 @@
           <a:p>
             <a:pPr algn="l"/>
             <a:r>
-              <a:rPr sz="1100" b="0" i="1">
+              <a:rPr sz="1040" b="0" i="0">
                 <a:solidFill>
                   <a:srgbClr val="6B6B6B"/>
                 </a:solidFill>
-                <a:latin typeface="Century Schoolbook"/>
+                <a:latin typeface="Lexend"/>
               </a:rPr>
               <a:t>Grade 7 Accelerated · Unit 4 · Lesson 5 — Evaluating Expressions with Radicals</a:t>
             </a:r>
@@ -11546,11 +11978,11 @@
           <a:p>
             <a:pPr algn="r"/>
             <a:r>
-              <a:rPr sz="1100" b="0" i="0">
+              <a:rPr sz="1040" b="0" i="0">
                 <a:solidFill>
                   <a:srgbClr val="6B6B6B"/>
                 </a:solidFill>
-                <a:latin typeface="Century Schoolbook"/>
+                <a:latin typeface="Lexend"/>
               </a:rPr>
               <a:t>30</a:t>
             </a:r>
@@ -11559,7 +11991,7 @@
       </p:sp>
       <p:pic>
         <p:nvPicPr>
-          <p:cNvPr id="8" name="Picture 7" descr="a56781a24b5677bc.png"/>
+          <p:cNvPr id="8" name="Picture 7" descr="4328986b534c4351.png"/>
           <p:cNvPicPr>
             <a:picLocks noChangeAspect="1"/>
           </p:cNvPicPr>
@@ -11573,23 +12005,95 @@
         </p:blipFill>
         <p:spPr>
           <a:xfrm>
-            <a:off x="4895087" y="2103120"/>
-            <a:ext cx="2371344" cy="502920"/>
+            <a:off x="4908803" y="2103120"/>
+            <a:ext cx="2343912" cy="478536"/>
           </a:xfrm>
           <a:prstGeom prst="rect">
             <a:avLst/>
           </a:prstGeom>
         </p:spPr>
       </p:pic>
-      <p:sp>
-        <p:nvSpPr>
-          <p:cNvPr id="9" name="TextBox 8"/>
-          <p:cNvSpPr txBox="1"/>
-          <p:nvPr/>
-        </p:nvSpPr>
-        <p:spPr>
-          <a:xfrm>
-            <a:off x="777240" y="4663440"/>
+      <p:pic>
+        <p:nvPicPr>
+          <p:cNvPr id="9" name="Picture 8" descr="95835d2aa1fdf8c4.png"/>
+          <p:cNvPicPr>
+            <a:picLocks noChangeAspect="1"/>
+          </p:cNvPicPr>
+          <p:nvPr/>
+        </p:nvPicPr>
+        <p:blipFill>
+          <a:blip r:embed="rId3"/>
+          <a:stretch>
+            <a:fillRect/>
+          </a:stretch>
+        </p:blipFill>
+        <p:spPr>
+          <a:xfrm>
+            <a:off x="4047743" y="2950464"/>
+            <a:ext cx="4175760" cy="368808"/>
+          </a:xfrm>
+          <a:prstGeom prst="rect">
+            <a:avLst/>
+          </a:prstGeom>
+        </p:spPr>
+      </p:pic>
+      <p:pic>
+        <p:nvPicPr>
+          <p:cNvPr id="10" name="Picture 9" descr="b2bdb283546f2e98.png"/>
+          <p:cNvPicPr>
+            <a:picLocks noChangeAspect="1"/>
+          </p:cNvPicPr>
+          <p:nvPr/>
+        </p:nvPicPr>
+        <p:blipFill>
+          <a:blip r:embed="rId4"/>
+          <a:stretch>
+            <a:fillRect/>
+          </a:stretch>
+        </p:blipFill>
+        <p:spPr>
+          <a:xfrm>
+            <a:off x="4047743" y="3432047"/>
+            <a:ext cx="1149096" cy="515112"/>
+          </a:xfrm>
+          <a:prstGeom prst="rect">
+            <a:avLst/>
+          </a:prstGeom>
+        </p:spPr>
+      </p:pic>
+      <p:pic>
+        <p:nvPicPr>
+          <p:cNvPr id="11" name="Picture 10" descr="092197a6c2e194dc.png"/>
+          <p:cNvPicPr>
+            <a:picLocks noChangeAspect="1"/>
+          </p:cNvPicPr>
+          <p:nvPr/>
+        </p:nvPicPr>
+        <p:blipFill>
+          <a:blip r:embed="rId5"/>
+          <a:stretch>
+            <a:fillRect/>
+          </a:stretch>
+        </p:blipFill>
+        <p:spPr>
+          <a:xfrm>
+            <a:off x="4047743" y="4038599"/>
+            <a:ext cx="2319528" cy="515112"/>
+          </a:xfrm>
+          <a:prstGeom prst="rect">
+            <a:avLst/>
+          </a:prstGeom>
+        </p:spPr>
+      </p:pic>
+      <p:sp>
+        <p:nvSpPr>
+          <p:cNvPr id="12" name="TextBox 11"/>
+          <p:cNvSpPr txBox="1"/>
+          <p:nvPr/>
+        </p:nvSpPr>
+        <p:spPr>
+          <a:xfrm>
+            <a:off x="777240" y="4690872"/>
             <a:ext cx="10607040" cy="548640"/>
           </a:xfrm>
           <a:prstGeom prst="rect">
@@ -11605,11 +12109,11 @@
           <a:p>
             <a:pPr algn="ctr"/>
             <a:r>
-              <a:rPr sz="3200" b="1" i="0">
+              <a:rPr sz="3040" b="1" i="0">
                 <a:solidFill>
                   <a:srgbClr val="9E1B32"/>
                 </a:solidFill>
-                <a:latin typeface="Century Schoolbook"/>
+                <a:latin typeface="Lexend"/>
               </a:rPr>
               <a:t>Answer:   1/25</a:t>
             </a:r>
@@ -11658,11 +12162,11 @@
           <a:p>
             <a:pPr algn="l"/>
             <a:r>
-              <a:rPr sz="3400" b="1" i="0">
+              <a:rPr sz="3229" b="1" i="0">
                 <a:solidFill>
                   <a:srgbClr val="1A1A1A"/>
                 </a:solidFill>
-                <a:latin typeface="Century Schoolbook"/>
+                <a:latin typeface="Lexend"/>
               </a:rPr>
               <a:t>Whiteboards   ·   Question 9 of 9</a:t>
             </a:r>
@@ -11798,11 +12302,11 @@
           <a:p>
             <a:pPr algn="l"/>
             <a:r>
-              <a:rPr sz="1100" b="0" i="1">
+              <a:rPr sz="1040" b="0" i="0">
                 <a:solidFill>
                   <a:srgbClr val="6B6B6B"/>
                 </a:solidFill>
-                <a:latin typeface="Century Schoolbook"/>
+                <a:latin typeface="Lexend"/>
               </a:rPr>
               <a:t>Grade 7 Accelerated · Unit 4 · Lesson 5 — Evaluating Expressions with Radicals</a:t>
             </a:r>
@@ -11833,11 +12337,11 @@
           <a:p>
             <a:pPr algn="r"/>
             <a:r>
-              <a:rPr sz="1100" b="0" i="0">
+              <a:rPr sz="1040" b="0" i="0">
                 <a:solidFill>
                   <a:srgbClr val="6B6B6B"/>
                 </a:solidFill>
-                <a:latin typeface="Century Schoolbook"/>
+                <a:latin typeface="Lexend"/>
               </a:rPr>
               <a:t>31</a:t>
             </a:r>
@@ -11852,8 +12356,8 @@
         </p:nvSpPr>
         <p:spPr>
           <a:xfrm>
-            <a:off x="2282364" y="2217420"/>
-            <a:ext cx="2998470" cy="457200"/>
+            <a:off x="2359886" y="2205228"/>
+            <a:ext cx="2969717" cy="457200"/>
           </a:xfrm>
           <a:prstGeom prst="rect">
             <a:avLst/>
@@ -11868,11 +12372,11 @@
           <a:p>
             <a:pPr algn="l"/>
             <a:r>
-              <a:rPr sz="2600" b="0" i="0">
+              <a:rPr sz="2470" b="0" i="0">
                 <a:solidFill>
                   <a:srgbClr val="1A1A1A"/>
                 </a:solidFill>
-                <a:latin typeface="Century Schoolbook"/>
+                <a:latin typeface="Lexend"/>
               </a:rPr>
               <a:t>Simon says that  </a:t>
             </a:r>
@@ -11881,7 +12385,7 @@
       </p:sp>
       <p:pic>
         <p:nvPicPr>
-          <p:cNvPr id="9" name="Picture 8" descr="81cf988981787399.png"/>
+          <p:cNvPr id="9" name="Picture 8" descr="a849ea34284e1e08.png"/>
           <p:cNvPicPr>
             <a:picLocks noChangeAspect="1"/>
           </p:cNvPicPr>
@@ -11895,8 +12399,8 @@
         </p:blipFill>
         <p:spPr>
           <a:xfrm>
-            <a:off x="5143675" y="2194560"/>
-            <a:ext cx="1121664" cy="502920"/>
+            <a:off x="5192443" y="2194560"/>
+            <a:ext cx="1060704" cy="478536"/>
           </a:xfrm>
           <a:prstGeom prst="rect">
             <a:avLst/>
@@ -11911,8 +12415,8 @@
         </p:nvSpPr>
         <p:spPr>
           <a:xfrm>
-            <a:off x="6265339" y="2217420"/>
-            <a:ext cx="3750975" cy="457200"/>
+            <a:off x="6253147" y="2205228"/>
+            <a:ext cx="3685645" cy="457200"/>
           </a:xfrm>
           <a:prstGeom prst="rect">
             <a:avLst/>
@@ -11927,11 +12431,11 @@
           <a:p>
             <a:pPr algn="l"/>
             <a:r>
-              <a:rPr sz="2600" b="0" i="0">
+              <a:rPr sz="2470" b="0" i="0">
                 <a:solidFill>
                   <a:srgbClr val="1A1A1A"/>
                 </a:solidFill>
-                <a:latin typeface="Century Schoolbook"/>
+                <a:latin typeface="Lexend"/>
               </a:rPr>
               <a:t>  is not a real number,</a:t>
             </a:r>
@@ -11946,7 +12450,7 @@
         </p:nvSpPr>
         <p:spPr>
           <a:xfrm>
-            <a:off x="777240" y="2971800"/>
+            <a:off x="777240" y="2947416"/>
             <a:ext cx="10607040" cy="465151"/>
           </a:xfrm>
           <a:prstGeom prst="rect">
@@ -11962,11 +12466,11 @@
           <a:p>
             <a:pPr algn="ctr"/>
             <a:r>
-              <a:rPr sz="2600" b="0" i="0">
+              <a:rPr sz="2470" b="0" i="0">
                 <a:solidFill>
                   <a:srgbClr val="1A1A1A"/>
                 </a:solidFill>
-                <a:latin typeface="Century Schoolbook"/>
+                <a:latin typeface="Lexend"/>
               </a:rPr>
               <a:t>because you cannot take the root of a negative.</a:t>
             </a:r>
@@ -11981,7 +12485,7 @@
         </p:nvSpPr>
         <p:spPr>
           <a:xfrm>
-            <a:off x="777240" y="3546679"/>
+            <a:off x="777240" y="3522295"/>
             <a:ext cx="10607040" cy="465151"/>
           </a:xfrm>
           <a:prstGeom prst="rect">
@@ -11997,11 +12501,11 @@
           <a:p>
             <a:pPr algn="ctr"/>
             <a:r>
-              <a:rPr sz="2600" b="0" i="0">
+              <a:rPr sz="2470" b="0" i="0">
                 <a:solidFill>
                   <a:srgbClr val="1A1A1A"/>
                 </a:solidFill>
-                <a:latin typeface="Century Schoolbook"/>
+                <a:latin typeface="Lexend"/>
               </a:rPr>
               <a:t>Explain why he is wrong, and give the value.</a:t>
             </a:r>
@@ -12032,11 +12536,11 @@
           <a:p>
             <a:pPr algn="ctr"/>
             <a:r>
-              <a:rPr sz="2600" b="1" i="0">
+              <a:rPr sz="2470" b="1" i="0">
                 <a:solidFill>
                   <a:srgbClr val="1A1A1A"/>
                 </a:solidFill>
-                <a:latin typeface="Century Schoolbook"/>
+                <a:latin typeface="Lexend"/>
               </a:rPr>
               <a:t>Write your answer in sentences.</a:t>
             </a:r>
@@ -12085,11 +12589,11 @@
           <a:p>
             <a:pPr algn="l"/>
             <a:r>
-              <a:rPr sz="3400" b="1" i="0">
+              <a:rPr sz="3229" b="1" i="0">
                 <a:solidFill>
                   <a:srgbClr val="1A1A1A"/>
                 </a:solidFill>
-                <a:latin typeface="Century Schoolbook"/>
+                <a:latin typeface="Lexend"/>
               </a:rPr>
               <a:t>Whiteboards   ·   Question 9 of 9</a:t>
             </a:r>
@@ -12225,11 +12729,11 @@
           <a:p>
             <a:pPr algn="l"/>
             <a:r>
-              <a:rPr sz="1100" b="0" i="1">
+              <a:rPr sz="1040" b="0" i="0">
                 <a:solidFill>
                   <a:srgbClr val="6B6B6B"/>
                 </a:solidFill>
-                <a:latin typeface="Century Schoolbook"/>
+                <a:latin typeface="Lexend"/>
               </a:rPr>
               <a:t>Grade 7 Accelerated · Unit 4 · Lesson 5 — Evaluating Expressions with Radicals</a:t>
             </a:r>
@@ -12260,11 +12764,11 @@
           <a:p>
             <a:pPr algn="r"/>
             <a:r>
-              <a:rPr sz="1100" b="0" i="0">
+              <a:rPr sz="1040" b="0" i="0">
                 <a:solidFill>
                   <a:srgbClr val="6B6B6B"/>
                 </a:solidFill>
-                <a:latin typeface="Century Schoolbook"/>
+                <a:latin typeface="Lexend"/>
               </a:rPr>
               <a:t>32</a:t>
             </a:r>
@@ -12279,8 +12783,8 @@
         </p:nvSpPr>
         <p:spPr>
           <a:xfrm>
-            <a:off x="2283888" y="2125979"/>
-            <a:ext cx="2998470" cy="457200"/>
+            <a:off x="2361410" y="2113788"/>
+            <a:ext cx="2969717" cy="457200"/>
           </a:xfrm>
           <a:prstGeom prst="rect">
             <a:avLst/>
@@ -12295,11 +12799,11 @@
           <a:p>
             <a:pPr algn="l"/>
             <a:r>
-              <a:rPr sz="2600" b="0" i="0">
+              <a:rPr sz="2470" b="0" i="0">
                 <a:solidFill>
                   <a:srgbClr val="1A1A1A"/>
                 </a:solidFill>
-                <a:latin typeface="Century Schoolbook"/>
+                <a:latin typeface="Lexend"/>
               </a:rPr>
               <a:t>Simon says that  </a:t>
             </a:r>
@@ -12308,7 +12812,7 @@
       </p:sp>
       <p:pic>
         <p:nvPicPr>
-          <p:cNvPr id="9" name="Picture 8" descr="1d8dbae40789857d.png"/>
+          <p:cNvPr id="9" name="Picture 8" descr="dc8e0a2c2f29ccd6.png"/>
           <p:cNvPicPr>
             <a:picLocks noChangeAspect="1"/>
           </p:cNvPicPr>
@@ -12322,8 +12826,8 @@
         </p:blipFill>
         <p:spPr>
           <a:xfrm>
-            <a:off x="5145199" y="2103120"/>
-            <a:ext cx="1118616" cy="502920"/>
+            <a:off x="5193967" y="2103120"/>
+            <a:ext cx="1057656" cy="478536"/>
           </a:xfrm>
           <a:prstGeom prst="rect">
             <a:avLst/>
@@ -12338,8 +12842,8 @@
         </p:nvSpPr>
         <p:spPr>
           <a:xfrm>
-            <a:off x="6263815" y="2125979"/>
-            <a:ext cx="3750975" cy="457200"/>
+            <a:off x="6251623" y="2113788"/>
+            <a:ext cx="3685645" cy="457200"/>
           </a:xfrm>
           <a:prstGeom prst="rect">
             <a:avLst/>
@@ -12354,11 +12858,11 @@
           <a:p>
             <a:pPr algn="l"/>
             <a:r>
-              <a:rPr sz="2600" b="0" i="0">
+              <a:rPr sz="2470" b="0" i="0">
                 <a:solidFill>
                   <a:srgbClr val="1A1A1A"/>
                 </a:solidFill>
-                <a:latin typeface="Century Schoolbook"/>
+                <a:latin typeface="Lexend"/>
               </a:rPr>
               <a:t>  is not a real number,</a:t>
             </a:r>
@@ -12373,7 +12877,7 @@
         </p:nvSpPr>
         <p:spPr>
           <a:xfrm>
-            <a:off x="777240" y="2880359"/>
+            <a:off x="777240" y="2855975"/>
             <a:ext cx="10607040" cy="465151"/>
           </a:xfrm>
           <a:prstGeom prst="rect">
@@ -12389,11 +12893,11 @@
           <a:p>
             <a:pPr algn="ctr"/>
             <a:r>
-              <a:rPr sz="2600" b="0" i="0">
+              <a:rPr sz="2470" b="0" i="0">
                 <a:solidFill>
                   <a:srgbClr val="1A1A1A"/>
                 </a:solidFill>
-                <a:latin typeface="Century Schoolbook"/>
+                <a:latin typeface="Lexend"/>
               </a:rPr>
               <a:t>because you cannot take the root of a negative.</a:t>
             </a:r>
@@ -12408,7 +12912,7 @@
         </p:nvSpPr>
         <p:spPr>
           <a:xfrm>
-            <a:off x="777240" y="3455239"/>
+            <a:off x="777240" y="3430855"/>
             <a:ext cx="10607040" cy="465151"/>
           </a:xfrm>
           <a:prstGeom prst="rect">
@@ -12424,11 +12928,11 @@
           <a:p>
             <a:pPr algn="ctr"/>
             <a:r>
-              <a:rPr sz="2600" b="0" i="0">
+              <a:rPr sz="2470" b="0" i="0">
                 <a:solidFill>
                   <a:srgbClr val="1A1A1A"/>
                 </a:solidFill>
-                <a:latin typeface="Century Schoolbook"/>
+                <a:latin typeface="Lexend"/>
               </a:rPr>
               <a:t>Explain why he is wrong, and give the value.</a:t>
             </a:r>
@@ -12443,7 +12947,125 @@
         </p:nvSpPr>
         <p:spPr>
           <a:xfrm>
-            <a:off x="777240" y="4663440"/>
+            <a:off x="893154" y="4056026"/>
+            <a:ext cx="10512370" cy="457200"/>
+          </a:xfrm>
+          <a:prstGeom prst="rect">
+            <a:avLst/>
+          </a:prstGeom>
+          <a:noFill/>
+        </p:spPr>
+        <p:txBody>
+          <a:bodyPr wrap="none" lIns="45720" rIns="45720" tIns="18288" bIns="18288" anchor="ctr">
+            <a:noAutofit/>
+          </a:bodyPr>
+          <a:lstStyle/>
+          <a:p>
+            <a:pPr algn="l"/>
+            <a:r>
+              <a:rPr sz="2330" b="0" i="0">
+                <a:solidFill>
+                  <a:srgbClr val="1A1A1A"/>
+                </a:solidFill>
+                <a:latin typeface="Lexend"/>
+              </a:rPr>
+              <a:t>A cube root can be negative: three negatives multiply to a negative.</a:t>
+            </a:r>
+          </a:p>
+        </p:txBody>
+      </p:sp>
+      <p:pic>
+        <p:nvPicPr>
+          <p:cNvPr id="14" name="Picture 13" descr="cbf83985c3ed1e84.png"/>
+          <p:cNvPicPr>
+            <a:picLocks noChangeAspect="1"/>
+          </p:cNvPicPr>
+          <p:nvPr/>
+        </p:nvPicPr>
+        <p:blipFill>
+          <a:blip r:embed="rId3"/>
+          <a:stretch>
+            <a:fillRect/>
+          </a:stretch>
+        </p:blipFill>
+        <p:spPr>
+          <a:xfrm>
+            <a:off x="948018" y="4654958"/>
+            <a:ext cx="2889504" cy="265176"/>
+          </a:xfrm>
+          <a:prstGeom prst="rect">
+            <a:avLst/>
+          </a:prstGeom>
+        </p:spPr>
+      </p:pic>
+      <p:sp>
+        <p:nvSpPr>
+          <p:cNvPr id="15" name="TextBox 14"/>
+          <p:cNvSpPr txBox="1"/>
+          <p:nvPr/>
+        </p:nvSpPr>
+        <p:spPr>
+          <a:xfrm>
+            <a:off x="3837522" y="4558946"/>
+            <a:ext cx="1163085" cy="457200"/>
+          </a:xfrm>
+          <a:prstGeom prst="rect">
+            <a:avLst/>
+          </a:prstGeom>
+          <a:noFill/>
+        </p:spPr>
+        <p:txBody>
+          <a:bodyPr wrap="none" lIns="45720" rIns="45720" tIns="18288" bIns="18288" anchor="ctr">
+            <a:noAutofit/>
+          </a:bodyPr>
+          <a:lstStyle/>
+          <a:p>
+            <a:pPr algn="l"/>
+            <a:r>
+              <a:rPr sz="2330" b="0" i="0">
+                <a:solidFill>
+                  <a:srgbClr val="1A1A1A"/>
+                </a:solidFill>
+                <a:latin typeface="Lexend"/>
+              </a:rPr>
+              <a:t>,   so   </a:t>
+            </a:r>
+          </a:p>
+        </p:txBody>
+      </p:sp>
+      <p:pic>
+        <p:nvPicPr>
+          <p:cNvPr id="16" name="Picture 15" descr="590e54612c7e6e68.png"/>
+          <p:cNvPicPr>
+            <a:picLocks noChangeAspect="1"/>
+          </p:cNvPicPr>
+          <p:nvPr/>
+        </p:nvPicPr>
+        <p:blipFill>
+          <a:blip r:embed="rId4"/>
+          <a:stretch>
+            <a:fillRect/>
+          </a:stretch>
+        </p:blipFill>
+        <p:spPr>
+          <a:xfrm>
+            <a:off x="4863447" y="4603142"/>
+            <a:ext cx="1405128" cy="368808"/>
+          </a:xfrm>
+          <a:prstGeom prst="rect">
+            <a:avLst/>
+          </a:prstGeom>
+        </p:spPr>
+      </p:pic>
+      <p:sp>
+        <p:nvSpPr>
+          <p:cNvPr id="17" name="TextBox 16"/>
+          <p:cNvSpPr txBox="1"/>
+          <p:nvPr/>
+        </p:nvSpPr>
+        <p:spPr>
+          <a:xfrm>
+            <a:off x="777240" y="5130446"/>
             <a:ext cx="10607040" cy="548640"/>
           </a:xfrm>
           <a:prstGeom prst="rect">
@@ -12459,11 +13081,11 @@
           <a:p>
             <a:pPr algn="ctr"/>
             <a:r>
-              <a:rPr sz="3200" b="1" i="0">
+              <a:rPr sz="3040" b="1" i="0">
                 <a:solidFill>
                   <a:srgbClr val="9E1B32"/>
                 </a:solidFill>
-                <a:latin typeface="Century Schoolbook"/>
+                <a:latin typeface="Lexend"/>
               </a:rPr>
               <a:t>Answer:   −3</a:t>
             </a:r>
@@ -12512,11 +13134,11 @@
           <a:p>
             <a:pPr algn="l"/>
             <a:r>
-              <a:rPr sz="3600" b="1" i="0">
+              <a:rPr sz="3420" b="1" i="0">
                 <a:solidFill>
                   <a:srgbClr val="1A1A1A"/>
                 </a:solidFill>
-                <a:latin typeface="Century Schoolbook"/>
+                <a:latin typeface="Lexend"/>
               </a:rPr>
               <a:t>Independent Set</a:t>
             </a:r>
@@ -12652,11 +13274,11 @@
           <a:p>
             <a:pPr algn="l"/>
             <a:r>
-              <a:rPr sz="1100" b="0" i="1">
+              <a:rPr sz="1040" b="0" i="0">
                 <a:solidFill>
                   <a:srgbClr val="6B6B6B"/>
                 </a:solidFill>
-                <a:latin typeface="Century Schoolbook"/>
+                <a:latin typeface="Lexend"/>
               </a:rPr>
               <a:t>Grade 7 Accelerated · Unit 4 · Lesson 5 — Evaluating Expressions with Radicals</a:t>
             </a:r>
@@ -12687,11 +13309,11 @@
           <a:p>
             <a:pPr algn="r"/>
             <a:r>
-              <a:rPr sz="1100" b="0" i="0">
+              <a:rPr sz="1040" b="0" i="0">
                 <a:solidFill>
                   <a:srgbClr val="6B6B6B"/>
                 </a:solidFill>
-                <a:latin typeface="Century Schoolbook"/>
+                <a:latin typeface="Lexend"/>
               </a:rPr>
               <a:t>33</a:t>
             </a:r>
@@ -12722,11 +13344,11 @@
           <a:p>
             <a:pPr algn="l"/>
             <a:r>
-              <a:rPr sz="2300" b="1" i="0">
+              <a:rPr sz="2180" b="1" i="0">
                 <a:solidFill>
                   <a:srgbClr val="0B5394"/>
                 </a:solidFill>
-                <a:latin typeface="Century Schoolbook"/>
+                <a:latin typeface="Lexend"/>
               </a:rPr>
               <a:t>1.</a:t>
             </a:r>
@@ -12735,7 +13357,7 @@
       </p:sp>
       <p:pic>
         <p:nvPicPr>
-          <p:cNvPr id="9" name="Picture 8" descr="6917906ce232438c.png"/>
+          <p:cNvPr id="9" name="Picture 8" descr="e838230098c64976.png"/>
           <p:cNvPicPr>
             <a:picLocks noChangeAspect="1"/>
           </p:cNvPicPr>
@@ -12749,8 +13371,8 @@
         </p:blipFill>
         <p:spPr>
           <a:xfrm>
-            <a:off x="1627632" y="1519428"/>
-            <a:ext cx="853440" cy="408432"/>
+            <a:off x="1627632" y="1528572"/>
+            <a:ext cx="862584" cy="390144"/>
           </a:xfrm>
           <a:prstGeom prst="rect">
             <a:avLst/>
@@ -12781,11 +13403,11 @@
           <a:p>
             <a:pPr algn="l"/>
             <a:r>
-              <a:rPr sz="2300" b="1" i="0">
+              <a:rPr sz="2180" b="1" i="0">
                 <a:solidFill>
                   <a:srgbClr val="0B5394"/>
                 </a:solidFill>
-                <a:latin typeface="Century Schoolbook"/>
+                <a:latin typeface="Lexend"/>
               </a:rPr>
               <a:t>2.</a:t>
             </a:r>
@@ -12794,7 +13416,7 @@
       </p:sp>
       <p:pic>
         <p:nvPicPr>
-          <p:cNvPr id="11" name="Picture 10" descr="38e9b447bed4dddc.png"/>
+          <p:cNvPr id="11" name="Picture 10" descr="58c968e8bf18d130.png"/>
           <p:cNvPicPr>
             <a:picLocks noChangeAspect="1"/>
           </p:cNvPicPr>
@@ -12808,8 +13430,8 @@
         </p:blipFill>
         <p:spPr>
           <a:xfrm>
-            <a:off x="1627632" y="2113787"/>
-            <a:ext cx="914400" cy="408432"/>
+            <a:off x="1627632" y="2122931"/>
+            <a:ext cx="862584" cy="390144"/>
           </a:xfrm>
           <a:prstGeom prst="rect">
             <a:avLst/>
@@ -12840,11 +13462,11 @@
           <a:p>
             <a:pPr algn="l"/>
             <a:r>
-              <a:rPr sz="2300" b="1" i="0">
+              <a:rPr sz="2180" b="1" i="0">
                 <a:solidFill>
                   <a:srgbClr val="0B5394"/>
                 </a:solidFill>
-                <a:latin typeface="Century Schoolbook"/>
+                <a:latin typeface="Lexend"/>
               </a:rPr>
               <a:t>3.</a:t>
             </a:r>
@@ -12853,7 +13475,7 @@
       </p:sp>
       <p:pic>
         <p:nvPicPr>
-          <p:cNvPr id="13" name="Picture 12" descr="9d8d0abecd2df022.png"/>
+          <p:cNvPr id="13" name="Picture 12" descr="ad02206568954f67.png"/>
           <p:cNvPicPr>
             <a:picLocks noChangeAspect="1"/>
           </p:cNvPicPr>
@@ -12867,8 +13489,8 @@
         </p:blipFill>
         <p:spPr>
           <a:xfrm>
-            <a:off x="1627632" y="2708147"/>
-            <a:ext cx="1310640" cy="408432"/>
+            <a:off x="1627632" y="2717291"/>
+            <a:ext cx="1271016" cy="390144"/>
           </a:xfrm>
           <a:prstGeom prst="rect">
             <a:avLst/>
@@ -12883,7 +13505,7 @@
         </p:nvSpPr>
         <p:spPr>
           <a:xfrm>
-            <a:off x="960120" y="3403091"/>
+            <a:off x="960120" y="3392423"/>
             <a:ext cx="548640" cy="457200"/>
           </a:xfrm>
           <a:prstGeom prst="rect">
@@ -12899,11 +13521,11 @@
           <a:p>
             <a:pPr algn="l"/>
             <a:r>
-              <a:rPr sz="2300" b="1" i="0">
+              <a:rPr sz="2180" b="1" i="0">
                 <a:solidFill>
                   <a:srgbClr val="0B5394"/>
                 </a:solidFill>
-                <a:latin typeface="Century Schoolbook"/>
+                <a:latin typeface="Lexend"/>
               </a:rPr>
               <a:t>4.</a:t>
             </a:r>
@@ -12912,7 +13534,7 @@
       </p:sp>
       <p:pic>
         <p:nvPicPr>
-          <p:cNvPr id="15" name="Picture 14" descr="89915d7fda969e55.png"/>
+          <p:cNvPr id="15" name="Picture 14" descr="64b69718fca3659e.png"/>
           <p:cNvPicPr>
             <a:picLocks noChangeAspect="1"/>
           </p:cNvPicPr>
@@ -12927,7 +13549,7 @@
         <p:spPr>
           <a:xfrm>
             <a:off x="1627632" y="3300983"/>
-            <a:ext cx="563880" cy="661416"/>
+            <a:ext cx="566928" cy="640080"/>
           </a:xfrm>
           <a:prstGeom prst="rect">
             <a:avLst/>
@@ -12942,7 +13564,7 @@
         </p:nvSpPr>
         <p:spPr>
           <a:xfrm>
-            <a:off x="960120" y="4122419"/>
+            <a:off x="960120" y="4101083"/>
             <a:ext cx="548640" cy="457200"/>
           </a:xfrm>
           <a:prstGeom prst="rect">
@@ -12958,11 +13580,11 @@
           <a:p>
             <a:pPr algn="l"/>
             <a:r>
-              <a:rPr sz="2300" b="1" i="0">
+              <a:rPr sz="2180" b="1" i="0">
                 <a:solidFill>
                   <a:srgbClr val="0B5394"/>
                 </a:solidFill>
-                <a:latin typeface="Century Schoolbook"/>
+                <a:latin typeface="Lexend"/>
               </a:rPr>
               <a:t>5.</a:t>
             </a:r>
@@ -12971,7 +13593,7 @@
       </p:sp>
       <p:pic>
         <p:nvPicPr>
-          <p:cNvPr id="17" name="Picture 16" descr="45776c96e77cc391.png"/>
+          <p:cNvPr id="17" name="Picture 16" descr="3f6f87e04710f316.png"/>
           <p:cNvPicPr>
             <a:picLocks noChangeAspect="1"/>
           </p:cNvPicPr>
@@ -12985,8 +13607,8 @@
         </p:blipFill>
         <p:spPr>
           <a:xfrm>
-            <a:off x="1627632" y="4146804"/>
-            <a:ext cx="1466088" cy="408432"/>
+            <a:off x="1627632" y="4134612"/>
+            <a:ext cx="1484376" cy="390144"/>
           </a:xfrm>
           <a:prstGeom prst="rect">
             <a:avLst/>
@@ -13001,7 +13623,7 @@
         </p:nvSpPr>
         <p:spPr>
           <a:xfrm>
-            <a:off x="960120" y="4785360"/>
+            <a:off x="960120" y="4760976"/>
             <a:ext cx="548640" cy="457200"/>
           </a:xfrm>
           <a:prstGeom prst="rect">
@@ -13017,11 +13639,11 @@
           <a:p>
             <a:pPr algn="l"/>
             <a:r>
-              <a:rPr sz="2300" b="1" i="0">
+              <a:rPr sz="2180" b="1" i="0">
                 <a:solidFill>
                   <a:srgbClr val="0B5394"/>
                 </a:solidFill>
-                <a:latin typeface="Century Schoolbook"/>
+                <a:latin typeface="Lexend"/>
               </a:rPr>
               <a:t>6.</a:t>
             </a:r>
@@ -13030,7 +13652,7 @@
       </p:sp>
       <p:pic>
         <p:nvPicPr>
-          <p:cNvPr id="19" name="Picture 18" descr="db016c3e3a507b57.png"/>
+          <p:cNvPr id="19" name="Picture 18" descr="07d37168da608794.png"/>
           <p:cNvPicPr>
             <a:picLocks noChangeAspect="1"/>
           </p:cNvPicPr>
@@ -13044,8 +13666,8 @@
         </p:blipFill>
         <p:spPr>
           <a:xfrm>
-            <a:off x="1627632" y="4739640"/>
-            <a:ext cx="2386584" cy="548640"/>
+            <a:off x="1627632" y="4718304"/>
+            <a:ext cx="2304288" cy="542544"/>
           </a:xfrm>
           <a:prstGeom prst="rect">
             <a:avLst/>
@@ -13094,11 +13716,11 @@
           <a:p>
             <a:pPr algn="l"/>
             <a:r>
-              <a:rPr sz="3600" b="1" i="0">
+              <a:rPr sz="3420" b="1" i="0">
                 <a:solidFill>
                   <a:srgbClr val="1A1A1A"/>
                 </a:solidFill>
-                <a:latin typeface="Century Schoolbook"/>
+                <a:latin typeface="Lexend"/>
               </a:rPr>
               <a:t>IXL</a:t>
             </a:r>
@@ -13234,11 +13856,11 @@
           <a:p>
             <a:pPr algn="l"/>
             <a:r>
-              <a:rPr sz="1100" b="0" i="1">
+              <a:rPr sz="1040" b="0" i="0">
                 <a:solidFill>
                   <a:srgbClr val="6B6B6B"/>
                 </a:solidFill>
-                <a:latin typeface="Century Schoolbook"/>
+                <a:latin typeface="Lexend"/>
               </a:rPr>
               <a:t>Grade 7 Accelerated · Unit 4 · Lesson 5 — Evaluating Expressions with Radicals</a:t>
             </a:r>
@@ -13269,11 +13891,11 @@
           <a:p>
             <a:pPr algn="r"/>
             <a:r>
-              <a:rPr sz="1100" b="0" i="0">
+              <a:rPr sz="1040" b="0" i="0">
                 <a:solidFill>
                   <a:srgbClr val="6B6B6B"/>
                 </a:solidFill>
-                <a:latin typeface="Century Schoolbook"/>
+                <a:latin typeface="Lexend"/>
               </a:rPr>
               <a:t>34</a:t>
             </a:r>
@@ -13304,11 +13926,11 @@
           <a:p>
             <a:pPr algn="l"/>
             <a:r>
-              <a:rPr sz="2100" b="1" i="0">
+              <a:rPr sz="1989" b="1" i="0">
                 <a:solidFill>
                   <a:srgbClr val="0B5394"/>
                 </a:solidFill>
-                <a:latin typeface="Century Schoolbook"/>
+                <a:latin typeface="Lexend"/>
               </a:rPr>
               <a:t>1.</a:t>
             </a:r>
@@ -13339,11 +13961,11 @@
           <a:p>
             <a:pPr algn="l"/>
             <a:r>
-              <a:rPr sz="2100" b="0" i="0">
+              <a:rPr sz="1989" b="0" i="0">
                 <a:solidFill>
                   <a:srgbClr val="1A1A1A"/>
                 </a:solidFill>
-                <a:latin typeface="Century Schoolbook"/>
+                <a:latin typeface="Lexend"/>
               </a:rPr>
               <a:t>Open IXL and start today's skills.</a:t>
             </a:r>
@@ -13374,11 +13996,11 @@
           <a:p>
             <a:pPr algn="l"/>
             <a:r>
-              <a:rPr sz="2100" b="1" i="0">
+              <a:rPr sz="1989" b="1" i="0">
                 <a:solidFill>
                   <a:srgbClr val="0B5394"/>
                 </a:solidFill>
-                <a:latin typeface="Century Schoolbook"/>
+                <a:latin typeface="Lexend"/>
               </a:rPr>
               <a:t>2.</a:t>
             </a:r>
@@ -13409,11 +14031,11 @@
           <a:p>
             <a:pPr algn="l"/>
             <a:r>
-              <a:rPr sz="2100" b="0" i="0">
+              <a:rPr sz="1989" b="0" i="0">
                 <a:solidFill>
                   <a:srgbClr val="1A1A1A"/>
                 </a:solidFill>
-                <a:latin typeface="Century Schoolbook"/>
+                <a:latin typeface="Lexend"/>
               </a:rPr>
               <a:t>Work on paper where the question needs work. The answer box does not show it.</a:t>
             </a:r>
@@ -13444,11 +14066,11 @@
           <a:p>
             <a:pPr algn="l"/>
             <a:r>
-              <a:rPr sz="2100" b="1" i="0">
+              <a:rPr sz="1989" b="1" i="0">
                 <a:solidFill>
                   <a:srgbClr val="0B5394"/>
                 </a:solidFill>
-                <a:latin typeface="Century Schoolbook"/>
+                <a:latin typeface="Lexend"/>
               </a:rPr>
               <a:t>3.</a:t>
             </a:r>
@@ -13479,11 +14101,11 @@
           <a:p>
             <a:pPr algn="l"/>
             <a:r>
-              <a:rPr sz="2100" b="0" i="0">
+              <a:rPr sz="1989" b="0" i="0">
                 <a:solidFill>
                   <a:srgbClr val="1A1A1A"/>
                 </a:solidFill>
-                <a:latin typeface="Century Schoolbook"/>
+                <a:latin typeface="Lexend"/>
               </a:rPr>
               <a:t>Every skill listed is required, to a SmartScore of 67. This skill continues tomorrow: one assignment, due at the start of the class after 4.06.</a:t>
             </a:r>
@@ -13514,11 +14136,11 @@
           <a:p>
             <a:pPr algn="l"/>
             <a:r>
-              <a:rPr sz="2100" b="1" i="0">
+              <a:rPr sz="1989" b="1" i="0">
                 <a:solidFill>
                   <a:srgbClr val="1A1A1A"/>
                 </a:solidFill>
-                <a:latin typeface="Century Schoolbook"/>
+                <a:latin typeface="Lexend"/>
               </a:rPr>
               <a:t>Today's skills — all required</a:t>
             </a:r>
@@ -13549,11 +14171,11 @@
           <a:p>
             <a:pPr algn="l"/>
             <a:r>
-              <a:rPr sz="1900" b="0" i="0">
+              <a:rPr sz="1810" b="0" i="0">
                 <a:solidFill>
                   <a:srgbClr val="1A1A1A"/>
                 </a:solidFill>
-                <a:latin typeface="Century Schoolbook"/>
+                <a:latin typeface="Lexend"/>
               </a:rPr>
               <a:t>Evaluate radical expressions — D8J</a:t>
             </a:r>
@@ -13602,11 +14224,11 @@
           <a:p>
             <a:pPr algn="l"/>
             <a:r>
-              <a:rPr sz="3600" b="1" i="0">
+              <a:rPr sz="3420" b="1" i="0">
                 <a:solidFill>
                   <a:srgbClr val="1A1A1A"/>
                 </a:solidFill>
-                <a:latin typeface="Century Schoolbook"/>
+                <a:latin typeface="Lexend"/>
               </a:rPr>
               <a:t>Notes</a:t>
             </a:r>
@@ -13742,11 +14364,11 @@
           <a:p>
             <a:pPr algn="l"/>
             <a:r>
-              <a:rPr sz="1100" b="0" i="1">
+              <a:rPr sz="1040" b="0" i="0">
                 <a:solidFill>
                   <a:srgbClr val="6B6B6B"/>
                 </a:solidFill>
-                <a:latin typeface="Century Schoolbook"/>
+                <a:latin typeface="Lexend"/>
               </a:rPr>
               <a:t>Grade 7 Accelerated · Unit 4 · Lesson 5 — Evaluating Expressions with Radicals</a:t>
             </a:r>
@@ -13777,11 +14399,11 @@
           <a:p>
             <a:pPr algn="r"/>
             <a:r>
-              <a:rPr sz="1100" b="0" i="0">
+              <a:rPr sz="1040" b="0" i="0">
                 <a:solidFill>
                   <a:srgbClr val="6B6B6B"/>
                 </a:solidFill>
-                <a:latin typeface="Century Schoolbook"/>
+                <a:latin typeface="Lexend"/>
               </a:rPr>
               <a:t>4</a:t>
             </a:r>
@@ -13812,11 +14434,11 @@
           <a:p>
             <a:pPr algn="l"/>
             <a:r>
-              <a:rPr sz="2500" b="1" i="0">
+              <a:rPr sz="2380" b="1" i="0">
                 <a:solidFill>
                   <a:srgbClr val="1A1A1A"/>
                 </a:solidFill>
-                <a:latin typeface="Century Schoolbook"/>
+                <a:latin typeface="Lexend"/>
               </a:rPr>
               <a:t>I.  The radical bar is a grouping symbol</a:t>
             </a:r>
@@ -13860,7 +14482,7 @@
       </p:cxnSp>
       <p:pic>
         <p:nvPicPr>
-          <p:cNvPr id="10" name="Picture 9" descr="6f10aaba5b6e762d.png"/>
+          <p:cNvPr id="10" name="Picture 9" descr="f0301447559f2620.png"/>
           <p:cNvPicPr>
             <a:picLocks noChangeAspect="1"/>
           </p:cNvPicPr>
@@ -13874,8 +14496,8 @@
         </p:blipFill>
         <p:spPr>
           <a:xfrm>
-            <a:off x="3287268" y="1993392"/>
-            <a:ext cx="5586984" cy="502920"/>
+            <a:off x="3377184" y="1993392"/>
+            <a:ext cx="5407152" cy="478536"/>
           </a:xfrm>
           <a:prstGeom prst="rect">
             <a:avLst/>
@@ -13884,7 +14506,7 @@
       </p:pic>
       <p:pic>
         <p:nvPicPr>
-          <p:cNvPr id="11" name="Picture 10" descr="0f750478274c693a.png"/>
+          <p:cNvPr id="11" name="Picture 10" descr="3737ed6aaf20179f.png"/>
           <p:cNvPicPr>
             <a:picLocks noChangeAspect="1"/>
           </p:cNvPicPr>
@@ -13898,8 +14520,8 @@
         </p:blipFill>
         <p:spPr>
           <a:xfrm>
-            <a:off x="4442459" y="2770632"/>
-            <a:ext cx="3276600" cy="502920"/>
+            <a:off x="4488180" y="2746248"/>
+            <a:ext cx="3185160" cy="478536"/>
           </a:xfrm>
           <a:prstGeom prst="rect">
             <a:avLst/>
@@ -13908,7 +14530,7 @@
       </p:pic>
       <p:pic>
         <p:nvPicPr>
-          <p:cNvPr id="12" name="Picture 11" descr="38c1b22d8ba50cd8.png"/>
+          <p:cNvPr id="12" name="Picture 11" descr="4a07f45d5d9ca5f4.png"/>
           <p:cNvPicPr>
             <a:picLocks noChangeAspect="1"/>
           </p:cNvPicPr>
@@ -13922,8 +14544,8 @@
         </p:blipFill>
         <p:spPr>
           <a:xfrm>
-            <a:off x="3171715" y="3547872"/>
-            <a:ext cx="3294888" cy="502920"/>
+            <a:off x="3221035" y="3499104"/>
+            <a:ext cx="3209544" cy="478536"/>
           </a:xfrm>
           <a:prstGeom prst="rect">
             <a:avLst/>
@@ -13938,8 +14560,8 @@
         </p:nvSpPr>
         <p:spPr>
           <a:xfrm>
-            <a:off x="6466603" y="3570732"/>
-            <a:ext cx="1880073" cy="457200"/>
+            <a:off x="6430579" y="3509772"/>
+            <a:ext cx="1854584" cy="457200"/>
           </a:xfrm>
           <a:prstGeom prst="rect">
             <a:avLst/>
@@ -13954,11 +14576,11 @@
           <a:p>
             <a:pPr algn="l"/>
             <a:r>
-              <a:rPr sz="2600" b="0" i="0">
+              <a:rPr sz="2470" b="0" i="0">
                 <a:solidFill>
                   <a:srgbClr val="1A1A1A"/>
                 </a:solidFill>
-                <a:latin typeface="Century Schoolbook"/>
+                <a:latin typeface="Lexend"/>
               </a:rPr>
               <a:t>,    never   </a:t>
             </a:r>
@@ -13967,7 +14589,7 @@
       </p:sp>
       <p:pic>
         <p:nvPicPr>
-          <p:cNvPr id="14" name="Picture 13" descr="af23067c54651ce4.png"/>
+          <p:cNvPr id="14" name="Picture 13" descr="fbd6d5a320033c4a.png"/>
           <p:cNvPicPr>
             <a:picLocks noChangeAspect="1"/>
           </p:cNvPicPr>
@@ -13981,8 +14603,8 @@
         </p:blipFill>
         <p:spPr>
           <a:xfrm>
-            <a:off x="8209516" y="3654552"/>
-            <a:ext cx="780288" cy="289560"/>
+            <a:off x="8148004" y="3601212"/>
+            <a:ext cx="792480" cy="274320"/>
           </a:xfrm>
           <a:prstGeom prst="rect">
             <a:avLst/>
@@ -13997,7 +14619,7 @@
         </p:nvSpPr>
         <p:spPr>
           <a:xfrm>
-            <a:off x="987552" y="4389120"/>
+            <a:off x="987552" y="4315968"/>
             <a:ext cx="10131551" cy="475488"/>
           </a:xfrm>
           <a:prstGeom prst="rect">
@@ -14013,11 +14635,11 @@
           <a:p>
             <a:pPr algn="l"/>
             <a:r>
-              <a:rPr sz="2300" b="1" i="0">
+              <a:rPr sz="2180" b="1" i="0">
                 <a:solidFill>
                   <a:srgbClr val="1A1A1A"/>
                 </a:solidFill>
-                <a:latin typeface="Century Schoolbook"/>
+                <a:latin typeface="Lexend"/>
               </a:rPr>
               <a:t>Everything under the bar is evaluated before the root is taken.</a:t>
             </a:r>
@@ -14066,11 +14688,11 @@
           <a:p>
             <a:pPr algn="l"/>
             <a:r>
-              <a:rPr sz="3600" b="1" i="0">
+              <a:rPr sz="3420" b="1" i="0">
                 <a:solidFill>
                   <a:srgbClr val="1A1A1A"/>
                 </a:solidFill>
-                <a:latin typeface="Century Schoolbook"/>
+                <a:latin typeface="Lexend"/>
               </a:rPr>
               <a:t>Notes</a:t>
             </a:r>
@@ -14206,11 +14828,11 @@
           <a:p>
             <a:pPr algn="l"/>
             <a:r>
-              <a:rPr sz="1100" b="0" i="1">
+              <a:rPr sz="1040" b="0" i="0">
                 <a:solidFill>
                   <a:srgbClr val="6B6B6B"/>
                 </a:solidFill>
-                <a:latin typeface="Century Schoolbook"/>
+                <a:latin typeface="Lexend"/>
               </a:rPr>
               <a:t>Grade 7 Accelerated · Unit 4 · Lesson 5 — Evaluating Expressions with Radicals</a:t>
             </a:r>
@@ -14241,11 +14863,11 @@
           <a:p>
             <a:pPr algn="r"/>
             <a:r>
-              <a:rPr sz="1100" b="0" i="0">
+              <a:rPr sz="1040" b="0" i="0">
                 <a:solidFill>
                   <a:srgbClr val="6B6B6B"/>
                 </a:solidFill>
-                <a:latin typeface="Century Schoolbook"/>
+                <a:latin typeface="Lexend"/>
               </a:rPr>
               <a:t>5</a:t>
             </a:r>
@@ -14276,11 +14898,11 @@
           <a:p>
             <a:pPr algn="l"/>
             <a:r>
-              <a:rPr sz="2500" b="1" i="0">
+              <a:rPr sz="2380" b="1" i="0">
                 <a:solidFill>
                   <a:srgbClr val="1A1A1A"/>
                 </a:solidFill>
-                <a:latin typeface="Century Schoolbook"/>
+                <a:latin typeface="Lexend"/>
               </a:rPr>
               <a:t>II.  Square roots and cube roots are not the same shape</a:t>
             </a:r>
@@ -14324,7 +14946,7 @@
       </p:cxnSp>
       <p:pic>
         <p:nvPicPr>
-          <p:cNvPr id="10" name="Picture 9" descr="71ccef74cf5a6c5b.png"/>
+          <p:cNvPr id="10" name="Picture 9" descr="14243ac5c29f503b.png"/>
           <p:cNvPicPr>
             <a:picLocks noChangeAspect="1"/>
           </p:cNvPicPr>
@@ -14338,8 +14960,8 @@
         </p:blipFill>
         <p:spPr>
           <a:xfrm>
-            <a:off x="2613132" y="1993392"/>
-            <a:ext cx="1420368" cy="502920"/>
+            <a:off x="2686784" y="1993392"/>
+            <a:ext cx="1423416" cy="478536"/>
           </a:xfrm>
           <a:prstGeom prst="rect">
             <a:avLst/>
@@ -14354,8 +14976,8 @@
         </p:nvSpPr>
         <p:spPr>
           <a:xfrm>
-            <a:off x="4033500" y="2016252"/>
-            <a:ext cx="1183151" cy="457200"/>
+            <a:off x="4110200" y="2004060"/>
+            <a:ext cx="1141503" cy="457200"/>
           </a:xfrm>
           <a:prstGeom prst="rect">
             <a:avLst/>
@@ -14370,11 +14992,11 @@
           <a:p>
             <a:pPr algn="l"/>
             <a:r>
-              <a:rPr sz="2600" b="0" i="0">
+              <a:rPr sz="2470" b="0" i="0">
                 <a:solidFill>
                   <a:srgbClr val="1A1A1A"/>
                 </a:solidFill>
-                <a:latin typeface="Century Schoolbook"/>
+                <a:latin typeface="Lexend"/>
               </a:rPr>
               <a:t>          </a:t>
             </a:r>
@@ -14383,7 +15005,7 @@
       </p:sp>
       <p:pic>
         <p:nvPicPr>
-          <p:cNvPr id="12" name="Picture 11" descr="099a845693bde0eb.png"/>
+          <p:cNvPr id="12" name="Picture 11" descr="59fd66553504e964.png"/>
           <p:cNvPicPr>
             <a:picLocks noChangeAspect="1"/>
           </p:cNvPicPr>
@@ -14397,8 +15019,8 @@
         </p:blipFill>
         <p:spPr>
           <a:xfrm>
-            <a:off x="5079492" y="1993392"/>
-            <a:ext cx="1432560" cy="502920"/>
+            <a:off x="5114543" y="1993392"/>
+            <a:ext cx="1453896" cy="478536"/>
           </a:xfrm>
           <a:prstGeom prst="rect">
             <a:avLst/>
@@ -14413,8 +15035,8 @@
         </p:nvSpPr>
         <p:spPr>
           <a:xfrm>
-            <a:off x="6512051" y="2016252"/>
-            <a:ext cx="1183151" cy="457200"/>
+            <a:off x="6568439" y="2004060"/>
+            <a:ext cx="1141503" cy="457200"/>
           </a:xfrm>
           <a:prstGeom prst="rect">
             <a:avLst/>
@@ -14429,11 +15051,11 @@
           <a:p>
             <a:pPr algn="l"/>
             <a:r>
-              <a:rPr sz="2600" b="0" i="0">
+              <a:rPr sz="2470" b="0" i="0">
                 <a:solidFill>
                   <a:srgbClr val="1A1A1A"/>
                 </a:solidFill>
-                <a:latin typeface="Century Schoolbook"/>
+                <a:latin typeface="Lexend"/>
               </a:rPr>
               <a:t>          </a:t>
             </a:r>
@@ -14442,7 +15064,7 @@
       </p:sp>
       <p:pic>
         <p:nvPicPr>
-          <p:cNvPr id="14" name="Picture 13" descr="a0a2abe2b8b88c6f.png"/>
+          <p:cNvPr id="14" name="Picture 13" descr="138d560710ac33e5.png"/>
           <p:cNvPicPr>
             <a:picLocks noChangeAspect="1"/>
           </p:cNvPicPr>
@@ -14456,8 +15078,8 @@
         </p:blipFill>
         <p:spPr>
           <a:xfrm>
-            <a:off x="7558043" y="1993392"/>
-            <a:ext cx="1990344" cy="502920"/>
+            <a:off x="7572783" y="1993392"/>
+            <a:ext cx="1901952" cy="478536"/>
           </a:xfrm>
           <a:prstGeom prst="rect">
             <a:avLst/>
@@ -14466,7 +15088,7 @@
       </p:pic>
       <p:pic>
         <p:nvPicPr>
-          <p:cNvPr id="15" name="Picture 14" descr="5dc53ddc22961e1d.png"/>
+          <p:cNvPr id="15" name="Picture 14" descr="b169188f81dcb70b.png"/>
           <p:cNvPicPr>
             <a:picLocks noChangeAspect="1"/>
           </p:cNvPicPr>
@@ -14480,8 +15102,8 @@
         </p:blipFill>
         <p:spPr>
           <a:xfrm>
-            <a:off x="4067292" y="2775204"/>
-            <a:ext cx="1289304" cy="813816"/>
+            <a:off x="4118596" y="2750820"/>
+            <a:ext cx="1246632" cy="789432"/>
           </a:xfrm>
           <a:prstGeom prst="rect">
             <a:avLst/>
@@ -14496,8 +15118,8 @@
         </p:nvSpPr>
         <p:spPr>
           <a:xfrm>
-            <a:off x="5356596" y="2953512"/>
-            <a:ext cx="1183151" cy="457200"/>
+            <a:off x="5365228" y="2916936"/>
+            <a:ext cx="1141503" cy="457200"/>
           </a:xfrm>
           <a:prstGeom prst="rect">
             <a:avLst/>
@@ -14512,11 +15134,11 @@
           <a:p>
             <a:pPr algn="l"/>
             <a:r>
-              <a:rPr sz="2600" b="0" i="0">
+              <a:rPr sz="2470" b="0" i="0">
                 <a:solidFill>
                   <a:srgbClr val="1A1A1A"/>
                 </a:solidFill>
-                <a:latin typeface="Century Schoolbook"/>
+                <a:latin typeface="Lexend"/>
               </a:rPr>
               <a:t>          </a:t>
             </a:r>
@@ -14525,7 +15147,7 @@
       </p:sp>
       <p:pic>
         <p:nvPicPr>
-          <p:cNvPr id="17" name="Picture 16" descr="0b3fc4acebe111bc.png"/>
+          <p:cNvPr id="17" name="Picture 16" descr="df602f9237f1cbdf.png"/>
           <p:cNvPicPr>
             <a:picLocks noChangeAspect="1"/>
           </p:cNvPicPr>
@@ -14539,8 +15161,8 @@
         </p:blipFill>
         <p:spPr>
           <a:xfrm>
-            <a:off x="6402587" y="2770632"/>
-            <a:ext cx="1691640" cy="822960"/>
+            <a:off x="6369571" y="2746248"/>
+            <a:ext cx="1673352" cy="798576"/>
           </a:xfrm>
           <a:prstGeom prst="rect">
             <a:avLst/>
@@ -14555,7 +15177,7 @@
         </p:nvSpPr>
         <p:spPr>
           <a:xfrm>
-            <a:off x="987552" y="3931920"/>
+            <a:off x="987552" y="3883152"/>
             <a:ext cx="10131551" cy="950976"/>
           </a:xfrm>
           <a:prstGeom prst="rect">
@@ -14571,11 +15193,11 @@
           <a:p>
             <a:pPr algn="l"/>
             <a:r>
-              <a:rPr sz="2300" b="1" i="0">
+              <a:rPr sz="2180" b="1" i="0">
                 <a:solidFill>
                   <a:srgbClr val="1A1A1A"/>
                 </a:solidFill>
-                <a:latin typeface="Century Schoolbook"/>
+                <a:latin typeface="Lexend"/>
               </a:rPr>
               <a:t>An odd root keeps the sign of its radicand. A square root sign never gives a negative value.</a:t>
             </a:r>
@@ -14624,11 +15246,11 @@
           <a:p>
             <a:pPr algn="l"/>
             <a:r>
-              <a:rPr sz="3600" b="1" i="0">
+              <a:rPr sz="3420" b="1" i="0">
                 <a:solidFill>
                   <a:srgbClr val="1A1A1A"/>
                 </a:solidFill>
-                <a:latin typeface="Century Schoolbook"/>
+                <a:latin typeface="Lexend"/>
               </a:rPr>
               <a:t>Notes</a:t>
             </a:r>
@@ -14764,11 +15386,11 @@
           <a:p>
             <a:pPr algn="l"/>
             <a:r>
-              <a:rPr sz="1100" b="0" i="1">
+              <a:rPr sz="1040" b="0" i="0">
                 <a:solidFill>
                   <a:srgbClr val="6B6B6B"/>
                 </a:solidFill>
-                <a:latin typeface="Century Schoolbook"/>
+                <a:latin typeface="Lexend"/>
               </a:rPr>
               <a:t>Grade 7 Accelerated · Unit 4 · Lesson 5 — Evaluating Expressions with Radicals</a:t>
             </a:r>
@@ -14799,11 +15421,11 @@
           <a:p>
             <a:pPr algn="r"/>
             <a:r>
-              <a:rPr sz="1100" b="0" i="0">
+              <a:rPr sz="1040" b="0" i="0">
                 <a:solidFill>
                   <a:srgbClr val="6B6B6B"/>
                 </a:solidFill>
-                <a:latin typeface="Century Schoolbook"/>
+                <a:latin typeface="Lexend"/>
               </a:rPr>
               <a:t>6</a:t>
             </a:r>
@@ -14834,11 +15456,11 @@
           <a:p>
             <a:pPr algn="l"/>
             <a:r>
-              <a:rPr sz="2500" b="1" i="0">
+              <a:rPr sz="2380" b="1" i="0">
                 <a:solidFill>
                   <a:srgbClr val="1A1A1A"/>
                 </a:solidFill>
-                <a:latin typeface="Century Schoolbook"/>
+                <a:latin typeface="Lexend"/>
               </a:rPr>
               <a:t>III.  Radicals alongside exponents</a:t>
             </a:r>
@@ -14882,7 +15504,7 @@
       </p:cxnSp>
       <p:pic>
         <p:nvPicPr>
-          <p:cNvPr id="10" name="Picture 9" descr="344afa7466e491c9.png"/>
+          <p:cNvPr id="10" name="Picture 9" descr="d5f3f835e2d87209.png"/>
           <p:cNvPicPr>
             <a:picLocks noChangeAspect="1"/>
           </p:cNvPicPr>
@@ -14896,8 +15518,8 @@
         </p:blipFill>
         <p:spPr>
           <a:xfrm>
-            <a:off x="2639304" y="1993392"/>
-            <a:ext cx="2374392" cy="740664"/>
+            <a:off x="2736328" y="1993392"/>
+            <a:ext cx="2286000" cy="731520"/>
           </a:xfrm>
           <a:prstGeom prst="rect">
             <a:avLst/>
@@ -14912,8 +15534,8 @@
         </p:nvSpPr>
         <p:spPr>
           <a:xfrm>
-            <a:off x="5013696" y="2135124"/>
-            <a:ext cx="1183151" cy="457200"/>
+            <a:off x="5022328" y="2130552"/>
+            <a:ext cx="1141503" cy="457200"/>
           </a:xfrm>
           <a:prstGeom prst="rect">
             <a:avLst/>
@@ -14928,11 +15550,11 @@
           <a:p>
             <a:pPr algn="l"/>
             <a:r>
-              <a:rPr sz="2600" b="0" i="0">
+              <a:rPr sz="2470" b="0" i="0">
                 <a:solidFill>
                   <a:srgbClr val="1A1A1A"/>
                 </a:solidFill>
-                <a:latin typeface="Century Schoolbook"/>
+                <a:latin typeface="Lexend"/>
               </a:rPr>
               <a:t>          </a:t>
             </a:r>
@@ -14941,7 +15563,7 @@
       </p:sp>
       <p:pic>
         <p:nvPicPr>
-          <p:cNvPr id="12" name="Picture 11" descr="32485dda09a6454c.png"/>
+          <p:cNvPr id="12" name="Picture 11" descr="24b3a5f09066cb84.png"/>
           <p:cNvPicPr>
             <a:picLocks noChangeAspect="1"/>
           </p:cNvPicPr>
@@ -14955,8 +15577,8 @@
         </p:blipFill>
         <p:spPr>
           <a:xfrm>
-            <a:off x="6059687" y="2112264"/>
-            <a:ext cx="3462528" cy="502920"/>
+            <a:off x="6026671" y="2119884"/>
+            <a:ext cx="3398520" cy="478536"/>
           </a:xfrm>
           <a:prstGeom prst="rect">
             <a:avLst/>
@@ -14965,7 +15587,7 @@
       </p:pic>
       <p:pic>
         <p:nvPicPr>
-          <p:cNvPr id="13" name="Picture 12" descr="1c083a55a6db1aed.png"/>
+          <p:cNvPr id="13" name="Picture 12" descr="0416a625cfa02c4b.png"/>
           <p:cNvPicPr>
             <a:picLocks noChangeAspect="1"/>
           </p:cNvPicPr>
@@ -14979,8 +15601,8 @@
         </p:blipFill>
         <p:spPr>
           <a:xfrm>
-            <a:off x="3730752" y="3008376"/>
-            <a:ext cx="4700016" cy="685800"/>
+            <a:off x="3761232" y="2999232"/>
+            <a:ext cx="4639056" cy="673608"/>
           </a:xfrm>
           <a:prstGeom prst="rect">
             <a:avLst/>
@@ -14995,7 +15617,7 @@
         </p:nvSpPr>
         <p:spPr>
           <a:xfrm>
-            <a:off x="987552" y="4032504"/>
+            <a:off x="987552" y="4011168"/>
             <a:ext cx="10131551" cy="475488"/>
           </a:xfrm>
           <a:prstGeom prst="rect">
@@ -15011,11 +15633,11 @@
           <a:p>
             <a:pPr algn="l"/>
             <a:r>
-              <a:rPr sz="2300" b="1" i="0">
+              <a:rPr sz="2180" b="1" i="0">
                 <a:solidFill>
                   <a:srgbClr val="1A1A1A"/>
                 </a:solidFill>
-                <a:latin typeface="Century Schoolbook"/>
+                <a:latin typeface="Lexend"/>
               </a:rPr>
               <a:t>Finish each piece — the radical, the power — and only then put them together.</a:t>
             </a:r>
@@ -15064,11 +15686,11 @@
           <a:p>
             <a:pPr algn="l"/>
             <a:r>
-              <a:rPr sz="3600" b="1" i="0">
+              <a:rPr sz="3420" b="1" i="0">
                 <a:solidFill>
                   <a:srgbClr val="1A1A1A"/>
                 </a:solidFill>
-                <a:latin typeface="Century Schoolbook"/>
+                <a:latin typeface="Lexend"/>
               </a:rPr>
               <a:t>Example 1</a:t>
             </a:r>
@@ -15204,11 +15826,11 @@
           <a:p>
             <a:pPr algn="l"/>
             <a:r>
-              <a:rPr sz="1100" b="0" i="1">
+              <a:rPr sz="1040" b="0" i="0">
                 <a:solidFill>
                   <a:srgbClr val="6B6B6B"/>
                 </a:solidFill>
-                <a:latin typeface="Century Schoolbook"/>
+                <a:latin typeface="Lexend"/>
               </a:rPr>
               <a:t>Grade 7 Accelerated · Unit 4 · Lesson 5 — Evaluating Expressions with Radicals</a:t>
             </a:r>
@@ -15239,11 +15861,11 @@
           <a:p>
             <a:pPr algn="r"/>
             <a:r>
-              <a:rPr sz="1100" b="0" i="0">
+              <a:rPr sz="1040" b="0" i="0">
                 <a:solidFill>
                   <a:srgbClr val="6B6B6B"/>
                 </a:solidFill>
-                <a:latin typeface="Century Schoolbook"/>
+                <a:latin typeface="Lexend"/>
               </a:rPr>
               <a:t>7</a:t>
             </a:r>
@@ -15252,7 +15874,7 @@
       </p:sp>
       <p:pic>
         <p:nvPicPr>
-          <p:cNvPr id="8" name="Picture 7" descr="9bb1c8a15b2d7bbe.png"/>
+          <p:cNvPr id="8" name="Picture 7" descr="5e47ed58306c9a9f.png"/>
           <p:cNvPicPr>
             <a:picLocks noChangeAspect="1"/>
           </p:cNvPicPr>
@@ -15266,8 +15888,8 @@
         </p:blipFill>
         <p:spPr>
           <a:xfrm>
-            <a:off x="4613148" y="2103120"/>
-            <a:ext cx="2935224" cy="676656"/>
+            <a:off x="4671059" y="2103120"/>
+            <a:ext cx="2819400" cy="667512"/>
           </a:xfrm>
           <a:prstGeom prst="rect">
             <a:avLst/>
@@ -15282,7 +15904,7 @@
         </p:nvSpPr>
         <p:spPr>
           <a:xfrm>
-            <a:off x="777240" y="3282696"/>
+            <a:off x="777240" y="3273552"/>
             <a:ext cx="10607040" cy="429370"/>
           </a:xfrm>
           <a:prstGeom prst="rect">
@@ -15298,11 +15920,11 @@
           <a:p>
             <a:pPr algn="ctr"/>
             <a:r>
-              <a:rPr sz="2400" b="1" i="0">
+              <a:rPr sz="2280" b="1" i="0">
                 <a:solidFill>
                   <a:srgbClr val="1A1A1A"/>
                 </a:solidFill>
-                <a:latin typeface="Century Schoolbook"/>
+                <a:latin typeface="Lexend"/>
               </a:rPr>
               <a:t>Evaluate.</a:t>
             </a:r>
@@ -15351,11 +15973,11 @@
           <a:p>
             <a:pPr algn="l"/>
             <a:r>
-              <a:rPr sz="3600" b="1" i="0">
+              <a:rPr sz="3420" b="1" i="0">
                 <a:solidFill>
                   <a:srgbClr val="1A1A1A"/>
                 </a:solidFill>
-                <a:latin typeface="Century Schoolbook"/>
+                <a:latin typeface="Lexend"/>
               </a:rPr>
               <a:t>Example 1</a:t>
             </a:r>
@@ -15491,11 +16113,11 @@
           <a:p>
             <a:pPr algn="l"/>
             <a:r>
-              <a:rPr sz="1100" b="0" i="1">
+              <a:rPr sz="1040" b="0" i="0">
                 <a:solidFill>
                   <a:srgbClr val="6B6B6B"/>
                 </a:solidFill>
-                <a:latin typeface="Century Schoolbook"/>
+                <a:latin typeface="Lexend"/>
               </a:rPr>
               <a:t>Grade 7 Accelerated · Unit 4 · Lesson 5 — Evaluating Expressions with Radicals</a:t>
             </a:r>
@@ -15526,11 +16148,11 @@
           <a:p>
             <a:pPr algn="r"/>
             <a:r>
-              <a:rPr sz="1100" b="0" i="0">
+              <a:rPr sz="1040" b="0" i="0">
                 <a:solidFill>
                   <a:srgbClr val="6B6B6B"/>
                 </a:solidFill>
-                <a:latin typeface="Century Schoolbook"/>
+                <a:latin typeface="Lexend"/>
               </a:rPr>
               <a:t>8</a:t>
             </a:r>
@@ -15539,7 +16161,7 @@
       </p:sp>
       <p:pic>
         <p:nvPicPr>
-          <p:cNvPr id="8" name="Picture 7" descr="888f9d60545f0d0f.png"/>
+          <p:cNvPr id="8" name="Picture 7" descr="0d6c9f96a3ec0d88.png"/>
           <p:cNvPicPr>
             <a:picLocks noChangeAspect="1"/>
           </p:cNvPicPr>
@@ -15554,7 +16176,7 @@
         <p:spPr>
           <a:xfrm>
             <a:off x="1828800" y="1920240"/>
-            <a:ext cx="1685544" cy="676656"/>
+            <a:ext cx="1630680" cy="673608"/>
           </a:xfrm>
           <a:prstGeom prst="rect">
             <a:avLst/>
@@ -15563,7 +16185,7 @@
       </p:pic>
       <p:pic>
         <p:nvPicPr>
-          <p:cNvPr id="9" name="Picture 8" descr="0f750478274c693a.png"/>
+          <p:cNvPr id="9" name="Picture 8" descr="3737ed6aaf20179f.png"/>
           <p:cNvPicPr>
             <a:picLocks noChangeAspect="1"/>
           </p:cNvPicPr>
@@ -15577,8 +16199,8 @@
         </p:blipFill>
         <p:spPr>
           <a:xfrm>
-            <a:off x="1828800" y="2871215"/>
-            <a:ext cx="3276600" cy="502920"/>
+            <a:off x="1828800" y="2868168"/>
+            <a:ext cx="3185160" cy="478536"/>
           </a:xfrm>
           <a:prstGeom prst="rect">
             <a:avLst/>
@@ -15587,7 +16209,7 @@
       </p:pic>
       <p:pic>
         <p:nvPicPr>
-          <p:cNvPr id="10" name="Picture 9" descr="bdab02e30458e0d1.png"/>
+          <p:cNvPr id="10" name="Picture 9" descr="48d618d0a819b8c5.png"/>
           <p:cNvPicPr>
             <a:picLocks noChangeAspect="1"/>
           </p:cNvPicPr>
@@ -15601,8 +16223,8 @@
         </p:blipFill>
         <p:spPr>
           <a:xfrm>
-            <a:off x="1828800" y="3648455"/>
-            <a:ext cx="1655064" cy="679704"/>
+            <a:off x="1828800" y="3621024"/>
+            <a:ext cx="1661160" cy="667512"/>
           </a:xfrm>
           <a:prstGeom prst="rect">
             <a:avLst/>
@@ -15617,7 +16239,7 @@
         </p:nvSpPr>
         <p:spPr>
           <a:xfrm>
-            <a:off x="777240" y="4785359"/>
+            <a:off x="777240" y="4745736"/>
             <a:ext cx="10607040" cy="548640"/>
           </a:xfrm>
           <a:prstGeom prst="rect">
@@ -15633,11 +16255,11 @@
           <a:p>
             <a:pPr algn="ctr"/>
             <a:r>
-              <a:rPr sz="3200" b="1" i="0">
+              <a:rPr sz="3040" b="1" i="0">
                 <a:solidFill>
                   <a:srgbClr val="9E1B32"/>
                 </a:solidFill>
-                <a:latin typeface="Century Schoolbook"/>
+                <a:latin typeface="Lexend"/>
               </a:rPr>
               <a:t>Answer:   17/4</a:t>
             </a:r>
@@ -15686,11 +16308,11 @@
           <a:p>
             <a:pPr algn="l"/>
             <a:r>
-              <a:rPr sz="3600" b="1" i="0">
+              <a:rPr sz="3420" b="1" i="0">
                 <a:solidFill>
                   <a:srgbClr val="1A1A1A"/>
                 </a:solidFill>
-                <a:latin typeface="Century Schoolbook"/>
+                <a:latin typeface="Lexend"/>
               </a:rPr>
               <a:t>Your Turn</a:t>
             </a:r>
@@ -15826,11 +16448,11 @@
           <a:p>
             <a:pPr algn="l"/>
             <a:r>
-              <a:rPr sz="1100" b="0" i="1">
+              <a:rPr sz="1040" b="0" i="0">
                 <a:solidFill>
                   <a:srgbClr val="6B6B6B"/>
                 </a:solidFill>
-                <a:latin typeface="Century Schoolbook"/>
+                <a:latin typeface="Lexend"/>
               </a:rPr>
               <a:t>Grade 7 Accelerated · Unit 4 · Lesson 5 — Evaluating Expressions with Radicals</a:t>
             </a:r>
@@ -15861,11 +16483,11 @@
           <a:p>
             <a:pPr algn="r"/>
             <a:r>
-              <a:rPr sz="1100" b="0" i="0">
+              <a:rPr sz="1040" b="0" i="0">
                 <a:solidFill>
                   <a:srgbClr val="6B6B6B"/>
                 </a:solidFill>
-                <a:latin typeface="Century Schoolbook"/>
+                <a:latin typeface="Lexend"/>
               </a:rPr>
               <a:t>9</a:t>
             </a:r>
@@ -15874,7 +16496,7 @@
       </p:sp>
       <p:pic>
         <p:nvPicPr>
-          <p:cNvPr id="8" name="Picture 7" descr="951716e95210eae7.png"/>
+          <p:cNvPr id="8" name="Picture 7" descr="b20bcbb3e5acef31.png"/>
           <p:cNvPicPr>
             <a:picLocks noChangeAspect="1"/>
           </p:cNvPicPr>
@@ -15888,8 +16510,8 @@
         </p:blipFill>
         <p:spPr>
           <a:xfrm>
-            <a:off x="4300728" y="2194560"/>
-            <a:ext cx="3560064" cy="859536"/>
+            <a:off x="4360163" y="1600200"/>
+            <a:ext cx="3441192" cy="841248"/>
           </a:xfrm>
           <a:prstGeom prst="rect">
             <a:avLst/>
@@ -15904,7 +16526,7 @@
         </p:nvSpPr>
         <p:spPr>
           <a:xfrm>
-            <a:off x="777240" y="3557016"/>
+            <a:off x="777240" y="2944368"/>
             <a:ext cx="10607040" cy="429370"/>
           </a:xfrm>
           <a:prstGeom prst="rect">
@@ -15920,11 +16542,11 @@
           <a:p>
             <a:pPr algn="ctr"/>
             <a:r>
-              <a:rPr sz="2400" b="1" i="0">
+              <a:rPr sz="2280" b="1" i="0">
                 <a:solidFill>
                   <a:srgbClr val="1A1A1A"/>
                 </a:solidFill>
-                <a:latin typeface="Century Schoolbook"/>
+                <a:latin typeface="Lexend"/>
               </a:rPr>
               <a:t>Evaluate.</a:t>
             </a:r>

--- a/a7/packages/A7 Unit 4 - Solving Problems with Rational Numbers/Lessons/4.05/A7 4.05 Evaluating Expressions with Radicals - Slides.pptx
+++ b/a7/packages/A7 Unit 4 - Solving Problems with Rational Numbers/Lessons/4.05/A7 4.05 Evaluating Expressions with Radicals - Slides.pptx
@@ -8628,7 +8628,7 @@
       </p:sp>
       <p:pic>
         <p:nvPicPr>
-          <p:cNvPr id="8" name="Picture 7" descr="9180b5fd8586da4a.png"/>
+          <p:cNvPr id="8" name="Picture 7" descr="0287c1279b1b6eda.png"/>
           <p:cNvPicPr>
             <a:picLocks noChangeAspect="1"/>
           </p:cNvPicPr>
@@ -8642,8 +8642,8 @@
         </p:blipFill>
         <p:spPr>
           <a:xfrm>
-            <a:off x="5376671" y="2194560"/>
-            <a:ext cx="1408176" cy="478536"/>
+            <a:off x="5135880" y="2194560"/>
+            <a:ext cx="1889760" cy="478536"/>
           </a:xfrm>
           <a:prstGeom prst="rect">
             <a:avLst/>
@@ -8724,7 +8724,7 @@
                 </a:solidFill>
                 <a:latin typeface="Lexend"/>
               </a:rPr>
-              <a:t>7</a:t>
+              <a:t>17</a:t>
             </a:r>
           </a:p>
         </p:txBody>
@@ -8768,7 +8768,7 @@
                 </a:solidFill>
                 <a:latin typeface="Lexend"/>
               </a:rPr>
-              <a:t>25</a:t>
+              <a:t>169</a:t>
             </a:r>
           </a:p>
         </p:txBody>
@@ -8812,7 +8812,7 @@
                 </a:solidFill>
                 <a:latin typeface="Lexend"/>
               </a:rPr>
-              <a:t>12.5</a:t>
+              <a:t>84.5</a:t>
             </a:r>
           </a:p>
         </p:txBody>
@@ -8856,7 +8856,7 @@
                 </a:solidFill>
                 <a:latin typeface="Lexend"/>
               </a:rPr>
-              <a:t>5</a:t>
+              <a:t>13</a:t>
             </a:r>
           </a:p>
         </p:txBody>
@@ -9126,7 +9126,7 @@
       </p:sp>
       <p:pic>
         <p:nvPicPr>
-          <p:cNvPr id="8" name="Picture 7" descr="af6863b3a9216dbf.png"/>
+          <p:cNvPr id="8" name="Picture 7" descr="627b4a23b9288a97.png"/>
           <p:cNvPicPr>
             <a:picLocks noChangeAspect="1"/>
           </p:cNvPicPr>
@@ -9140,8 +9140,8 @@
         </p:blipFill>
         <p:spPr>
           <a:xfrm>
-            <a:off x="5379720" y="2103120"/>
-            <a:ext cx="1402080" cy="478536"/>
+            <a:off x="5138927" y="2103120"/>
+            <a:ext cx="1883664" cy="478536"/>
           </a:xfrm>
           <a:prstGeom prst="rect">
             <a:avLst/>
@@ -9191,7 +9191,7 @@
         </p:nvSpPr>
         <p:spPr>
           <a:xfrm>
-            <a:off x="3442898" y="3481147"/>
+            <a:off x="3136574" y="3481147"/>
             <a:ext cx="3827922" cy="457200"/>
           </a:xfrm>
           <a:prstGeom prst="rect">
@@ -9220,7 +9220,7 @@
       </p:sp>
       <p:pic>
         <p:nvPicPr>
-          <p:cNvPr id="11" name="Picture 10" descr="bf2df4e3775dcca4.png"/>
+          <p:cNvPr id="11" name="Picture 10" descr="d050f197a4a44d9d.png"/>
           <p:cNvPicPr>
             <a:picLocks noChangeAspect="1"/>
           </p:cNvPicPr>
@@ -9234,8 +9234,8 @@
         </p:blipFill>
         <p:spPr>
           <a:xfrm>
-            <a:off x="7133661" y="3581731"/>
-            <a:ext cx="1584960" cy="256032"/>
+            <a:off x="6827337" y="3581731"/>
+            <a:ext cx="2197608" cy="256032"/>
           </a:xfrm>
           <a:prstGeom prst="rect">
             <a:avLst/>
@@ -9244,7 +9244,7 @@
       </p:pic>
       <p:pic>
         <p:nvPicPr>
-          <p:cNvPr id="12" name="Picture 11" descr="5127a0c173e39499.png"/>
+          <p:cNvPr id="12" name="Picture 11" descr="296c25346e41fa21.png"/>
           <p:cNvPicPr>
             <a:picLocks noChangeAspect="1"/>
           </p:cNvPicPr>
@@ -9258,8 +9258,8 @@
         </p:blipFill>
         <p:spPr>
           <a:xfrm>
-            <a:off x="3497762" y="4043503"/>
-            <a:ext cx="1271016" cy="432816"/>
+            <a:off x="3191438" y="4043503"/>
+            <a:ext cx="1612392" cy="432816"/>
           </a:xfrm>
           <a:prstGeom prst="rect">
             <a:avLst/>
@@ -9296,7 +9296,7 @@
                 </a:solidFill>
                 <a:latin typeface="Lexend"/>
               </a:rPr>
-              <a:t>Answer:   D — 5</a:t>
+              <a:t>Answer:   D — 13</a:t>
             </a:r>
           </a:p>
         </p:txBody>
@@ -9531,7 +9531,7 @@
       </p:sp>
       <p:pic>
         <p:nvPicPr>
-          <p:cNvPr id="8" name="Picture 7" descr="65ed02bc6c30adaa.png"/>
+          <p:cNvPr id="8" name="Picture 7" descr="24ebae5e5d75799b.png"/>
           <p:cNvPicPr>
             <a:picLocks noChangeAspect="1"/>
           </p:cNvPicPr>
@@ -9545,8 +9545,8 @@
         </p:blipFill>
         <p:spPr>
           <a:xfrm>
-            <a:off x="5533643" y="2194560"/>
-            <a:ext cx="1094232" cy="478536"/>
+            <a:off x="5504688" y="2194560"/>
+            <a:ext cx="1152144" cy="789432"/>
           </a:xfrm>
           <a:prstGeom prst="rect">
             <a:avLst/>
@@ -9561,7 +9561,7 @@
         </p:nvSpPr>
         <p:spPr>
           <a:xfrm>
-            <a:off x="777240" y="2947416"/>
+            <a:off x="777240" y="3258311"/>
             <a:ext cx="10607040" cy="465151"/>
           </a:xfrm>
           <a:prstGeom prst="rect">
@@ -9596,7 +9596,7 @@
         </p:nvSpPr>
         <p:spPr>
           <a:xfrm>
-            <a:off x="1874519" y="3613735"/>
+            <a:off x="1874519" y="3924631"/>
             <a:ext cx="4572000" cy="548640"/>
           </a:xfrm>
           <a:prstGeom prst="rect">
@@ -9627,7 +9627,7 @@
                 </a:solidFill>
                 <a:latin typeface="Lexend"/>
               </a:rPr>
-              <a:t>−4</a:t>
+              <a:t>−1/4</a:t>
             </a:r>
           </a:p>
         </p:txBody>
@@ -9640,7 +9640,7 @@
         </p:nvSpPr>
         <p:spPr>
           <a:xfrm>
-            <a:off x="6629400" y="3613735"/>
+            <a:off x="6629400" y="3924631"/>
             <a:ext cx="4572000" cy="548640"/>
           </a:xfrm>
           <a:prstGeom prst="rect">
@@ -9684,7 +9684,7 @@
         </p:nvSpPr>
         <p:spPr>
           <a:xfrm>
-            <a:off x="1874519" y="4299535"/>
+            <a:off x="1874519" y="4610431"/>
             <a:ext cx="4572000" cy="548640"/>
           </a:xfrm>
           <a:prstGeom prst="rect">
@@ -9715,7 +9715,7 @@
                 </a:solidFill>
                 <a:latin typeface="Lexend"/>
               </a:rPr>
-              <a:t>−8</a:t>
+              <a:t>−1/8</a:t>
             </a:r>
           </a:p>
         </p:txBody>
@@ -9728,7 +9728,7 @@
         </p:nvSpPr>
         <p:spPr>
           <a:xfrm>
-            <a:off x="6629400" y="4299535"/>
+            <a:off x="6629400" y="4610431"/>
             <a:ext cx="4572000" cy="548640"/>
           </a:xfrm>
           <a:prstGeom prst="rect">
@@ -9759,7 +9759,7 @@
                 </a:solidFill>
                 <a:latin typeface="Lexend"/>
               </a:rPr>
-              <a:t>4</a:t>
+              <a:t>1/4</a:t>
             </a:r>
           </a:p>
         </p:txBody>
@@ -9772,7 +9772,7 @@
         </p:nvSpPr>
         <p:spPr>
           <a:xfrm>
-            <a:off x="777240" y="5305375"/>
+            <a:off x="777240" y="5616271"/>
             <a:ext cx="10607040" cy="457200"/>
           </a:xfrm>
           <a:prstGeom prst="rect">
@@ -10029,7 +10029,7 @@
       </p:sp>
       <p:pic>
         <p:nvPicPr>
-          <p:cNvPr id="8" name="Picture 7" descr="c05f88468ec8db72.png"/>
+          <p:cNvPr id="8" name="Picture 7" descr="3d615a9b7c2dc05a.png"/>
           <p:cNvPicPr>
             <a:picLocks noChangeAspect="1"/>
           </p:cNvPicPr>
@@ -10043,8 +10043,8 @@
         </p:blipFill>
         <p:spPr>
           <a:xfrm>
-            <a:off x="5535167" y="2103120"/>
-            <a:ext cx="1091184" cy="478536"/>
+            <a:off x="5506212" y="2103120"/>
+            <a:ext cx="1149096" cy="789432"/>
           </a:xfrm>
           <a:prstGeom prst="rect">
             <a:avLst/>
@@ -10059,7 +10059,7 @@
         </p:nvSpPr>
         <p:spPr>
           <a:xfrm>
-            <a:off x="777240" y="2855975"/>
+            <a:off x="777240" y="3166871"/>
             <a:ext cx="10607040" cy="465151"/>
           </a:xfrm>
           <a:prstGeom prst="rect">
@@ -10088,7 +10088,7 @@
       </p:sp>
       <p:pic>
         <p:nvPicPr>
-          <p:cNvPr id="10" name="Picture 9" descr="fcf33c76384f23a0.png"/>
+          <p:cNvPr id="10" name="Picture 9" descr="44ca813e0eef5cc0.png"/>
           <p:cNvPicPr>
             <a:picLocks noChangeAspect="1"/>
           </p:cNvPicPr>
@@ -10102,8 +10102,8 @@
         </p:blipFill>
         <p:spPr>
           <a:xfrm>
-            <a:off x="2906187" y="3560395"/>
-            <a:ext cx="3538728" cy="320040"/>
+            <a:off x="4107179" y="3814903"/>
+            <a:ext cx="4053840" cy="606552"/>
           </a:xfrm>
           <a:prstGeom prst="rect">
             <a:avLst/>
@@ -10118,8 +10118,8 @@
         </p:nvSpPr>
         <p:spPr>
           <a:xfrm>
-            <a:off x="6444915" y="3491815"/>
-            <a:ext cx="1338233" cy="457200"/>
+            <a:off x="4052316" y="4679011"/>
+            <a:ext cx="927639" cy="457200"/>
           </a:xfrm>
           <a:prstGeom prst="rect">
             <a:avLst/>
@@ -10140,14 +10140,14 @@
                 </a:solidFill>
                 <a:latin typeface="Lexend"/>
               </a:rPr>
-              <a:t>,   so   </a:t>
+              <a:t>so   </a:t>
             </a:r>
           </a:p>
         </p:txBody>
       </p:sp>
       <p:pic>
         <p:nvPicPr>
-          <p:cNvPr id="12" name="Picture 11" descr="8c7dac3379df930d.png"/>
+          <p:cNvPr id="12" name="Picture 11" descr="712e2a339e91aae2.png"/>
           <p:cNvPicPr>
             <a:picLocks noChangeAspect="1"/>
           </p:cNvPicPr>
@@ -10161,8 +10161,8 @@
         </p:blipFill>
         <p:spPr>
           <a:xfrm>
-            <a:off x="7645988" y="3504007"/>
-            <a:ext cx="1725168" cy="432816"/>
+            <a:off x="4842795" y="4549471"/>
+            <a:ext cx="1786128" cy="716280"/>
           </a:xfrm>
           <a:prstGeom prst="rect">
             <a:avLst/>
@@ -10177,7 +10177,7 @@
         </p:nvSpPr>
         <p:spPr>
           <a:xfrm>
-            <a:off x="777240" y="4663440"/>
+            <a:off x="777240" y="5402911"/>
             <a:ext cx="10607040" cy="548640"/>
           </a:xfrm>
           <a:prstGeom prst="rect">
@@ -10199,7 +10199,7 @@
                 </a:solidFill>
                 <a:latin typeface="Lexend"/>
               </a:rPr>
-              <a:t>Answer:   A — −4</a:t>
+              <a:t>Answer:   A — −1/4</a:t>
             </a:r>
           </a:p>
         </p:txBody>
@@ -10434,7 +10434,7 @@
       </p:sp>
       <p:pic>
         <p:nvPicPr>
-          <p:cNvPr id="8" name="Picture 7" descr="a2c664b248cf7d61.png"/>
+          <p:cNvPr id="8" name="Picture 7" descr="13bd5897204bf8fd.png"/>
           <p:cNvPicPr>
             <a:picLocks noChangeAspect="1"/>
           </p:cNvPicPr>
@@ -10448,8 +10448,8 @@
         </p:blipFill>
         <p:spPr>
           <a:xfrm>
-            <a:off x="5129783" y="2194560"/>
-            <a:ext cx="1901952" cy="792480"/>
+            <a:off x="5117591" y="2194560"/>
+            <a:ext cx="1926335" cy="789432"/>
           </a:xfrm>
           <a:prstGeom prst="rect">
             <a:avLst/>
@@ -10721,7 +10721,7 @@
       </p:sp>
       <p:pic>
         <p:nvPicPr>
-          <p:cNvPr id="8" name="Picture 7" descr="69810e14e0abf5cf.png"/>
+          <p:cNvPr id="8" name="Picture 7" descr="e6bc0b83f8afa4f2.png"/>
           <p:cNvPicPr>
             <a:picLocks noChangeAspect="1"/>
           </p:cNvPicPr>
@@ -10735,8 +10735,8 @@
         </p:blipFill>
         <p:spPr>
           <a:xfrm>
-            <a:off x="5131308" y="2103120"/>
-            <a:ext cx="1898904" cy="789432"/>
+            <a:off x="5119115" y="2103120"/>
+            <a:ext cx="1923288" cy="789432"/>
           </a:xfrm>
           <a:prstGeom prst="rect">
             <a:avLst/>
@@ -10745,7 +10745,7 @@
       </p:pic>
       <p:pic>
         <p:nvPicPr>
-          <p:cNvPr id="9" name="Picture 8" descr="d5959474f07c9a8e.png"/>
+          <p:cNvPr id="9" name="Picture 8" descr="ab1c6f19d3960fbb.png"/>
           <p:cNvPicPr>
             <a:picLocks noChangeAspect="1"/>
           </p:cNvPicPr>
@@ -10759,8 +10759,8 @@
         </p:blipFill>
         <p:spPr>
           <a:xfrm>
-            <a:off x="4003081" y="3240023"/>
-            <a:ext cx="1133856" cy="716280"/>
+            <a:off x="3986317" y="3240023"/>
+            <a:ext cx="1161288" cy="716280"/>
           </a:xfrm>
           <a:prstGeom prst="rect">
             <a:avLst/>
@@ -10775,7 +10775,7 @@
         </p:nvSpPr>
         <p:spPr>
           <a:xfrm>
-            <a:off x="5136937" y="3369563"/>
+            <a:off x="5147605" y="3369563"/>
             <a:ext cx="1939461" cy="457200"/>
           </a:xfrm>
           <a:prstGeom prst="rect">
@@ -10804,7 +10804,7 @@
       </p:sp>
       <p:pic>
         <p:nvPicPr>
-          <p:cNvPr id="11" name="Picture 10" descr="3da34b52f30f550d.png"/>
+          <p:cNvPr id="11" name="Picture 10" descr="7b48005c9016cda3.png"/>
           <p:cNvPicPr>
             <a:picLocks noChangeAspect="1"/>
           </p:cNvPicPr>
@@ -10818,8 +10818,8 @@
         </p:blipFill>
         <p:spPr>
           <a:xfrm>
-            <a:off x="6939238" y="3240023"/>
-            <a:ext cx="1316736" cy="716280"/>
+            <a:off x="6949906" y="3240023"/>
+            <a:ext cx="1322832" cy="716280"/>
           </a:xfrm>
           <a:prstGeom prst="rect">
             <a:avLst/>
@@ -10828,7 +10828,7 @@
       </p:pic>
       <p:pic>
         <p:nvPicPr>
-          <p:cNvPr id="12" name="Picture 11" descr="bf4ec778f3c995cc.png"/>
+          <p:cNvPr id="12" name="Picture 11" descr="27befd5d16127212.png"/>
           <p:cNvPicPr>
             <a:picLocks noChangeAspect="1"/>
           </p:cNvPicPr>
@@ -10842,8 +10842,8 @@
         </p:blipFill>
         <p:spPr>
           <a:xfrm>
-            <a:off x="4003081" y="4084320"/>
-            <a:ext cx="1310640" cy="606552"/>
+            <a:off x="3986317" y="4084320"/>
+            <a:ext cx="1350264" cy="606552"/>
           </a:xfrm>
           <a:prstGeom prst="rect">
             <a:avLst/>
@@ -10880,7 +10880,7 @@
                 </a:solidFill>
                 <a:latin typeface="Lexend"/>
               </a:rPr>
-              <a:t>Answer:   2/3</a:t>
+              <a:t>Answer:   4/3</a:t>
             </a:r>
           </a:p>
         </p:txBody>
@@ -11115,7 +11115,7 @@
       </p:sp>
       <p:pic>
         <p:nvPicPr>
-          <p:cNvPr id="8" name="Picture 7" descr="00016760c7ea4b37.png"/>
+          <p:cNvPr id="8" name="Picture 7" descr="7513eedb387e9335.png"/>
           <p:cNvPicPr>
             <a:picLocks noChangeAspect="1"/>
           </p:cNvPicPr>
@@ -11129,8 +11129,8 @@
         </p:blipFill>
         <p:spPr>
           <a:xfrm>
-            <a:off x="4911851" y="2194560"/>
-            <a:ext cx="2337816" cy="478536"/>
+            <a:off x="4809744" y="2194560"/>
+            <a:ext cx="2542032" cy="478536"/>
           </a:xfrm>
           <a:prstGeom prst="rect">
             <a:avLst/>
@@ -11991,7 +11991,7 @@
       </p:sp>
       <p:pic>
         <p:nvPicPr>
-          <p:cNvPr id="8" name="Picture 7" descr="4328986b534c4351.png"/>
+          <p:cNvPr id="8" name="Picture 7" descr="41217f15035bee5c.png"/>
           <p:cNvPicPr>
             <a:picLocks noChangeAspect="1"/>
           </p:cNvPicPr>
@@ -12005,8 +12005,8 @@
         </p:blipFill>
         <p:spPr>
           <a:xfrm>
-            <a:off x="4908803" y="2103120"/>
-            <a:ext cx="2343912" cy="478536"/>
+            <a:off x="4808220" y="2103120"/>
+            <a:ext cx="2545080" cy="478536"/>
           </a:xfrm>
           <a:prstGeom prst="rect">
             <a:avLst/>
@@ -12015,7 +12015,7 @@
       </p:pic>
       <p:pic>
         <p:nvPicPr>
-          <p:cNvPr id="9" name="Picture 8" descr="95835d2aa1fdf8c4.png"/>
+          <p:cNvPr id="9" name="Picture 8" descr="3837c1f0f17629cf.png"/>
           <p:cNvPicPr>
             <a:picLocks noChangeAspect="1"/>
           </p:cNvPicPr>
@@ -12029,8 +12029,8 @@
         </p:blipFill>
         <p:spPr>
           <a:xfrm>
-            <a:off x="4047743" y="2950464"/>
-            <a:ext cx="4175760" cy="368808"/>
+            <a:off x="3809999" y="2950464"/>
+            <a:ext cx="4651248" cy="368808"/>
           </a:xfrm>
           <a:prstGeom prst="rect">
             <a:avLst/>
@@ -12039,7 +12039,7 @@
       </p:pic>
       <p:pic>
         <p:nvPicPr>
-          <p:cNvPr id="10" name="Picture 9" descr="b2bdb283546f2e98.png"/>
+          <p:cNvPr id="10" name="Picture 9" descr="a0f3c47d5d7510d6.png"/>
           <p:cNvPicPr>
             <a:picLocks noChangeAspect="1"/>
           </p:cNvPicPr>
@@ -12053,8 +12053,8 @@
         </p:blipFill>
         <p:spPr>
           <a:xfrm>
-            <a:off x="4047743" y="3432047"/>
-            <a:ext cx="1149096" cy="515112"/>
+            <a:off x="3809999" y="3432047"/>
+            <a:ext cx="1584960" cy="569976"/>
           </a:xfrm>
           <a:prstGeom prst="rect">
             <a:avLst/>
@@ -12063,7 +12063,7 @@
       </p:pic>
       <p:pic>
         <p:nvPicPr>
-          <p:cNvPr id="11" name="Picture 10" descr="092197a6c2e194dc.png"/>
+          <p:cNvPr id="11" name="Picture 10" descr="894447109a3e5d6a.png"/>
           <p:cNvPicPr>
             <a:picLocks noChangeAspect="1"/>
           </p:cNvPicPr>
@@ -12077,8 +12077,8 @@
         </p:blipFill>
         <p:spPr>
           <a:xfrm>
-            <a:off x="4047743" y="4038599"/>
-            <a:ext cx="2319528" cy="515112"/>
+            <a:off x="3809999" y="4093464"/>
+            <a:ext cx="3218688" cy="573024"/>
           </a:xfrm>
           <a:prstGeom prst="rect">
             <a:avLst/>
@@ -12093,7 +12093,7 @@
         </p:nvSpPr>
         <p:spPr>
           <a:xfrm>
-            <a:off x="777240" y="4690872"/>
+            <a:off x="777240" y="4803648"/>
             <a:ext cx="10607040" cy="548640"/>
           </a:xfrm>
           <a:prstGeom prst="rect">
@@ -12115,7 +12115,7 @@
                 </a:solidFill>
                 <a:latin typeface="Lexend"/>
               </a:rPr>
-              <a:t>Answer:   1/25</a:t>
+              <a:t>Answer:   1/100</a:t>
             </a:r>
           </a:p>
         </p:txBody>
@@ -13416,7 +13416,7 @@
       </p:sp>
       <p:pic>
         <p:nvPicPr>
-          <p:cNvPr id="11" name="Picture 10" descr="58c968e8bf18d130.png"/>
+          <p:cNvPr id="11" name="Picture 10" descr="c2339290e8681863.png"/>
           <p:cNvPicPr>
             <a:picLocks noChangeAspect="1"/>
           </p:cNvPicPr>
@@ -13431,7 +13431,7 @@
         <p:spPr>
           <a:xfrm>
             <a:off x="1627632" y="2122931"/>
-            <a:ext cx="862584" cy="390144"/>
+            <a:ext cx="676656" cy="390144"/>
           </a:xfrm>
           <a:prstGeom prst="rect">
             <a:avLst/>

--- a/a7/packages/A7 Unit 4 - Solving Problems with Rational Numbers/Lessons/4.05/A7 4.05 Evaluating Expressions with Radicals - Slides.pptx
+++ b/a7/packages/A7 Unit 4 - Solving Problems with Rational Numbers/Lessons/4.05/A7 4.05 Evaluating Expressions with Radicals - Slides.pptx
@@ -39,6 +39,7 @@
     <p:sldId id="287" r:id="rId38"/>
     <p:sldId id="288" r:id="rId39"/>
     <p:sldId id="289" r:id="rId40"/>
+    <p:sldId id="290" r:id="rId41"/>
   </p:sldIdLst>
   <p:sldSz cx="12191969" cy="6858000" type="screen4x3"/>
   <p:notesSz cx="6858000" cy="9144000"/>
@@ -3666,7 +3667,7 @@
       </p:sp>
       <p:pic>
         <p:nvPicPr>
-          <p:cNvPr id="8" name="Picture 7" descr="39a98bd65ba9c0b4.png"/>
+          <p:cNvPr id="8" name="Picture 7" descr="b20bcbb3e5acef31.png"/>
           <p:cNvPicPr>
             <a:picLocks noChangeAspect="1"/>
           </p:cNvPicPr>
@@ -3680,8 +3681,8 @@
         </p:blipFill>
         <p:spPr>
           <a:xfrm>
-            <a:off x="4364735" y="1600200"/>
-            <a:ext cx="3432048" cy="841248"/>
+            <a:off x="4360163" y="1600200"/>
+            <a:ext cx="3441192" cy="841248"/>
           </a:xfrm>
           <a:prstGeom prst="rect">
             <a:avLst/>
@@ -3719,113 +3720,6 @@
                 <a:latin typeface="Lexend"/>
               </a:rPr>
               <a:t>Evaluate.</a:t>
-            </a:r>
-          </a:p>
-        </p:txBody>
-      </p:sp>
-      <p:pic>
-        <p:nvPicPr>
-          <p:cNvPr id="10" name="Picture 9" descr="6dcdcd24bba74583.png"/>
-          <p:cNvPicPr>
-            <a:picLocks noChangeAspect="1"/>
-          </p:cNvPicPr>
-          <p:nvPr/>
-        </p:nvPicPr>
-        <p:blipFill>
-          <a:blip r:embed="rId3"/>
-          <a:stretch>
-            <a:fillRect/>
-          </a:stretch>
-        </p:blipFill>
-        <p:spPr>
-          <a:xfrm>
-            <a:off x="5020055" y="3556618"/>
-            <a:ext cx="1219200" cy="515112"/>
-          </a:xfrm>
-          <a:prstGeom prst="rect">
-            <a:avLst/>
-          </a:prstGeom>
-        </p:spPr>
-      </p:pic>
-      <p:pic>
-        <p:nvPicPr>
-          <p:cNvPr id="11" name="Picture 10" descr="56c69e6e26de48c6.png"/>
-          <p:cNvPicPr>
-            <a:picLocks noChangeAspect="1"/>
-          </p:cNvPicPr>
-          <p:nvPr/>
-        </p:nvPicPr>
-        <p:blipFill>
-          <a:blip r:embed="rId4"/>
-          <a:stretch>
-            <a:fillRect/>
-          </a:stretch>
-        </p:blipFill>
-        <p:spPr>
-          <a:xfrm>
-            <a:off x="5020055" y="4184506"/>
-            <a:ext cx="2234184" cy="368808"/>
-          </a:xfrm>
-          <a:prstGeom prst="rect">
-            <a:avLst/>
-          </a:prstGeom>
-        </p:spPr>
-      </p:pic>
-      <p:pic>
-        <p:nvPicPr>
-          <p:cNvPr id="12" name="Picture 11" descr="a96b4c18555835ff.png"/>
-          <p:cNvPicPr>
-            <a:picLocks noChangeAspect="1"/>
-          </p:cNvPicPr>
-          <p:nvPr/>
-        </p:nvPicPr>
-        <p:blipFill>
-          <a:blip r:embed="rId5"/>
-          <a:stretch>
-            <a:fillRect/>
-          </a:stretch>
-        </p:blipFill>
-        <p:spPr>
-          <a:xfrm>
-            <a:off x="5020055" y="4666090"/>
-            <a:ext cx="1399032" cy="515112"/>
-          </a:xfrm>
-          <a:prstGeom prst="rect">
-            <a:avLst/>
-          </a:prstGeom>
-        </p:spPr>
-      </p:pic>
-      <p:sp>
-        <p:nvSpPr>
-          <p:cNvPr id="13" name="TextBox 12"/>
-          <p:cNvSpPr txBox="1"/>
-          <p:nvPr/>
-        </p:nvSpPr>
-        <p:spPr>
-          <a:xfrm>
-            <a:off x="777240" y="5318362"/>
-            <a:ext cx="10607040" cy="548640"/>
-          </a:xfrm>
-          <a:prstGeom prst="rect">
-            <a:avLst/>
-          </a:prstGeom>
-          <a:noFill/>
-        </p:spPr>
-        <p:txBody>
-          <a:bodyPr wrap="square" lIns="45720" rIns="45720" tIns="18288" bIns="18288" anchor="t">
-            <a:spAutoFit/>
-          </a:bodyPr>
-          <a:lstStyle/>
-          <a:p>
-            <a:pPr algn="ctr"/>
-            <a:r>
-              <a:rPr sz="3040" b="1" i="0">
-                <a:solidFill>
-                  <a:srgbClr val="9E1B32"/>
-                </a:solidFill>
-                <a:latin typeface="Lexend"/>
-              </a:rPr>
-              <a:t>Answer:   −17/9</a:t>
             </a:r>
           </a:p>
         </p:txBody>
@@ -3878,7 +3772,7 @@
                 </a:solidFill>
                 <a:latin typeface="Lexend"/>
               </a:rPr>
-              <a:t>Example 2</a:t>
+              <a:t>Your Turn</a:t>
             </a:r>
           </a:p>
         </p:txBody>
@@ -4060,7 +3954,7 @@
       </p:sp>
       <p:pic>
         <p:nvPicPr>
-          <p:cNvPr id="8" name="Picture 7" descr="8d7699a30e9dd19c.png"/>
+          <p:cNvPr id="8" name="Picture 7" descr="39a98bd65ba9c0b4.png"/>
           <p:cNvPicPr>
             <a:picLocks noChangeAspect="1"/>
           </p:cNvPicPr>
@@ -4074,8 +3968,8 @@
         </p:blipFill>
         <p:spPr>
           <a:xfrm>
-            <a:off x="4357116" y="2103120"/>
-            <a:ext cx="3447288" cy="499871"/>
+            <a:off x="4364735" y="1600200"/>
+            <a:ext cx="3432048" cy="841248"/>
           </a:xfrm>
           <a:prstGeom prst="rect">
             <a:avLst/>
@@ -4090,7 +3984,7 @@
         </p:nvSpPr>
         <p:spPr>
           <a:xfrm>
-            <a:off x="777240" y="3105912"/>
+            <a:off x="777240" y="2944368"/>
             <a:ext cx="10607040" cy="429370"/>
           </a:xfrm>
           <a:prstGeom prst="rect">
@@ -4113,6 +4007,113 @@
                 <a:latin typeface="Lexend"/>
               </a:rPr>
               <a:t>Evaluate.</a:t>
+            </a:r>
+          </a:p>
+        </p:txBody>
+      </p:sp>
+      <p:pic>
+        <p:nvPicPr>
+          <p:cNvPr id="10" name="Picture 9" descr="6dcdcd24bba74583.png"/>
+          <p:cNvPicPr>
+            <a:picLocks noChangeAspect="1"/>
+          </p:cNvPicPr>
+          <p:nvPr/>
+        </p:nvPicPr>
+        <p:blipFill>
+          <a:blip r:embed="rId3"/>
+          <a:stretch>
+            <a:fillRect/>
+          </a:stretch>
+        </p:blipFill>
+        <p:spPr>
+          <a:xfrm>
+            <a:off x="5020055" y="3556618"/>
+            <a:ext cx="1219200" cy="515112"/>
+          </a:xfrm>
+          <a:prstGeom prst="rect">
+            <a:avLst/>
+          </a:prstGeom>
+        </p:spPr>
+      </p:pic>
+      <p:pic>
+        <p:nvPicPr>
+          <p:cNvPr id="11" name="Picture 10" descr="56c69e6e26de48c6.png"/>
+          <p:cNvPicPr>
+            <a:picLocks noChangeAspect="1"/>
+          </p:cNvPicPr>
+          <p:nvPr/>
+        </p:nvPicPr>
+        <p:blipFill>
+          <a:blip r:embed="rId4"/>
+          <a:stretch>
+            <a:fillRect/>
+          </a:stretch>
+        </p:blipFill>
+        <p:spPr>
+          <a:xfrm>
+            <a:off x="5020055" y="4184506"/>
+            <a:ext cx="2234184" cy="368808"/>
+          </a:xfrm>
+          <a:prstGeom prst="rect">
+            <a:avLst/>
+          </a:prstGeom>
+        </p:spPr>
+      </p:pic>
+      <p:pic>
+        <p:nvPicPr>
+          <p:cNvPr id="12" name="Picture 11" descr="a96b4c18555835ff.png"/>
+          <p:cNvPicPr>
+            <a:picLocks noChangeAspect="1"/>
+          </p:cNvPicPr>
+          <p:nvPr/>
+        </p:nvPicPr>
+        <p:blipFill>
+          <a:blip r:embed="rId5"/>
+          <a:stretch>
+            <a:fillRect/>
+          </a:stretch>
+        </p:blipFill>
+        <p:spPr>
+          <a:xfrm>
+            <a:off x="5020055" y="4666090"/>
+            <a:ext cx="1399032" cy="515112"/>
+          </a:xfrm>
+          <a:prstGeom prst="rect">
+            <a:avLst/>
+          </a:prstGeom>
+        </p:spPr>
+      </p:pic>
+      <p:sp>
+        <p:nvSpPr>
+          <p:cNvPr id="13" name="TextBox 12"/>
+          <p:cNvSpPr txBox="1"/>
+          <p:nvPr/>
+        </p:nvSpPr>
+        <p:spPr>
+          <a:xfrm>
+            <a:off x="777240" y="5318362"/>
+            <a:ext cx="10607040" cy="548640"/>
+          </a:xfrm>
+          <a:prstGeom prst="rect">
+            <a:avLst/>
+          </a:prstGeom>
+          <a:noFill/>
+        </p:spPr>
+        <p:txBody>
+          <a:bodyPr wrap="square" lIns="45720" rIns="45720" tIns="18288" bIns="18288" anchor="t">
+            <a:spAutoFit/>
+          </a:bodyPr>
+          <a:lstStyle/>
+          <a:p>
+            <a:pPr algn="ctr"/>
+            <a:r>
+              <a:rPr sz="3040" b="1" i="0">
+                <a:solidFill>
+                  <a:srgbClr val="9E1B32"/>
+                </a:solidFill>
+                <a:latin typeface="Lexend"/>
+              </a:rPr>
+              <a:t>Answer:   −17/9</a:t>
             </a:r>
           </a:p>
         </p:txBody>
@@ -4347,7 +4348,7 @@
       </p:sp>
       <p:pic>
         <p:nvPicPr>
-          <p:cNvPr id="8" name="Picture 7" descr="0e80ddb964149cd1.png"/>
+          <p:cNvPr id="8" name="Picture 7" descr="8d7699a30e9dd19c.png"/>
           <p:cNvPicPr>
             <a:picLocks noChangeAspect="1"/>
           </p:cNvPicPr>
@@ -4361,72 +4362,24 @@
         </p:blipFill>
         <p:spPr>
           <a:xfrm>
-            <a:off x="1828800" y="1920240"/>
-            <a:ext cx="3822191" cy="478536"/>
+            <a:off x="4357116" y="2103120"/>
+            <a:ext cx="3447288" cy="499871"/>
           </a:xfrm>
           <a:prstGeom prst="rect">
             <a:avLst/>
           </a:prstGeom>
         </p:spPr>
       </p:pic>
-      <p:pic>
-        <p:nvPicPr>
-          <p:cNvPr id="9" name="Picture 8" descr="a2a1fa108c11dcc5.png"/>
-          <p:cNvPicPr>
-            <a:picLocks noChangeAspect="1"/>
-          </p:cNvPicPr>
-          <p:nvPr/>
-        </p:nvPicPr>
-        <p:blipFill>
-          <a:blip r:embed="rId3"/>
-          <a:stretch>
-            <a:fillRect/>
-          </a:stretch>
-        </p:blipFill>
-        <p:spPr>
-          <a:xfrm>
-            <a:off x="1828800" y="2673096"/>
-            <a:ext cx="3989832" cy="478536"/>
-          </a:xfrm>
-          <a:prstGeom prst="rect">
-            <a:avLst/>
-          </a:prstGeom>
-        </p:spPr>
-      </p:pic>
-      <p:pic>
-        <p:nvPicPr>
-          <p:cNvPr id="10" name="Picture 9" descr="64f4a386edd00985.png"/>
-          <p:cNvPicPr>
-            <a:picLocks noChangeAspect="1"/>
-          </p:cNvPicPr>
-          <p:nvPr/>
-        </p:nvPicPr>
-        <p:blipFill>
-          <a:blip r:embed="rId4"/>
-          <a:stretch>
-            <a:fillRect/>
-          </a:stretch>
-        </p:blipFill>
-        <p:spPr>
-          <a:xfrm>
-            <a:off x="1828800" y="3425952"/>
-            <a:ext cx="1972056" cy="277368"/>
-          </a:xfrm>
-          <a:prstGeom prst="rect">
-            <a:avLst/>
-          </a:prstGeom>
-        </p:spPr>
-      </p:pic>
-      <p:sp>
-        <p:nvSpPr>
-          <p:cNvPr id="11" name="TextBox 10"/>
-          <p:cNvSpPr txBox="1"/>
-          <p:nvPr/>
-        </p:nvSpPr>
-        <p:spPr>
-          <a:xfrm>
-            <a:off x="777240" y="4572000"/>
-            <a:ext cx="10607040" cy="548640"/>
+      <p:sp>
+        <p:nvSpPr>
+          <p:cNvPr id="9" name="TextBox 8"/>
+          <p:cNvSpPr txBox="1"/>
+          <p:nvPr/>
+        </p:nvSpPr>
+        <p:spPr>
+          <a:xfrm>
+            <a:off x="777240" y="3105912"/>
+            <a:ext cx="10607040" cy="429370"/>
           </a:xfrm>
           <a:prstGeom prst="rect">
             <a:avLst/>
@@ -4441,13 +4394,13 @@
           <a:p>
             <a:pPr algn="ctr"/>
             <a:r>
-              <a:rPr sz="3040" b="1" i="0">
-                <a:solidFill>
-                  <a:srgbClr val="9E1B32"/>
-                </a:solidFill>
-                <a:latin typeface="Lexend"/>
-              </a:rPr>
-              <a:t>Answer:   0.2</a:t>
+              <a:rPr sz="2280" b="1" i="0">
+                <a:solidFill>
+                  <a:srgbClr val="1A1A1A"/>
+                </a:solidFill>
+                <a:latin typeface="Lexend"/>
+              </a:rPr>
+              <a:t>Evaluate.</a:t>
             </a:r>
           </a:p>
         </p:txBody>
@@ -4500,7 +4453,7 @@
                 </a:solidFill>
                 <a:latin typeface="Lexend"/>
               </a:rPr>
-              <a:t>Your Turn</a:t>
+              <a:t>Example 2</a:t>
             </a:r>
           </a:p>
         </p:txBody>
@@ -4682,7 +4635,7 @@
       </p:sp>
       <p:pic>
         <p:nvPicPr>
-          <p:cNvPr id="8" name="Picture 7" descr="d6d7dee63e8529a6.png"/>
+          <p:cNvPr id="8" name="Picture 7" descr="0e80ddb964149cd1.png"/>
           <p:cNvPicPr>
             <a:picLocks noChangeAspect="1"/>
           </p:cNvPicPr>
@@ -4696,24 +4649,72 @@
         </p:blipFill>
         <p:spPr>
           <a:xfrm>
-            <a:off x="3901440" y="1600200"/>
-            <a:ext cx="4358640" cy="624840"/>
+            <a:off x="1828800" y="1920240"/>
+            <a:ext cx="3822191" cy="478536"/>
           </a:xfrm>
           <a:prstGeom prst="rect">
             <a:avLst/>
           </a:prstGeom>
         </p:spPr>
       </p:pic>
-      <p:sp>
-        <p:nvSpPr>
-          <p:cNvPr id="9" name="TextBox 8"/>
-          <p:cNvSpPr txBox="1"/>
-          <p:nvPr/>
-        </p:nvSpPr>
-        <p:spPr>
-          <a:xfrm>
-            <a:off x="777240" y="2727960"/>
-            <a:ext cx="10607040" cy="429370"/>
+      <p:pic>
+        <p:nvPicPr>
+          <p:cNvPr id="9" name="Picture 8" descr="a2a1fa108c11dcc5.png"/>
+          <p:cNvPicPr>
+            <a:picLocks noChangeAspect="1"/>
+          </p:cNvPicPr>
+          <p:nvPr/>
+        </p:nvPicPr>
+        <p:blipFill>
+          <a:blip r:embed="rId3"/>
+          <a:stretch>
+            <a:fillRect/>
+          </a:stretch>
+        </p:blipFill>
+        <p:spPr>
+          <a:xfrm>
+            <a:off x="1828800" y="2673096"/>
+            <a:ext cx="3989832" cy="478536"/>
+          </a:xfrm>
+          <a:prstGeom prst="rect">
+            <a:avLst/>
+          </a:prstGeom>
+        </p:spPr>
+      </p:pic>
+      <p:pic>
+        <p:nvPicPr>
+          <p:cNvPr id="10" name="Picture 9" descr="64f4a386edd00985.png"/>
+          <p:cNvPicPr>
+            <a:picLocks noChangeAspect="1"/>
+          </p:cNvPicPr>
+          <p:nvPr/>
+        </p:nvPicPr>
+        <p:blipFill>
+          <a:blip r:embed="rId4"/>
+          <a:stretch>
+            <a:fillRect/>
+          </a:stretch>
+        </p:blipFill>
+        <p:spPr>
+          <a:xfrm>
+            <a:off x="1828800" y="3425952"/>
+            <a:ext cx="1972056" cy="277368"/>
+          </a:xfrm>
+          <a:prstGeom prst="rect">
+            <a:avLst/>
+          </a:prstGeom>
+        </p:spPr>
+      </p:pic>
+      <p:sp>
+        <p:nvSpPr>
+          <p:cNvPr id="11" name="TextBox 10"/>
+          <p:cNvSpPr txBox="1"/>
+          <p:nvPr/>
+        </p:nvSpPr>
+        <p:spPr>
+          <a:xfrm>
+            <a:off x="777240" y="4572000"/>
+            <a:ext cx="10607040" cy="548640"/>
           </a:xfrm>
           <a:prstGeom prst="rect">
             <a:avLst/>
@@ -4728,13 +4729,13 @@
           <a:p>
             <a:pPr algn="ctr"/>
             <a:r>
-              <a:rPr sz="2280" b="1" i="0">
-                <a:solidFill>
-                  <a:srgbClr val="1A1A1A"/>
-                </a:solidFill>
-                <a:latin typeface="Lexend"/>
-              </a:rPr>
-              <a:t>Evaluate.</a:t>
+              <a:rPr sz="3040" b="1" i="0">
+                <a:solidFill>
+                  <a:srgbClr val="9E1B32"/>
+                </a:solidFill>
+                <a:latin typeface="Lexend"/>
+              </a:rPr>
+              <a:t>Answer:   0.2</a:t>
             </a:r>
           </a:p>
         </p:txBody>
@@ -4969,7 +4970,7 @@
       </p:sp>
       <p:pic>
         <p:nvPicPr>
-          <p:cNvPr id="8" name="Picture 7" descr="7e55928de2d14c9d.png"/>
+          <p:cNvPr id="8" name="Picture 7" descr="d6d7dee63e8529a6.png"/>
           <p:cNvPicPr>
             <a:picLocks noChangeAspect="1"/>
           </p:cNvPicPr>
@@ -4983,8 +4984,8 @@
         </p:blipFill>
         <p:spPr>
           <a:xfrm>
-            <a:off x="3899915" y="1600200"/>
-            <a:ext cx="4361688" cy="624840"/>
+            <a:off x="3901440" y="1600200"/>
+            <a:ext cx="4358640" cy="624840"/>
           </a:xfrm>
           <a:prstGeom prst="rect">
             <a:avLst/>
@@ -5022,113 +5023,6 @@
                 <a:latin typeface="Lexend"/>
               </a:rPr>
               <a:t>Evaluate.</a:t>
-            </a:r>
-          </a:p>
-        </p:txBody>
-      </p:sp>
-      <p:pic>
-        <p:nvPicPr>
-          <p:cNvPr id="10" name="Picture 9" descr="3d08e3b9f0cd1290.png"/>
-          <p:cNvPicPr>
-            <a:picLocks noChangeAspect="1"/>
-          </p:cNvPicPr>
-          <p:nvPr/>
-        </p:nvPicPr>
-        <p:blipFill>
-          <a:blip r:embed="rId3"/>
-          <a:stretch>
-            <a:fillRect/>
-          </a:stretch>
-        </p:blipFill>
-        <p:spPr>
-          <a:xfrm>
-            <a:off x="4591811" y="3361546"/>
-            <a:ext cx="1261872" cy="368808"/>
-          </a:xfrm>
-          <a:prstGeom prst="rect">
-            <a:avLst/>
-          </a:prstGeom>
-        </p:spPr>
-      </p:pic>
-      <p:pic>
-        <p:nvPicPr>
-          <p:cNvPr id="11" name="Picture 10" descr="97af87df177bbd26.png"/>
-          <p:cNvPicPr>
-            <a:picLocks noChangeAspect="1"/>
-          </p:cNvPicPr>
-          <p:nvPr/>
-        </p:nvPicPr>
-        <p:blipFill>
-          <a:blip r:embed="rId4"/>
-          <a:stretch>
-            <a:fillRect/>
-          </a:stretch>
-        </p:blipFill>
-        <p:spPr>
-          <a:xfrm>
-            <a:off x="4591811" y="3864466"/>
-            <a:ext cx="2438400" cy="368808"/>
-          </a:xfrm>
-          <a:prstGeom prst="rect">
-            <a:avLst/>
-          </a:prstGeom>
-        </p:spPr>
-      </p:pic>
-      <p:pic>
-        <p:nvPicPr>
-          <p:cNvPr id="12" name="Picture 11" descr="dbd85bfcc6699fc2.png"/>
-          <p:cNvPicPr>
-            <a:picLocks noChangeAspect="1"/>
-          </p:cNvPicPr>
-          <p:nvPr/>
-        </p:nvPicPr>
-        <p:blipFill>
-          <a:blip r:embed="rId5"/>
-          <a:stretch>
-            <a:fillRect/>
-          </a:stretch>
-        </p:blipFill>
-        <p:spPr>
-          <a:xfrm>
-            <a:off x="4591811" y="4445110"/>
-            <a:ext cx="3087624" cy="213360"/>
-          </a:xfrm>
-          <a:prstGeom prst="rect">
-            <a:avLst/>
-          </a:prstGeom>
-        </p:spPr>
-      </p:pic>
-      <p:sp>
-        <p:nvSpPr>
-          <p:cNvPr id="13" name="TextBox 12"/>
-          <p:cNvSpPr txBox="1"/>
-          <p:nvPr/>
-        </p:nvSpPr>
-        <p:spPr>
-          <a:xfrm>
-            <a:off x="777240" y="4894690"/>
-            <a:ext cx="10607040" cy="548640"/>
-          </a:xfrm>
-          <a:prstGeom prst="rect">
-            <a:avLst/>
-          </a:prstGeom>
-          <a:noFill/>
-        </p:spPr>
-        <p:txBody>
-          <a:bodyPr wrap="square" lIns="45720" rIns="45720" tIns="18288" bIns="18288" anchor="t">
-            <a:spAutoFit/>
-          </a:bodyPr>
-          <a:lstStyle/>
-          <a:p>
-            <a:pPr algn="ctr"/>
-            <a:r>
-              <a:rPr sz="3040" b="1" i="0">
-                <a:solidFill>
-                  <a:srgbClr val="9E1B32"/>
-                </a:solidFill>
-                <a:latin typeface="Lexend"/>
-              </a:rPr>
-              <a:t>Answer:   8</a:t>
             </a:r>
           </a:p>
         </p:txBody>
@@ -5175,13 +5069,13 @@
           <a:p>
             <a:pPr algn="l"/>
             <a:r>
-              <a:rPr sz="3229" b="1" i="0">
+              <a:rPr sz="3420" b="1" i="0">
                 <a:solidFill>
                   <a:srgbClr val="1A1A1A"/>
                 </a:solidFill>
                 <a:latin typeface="Lexend"/>
               </a:rPr>
-              <a:t>Whiteboards   ·   Question 1 of 9</a:t>
+              <a:t>Your Turn</a:t>
             </a:r>
           </a:p>
         </p:txBody>
@@ -5363,7 +5257,7 @@
       </p:sp>
       <p:pic>
         <p:nvPicPr>
-          <p:cNvPr id="8" name="Picture 7" descr="ea03e9b9b6d50897.png"/>
+          <p:cNvPr id="8" name="Picture 7" descr="7e55928de2d14c9d.png"/>
           <p:cNvPicPr>
             <a:picLocks noChangeAspect="1"/>
           </p:cNvPicPr>
@@ -5377,8 +5271,8 @@
         </p:blipFill>
         <p:spPr>
           <a:xfrm>
-            <a:off x="5573268" y="2194560"/>
-            <a:ext cx="1014984" cy="478536"/>
+            <a:off x="3899915" y="1600200"/>
+            <a:ext cx="4361688" cy="624840"/>
           </a:xfrm>
           <a:prstGeom prst="rect">
             <a:avLst/>
@@ -5393,8 +5287,8 @@
         </p:nvSpPr>
         <p:spPr>
           <a:xfrm>
-            <a:off x="777240" y="4343400"/>
-            <a:ext cx="10607040" cy="457200"/>
+            <a:off x="777240" y="2727960"/>
+            <a:ext cx="10607040" cy="429370"/>
           </a:xfrm>
           <a:prstGeom prst="rect">
             <a:avLst/>
@@ -5409,13 +5303,120 @@
           <a:p>
             <a:pPr algn="ctr"/>
             <a:r>
-              <a:rPr sz="2470" b="1" i="0">
+              <a:rPr sz="2280" b="1" i="0">
                 <a:solidFill>
                   <a:srgbClr val="1A1A1A"/>
                 </a:solidFill>
                 <a:latin typeface="Lexend"/>
               </a:rPr>
-              <a:t>Answer it.</a:t>
+              <a:t>Evaluate.</a:t>
+            </a:r>
+          </a:p>
+        </p:txBody>
+      </p:sp>
+      <p:pic>
+        <p:nvPicPr>
+          <p:cNvPr id="10" name="Picture 9" descr="3d08e3b9f0cd1290.png"/>
+          <p:cNvPicPr>
+            <a:picLocks noChangeAspect="1"/>
+          </p:cNvPicPr>
+          <p:nvPr/>
+        </p:nvPicPr>
+        <p:blipFill>
+          <a:blip r:embed="rId3"/>
+          <a:stretch>
+            <a:fillRect/>
+          </a:stretch>
+        </p:blipFill>
+        <p:spPr>
+          <a:xfrm>
+            <a:off x="4591811" y="3361546"/>
+            <a:ext cx="1261872" cy="368808"/>
+          </a:xfrm>
+          <a:prstGeom prst="rect">
+            <a:avLst/>
+          </a:prstGeom>
+        </p:spPr>
+      </p:pic>
+      <p:pic>
+        <p:nvPicPr>
+          <p:cNvPr id="11" name="Picture 10" descr="97af87df177bbd26.png"/>
+          <p:cNvPicPr>
+            <a:picLocks noChangeAspect="1"/>
+          </p:cNvPicPr>
+          <p:nvPr/>
+        </p:nvPicPr>
+        <p:blipFill>
+          <a:blip r:embed="rId4"/>
+          <a:stretch>
+            <a:fillRect/>
+          </a:stretch>
+        </p:blipFill>
+        <p:spPr>
+          <a:xfrm>
+            <a:off x="4591811" y="3864466"/>
+            <a:ext cx="2438400" cy="368808"/>
+          </a:xfrm>
+          <a:prstGeom prst="rect">
+            <a:avLst/>
+          </a:prstGeom>
+        </p:spPr>
+      </p:pic>
+      <p:pic>
+        <p:nvPicPr>
+          <p:cNvPr id="12" name="Picture 11" descr="dbd85bfcc6699fc2.png"/>
+          <p:cNvPicPr>
+            <a:picLocks noChangeAspect="1"/>
+          </p:cNvPicPr>
+          <p:nvPr/>
+        </p:nvPicPr>
+        <p:blipFill>
+          <a:blip r:embed="rId5"/>
+          <a:stretch>
+            <a:fillRect/>
+          </a:stretch>
+        </p:blipFill>
+        <p:spPr>
+          <a:xfrm>
+            <a:off x="4591811" y="4445110"/>
+            <a:ext cx="3087624" cy="213360"/>
+          </a:xfrm>
+          <a:prstGeom prst="rect">
+            <a:avLst/>
+          </a:prstGeom>
+        </p:spPr>
+      </p:pic>
+      <p:sp>
+        <p:nvSpPr>
+          <p:cNvPr id="13" name="TextBox 12"/>
+          <p:cNvSpPr txBox="1"/>
+          <p:nvPr/>
+        </p:nvSpPr>
+        <p:spPr>
+          <a:xfrm>
+            <a:off x="777240" y="4894690"/>
+            <a:ext cx="10607040" cy="548640"/>
+          </a:xfrm>
+          <a:prstGeom prst="rect">
+            <a:avLst/>
+          </a:prstGeom>
+          <a:noFill/>
+        </p:spPr>
+        <p:txBody>
+          <a:bodyPr wrap="square" lIns="45720" rIns="45720" tIns="18288" bIns="18288" anchor="t">
+            <a:spAutoFit/>
+          </a:bodyPr>
+          <a:lstStyle/>
+          <a:p>
+            <a:pPr algn="ctr"/>
+            <a:r>
+              <a:rPr sz="3040" b="1" i="0">
+                <a:solidFill>
+                  <a:srgbClr val="9E1B32"/>
+                </a:solidFill>
+                <a:latin typeface="Lexend"/>
+              </a:rPr>
+              <a:t>Answer:   8</a:t>
             </a:r>
           </a:p>
         </p:txBody>
@@ -5650,7 +5651,7 @@
       </p:sp>
       <p:pic>
         <p:nvPicPr>
-          <p:cNvPr id="8" name="Picture 7" descr="6c4a40349de610b1.png"/>
+          <p:cNvPr id="8" name="Picture 7" descr="ea03e9b9b6d50897.png"/>
           <p:cNvPicPr>
             <a:picLocks noChangeAspect="1"/>
           </p:cNvPicPr>
@@ -5664,128 +5665,45 @@
         </p:blipFill>
         <p:spPr>
           <a:xfrm>
-            <a:off x="5576315" y="2103120"/>
-            <a:ext cx="1008888" cy="478536"/>
+            <a:off x="5573268" y="2194560"/>
+            <a:ext cx="1014984" cy="478536"/>
           </a:xfrm>
           <a:prstGeom prst="rect">
             <a:avLst/>
           </a:prstGeom>
         </p:spPr>
       </p:pic>
-      <p:pic>
-        <p:nvPicPr>
-          <p:cNvPr id="9" name="Picture 8" descr="e345b1c8704f7bb5.png"/>
-          <p:cNvPicPr>
-            <a:picLocks noChangeAspect="1"/>
-          </p:cNvPicPr>
-          <p:nvPr/>
-        </p:nvPicPr>
-        <p:blipFill>
-          <a:blip r:embed="rId3"/>
-          <a:stretch>
-            <a:fillRect/>
-          </a:stretch>
-        </p:blipFill>
-        <p:spPr>
-          <a:xfrm>
-            <a:off x="3840399" y="3020568"/>
-            <a:ext cx="1819656" cy="249935"/>
-          </a:xfrm>
-          <a:prstGeom prst="rect">
-            <a:avLst/>
-          </a:prstGeom>
-        </p:spPr>
-      </p:pic>
-      <p:sp>
-        <p:nvSpPr>
-          <p:cNvPr id="10" name="TextBox 9"/>
-          <p:cNvSpPr txBox="1"/>
-          <p:nvPr/>
-        </p:nvSpPr>
-        <p:spPr>
-          <a:xfrm>
-            <a:off x="5660055" y="2916936"/>
-            <a:ext cx="1338233" cy="457200"/>
-          </a:xfrm>
-          <a:prstGeom prst="rect">
-            <a:avLst/>
-          </a:prstGeom>
-          <a:noFill/>
-        </p:spPr>
-        <p:txBody>
-          <a:bodyPr wrap="none" lIns="45720" rIns="45720" tIns="18288" bIns="18288" anchor="ctr">
-            <a:noAutofit/>
-          </a:bodyPr>
-          <a:lstStyle/>
-          <a:p>
-            <a:pPr algn="l"/>
-            <a:r>
-              <a:rPr sz="2750" b="0" i="0">
+      <p:sp>
+        <p:nvSpPr>
+          <p:cNvPr id="9" name="TextBox 8"/>
+          <p:cNvSpPr txBox="1"/>
+          <p:nvPr/>
+        </p:nvSpPr>
+        <p:spPr>
+          <a:xfrm>
+            <a:off x="777240" y="4343400"/>
+            <a:ext cx="10607040" cy="457200"/>
+          </a:xfrm>
+          <a:prstGeom prst="rect">
+            <a:avLst/>
+          </a:prstGeom>
+          <a:noFill/>
+        </p:spPr>
+        <p:txBody>
+          <a:bodyPr wrap="square" lIns="45720" rIns="45720" tIns="18288" bIns="18288" anchor="t">
+            <a:spAutoFit/>
+          </a:bodyPr>
+          <a:lstStyle/>
+          <a:p>
+            <a:pPr algn="ctr"/>
+            <a:r>
+              <a:rPr sz="2470" b="1" i="0">
                 <a:solidFill>
                   <a:srgbClr val="1A1A1A"/>
                 </a:solidFill>
                 <a:latin typeface="Lexend"/>
               </a:rPr>
-              <a:t>,   so   </a:t>
-            </a:r>
-          </a:p>
-        </p:txBody>
-      </p:sp>
-      <p:pic>
-        <p:nvPicPr>
-          <p:cNvPr id="11" name="Picture 10" descr="ca3e1ca339eb783d.png"/>
-          <p:cNvPicPr>
-            <a:picLocks noChangeAspect="1"/>
-          </p:cNvPicPr>
-          <p:nvPr/>
-        </p:nvPicPr>
-        <p:blipFill>
-          <a:blip r:embed="rId4"/>
-          <a:stretch>
-            <a:fillRect/>
-          </a:stretch>
-        </p:blipFill>
-        <p:spPr>
-          <a:xfrm>
-            <a:off x="6861128" y="2929128"/>
-            <a:ext cx="1572768" cy="432816"/>
-          </a:xfrm>
-          <a:prstGeom prst="rect">
-            <a:avLst/>
-          </a:prstGeom>
-        </p:spPr>
-      </p:pic>
-      <p:sp>
-        <p:nvSpPr>
-          <p:cNvPr id="12" name="TextBox 11"/>
-          <p:cNvSpPr txBox="1"/>
-          <p:nvPr/>
-        </p:nvSpPr>
-        <p:spPr>
-          <a:xfrm>
-            <a:off x="777240" y="4663440"/>
-            <a:ext cx="10607040" cy="548640"/>
-          </a:xfrm>
-          <a:prstGeom prst="rect">
-            <a:avLst/>
-          </a:prstGeom>
-          <a:noFill/>
-        </p:spPr>
-        <p:txBody>
-          <a:bodyPr wrap="square" lIns="45720" rIns="45720" tIns="18288" bIns="18288" anchor="t">
-            <a:spAutoFit/>
-          </a:bodyPr>
-          <a:lstStyle/>
-          <a:p>
-            <a:pPr algn="ctr"/>
-            <a:r>
-              <a:rPr sz="3040" b="1" i="0">
-                <a:solidFill>
-                  <a:srgbClr val="9E1B32"/>
-                </a:solidFill>
-                <a:latin typeface="Lexend"/>
-              </a:rPr>
-              <a:t>Answer:   11</a:t>
+              <a:t>Answer it.</a:t>
             </a:r>
           </a:p>
         </p:txBody>
@@ -5838,7 +5756,7 @@
                 </a:solidFill>
                 <a:latin typeface="Lexend"/>
               </a:rPr>
-              <a:t>Whiteboards   ·   Question 2 of 9</a:t>
+              <a:t>Whiteboards   ·   Question 1 of 9</a:t>
             </a:r>
           </a:p>
         </p:txBody>
@@ -6018,16 +5936,123 @@
           </a:p>
         </p:txBody>
       </p:sp>
-      <p:sp>
-        <p:nvSpPr>
-          <p:cNvPr id="8" name="TextBox 7"/>
-          <p:cNvSpPr txBox="1"/>
-          <p:nvPr/>
-        </p:nvSpPr>
-        <p:spPr>
-          <a:xfrm>
-            <a:off x="1234440" y="1874519"/>
-            <a:ext cx="10058400" cy="429370"/>
+      <p:pic>
+        <p:nvPicPr>
+          <p:cNvPr id="8" name="Picture 7" descr="6c4a40349de610b1.png"/>
+          <p:cNvPicPr>
+            <a:picLocks noChangeAspect="1"/>
+          </p:cNvPicPr>
+          <p:nvPr/>
+        </p:nvPicPr>
+        <p:blipFill>
+          <a:blip r:embed="rId2"/>
+          <a:stretch>
+            <a:fillRect/>
+          </a:stretch>
+        </p:blipFill>
+        <p:spPr>
+          <a:xfrm>
+            <a:off x="5576315" y="2103120"/>
+            <a:ext cx="1008888" cy="478536"/>
+          </a:xfrm>
+          <a:prstGeom prst="rect">
+            <a:avLst/>
+          </a:prstGeom>
+        </p:spPr>
+      </p:pic>
+      <p:pic>
+        <p:nvPicPr>
+          <p:cNvPr id="9" name="Picture 8" descr="e345b1c8704f7bb5.png"/>
+          <p:cNvPicPr>
+            <a:picLocks noChangeAspect="1"/>
+          </p:cNvPicPr>
+          <p:nvPr/>
+        </p:nvPicPr>
+        <p:blipFill>
+          <a:blip r:embed="rId3"/>
+          <a:stretch>
+            <a:fillRect/>
+          </a:stretch>
+        </p:blipFill>
+        <p:spPr>
+          <a:xfrm>
+            <a:off x="3840399" y="3020568"/>
+            <a:ext cx="1819656" cy="249935"/>
+          </a:xfrm>
+          <a:prstGeom prst="rect">
+            <a:avLst/>
+          </a:prstGeom>
+        </p:spPr>
+      </p:pic>
+      <p:sp>
+        <p:nvSpPr>
+          <p:cNvPr id="10" name="TextBox 9"/>
+          <p:cNvSpPr txBox="1"/>
+          <p:nvPr/>
+        </p:nvSpPr>
+        <p:spPr>
+          <a:xfrm>
+            <a:off x="5660055" y="2916936"/>
+            <a:ext cx="1338233" cy="457200"/>
+          </a:xfrm>
+          <a:prstGeom prst="rect">
+            <a:avLst/>
+          </a:prstGeom>
+          <a:noFill/>
+        </p:spPr>
+        <p:txBody>
+          <a:bodyPr wrap="none" lIns="45720" rIns="45720" tIns="18288" bIns="18288" anchor="ctr">
+            <a:noAutofit/>
+          </a:bodyPr>
+          <a:lstStyle/>
+          <a:p>
+            <a:pPr algn="l"/>
+            <a:r>
+              <a:rPr sz="2750" b="0" i="0">
+                <a:solidFill>
+                  <a:srgbClr val="1A1A1A"/>
+                </a:solidFill>
+                <a:latin typeface="Lexend"/>
+              </a:rPr>
+              <a:t>,   so   </a:t>
+            </a:r>
+          </a:p>
+        </p:txBody>
+      </p:sp>
+      <p:pic>
+        <p:nvPicPr>
+          <p:cNvPr id="11" name="Picture 10" descr="ca3e1ca339eb783d.png"/>
+          <p:cNvPicPr>
+            <a:picLocks noChangeAspect="1"/>
+          </p:cNvPicPr>
+          <p:nvPr/>
+        </p:nvPicPr>
+        <p:blipFill>
+          <a:blip r:embed="rId4"/>
+          <a:stretch>
+            <a:fillRect/>
+          </a:stretch>
+        </p:blipFill>
+        <p:spPr>
+          <a:xfrm>
+            <a:off x="6861128" y="2929128"/>
+            <a:ext cx="1572768" cy="432816"/>
+          </a:xfrm>
+          <a:prstGeom prst="rect">
+            <a:avLst/>
+          </a:prstGeom>
+        </p:spPr>
+      </p:pic>
+      <p:sp>
+        <p:nvSpPr>
+          <p:cNvPr id="12" name="TextBox 11"/>
+          <p:cNvSpPr txBox="1"/>
+          <p:nvPr/>
+        </p:nvSpPr>
+        <p:spPr>
+          <a:xfrm>
+            <a:off x="777240" y="4663440"/>
+            <a:ext cx="10607040" cy="548640"/>
           </a:xfrm>
           <a:prstGeom prst="rect">
             <a:avLst/>
@@ -6040,120 +6065,15 @@
           </a:bodyPr>
           <a:lstStyle/>
           <a:p>
-            <a:pPr algn="l"/>
-            <a:r>
-              <a:rPr sz="2280" b="0" i="0">
-                <a:solidFill>
-                  <a:srgbClr val="1A1A1A"/>
-                </a:solidFill>
-                <a:latin typeface="Lexend"/>
-              </a:rPr>
-              <a:t>A square patio has an area of  169  square feet.</a:t>
-            </a:r>
-          </a:p>
-        </p:txBody>
-      </p:sp>
-      <p:sp>
-        <p:nvSpPr>
-          <p:cNvPr id="9" name="TextBox 8"/>
-          <p:cNvSpPr txBox="1"/>
-          <p:nvPr/>
-        </p:nvSpPr>
-        <p:spPr>
-          <a:xfrm>
-            <a:off x="1234440" y="2413618"/>
-            <a:ext cx="10058400" cy="429370"/>
-          </a:xfrm>
-          <a:prstGeom prst="rect">
-            <a:avLst/>
-          </a:prstGeom>
-          <a:noFill/>
-        </p:spPr>
-        <p:txBody>
-          <a:bodyPr wrap="square" lIns="45720" rIns="45720" tIns="18288" bIns="18288" anchor="t">
-            <a:spAutoFit/>
-          </a:bodyPr>
-          <a:lstStyle/>
-          <a:p>
-            <a:pPr algn="l"/>
-            <a:r>
-              <a:rPr sz="2280" b="0" i="0">
-                <a:solidFill>
-                  <a:srgbClr val="1A1A1A"/>
-                </a:solidFill>
-                <a:latin typeface="Lexend"/>
-              </a:rPr>
-              <a:t>Fencing for it costs 12 dollars a foot.</a:t>
-            </a:r>
-          </a:p>
-        </p:txBody>
-      </p:sp>
-      <p:sp>
-        <p:nvSpPr>
-          <p:cNvPr id="10" name="TextBox 9"/>
-          <p:cNvSpPr txBox="1"/>
-          <p:nvPr/>
-        </p:nvSpPr>
-        <p:spPr>
-          <a:xfrm>
-            <a:off x="1234440" y="2952716"/>
-            <a:ext cx="10058400" cy="429370"/>
-          </a:xfrm>
-          <a:prstGeom prst="rect">
-            <a:avLst/>
-          </a:prstGeom>
-          <a:noFill/>
-        </p:spPr>
-        <p:txBody>
-          <a:bodyPr wrap="square" lIns="45720" rIns="45720" tIns="18288" bIns="18288" anchor="t">
-            <a:spAutoFit/>
-          </a:bodyPr>
-          <a:lstStyle/>
-          <a:p>
-            <a:pPr algn="l"/>
-            <a:r>
-              <a:rPr sz="2280" b="1" i="0">
-                <a:solidFill>
-                  <a:srgbClr val="1A1A1A"/>
-                </a:solidFill>
-                <a:latin typeface="Lexend"/>
-              </a:rPr>
-              <a:t>How long is one side of the patio?</a:t>
-            </a:r>
-          </a:p>
-        </p:txBody>
-      </p:sp>
-      <p:sp>
-        <p:nvSpPr>
-          <p:cNvPr id="11" name="TextBox 10"/>
-          <p:cNvSpPr txBox="1"/>
-          <p:nvPr/>
-        </p:nvSpPr>
-        <p:spPr>
-          <a:xfrm>
-            <a:off x="777240" y="4343400"/>
-            <a:ext cx="10607040" cy="457200"/>
-          </a:xfrm>
-          <a:prstGeom prst="rect">
-            <a:avLst/>
-          </a:prstGeom>
-          <a:noFill/>
-        </p:spPr>
-        <p:txBody>
-          <a:bodyPr wrap="square" lIns="45720" rIns="45720" tIns="18288" bIns="18288" anchor="t">
-            <a:spAutoFit/>
-          </a:bodyPr>
-          <a:lstStyle/>
-          <a:p>
             <a:pPr algn="ctr"/>
             <a:r>
-              <a:rPr sz="2470" b="1" i="0">
-                <a:solidFill>
-                  <a:srgbClr val="1A1A1A"/>
-                </a:solidFill>
-                <a:latin typeface="Lexend"/>
-              </a:rPr>
-              <a:t>Answer it.</a:t>
+              <a:rPr sz="3040" b="1" i="0">
+                <a:solidFill>
+                  <a:srgbClr val="9E1B32"/>
+                </a:solidFill>
+                <a:latin typeface="Lexend"/>
+              </a:rPr>
+              <a:t>Answer:   11</a:t>
             </a:r>
           </a:p>
         </p:txBody>
@@ -6499,147 +6419,29 @@
         </p:nvSpPr>
         <p:spPr>
           <a:xfrm>
-            <a:off x="3739815" y="3587827"/>
-            <a:ext cx="3131776" cy="457200"/>
-          </a:xfrm>
-          <a:prstGeom prst="rect">
-            <a:avLst/>
-          </a:prstGeom>
-          <a:noFill/>
-        </p:spPr>
-        <p:txBody>
-          <a:bodyPr wrap="none" lIns="45720" rIns="45720" tIns="18288" bIns="18288" anchor="ctr">
-            <a:noAutofit/>
-          </a:bodyPr>
-          <a:lstStyle/>
-          <a:p>
-            <a:pPr algn="l"/>
-            <a:r>
-              <a:rPr sz="2750" b="0" i="0">
+            <a:off x="777240" y="4343400"/>
+            <a:ext cx="10607040" cy="457200"/>
+          </a:xfrm>
+          <a:prstGeom prst="rect">
+            <a:avLst/>
+          </a:prstGeom>
+          <a:noFill/>
+        </p:spPr>
+        <p:txBody>
+          <a:bodyPr wrap="square" lIns="45720" rIns="45720" tIns="18288" bIns="18288" anchor="t">
+            <a:spAutoFit/>
+          </a:bodyPr>
+          <a:lstStyle/>
+          <a:p>
+            <a:pPr algn="ctr"/>
+            <a:r>
+              <a:rPr sz="2470" b="1" i="0">
                 <a:solidFill>
                   <a:srgbClr val="1A1A1A"/>
                 </a:solidFill>
                 <a:latin typeface="Lexend"/>
               </a:rPr>
-              <a:t>Side × side = 169</a:t>
-            </a:r>
-          </a:p>
-        </p:txBody>
-      </p:sp>
-      <p:pic>
-        <p:nvPicPr>
-          <p:cNvPr id="12" name="Picture 11" descr="389a35c8a608274e.png"/>
-          <p:cNvPicPr>
-            <a:picLocks noChangeAspect="1"/>
-          </p:cNvPicPr>
-          <p:nvPr/>
-        </p:nvPicPr>
-        <p:blipFill>
-          <a:blip r:embed="rId2"/>
-          <a:stretch>
-            <a:fillRect/>
-          </a:stretch>
-        </p:blipFill>
-        <p:spPr>
-          <a:xfrm>
-            <a:off x="3794679" y="4238575"/>
-            <a:ext cx="1868424" cy="256032"/>
-          </a:xfrm>
-          <a:prstGeom prst="rect">
-            <a:avLst/>
-          </a:prstGeom>
-        </p:spPr>
-      </p:pic>
-      <p:sp>
-        <p:nvSpPr>
-          <p:cNvPr id="13" name="TextBox 12"/>
-          <p:cNvSpPr txBox="1"/>
-          <p:nvPr/>
-        </p:nvSpPr>
-        <p:spPr>
-          <a:xfrm>
-            <a:off x="5663103" y="4137991"/>
-            <a:ext cx="1338233" cy="457200"/>
-          </a:xfrm>
-          <a:prstGeom prst="rect">
-            <a:avLst/>
-          </a:prstGeom>
-          <a:noFill/>
-        </p:spPr>
-        <p:txBody>
-          <a:bodyPr wrap="none" lIns="45720" rIns="45720" tIns="18288" bIns="18288" anchor="ctr">
-            <a:noAutofit/>
-          </a:bodyPr>
-          <a:lstStyle/>
-          <a:p>
-            <a:pPr algn="l"/>
-            <a:r>
-              <a:rPr sz="2750" b="0" i="0">
-                <a:solidFill>
-                  <a:srgbClr val="1A1A1A"/>
-                </a:solidFill>
-                <a:latin typeface="Lexend"/>
-              </a:rPr>
-              <a:t>,   so   </a:t>
-            </a:r>
-          </a:p>
-        </p:txBody>
-      </p:sp>
-      <p:pic>
-        <p:nvPicPr>
-          <p:cNvPr id="14" name="Picture 13" descr="296c25346e41fa21.png"/>
-          <p:cNvPicPr>
-            <a:picLocks noChangeAspect="1"/>
-          </p:cNvPicPr>
-          <p:nvPr/>
-        </p:nvPicPr>
-        <p:blipFill>
-          <a:blip r:embed="rId3"/>
-          <a:stretch>
-            <a:fillRect/>
-          </a:stretch>
-        </p:blipFill>
-        <p:spPr>
-          <a:xfrm>
-            <a:off x="6864176" y="4150183"/>
-            <a:ext cx="1612392" cy="432816"/>
-          </a:xfrm>
-          <a:prstGeom prst="rect">
-            <a:avLst/>
-          </a:prstGeom>
-        </p:spPr>
-      </p:pic>
-      <p:sp>
-        <p:nvSpPr>
-          <p:cNvPr id="15" name="TextBox 14"/>
-          <p:cNvSpPr txBox="1"/>
-          <p:nvPr/>
-        </p:nvSpPr>
-        <p:spPr>
-          <a:xfrm>
-            <a:off x="777240" y="4720159"/>
-            <a:ext cx="10607040" cy="548640"/>
-          </a:xfrm>
-          <a:prstGeom prst="rect">
-            <a:avLst/>
-          </a:prstGeom>
-          <a:noFill/>
-        </p:spPr>
-        <p:txBody>
-          <a:bodyPr wrap="square" lIns="45720" rIns="45720" tIns="18288" bIns="18288" anchor="t">
-            <a:spAutoFit/>
-          </a:bodyPr>
-          <a:lstStyle/>
-          <a:p>
-            <a:pPr algn="ctr"/>
-            <a:r>
-              <a:rPr sz="3040" b="1" i="0">
-                <a:solidFill>
-                  <a:srgbClr val="9E1B32"/>
-                </a:solidFill>
-                <a:latin typeface="Lexend"/>
-              </a:rPr>
-              <a:t>Answer:   13 feet</a:t>
+              <a:t>Answer it.</a:t>
             </a:r>
           </a:p>
         </p:txBody>
@@ -6692,7 +6494,7 @@
                 </a:solidFill>
                 <a:latin typeface="Lexend"/>
               </a:rPr>
-              <a:t>Whiteboards   ·   Question 3 of 9</a:t>
+              <a:t>Whiteboards   ·   Question 2 of 9</a:t>
             </a:r>
           </a:p>
         </p:txBody>
@@ -6872,9 +6674,149 @@
           </a:p>
         </p:txBody>
       </p:sp>
+      <p:sp>
+        <p:nvSpPr>
+          <p:cNvPr id="8" name="TextBox 7"/>
+          <p:cNvSpPr txBox="1"/>
+          <p:nvPr/>
+        </p:nvSpPr>
+        <p:spPr>
+          <a:xfrm>
+            <a:off x="1234440" y="1874519"/>
+            <a:ext cx="10058400" cy="429370"/>
+          </a:xfrm>
+          <a:prstGeom prst="rect">
+            <a:avLst/>
+          </a:prstGeom>
+          <a:noFill/>
+        </p:spPr>
+        <p:txBody>
+          <a:bodyPr wrap="square" lIns="45720" rIns="45720" tIns="18288" bIns="18288" anchor="t">
+            <a:spAutoFit/>
+          </a:bodyPr>
+          <a:lstStyle/>
+          <a:p>
+            <a:pPr algn="l"/>
+            <a:r>
+              <a:rPr sz="2280" b="0" i="0">
+                <a:solidFill>
+                  <a:srgbClr val="1A1A1A"/>
+                </a:solidFill>
+                <a:latin typeface="Lexend"/>
+              </a:rPr>
+              <a:t>A square patio has an area of  169  square feet.</a:t>
+            </a:r>
+          </a:p>
+        </p:txBody>
+      </p:sp>
+      <p:sp>
+        <p:nvSpPr>
+          <p:cNvPr id="9" name="TextBox 8"/>
+          <p:cNvSpPr txBox="1"/>
+          <p:nvPr/>
+        </p:nvSpPr>
+        <p:spPr>
+          <a:xfrm>
+            <a:off x="1234440" y="2413618"/>
+            <a:ext cx="10058400" cy="429370"/>
+          </a:xfrm>
+          <a:prstGeom prst="rect">
+            <a:avLst/>
+          </a:prstGeom>
+          <a:noFill/>
+        </p:spPr>
+        <p:txBody>
+          <a:bodyPr wrap="square" lIns="45720" rIns="45720" tIns="18288" bIns="18288" anchor="t">
+            <a:spAutoFit/>
+          </a:bodyPr>
+          <a:lstStyle/>
+          <a:p>
+            <a:pPr algn="l"/>
+            <a:r>
+              <a:rPr sz="2280" b="0" i="0">
+                <a:solidFill>
+                  <a:srgbClr val="1A1A1A"/>
+                </a:solidFill>
+                <a:latin typeface="Lexend"/>
+              </a:rPr>
+              <a:t>Fencing for it costs 12 dollars a foot.</a:t>
+            </a:r>
+          </a:p>
+        </p:txBody>
+      </p:sp>
+      <p:sp>
+        <p:nvSpPr>
+          <p:cNvPr id="10" name="TextBox 9"/>
+          <p:cNvSpPr txBox="1"/>
+          <p:nvPr/>
+        </p:nvSpPr>
+        <p:spPr>
+          <a:xfrm>
+            <a:off x="1234440" y="2952716"/>
+            <a:ext cx="10058400" cy="429370"/>
+          </a:xfrm>
+          <a:prstGeom prst="rect">
+            <a:avLst/>
+          </a:prstGeom>
+          <a:noFill/>
+        </p:spPr>
+        <p:txBody>
+          <a:bodyPr wrap="square" lIns="45720" rIns="45720" tIns="18288" bIns="18288" anchor="t">
+            <a:spAutoFit/>
+          </a:bodyPr>
+          <a:lstStyle/>
+          <a:p>
+            <a:pPr algn="l"/>
+            <a:r>
+              <a:rPr sz="2280" b="1" i="0">
+                <a:solidFill>
+                  <a:srgbClr val="1A1A1A"/>
+                </a:solidFill>
+                <a:latin typeface="Lexend"/>
+              </a:rPr>
+              <a:t>How long is one side of the patio?</a:t>
+            </a:r>
+          </a:p>
+        </p:txBody>
+      </p:sp>
+      <p:sp>
+        <p:nvSpPr>
+          <p:cNvPr id="11" name="TextBox 10"/>
+          <p:cNvSpPr txBox="1"/>
+          <p:nvPr/>
+        </p:nvSpPr>
+        <p:spPr>
+          <a:xfrm>
+            <a:off x="3739815" y="3587827"/>
+            <a:ext cx="3131776" cy="457200"/>
+          </a:xfrm>
+          <a:prstGeom prst="rect">
+            <a:avLst/>
+          </a:prstGeom>
+          <a:noFill/>
+        </p:spPr>
+        <p:txBody>
+          <a:bodyPr wrap="none" lIns="45720" rIns="45720" tIns="18288" bIns="18288" anchor="ctr">
+            <a:noAutofit/>
+          </a:bodyPr>
+          <a:lstStyle/>
+          <a:p>
+            <a:pPr algn="l"/>
+            <a:r>
+              <a:rPr sz="2750" b="0" i="0">
+                <a:solidFill>
+                  <a:srgbClr val="1A1A1A"/>
+                </a:solidFill>
+                <a:latin typeface="Lexend"/>
+              </a:rPr>
+              <a:t>Side × side = 169</a:t>
+            </a:r>
+          </a:p>
+        </p:txBody>
+      </p:sp>
       <p:pic>
         <p:nvPicPr>
-          <p:cNvPr id="8" name="Picture 7" descr="33a9e56c707a61f1.png"/>
+          <p:cNvPr id="12" name="Picture 11" descr="389a35c8a608274e.png"/>
           <p:cNvPicPr>
             <a:picLocks noChangeAspect="1"/>
           </p:cNvPicPr>
@@ -6888,8 +6830,8 @@
         </p:blipFill>
         <p:spPr>
           <a:xfrm>
-            <a:off x="5448300" y="2194560"/>
-            <a:ext cx="1264920" cy="478536"/>
+            <a:off x="3794679" y="4238575"/>
+            <a:ext cx="1868424" cy="256032"/>
           </a:xfrm>
           <a:prstGeom prst="rect">
             <a:avLst/>
@@ -6898,14 +6840,73 @@
       </p:pic>
       <p:sp>
         <p:nvSpPr>
-          <p:cNvPr id="9" name="TextBox 8"/>
-          <p:cNvSpPr txBox="1"/>
-          <p:nvPr/>
-        </p:nvSpPr>
-        <p:spPr>
-          <a:xfrm>
-            <a:off x="777240" y="4343400"/>
-            <a:ext cx="10607040" cy="457200"/>
+          <p:cNvPr id="13" name="TextBox 12"/>
+          <p:cNvSpPr txBox="1"/>
+          <p:nvPr/>
+        </p:nvSpPr>
+        <p:spPr>
+          <a:xfrm>
+            <a:off x="5663103" y="4137991"/>
+            <a:ext cx="1338233" cy="457200"/>
+          </a:xfrm>
+          <a:prstGeom prst="rect">
+            <a:avLst/>
+          </a:prstGeom>
+          <a:noFill/>
+        </p:spPr>
+        <p:txBody>
+          <a:bodyPr wrap="none" lIns="45720" rIns="45720" tIns="18288" bIns="18288" anchor="ctr">
+            <a:noAutofit/>
+          </a:bodyPr>
+          <a:lstStyle/>
+          <a:p>
+            <a:pPr algn="l"/>
+            <a:r>
+              <a:rPr sz="2750" b="0" i="0">
+                <a:solidFill>
+                  <a:srgbClr val="1A1A1A"/>
+                </a:solidFill>
+                <a:latin typeface="Lexend"/>
+              </a:rPr>
+              <a:t>,   so   </a:t>
+            </a:r>
+          </a:p>
+        </p:txBody>
+      </p:sp>
+      <p:pic>
+        <p:nvPicPr>
+          <p:cNvPr id="14" name="Picture 13" descr="296c25346e41fa21.png"/>
+          <p:cNvPicPr>
+            <a:picLocks noChangeAspect="1"/>
+          </p:cNvPicPr>
+          <p:nvPr/>
+        </p:nvPicPr>
+        <p:blipFill>
+          <a:blip r:embed="rId3"/>
+          <a:stretch>
+            <a:fillRect/>
+          </a:stretch>
+        </p:blipFill>
+        <p:spPr>
+          <a:xfrm>
+            <a:off x="6864176" y="4150183"/>
+            <a:ext cx="1612392" cy="432816"/>
+          </a:xfrm>
+          <a:prstGeom prst="rect">
+            <a:avLst/>
+          </a:prstGeom>
+        </p:spPr>
+      </p:pic>
+      <p:sp>
+        <p:nvSpPr>
+          <p:cNvPr id="15" name="TextBox 14"/>
+          <p:cNvSpPr txBox="1"/>
+          <p:nvPr/>
+        </p:nvSpPr>
+        <p:spPr>
+          <a:xfrm>
+            <a:off x="777240" y="4720159"/>
+            <a:ext cx="10607040" cy="548640"/>
           </a:xfrm>
           <a:prstGeom prst="rect">
             <a:avLst/>
@@ -6920,13 +6921,13 @@
           <a:p>
             <a:pPr algn="ctr"/>
             <a:r>
-              <a:rPr sz="2470" b="1" i="0">
-                <a:solidFill>
-                  <a:srgbClr val="1A1A1A"/>
-                </a:solidFill>
-                <a:latin typeface="Lexend"/>
-              </a:rPr>
-              <a:t>Answer it.</a:t>
+              <a:rPr sz="3040" b="1" i="0">
+                <a:solidFill>
+                  <a:srgbClr val="9E1B32"/>
+                </a:solidFill>
+                <a:latin typeface="Lexend"/>
+              </a:rPr>
+              <a:t>Answer:   13 feet</a:t>
             </a:r>
           </a:p>
         </p:txBody>
@@ -7601,7 +7602,7 @@
       </p:sp>
       <p:pic>
         <p:nvPicPr>
-          <p:cNvPr id="8" name="Picture 7" descr="84e87a07475feba9.png"/>
+          <p:cNvPr id="8" name="Picture 7" descr="33a9e56c707a61f1.png"/>
           <p:cNvPicPr>
             <a:picLocks noChangeAspect="1"/>
           </p:cNvPicPr>
@@ -7615,128 +7616,45 @@
         </p:blipFill>
         <p:spPr>
           <a:xfrm>
-            <a:off x="5451347" y="2103120"/>
-            <a:ext cx="1258824" cy="478536"/>
+            <a:off x="5448300" y="2194560"/>
+            <a:ext cx="1264920" cy="478536"/>
           </a:xfrm>
           <a:prstGeom prst="rect">
             <a:avLst/>
           </a:prstGeom>
         </p:spPr>
       </p:pic>
-      <p:pic>
-        <p:nvPicPr>
-          <p:cNvPr id="9" name="Picture 8" descr="6b0304793847f9ae.png"/>
-          <p:cNvPicPr>
-            <a:picLocks noChangeAspect="1"/>
-          </p:cNvPicPr>
-          <p:nvPr/>
-        </p:nvPicPr>
-        <p:blipFill>
-          <a:blip r:embed="rId3"/>
-          <a:stretch>
-            <a:fillRect/>
-          </a:stretch>
-        </p:blipFill>
-        <p:spPr>
-          <a:xfrm>
-            <a:off x="2794935" y="2987040"/>
-            <a:ext cx="3630168" cy="316992"/>
-          </a:xfrm>
-          <a:prstGeom prst="rect">
-            <a:avLst/>
-          </a:prstGeom>
-        </p:spPr>
-      </p:pic>
-      <p:sp>
-        <p:nvSpPr>
-          <p:cNvPr id="10" name="TextBox 9"/>
-          <p:cNvSpPr txBox="1"/>
-          <p:nvPr/>
-        </p:nvSpPr>
-        <p:spPr>
-          <a:xfrm>
-            <a:off x="6425103" y="2916936"/>
-            <a:ext cx="1338233" cy="457200"/>
-          </a:xfrm>
-          <a:prstGeom prst="rect">
-            <a:avLst/>
-          </a:prstGeom>
-          <a:noFill/>
-        </p:spPr>
-        <p:txBody>
-          <a:bodyPr wrap="none" lIns="45720" rIns="45720" tIns="18288" bIns="18288" anchor="ctr">
-            <a:noAutofit/>
-          </a:bodyPr>
-          <a:lstStyle/>
-          <a:p>
-            <a:pPr algn="l"/>
-            <a:r>
-              <a:rPr sz="2750" b="0" i="0">
+      <p:sp>
+        <p:nvSpPr>
+          <p:cNvPr id="9" name="TextBox 8"/>
+          <p:cNvSpPr txBox="1"/>
+          <p:nvPr/>
+        </p:nvSpPr>
+        <p:spPr>
+          <a:xfrm>
+            <a:off x="777240" y="4343400"/>
+            <a:ext cx="10607040" cy="457200"/>
+          </a:xfrm>
+          <a:prstGeom prst="rect">
+            <a:avLst/>
+          </a:prstGeom>
+          <a:noFill/>
+        </p:spPr>
+        <p:txBody>
+          <a:bodyPr wrap="square" lIns="45720" rIns="45720" tIns="18288" bIns="18288" anchor="t">
+            <a:spAutoFit/>
+          </a:bodyPr>
+          <a:lstStyle/>
+          <a:p>
+            <a:pPr algn="ctr"/>
+            <a:r>
+              <a:rPr sz="2470" b="1" i="0">
                 <a:solidFill>
                   <a:srgbClr val="1A1A1A"/>
                 </a:solidFill>
                 <a:latin typeface="Lexend"/>
               </a:rPr>
-              <a:t>,   so   </a:t>
-            </a:r>
-          </a:p>
-        </p:txBody>
-      </p:sp>
-      <p:pic>
-        <p:nvPicPr>
-          <p:cNvPr id="11" name="Picture 10" descr="754dfe5956abcf18.png"/>
-          <p:cNvPicPr>
-            <a:picLocks noChangeAspect="1"/>
-          </p:cNvPicPr>
-          <p:nvPr/>
-        </p:nvPicPr>
-        <p:blipFill>
-          <a:blip r:embed="rId4"/>
-          <a:stretch>
-            <a:fillRect/>
-          </a:stretch>
-        </p:blipFill>
-        <p:spPr>
-          <a:xfrm>
-            <a:off x="7626176" y="2929128"/>
-            <a:ext cx="1853184" cy="432816"/>
-          </a:xfrm>
-          <a:prstGeom prst="rect">
-            <a:avLst/>
-          </a:prstGeom>
-        </p:spPr>
-      </p:pic>
-      <p:sp>
-        <p:nvSpPr>
-          <p:cNvPr id="12" name="TextBox 11"/>
-          <p:cNvSpPr txBox="1"/>
-          <p:nvPr/>
-        </p:nvSpPr>
-        <p:spPr>
-          <a:xfrm>
-            <a:off x="777240" y="4663440"/>
-            <a:ext cx="10607040" cy="548640"/>
-          </a:xfrm>
-          <a:prstGeom prst="rect">
-            <a:avLst/>
-          </a:prstGeom>
-          <a:noFill/>
-        </p:spPr>
-        <p:txBody>
-          <a:bodyPr wrap="square" lIns="45720" rIns="45720" tIns="18288" bIns="18288" anchor="t">
-            <a:spAutoFit/>
-          </a:bodyPr>
-          <a:lstStyle/>
-          <a:p>
-            <a:pPr algn="ctr"/>
-            <a:r>
-              <a:rPr sz="3040" b="1" i="0">
-                <a:solidFill>
-                  <a:srgbClr val="9E1B32"/>
-                </a:solidFill>
-                <a:latin typeface="Lexend"/>
-              </a:rPr>
-              <a:t>Answer:   −5</a:t>
+              <a:t>Answer it.</a:t>
             </a:r>
           </a:p>
         </p:txBody>
@@ -7789,7 +7707,7 @@
                 </a:solidFill>
                 <a:latin typeface="Lexend"/>
               </a:rPr>
-              <a:t>Whiteboards   ·   Question 4 of 9</a:t>
+              <a:t>Whiteboards   ·   Question 3 of 9</a:t>
             </a:r>
           </a:p>
         </p:txBody>
@@ -7971,7 +7889,7 @@
       </p:sp>
       <p:pic>
         <p:nvPicPr>
-          <p:cNvPr id="8" name="Picture 7" descr="7058abdbd1529243.png"/>
+          <p:cNvPr id="8" name="Picture 7" descr="84e87a07475feba9.png"/>
           <p:cNvPicPr>
             <a:picLocks noChangeAspect="1"/>
           </p:cNvPicPr>
@@ -7985,24 +7903,107 @@
         </p:blipFill>
         <p:spPr>
           <a:xfrm>
-            <a:off x="5301996" y="2194560"/>
-            <a:ext cx="1557528" cy="478536"/>
+            <a:off x="5451347" y="2103120"/>
+            <a:ext cx="1258824" cy="478536"/>
           </a:xfrm>
           <a:prstGeom prst="rect">
             <a:avLst/>
           </a:prstGeom>
         </p:spPr>
       </p:pic>
-      <p:sp>
-        <p:nvSpPr>
-          <p:cNvPr id="9" name="TextBox 8"/>
-          <p:cNvSpPr txBox="1"/>
-          <p:nvPr/>
-        </p:nvSpPr>
-        <p:spPr>
-          <a:xfrm>
-            <a:off x="777240" y="4343400"/>
-            <a:ext cx="10607040" cy="457200"/>
+      <p:pic>
+        <p:nvPicPr>
+          <p:cNvPr id="9" name="Picture 8" descr="6b0304793847f9ae.png"/>
+          <p:cNvPicPr>
+            <a:picLocks noChangeAspect="1"/>
+          </p:cNvPicPr>
+          <p:nvPr/>
+        </p:nvPicPr>
+        <p:blipFill>
+          <a:blip r:embed="rId3"/>
+          <a:stretch>
+            <a:fillRect/>
+          </a:stretch>
+        </p:blipFill>
+        <p:spPr>
+          <a:xfrm>
+            <a:off x="2794935" y="2987040"/>
+            <a:ext cx="3630168" cy="316992"/>
+          </a:xfrm>
+          <a:prstGeom prst="rect">
+            <a:avLst/>
+          </a:prstGeom>
+        </p:spPr>
+      </p:pic>
+      <p:sp>
+        <p:nvSpPr>
+          <p:cNvPr id="10" name="TextBox 9"/>
+          <p:cNvSpPr txBox="1"/>
+          <p:nvPr/>
+        </p:nvSpPr>
+        <p:spPr>
+          <a:xfrm>
+            <a:off x="6425103" y="2916936"/>
+            <a:ext cx="1338233" cy="457200"/>
+          </a:xfrm>
+          <a:prstGeom prst="rect">
+            <a:avLst/>
+          </a:prstGeom>
+          <a:noFill/>
+        </p:spPr>
+        <p:txBody>
+          <a:bodyPr wrap="none" lIns="45720" rIns="45720" tIns="18288" bIns="18288" anchor="ctr">
+            <a:noAutofit/>
+          </a:bodyPr>
+          <a:lstStyle/>
+          <a:p>
+            <a:pPr algn="l"/>
+            <a:r>
+              <a:rPr sz="2750" b="0" i="0">
+                <a:solidFill>
+                  <a:srgbClr val="1A1A1A"/>
+                </a:solidFill>
+                <a:latin typeface="Lexend"/>
+              </a:rPr>
+              <a:t>,   so   </a:t>
+            </a:r>
+          </a:p>
+        </p:txBody>
+      </p:sp>
+      <p:pic>
+        <p:nvPicPr>
+          <p:cNvPr id="11" name="Picture 10" descr="754dfe5956abcf18.png"/>
+          <p:cNvPicPr>
+            <a:picLocks noChangeAspect="1"/>
+          </p:cNvPicPr>
+          <p:nvPr/>
+        </p:nvPicPr>
+        <p:blipFill>
+          <a:blip r:embed="rId4"/>
+          <a:stretch>
+            <a:fillRect/>
+          </a:stretch>
+        </p:blipFill>
+        <p:spPr>
+          <a:xfrm>
+            <a:off x="7626176" y="2929128"/>
+            <a:ext cx="1853184" cy="432816"/>
+          </a:xfrm>
+          <a:prstGeom prst="rect">
+            <a:avLst/>
+          </a:prstGeom>
+        </p:spPr>
+      </p:pic>
+      <p:sp>
+        <p:nvSpPr>
+          <p:cNvPr id="12" name="TextBox 11"/>
+          <p:cNvSpPr txBox="1"/>
+          <p:nvPr/>
+        </p:nvSpPr>
+        <p:spPr>
+          <a:xfrm>
+            <a:off x="777240" y="4663440"/>
+            <a:ext cx="10607040" cy="548640"/>
           </a:xfrm>
           <a:prstGeom prst="rect">
             <a:avLst/>
@@ -8017,13 +8018,13 @@
           <a:p>
             <a:pPr algn="ctr"/>
             <a:r>
-              <a:rPr sz="2470" b="1" i="0">
-                <a:solidFill>
-                  <a:srgbClr val="1A1A1A"/>
-                </a:solidFill>
-                <a:latin typeface="Lexend"/>
-              </a:rPr>
-              <a:t>Answer it.</a:t>
+              <a:rPr sz="3040" b="1" i="0">
+                <a:solidFill>
+                  <a:srgbClr val="9E1B32"/>
+                </a:solidFill>
+                <a:latin typeface="Lexend"/>
+              </a:rPr>
+              <a:t>Answer:   −5</a:t>
             </a:r>
           </a:p>
         </p:txBody>
@@ -8258,7 +8259,7 @@
       </p:sp>
       <p:pic>
         <p:nvPicPr>
-          <p:cNvPr id="8" name="Picture 7" descr="074bb924378dc964.png"/>
+          <p:cNvPr id="8" name="Picture 7" descr="7058abdbd1529243.png"/>
           <p:cNvPicPr>
             <a:picLocks noChangeAspect="1"/>
           </p:cNvPicPr>
@@ -8272,8 +8273,8 @@
         </p:blipFill>
         <p:spPr>
           <a:xfrm>
-            <a:off x="5305043" y="2103120"/>
-            <a:ext cx="1551432" cy="478536"/>
+            <a:off x="5301996" y="2194560"/>
+            <a:ext cx="1557528" cy="478536"/>
           </a:xfrm>
           <a:prstGeom prst="rect">
             <a:avLst/>
@@ -8288,112 +8289,29 @@
         </p:nvSpPr>
         <p:spPr>
           <a:xfrm>
-            <a:off x="2763194" y="2906268"/>
-            <a:ext cx="3827922" cy="457200"/>
-          </a:xfrm>
-          <a:prstGeom prst="rect">
-            <a:avLst/>
-          </a:prstGeom>
-          <a:noFill/>
-        </p:spPr>
-        <p:txBody>
-          <a:bodyPr wrap="none" lIns="45720" rIns="45720" tIns="18288" bIns="18288" anchor="ctr">
-            <a:noAutofit/>
-          </a:bodyPr>
-          <a:lstStyle/>
-          <a:p>
-            <a:pPr algn="l"/>
-            <a:r>
-              <a:rPr sz="2750" b="0" i="0">
+            <a:off x="777240" y="4343400"/>
+            <a:ext cx="10607040" cy="457200"/>
+          </a:xfrm>
+          <a:prstGeom prst="rect">
+            <a:avLst/>
+          </a:prstGeom>
+          <a:noFill/>
+        </p:spPr>
+        <p:txBody>
+          <a:bodyPr wrap="square" lIns="45720" rIns="45720" tIns="18288" bIns="18288" anchor="t">
+            <a:spAutoFit/>
+          </a:bodyPr>
+          <a:lstStyle/>
+          <a:p>
+            <a:pPr algn="ctr"/>
+            <a:r>
+              <a:rPr sz="2470" b="1" i="0">
                 <a:solidFill>
                   <a:srgbClr val="1A1A1A"/>
                 </a:solidFill>
                 <a:latin typeface="Lexend"/>
               </a:rPr>
-              <a:t>Under the bar first:  </a:t>
-            </a:r>
-          </a:p>
-        </p:txBody>
-      </p:sp>
-      <p:pic>
-        <p:nvPicPr>
-          <p:cNvPr id="10" name="Picture 9" descr="5105a5010efd4535.png"/>
-          <p:cNvPicPr>
-            <a:picLocks noChangeAspect="1"/>
-          </p:cNvPicPr>
-          <p:nvPr/>
-        </p:nvPicPr>
-        <p:blipFill>
-          <a:blip r:embed="rId3"/>
-          <a:stretch>
-            <a:fillRect/>
-          </a:stretch>
-        </p:blipFill>
-        <p:spPr>
-          <a:xfrm>
-            <a:off x="6453957" y="2982468"/>
-            <a:ext cx="2944368" cy="304800"/>
-          </a:xfrm>
-          <a:prstGeom prst="rect">
-            <a:avLst/>
-          </a:prstGeom>
-        </p:spPr>
-      </p:pic>
-      <p:pic>
-        <p:nvPicPr>
-          <p:cNvPr id="11" name="Picture 10" descr="5127a0c173e39499.png"/>
-          <p:cNvPicPr>
-            <a:picLocks noChangeAspect="1"/>
-          </p:cNvPicPr>
-          <p:nvPr/>
-        </p:nvPicPr>
-        <p:blipFill>
-          <a:blip r:embed="rId4"/>
-          <a:stretch>
-            <a:fillRect/>
-          </a:stretch>
-        </p:blipFill>
-        <p:spPr>
-          <a:xfrm>
-            <a:off x="2818058" y="3468623"/>
-            <a:ext cx="1271016" cy="432816"/>
-          </a:xfrm>
-          <a:prstGeom prst="rect">
-            <a:avLst/>
-          </a:prstGeom>
-        </p:spPr>
-      </p:pic>
-      <p:sp>
-        <p:nvSpPr>
-          <p:cNvPr id="12" name="TextBox 11"/>
-          <p:cNvSpPr txBox="1"/>
-          <p:nvPr/>
-        </p:nvSpPr>
-        <p:spPr>
-          <a:xfrm>
-            <a:off x="777240" y="4663440"/>
-            <a:ext cx="10607040" cy="548640"/>
-          </a:xfrm>
-          <a:prstGeom prst="rect">
-            <a:avLst/>
-          </a:prstGeom>
-          <a:noFill/>
-        </p:spPr>
-        <p:txBody>
-          <a:bodyPr wrap="square" lIns="45720" rIns="45720" tIns="18288" bIns="18288" anchor="t">
-            <a:spAutoFit/>
-          </a:bodyPr>
-          <a:lstStyle/>
-          <a:p>
-            <a:pPr algn="ctr"/>
-            <a:r>
-              <a:rPr sz="3040" b="1" i="0">
-                <a:solidFill>
-                  <a:srgbClr val="9E1B32"/>
-                </a:solidFill>
-                <a:latin typeface="Lexend"/>
-              </a:rPr>
-              <a:t>Answer:   5</a:t>
+              <a:t>Answer it.</a:t>
             </a:r>
           </a:p>
         </p:txBody>
@@ -8446,7 +8364,7 @@
                 </a:solidFill>
                 <a:latin typeface="Lexend"/>
               </a:rPr>
-              <a:t>Whiteboards   ·   Question 5 of 9</a:t>
+              <a:t>Whiteboards   ·   Question 4 of 9</a:t>
             </a:r>
           </a:p>
         </p:txBody>
@@ -8628,7 +8546,7 @@
       </p:sp>
       <p:pic>
         <p:nvPicPr>
-          <p:cNvPr id="8" name="Picture 7" descr="0287c1279b1b6eda.png"/>
+          <p:cNvPr id="8" name="Picture 7" descr="074bb924378dc964.png"/>
           <p:cNvPicPr>
             <a:picLocks noChangeAspect="1"/>
           </p:cNvPicPr>
@@ -8642,8 +8560,8 @@
         </p:blipFill>
         <p:spPr>
           <a:xfrm>
-            <a:off x="5135880" y="2194560"/>
-            <a:ext cx="1889760" cy="478536"/>
+            <a:off x="5305043" y="2103120"/>
+            <a:ext cx="1551432" cy="478536"/>
           </a:xfrm>
           <a:prstGeom prst="rect">
             <a:avLst/>
@@ -8658,8 +8576,91 @@
         </p:nvSpPr>
         <p:spPr>
           <a:xfrm>
-            <a:off x="777240" y="2947416"/>
-            <a:ext cx="10607040" cy="465151"/>
+            <a:off x="2763194" y="2906268"/>
+            <a:ext cx="3827922" cy="457200"/>
+          </a:xfrm>
+          <a:prstGeom prst="rect">
+            <a:avLst/>
+          </a:prstGeom>
+          <a:noFill/>
+        </p:spPr>
+        <p:txBody>
+          <a:bodyPr wrap="none" lIns="45720" rIns="45720" tIns="18288" bIns="18288" anchor="ctr">
+            <a:noAutofit/>
+          </a:bodyPr>
+          <a:lstStyle/>
+          <a:p>
+            <a:pPr algn="l"/>
+            <a:r>
+              <a:rPr sz="2750" b="0" i="0">
+                <a:solidFill>
+                  <a:srgbClr val="1A1A1A"/>
+                </a:solidFill>
+                <a:latin typeface="Lexend"/>
+              </a:rPr>
+              <a:t>Under the bar first:  </a:t>
+            </a:r>
+          </a:p>
+        </p:txBody>
+      </p:sp>
+      <p:pic>
+        <p:nvPicPr>
+          <p:cNvPr id="10" name="Picture 9" descr="5105a5010efd4535.png"/>
+          <p:cNvPicPr>
+            <a:picLocks noChangeAspect="1"/>
+          </p:cNvPicPr>
+          <p:nvPr/>
+        </p:nvPicPr>
+        <p:blipFill>
+          <a:blip r:embed="rId3"/>
+          <a:stretch>
+            <a:fillRect/>
+          </a:stretch>
+        </p:blipFill>
+        <p:spPr>
+          <a:xfrm>
+            <a:off x="6453957" y="2982468"/>
+            <a:ext cx="2944368" cy="304800"/>
+          </a:xfrm>
+          <a:prstGeom prst="rect">
+            <a:avLst/>
+          </a:prstGeom>
+        </p:spPr>
+      </p:pic>
+      <p:pic>
+        <p:nvPicPr>
+          <p:cNvPr id="11" name="Picture 10" descr="5127a0c173e39499.png"/>
+          <p:cNvPicPr>
+            <a:picLocks noChangeAspect="1"/>
+          </p:cNvPicPr>
+          <p:nvPr/>
+        </p:nvPicPr>
+        <p:blipFill>
+          <a:blip r:embed="rId4"/>
+          <a:stretch>
+            <a:fillRect/>
+          </a:stretch>
+        </p:blipFill>
+        <p:spPr>
+          <a:xfrm>
+            <a:off x="2818058" y="3468623"/>
+            <a:ext cx="1271016" cy="432816"/>
+          </a:xfrm>
+          <a:prstGeom prst="rect">
+            <a:avLst/>
+          </a:prstGeom>
+        </p:spPr>
+      </p:pic>
+      <p:sp>
+        <p:nvSpPr>
+          <p:cNvPr id="12" name="TextBox 11"/>
+          <p:cNvSpPr txBox="1"/>
+          <p:nvPr/>
+        </p:nvSpPr>
+        <p:spPr>
+          <a:xfrm>
+            <a:off x="777240" y="4663440"/>
+            <a:ext cx="10607040" cy="548640"/>
           </a:xfrm>
           <a:prstGeom prst="rect">
             <a:avLst/>
@@ -8674,224 +8675,13 @@
           <a:p>
             <a:pPr algn="ctr"/>
             <a:r>
-              <a:rPr sz="2470" b="0" i="0">
-                <a:solidFill>
-                  <a:srgbClr val="1A1A1A"/>
-                </a:solidFill>
-                <a:latin typeface="Lexend"/>
-              </a:rPr>
-              <a:t>Which is the value?</a:t>
-            </a:r>
-          </a:p>
-        </p:txBody>
-      </p:sp>
-      <p:sp>
-        <p:nvSpPr>
-          <p:cNvPr id="10" name="TextBox 9"/>
-          <p:cNvSpPr txBox="1"/>
-          <p:nvPr/>
-        </p:nvSpPr>
-        <p:spPr>
-          <a:xfrm>
-            <a:off x="1874519" y="3613735"/>
-            <a:ext cx="4572000" cy="548640"/>
-          </a:xfrm>
-          <a:prstGeom prst="rect">
-            <a:avLst/>
-          </a:prstGeom>
-          <a:noFill/>
-        </p:spPr>
-        <p:txBody>
-          <a:bodyPr wrap="square" lIns="45720" rIns="45720" tIns="18288" bIns="18288" anchor="t">
-            <a:spAutoFit/>
-          </a:bodyPr>
-          <a:lstStyle/>
-          <a:p>
-            <a:pPr algn="l"/>
-            <a:r>
-              <a:rPr sz="2280" b="1" i="0">
-                <a:solidFill>
-                  <a:srgbClr val="1A1A1A"/>
-                </a:solidFill>
-                <a:latin typeface="Lexend"/>
-              </a:rPr>
-              <a:t>A.   </a:t>
-            </a:r>
-            <a:r>
-              <a:rPr sz="2280" b="0" i="0">
-                <a:solidFill>
-                  <a:srgbClr val="1A1A1A"/>
-                </a:solidFill>
-                <a:latin typeface="Lexend"/>
-              </a:rPr>
-              <a:t>17</a:t>
-            </a:r>
-          </a:p>
-        </p:txBody>
-      </p:sp>
-      <p:sp>
-        <p:nvSpPr>
-          <p:cNvPr id="11" name="TextBox 10"/>
-          <p:cNvSpPr txBox="1"/>
-          <p:nvPr/>
-        </p:nvSpPr>
-        <p:spPr>
-          <a:xfrm>
-            <a:off x="6629400" y="3613735"/>
-            <a:ext cx="4572000" cy="548640"/>
-          </a:xfrm>
-          <a:prstGeom prst="rect">
-            <a:avLst/>
-          </a:prstGeom>
-          <a:noFill/>
-        </p:spPr>
-        <p:txBody>
-          <a:bodyPr wrap="square" lIns="45720" rIns="45720" tIns="18288" bIns="18288" anchor="t">
-            <a:spAutoFit/>
-          </a:bodyPr>
-          <a:lstStyle/>
-          <a:p>
-            <a:pPr algn="l"/>
-            <a:r>
-              <a:rPr sz="2280" b="1" i="0">
-                <a:solidFill>
-                  <a:srgbClr val="1A1A1A"/>
-                </a:solidFill>
-                <a:latin typeface="Lexend"/>
-              </a:rPr>
-              <a:t>B.   </a:t>
-            </a:r>
-            <a:r>
-              <a:rPr sz="2280" b="0" i="0">
-                <a:solidFill>
-                  <a:srgbClr val="1A1A1A"/>
-                </a:solidFill>
-                <a:latin typeface="Lexend"/>
-              </a:rPr>
-              <a:t>169</a:t>
-            </a:r>
-          </a:p>
-        </p:txBody>
-      </p:sp>
-      <p:sp>
-        <p:nvSpPr>
-          <p:cNvPr id="12" name="TextBox 11"/>
-          <p:cNvSpPr txBox="1"/>
-          <p:nvPr/>
-        </p:nvSpPr>
-        <p:spPr>
-          <a:xfrm>
-            <a:off x="1874519" y="4299535"/>
-            <a:ext cx="4572000" cy="548640"/>
-          </a:xfrm>
-          <a:prstGeom prst="rect">
-            <a:avLst/>
-          </a:prstGeom>
-          <a:noFill/>
-        </p:spPr>
-        <p:txBody>
-          <a:bodyPr wrap="square" lIns="45720" rIns="45720" tIns="18288" bIns="18288" anchor="t">
-            <a:spAutoFit/>
-          </a:bodyPr>
-          <a:lstStyle/>
-          <a:p>
-            <a:pPr algn="l"/>
-            <a:r>
-              <a:rPr sz="2280" b="1" i="0">
-                <a:solidFill>
-                  <a:srgbClr val="1A1A1A"/>
-                </a:solidFill>
-                <a:latin typeface="Lexend"/>
-              </a:rPr>
-              <a:t>C.   </a:t>
-            </a:r>
-            <a:r>
-              <a:rPr sz="2280" b="0" i="0">
-                <a:solidFill>
-                  <a:srgbClr val="1A1A1A"/>
-                </a:solidFill>
-                <a:latin typeface="Lexend"/>
-              </a:rPr>
-              <a:t>84.5</a:t>
-            </a:r>
-          </a:p>
-        </p:txBody>
-      </p:sp>
-      <p:sp>
-        <p:nvSpPr>
-          <p:cNvPr id="13" name="TextBox 12"/>
-          <p:cNvSpPr txBox="1"/>
-          <p:nvPr/>
-        </p:nvSpPr>
-        <p:spPr>
-          <a:xfrm>
-            <a:off x="6629400" y="4299535"/>
-            <a:ext cx="4572000" cy="548640"/>
-          </a:xfrm>
-          <a:prstGeom prst="rect">
-            <a:avLst/>
-          </a:prstGeom>
-          <a:noFill/>
-        </p:spPr>
-        <p:txBody>
-          <a:bodyPr wrap="square" lIns="45720" rIns="45720" tIns="18288" bIns="18288" anchor="t">
-            <a:spAutoFit/>
-          </a:bodyPr>
-          <a:lstStyle/>
-          <a:p>
-            <a:pPr algn="l"/>
-            <a:r>
-              <a:rPr sz="2280" b="1" i="0">
-                <a:solidFill>
-                  <a:srgbClr val="1A1A1A"/>
-                </a:solidFill>
-                <a:latin typeface="Lexend"/>
-              </a:rPr>
-              <a:t>D.   </a:t>
-            </a:r>
-            <a:r>
-              <a:rPr sz="2280" b="0" i="0">
-                <a:solidFill>
-                  <a:srgbClr val="1A1A1A"/>
-                </a:solidFill>
-                <a:latin typeface="Lexend"/>
-              </a:rPr>
-              <a:t>13</a:t>
-            </a:r>
-          </a:p>
-        </p:txBody>
-      </p:sp>
-      <p:sp>
-        <p:nvSpPr>
-          <p:cNvPr id="14" name="TextBox 13"/>
-          <p:cNvSpPr txBox="1"/>
-          <p:nvPr/>
-        </p:nvSpPr>
-        <p:spPr>
-          <a:xfrm>
-            <a:off x="777240" y="5305375"/>
-            <a:ext cx="10607040" cy="457200"/>
-          </a:xfrm>
-          <a:prstGeom prst="rect">
-            <a:avLst/>
-          </a:prstGeom>
-          <a:noFill/>
-        </p:spPr>
-        <p:txBody>
-          <a:bodyPr wrap="square" lIns="45720" rIns="45720" tIns="18288" bIns="18288" anchor="t">
-            <a:spAutoFit/>
-          </a:bodyPr>
-          <a:lstStyle/>
-          <a:p>
-            <a:pPr algn="ctr"/>
-            <a:r>
-              <a:rPr sz="2470" b="1" i="0">
-                <a:solidFill>
-                  <a:srgbClr val="1A1A1A"/>
-                </a:solidFill>
-                <a:latin typeface="Lexend"/>
-              </a:rPr>
-              <a:t>Answer it.</a:t>
+              <a:rPr sz="3040" b="1" i="0">
+                <a:solidFill>
+                  <a:srgbClr val="9E1B32"/>
+                </a:solidFill>
+                <a:latin typeface="Lexend"/>
+              </a:rPr>
+              <a:t>Answer:   5</a:t>
             </a:r>
           </a:p>
         </p:txBody>
@@ -9126,7 +8916,7 @@
       </p:sp>
       <p:pic>
         <p:nvPicPr>
-          <p:cNvPr id="8" name="Picture 7" descr="627b4a23b9288a97.png"/>
+          <p:cNvPr id="8" name="Picture 7" descr="0287c1279b1b6eda.png"/>
           <p:cNvPicPr>
             <a:picLocks noChangeAspect="1"/>
           </p:cNvPicPr>
@@ -9140,8 +8930,8 @@
         </p:blipFill>
         <p:spPr>
           <a:xfrm>
-            <a:off x="5138927" y="2103120"/>
-            <a:ext cx="1883664" cy="478536"/>
+            <a:off x="5135880" y="2194560"/>
+            <a:ext cx="1889760" cy="478536"/>
           </a:xfrm>
           <a:prstGeom prst="rect">
             <a:avLst/>
@@ -9156,7 +8946,7 @@
         </p:nvSpPr>
         <p:spPr>
           <a:xfrm>
-            <a:off x="777240" y="2855975"/>
+            <a:off x="777240" y="2947416"/>
             <a:ext cx="10607040" cy="465151"/>
           </a:xfrm>
           <a:prstGeom prst="rect">
@@ -9191,81 +8981,130 @@
         </p:nvSpPr>
         <p:spPr>
           <a:xfrm>
-            <a:off x="3136574" y="3481147"/>
-            <a:ext cx="3827922" cy="457200"/>
-          </a:xfrm>
-          <a:prstGeom prst="rect">
-            <a:avLst/>
-          </a:prstGeom>
-          <a:noFill/>
-        </p:spPr>
-        <p:txBody>
-          <a:bodyPr wrap="none" lIns="45720" rIns="45720" tIns="18288" bIns="18288" anchor="ctr">
-            <a:noAutofit/>
+            <a:off x="1874519" y="3613735"/>
+            <a:ext cx="4572000" cy="548640"/>
+          </a:xfrm>
+          <a:prstGeom prst="rect">
+            <a:avLst/>
+          </a:prstGeom>
+          <a:noFill/>
+        </p:spPr>
+        <p:txBody>
+          <a:bodyPr wrap="square" lIns="45720" rIns="45720" tIns="18288" bIns="18288" anchor="t">
+            <a:spAutoFit/>
           </a:bodyPr>
           <a:lstStyle/>
           <a:p>
             <a:pPr algn="l"/>
             <a:r>
-              <a:rPr sz="2750" b="0" i="0">
+              <a:rPr sz="2280" b="1" i="0">
                 <a:solidFill>
                   <a:srgbClr val="1A1A1A"/>
                 </a:solidFill>
                 <a:latin typeface="Lexend"/>
               </a:rPr>
-              <a:t>Under the bar first:  </a:t>
-            </a:r>
-          </a:p>
-        </p:txBody>
-      </p:sp>
-      <p:pic>
-        <p:nvPicPr>
-          <p:cNvPr id="11" name="Picture 10" descr="d050f197a4a44d9d.png"/>
-          <p:cNvPicPr>
-            <a:picLocks noChangeAspect="1"/>
-          </p:cNvPicPr>
-          <p:nvPr/>
-        </p:nvPicPr>
-        <p:blipFill>
-          <a:blip r:embed="rId3"/>
-          <a:stretch>
-            <a:fillRect/>
-          </a:stretch>
-        </p:blipFill>
-        <p:spPr>
-          <a:xfrm>
-            <a:off x="6827337" y="3581731"/>
-            <a:ext cx="2197608" cy="256032"/>
-          </a:xfrm>
-          <a:prstGeom prst="rect">
-            <a:avLst/>
-          </a:prstGeom>
-        </p:spPr>
-      </p:pic>
-      <p:pic>
-        <p:nvPicPr>
-          <p:cNvPr id="12" name="Picture 11" descr="296c25346e41fa21.png"/>
-          <p:cNvPicPr>
-            <a:picLocks noChangeAspect="1"/>
-          </p:cNvPicPr>
-          <p:nvPr/>
-        </p:nvPicPr>
-        <p:blipFill>
-          <a:blip r:embed="rId4"/>
-          <a:stretch>
-            <a:fillRect/>
-          </a:stretch>
-        </p:blipFill>
-        <p:spPr>
-          <a:xfrm>
-            <a:off x="3191438" y="4043503"/>
-            <a:ext cx="1612392" cy="432816"/>
-          </a:xfrm>
-          <a:prstGeom prst="rect">
-            <a:avLst/>
-          </a:prstGeom>
-        </p:spPr>
-      </p:pic>
+              <a:t>A.   </a:t>
+            </a:r>
+            <a:r>
+              <a:rPr sz="2280" b="0" i="0">
+                <a:solidFill>
+                  <a:srgbClr val="1A1A1A"/>
+                </a:solidFill>
+                <a:latin typeface="Lexend"/>
+              </a:rPr>
+              <a:t>17</a:t>
+            </a:r>
+          </a:p>
+        </p:txBody>
+      </p:sp>
+      <p:sp>
+        <p:nvSpPr>
+          <p:cNvPr id="11" name="TextBox 10"/>
+          <p:cNvSpPr txBox="1"/>
+          <p:nvPr/>
+        </p:nvSpPr>
+        <p:spPr>
+          <a:xfrm>
+            <a:off x="6629400" y="3613735"/>
+            <a:ext cx="4572000" cy="548640"/>
+          </a:xfrm>
+          <a:prstGeom prst="rect">
+            <a:avLst/>
+          </a:prstGeom>
+          <a:noFill/>
+        </p:spPr>
+        <p:txBody>
+          <a:bodyPr wrap="square" lIns="45720" rIns="45720" tIns="18288" bIns="18288" anchor="t">
+            <a:spAutoFit/>
+          </a:bodyPr>
+          <a:lstStyle/>
+          <a:p>
+            <a:pPr algn="l"/>
+            <a:r>
+              <a:rPr sz="2280" b="1" i="0">
+                <a:solidFill>
+                  <a:srgbClr val="1A1A1A"/>
+                </a:solidFill>
+                <a:latin typeface="Lexend"/>
+              </a:rPr>
+              <a:t>B.   </a:t>
+            </a:r>
+            <a:r>
+              <a:rPr sz="2280" b="0" i="0">
+                <a:solidFill>
+                  <a:srgbClr val="1A1A1A"/>
+                </a:solidFill>
+                <a:latin typeface="Lexend"/>
+              </a:rPr>
+              <a:t>169</a:t>
+            </a:r>
+          </a:p>
+        </p:txBody>
+      </p:sp>
+      <p:sp>
+        <p:nvSpPr>
+          <p:cNvPr id="12" name="TextBox 11"/>
+          <p:cNvSpPr txBox="1"/>
+          <p:nvPr/>
+        </p:nvSpPr>
+        <p:spPr>
+          <a:xfrm>
+            <a:off x="1874519" y="4299535"/>
+            <a:ext cx="4572000" cy="548640"/>
+          </a:xfrm>
+          <a:prstGeom prst="rect">
+            <a:avLst/>
+          </a:prstGeom>
+          <a:noFill/>
+        </p:spPr>
+        <p:txBody>
+          <a:bodyPr wrap="square" lIns="45720" rIns="45720" tIns="18288" bIns="18288" anchor="t">
+            <a:spAutoFit/>
+          </a:bodyPr>
+          <a:lstStyle/>
+          <a:p>
+            <a:pPr algn="l"/>
+            <a:r>
+              <a:rPr sz="2280" b="1" i="0">
+                <a:solidFill>
+                  <a:srgbClr val="1A1A1A"/>
+                </a:solidFill>
+                <a:latin typeface="Lexend"/>
+              </a:rPr>
+              <a:t>C.   </a:t>
+            </a:r>
+            <a:r>
+              <a:rPr sz="2280" b="0" i="0">
+                <a:solidFill>
+                  <a:srgbClr val="1A1A1A"/>
+                </a:solidFill>
+                <a:latin typeface="Lexend"/>
+              </a:rPr>
+              <a:t>84.5</a:t>
+            </a:r>
+          </a:p>
+        </p:txBody>
+      </p:sp>
       <p:sp>
         <p:nvSpPr>
           <p:cNvPr id="13" name="TextBox 12"/>
@@ -9274,8 +9113,8 @@
         </p:nvSpPr>
         <p:spPr>
           <a:xfrm>
-            <a:off x="777240" y="4663440"/>
-            <a:ext cx="10607040" cy="548640"/>
+            <a:off x="6629400" y="4299535"/>
+            <a:ext cx="4572000" cy="548640"/>
           </a:xfrm>
           <a:prstGeom prst="rect">
             <a:avLst/>
@@ -9288,15 +9127,59 @@
           </a:bodyPr>
           <a:lstStyle/>
           <a:p>
+            <a:pPr algn="l"/>
+            <a:r>
+              <a:rPr sz="2280" b="1" i="0">
+                <a:solidFill>
+                  <a:srgbClr val="1A1A1A"/>
+                </a:solidFill>
+                <a:latin typeface="Lexend"/>
+              </a:rPr>
+              <a:t>D.   </a:t>
+            </a:r>
+            <a:r>
+              <a:rPr sz="2280" b="0" i="0">
+                <a:solidFill>
+                  <a:srgbClr val="1A1A1A"/>
+                </a:solidFill>
+                <a:latin typeface="Lexend"/>
+              </a:rPr>
+              <a:t>13</a:t>
+            </a:r>
+          </a:p>
+        </p:txBody>
+      </p:sp>
+      <p:sp>
+        <p:nvSpPr>
+          <p:cNvPr id="14" name="TextBox 13"/>
+          <p:cNvSpPr txBox="1"/>
+          <p:nvPr/>
+        </p:nvSpPr>
+        <p:spPr>
+          <a:xfrm>
+            <a:off x="777240" y="5305375"/>
+            <a:ext cx="10607040" cy="457200"/>
+          </a:xfrm>
+          <a:prstGeom prst="rect">
+            <a:avLst/>
+          </a:prstGeom>
+          <a:noFill/>
+        </p:spPr>
+        <p:txBody>
+          <a:bodyPr wrap="square" lIns="45720" rIns="45720" tIns="18288" bIns="18288" anchor="t">
+            <a:spAutoFit/>
+          </a:bodyPr>
+          <a:lstStyle/>
+          <a:p>
             <a:pPr algn="ctr"/>
             <a:r>
-              <a:rPr sz="3040" b="1" i="0">
-                <a:solidFill>
-                  <a:srgbClr val="9E1B32"/>
-                </a:solidFill>
-                <a:latin typeface="Lexend"/>
-              </a:rPr>
-              <a:t>Answer:   D — 13</a:t>
+              <a:rPr sz="2470" b="1" i="0">
+                <a:solidFill>
+                  <a:srgbClr val="1A1A1A"/>
+                </a:solidFill>
+                <a:latin typeface="Lexend"/>
+              </a:rPr>
+              <a:t>Answer it.</a:t>
             </a:r>
           </a:p>
         </p:txBody>
@@ -9349,7 +9232,7 @@
                 </a:solidFill>
                 <a:latin typeface="Lexend"/>
               </a:rPr>
-              <a:t>Whiteboards   ·   Question 6 of 9</a:t>
+              <a:t>Whiteboards   ·   Question 5 of 9</a:t>
             </a:r>
           </a:p>
         </p:txBody>
@@ -9531,7 +9414,7 @@
       </p:sp>
       <p:pic>
         <p:nvPicPr>
-          <p:cNvPr id="8" name="Picture 7" descr="24ebae5e5d75799b.png"/>
+          <p:cNvPr id="8" name="Picture 7" descr="627b4a23b9288a97.png"/>
           <p:cNvPicPr>
             <a:picLocks noChangeAspect="1"/>
           </p:cNvPicPr>
@@ -9545,8 +9428,8 @@
         </p:blipFill>
         <p:spPr>
           <a:xfrm>
-            <a:off x="5504688" y="2194560"/>
-            <a:ext cx="1152144" cy="789432"/>
+            <a:off x="5138927" y="2103120"/>
+            <a:ext cx="1883664" cy="478536"/>
           </a:xfrm>
           <a:prstGeom prst="rect">
             <a:avLst/>
@@ -9561,7 +9444,7 @@
         </p:nvSpPr>
         <p:spPr>
           <a:xfrm>
-            <a:off x="777240" y="3258311"/>
+            <a:off x="777240" y="2855975"/>
             <a:ext cx="10607040" cy="465151"/>
           </a:xfrm>
           <a:prstGeom prst="rect">
@@ -9596,8 +9479,91 @@
         </p:nvSpPr>
         <p:spPr>
           <a:xfrm>
-            <a:off x="1874519" y="3924631"/>
-            <a:ext cx="4572000" cy="548640"/>
+            <a:off x="3136574" y="3481147"/>
+            <a:ext cx="3827922" cy="457200"/>
+          </a:xfrm>
+          <a:prstGeom prst="rect">
+            <a:avLst/>
+          </a:prstGeom>
+          <a:noFill/>
+        </p:spPr>
+        <p:txBody>
+          <a:bodyPr wrap="none" lIns="45720" rIns="45720" tIns="18288" bIns="18288" anchor="ctr">
+            <a:noAutofit/>
+          </a:bodyPr>
+          <a:lstStyle/>
+          <a:p>
+            <a:pPr algn="l"/>
+            <a:r>
+              <a:rPr sz="2750" b="0" i="0">
+                <a:solidFill>
+                  <a:srgbClr val="1A1A1A"/>
+                </a:solidFill>
+                <a:latin typeface="Lexend"/>
+              </a:rPr>
+              <a:t>Under the bar first:  </a:t>
+            </a:r>
+          </a:p>
+        </p:txBody>
+      </p:sp>
+      <p:pic>
+        <p:nvPicPr>
+          <p:cNvPr id="11" name="Picture 10" descr="d050f197a4a44d9d.png"/>
+          <p:cNvPicPr>
+            <a:picLocks noChangeAspect="1"/>
+          </p:cNvPicPr>
+          <p:nvPr/>
+        </p:nvPicPr>
+        <p:blipFill>
+          <a:blip r:embed="rId3"/>
+          <a:stretch>
+            <a:fillRect/>
+          </a:stretch>
+        </p:blipFill>
+        <p:spPr>
+          <a:xfrm>
+            <a:off x="6827337" y="3581731"/>
+            <a:ext cx="2197608" cy="256032"/>
+          </a:xfrm>
+          <a:prstGeom prst="rect">
+            <a:avLst/>
+          </a:prstGeom>
+        </p:spPr>
+      </p:pic>
+      <p:pic>
+        <p:nvPicPr>
+          <p:cNvPr id="12" name="Picture 11" descr="296c25346e41fa21.png"/>
+          <p:cNvPicPr>
+            <a:picLocks noChangeAspect="1"/>
+          </p:cNvPicPr>
+          <p:nvPr/>
+        </p:nvPicPr>
+        <p:blipFill>
+          <a:blip r:embed="rId4"/>
+          <a:stretch>
+            <a:fillRect/>
+          </a:stretch>
+        </p:blipFill>
+        <p:spPr>
+          <a:xfrm>
+            <a:off x="3191438" y="4043503"/>
+            <a:ext cx="1612392" cy="432816"/>
+          </a:xfrm>
+          <a:prstGeom prst="rect">
+            <a:avLst/>
+          </a:prstGeom>
+        </p:spPr>
+      </p:pic>
+      <p:sp>
+        <p:nvSpPr>
+          <p:cNvPr id="13" name="TextBox 12"/>
+          <p:cNvSpPr txBox="1"/>
+          <p:nvPr/>
+        </p:nvSpPr>
+        <p:spPr>
+          <a:xfrm>
+            <a:off x="777240" y="4663440"/>
+            <a:ext cx="10607040" cy="548640"/>
           </a:xfrm>
           <a:prstGeom prst="rect">
             <a:avLst/>
@@ -9610,191 +9576,15 @@
           </a:bodyPr>
           <a:lstStyle/>
           <a:p>
-            <a:pPr algn="l"/>
-            <a:r>
-              <a:rPr sz="2280" b="1" i="0">
-                <a:solidFill>
-                  <a:srgbClr val="1A1A1A"/>
-                </a:solidFill>
-                <a:latin typeface="Lexend"/>
-              </a:rPr>
-              <a:t>A.   </a:t>
-            </a:r>
-            <a:r>
-              <a:rPr sz="2280" b="0" i="0">
-                <a:solidFill>
-                  <a:srgbClr val="1A1A1A"/>
-                </a:solidFill>
-                <a:latin typeface="Lexend"/>
-              </a:rPr>
-              <a:t>−1/4</a:t>
-            </a:r>
-          </a:p>
-        </p:txBody>
-      </p:sp>
-      <p:sp>
-        <p:nvSpPr>
-          <p:cNvPr id="11" name="TextBox 10"/>
-          <p:cNvSpPr txBox="1"/>
-          <p:nvPr/>
-        </p:nvSpPr>
-        <p:spPr>
-          <a:xfrm>
-            <a:off x="6629400" y="3924631"/>
-            <a:ext cx="4572000" cy="548640"/>
-          </a:xfrm>
-          <a:prstGeom prst="rect">
-            <a:avLst/>
-          </a:prstGeom>
-          <a:noFill/>
-        </p:spPr>
-        <p:txBody>
-          <a:bodyPr wrap="square" lIns="45720" rIns="45720" tIns="18288" bIns="18288" anchor="t">
-            <a:spAutoFit/>
-          </a:bodyPr>
-          <a:lstStyle/>
-          <a:p>
-            <a:pPr algn="l"/>
-            <a:r>
-              <a:rPr sz="2280" b="1" i="0">
-                <a:solidFill>
-                  <a:srgbClr val="1A1A1A"/>
-                </a:solidFill>
-                <a:latin typeface="Lexend"/>
-              </a:rPr>
-              <a:t>B.   </a:t>
-            </a:r>
-            <a:r>
-              <a:rPr sz="2280" b="0" i="0">
-                <a:solidFill>
-                  <a:srgbClr val="1A1A1A"/>
-                </a:solidFill>
-                <a:latin typeface="Lexend"/>
-              </a:rPr>
-              <a:t>not a real number</a:t>
-            </a:r>
-          </a:p>
-        </p:txBody>
-      </p:sp>
-      <p:sp>
-        <p:nvSpPr>
-          <p:cNvPr id="12" name="TextBox 11"/>
-          <p:cNvSpPr txBox="1"/>
-          <p:nvPr/>
-        </p:nvSpPr>
-        <p:spPr>
-          <a:xfrm>
-            <a:off x="1874519" y="4610431"/>
-            <a:ext cx="4572000" cy="548640"/>
-          </a:xfrm>
-          <a:prstGeom prst="rect">
-            <a:avLst/>
-          </a:prstGeom>
-          <a:noFill/>
-        </p:spPr>
-        <p:txBody>
-          <a:bodyPr wrap="square" lIns="45720" rIns="45720" tIns="18288" bIns="18288" anchor="t">
-            <a:spAutoFit/>
-          </a:bodyPr>
-          <a:lstStyle/>
-          <a:p>
-            <a:pPr algn="l"/>
-            <a:r>
-              <a:rPr sz="2280" b="1" i="0">
-                <a:solidFill>
-                  <a:srgbClr val="1A1A1A"/>
-                </a:solidFill>
-                <a:latin typeface="Lexend"/>
-              </a:rPr>
-              <a:t>C.   </a:t>
-            </a:r>
-            <a:r>
-              <a:rPr sz="2280" b="0" i="0">
-                <a:solidFill>
-                  <a:srgbClr val="1A1A1A"/>
-                </a:solidFill>
-                <a:latin typeface="Lexend"/>
-              </a:rPr>
-              <a:t>−1/8</a:t>
-            </a:r>
-          </a:p>
-        </p:txBody>
-      </p:sp>
-      <p:sp>
-        <p:nvSpPr>
-          <p:cNvPr id="13" name="TextBox 12"/>
-          <p:cNvSpPr txBox="1"/>
-          <p:nvPr/>
-        </p:nvSpPr>
-        <p:spPr>
-          <a:xfrm>
-            <a:off x="6629400" y="4610431"/>
-            <a:ext cx="4572000" cy="548640"/>
-          </a:xfrm>
-          <a:prstGeom prst="rect">
-            <a:avLst/>
-          </a:prstGeom>
-          <a:noFill/>
-        </p:spPr>
-        <p:txBody>
-          <a:bodyPr wrap="square" lIns="45720" rIns="45720" tIns="18288" bIns="18288" anchor="t">
-            <a:spAutoFit/>
-          </a:bodyPr>
-          <a:lstStyle/>
-          <a:p>
-            <a:pPr algn="l"/>
-            <a:r>
-              <a:rPr sz="2280" b="1" i="0">
-                <a:solidFill>
-                  <a:srgbClr val="1A1A1A"/>
-                </a:solidFill>
-                <a:latin typeface="Lexend"/>
-              </a:rPr>
-              <a:t>D.   </a:t>
-            </a:r>
-            <a:r>
-              <a:rPr sz="2280" b="0" i="0">
-                <a:solidFill>
-                  <a:srgbClr val="1A1A1A"/>
-                </a:solidFill>
-                <a:latin typeface="Lexend"/>
-              </a:rPr>
-              <a:t>1/4</a:t>
-            </a:r>
-          </a:p>
-        </p:txBody>
-      </p:sp>
-      <p:sp>
-        <p:nvSpPr>
-          <p:cNvPr id="14" name="TextBox 13"/>
-          <p:cNvSpPr txBox="1"/>
-          <p:nvPr/>
-        </p:nvSpPr>
-        <p:spPr>
-          <a:xfrm>
-            <a:off x="777240" y="5616271"/>
-            <a:ext cx="10607040" cy="457200"/>
-          </a:xfrm>
-          <a:prstGeom prst="rect">
-            <a:avLst/>
-          </a:prstGeom>
-          <a:noFill/>
-        </p:spPr>
-        <p:txBody>
-          <a:bodyPr wrap="square" lIns="45720" rIns="45720" tIns="18288" bIns="18288" anchor="t">
-            <a:spAutoFit/>
-          </a:bodyPr>
-          <a:lstStyle/>
-          <a:p>
             <a:pPr algn="ctr"/>
             <a:r>
-              <a:rPr sz="2470" b="1" i="0">
-                <a:solidFill>
-                  <a:srgbClr val="1A1A1A"/>
-                </a:solidFill>
-                <a:latin typeface="Lexend"/>
-              </a:rPr>
-              <a:t>Answer it.</a:t>
+              <a:rPr sz="3040" b="1" i="0">
+                <a:solidFill>
+                  <a:srgbClr val="9E1B32"/>
+                </a:solidFill>
+                <a:latin typeface="Lexend"/>
+              </a:rPr>
+              <a:t>Answer:   D — 13</a:t>
             </a:r>
           </a:p>
         </p:txBody>
@@ -10029,7 +9819,7 @@
       </p:sp>
       <p:pic>
         <p:nvPicPr>
-          <p:cNvPr id="8" name="Picture 7" descr="3d615a9b7c2dc05a.png"/>
+          <p:cNvPr id="8" name="Picture 7" descr="24ebae5e5d75799b.png"/>
           <p:cNvPicPr>
             <a:picLocks noChangeAspect="1"/>
           </p:cNvPicPr>
@@ -10043,8 +9833,8 @@
         </p:blipFill>
         <p:spPr>
           <a:xfrm>
-            <a:off x="5506212" y="2103120"/>
-            <a:ext cx="1149096" cy="789432"/>
+            <a:off x="5504688" y="2194560"/>
+            <a:ext cx="1152144" cy="789432"/>
           </a:xfrm>
           <a:prstGeom prst="rect">
             <a:avLst/>
@@ -10059,7 +9849,7 @@
         </p:nvSpPr>
         <p:spPr>
           <a:xfrm>
-            <a:off x="777240" y="3166871"/>
+            <a:off x="777240" y="3258311"/>
             <a:ext cx="10607040" cy="465151"/>
           </a:xfrm>
           <a:prstGeom prst="rect">
@@ -10086,30 +9876,50 @@
           </a:p>
         </p:txBody>
       </p:sp>
-      <p:pic>
-        <p:nvPicPr>
-          <p:cNvPr id="10" name="Picture 9" descr="44ca813e0eef5cc0.png"/>
-          <p:cNvPicPr>
-            <a:picLocks noChangeAspect="1"/>
-          </p:cNvPicPr>
-          <p:nvPr/>
-        </p:nvPicPr>
-        <p:blipFill>
-          <a:blip r:embed="rId3"/>
-          <a:stretch>
-            <a:fillRect/>
-          </a:stretch>
-        </p:blipFill>
-        <p:spPr>
-          <a:xfrm>
-            <a:off x="4107179" y="3814903"/>
-            <a:ext cx="4053840" cy="606552"/>
-          </a:xfrm>
-          <a:prstGeom prst="rect">
-            <a:avLst/>
-          </a:prstGeom>
-        </p:spPr>
-      </p:pic>
+      <p:sp>
+        <p:nvSpPr>
+          <p:cNvPr id="10" name="TextBox 9"/>
+          <p:cNvSpPr txBox="1"/>
+          <p:nvPr/>
+        </p:nvSpPr>
+        <p:spPr>
+          <a:xfrm>
+            <a:off x="1874519" y="3924631"/>
+            <a:ext cx="4572000" cy="548640"/>
+          </a:xfrm>
+          <a:prstGeom prst="rect">
+            <a:avLst/>
+          </a:prstGeom>
+          <a:noFill/>
+        </p:spPr>
+        <p:txBody>
+          <a:bodyPr wrap="square" lIns="45720" rIns="45720" tIns="18288" bIns="18288" anchor="t">
+            <a:spAutoFit/>
+          </a:bodyPr>
+          <a:lstStyle/>
+          <a:p>
+            <a:pPr algn="l"/>
+            <a:r>
+              <a:rPr sz="2280" b="1" i="0">
+                <a:solidFill>
+                  <a:srgbClr val="1A1A1A"/>
+                </a:solidFill>
+                <a:latin typeface="Lexend"/>
+              </a:rPr>
+              <a:t>A.   </a:t>
+            </a:r>
+            <a:r>
+              <a:rPr sz="2280" b="0" i="0">
+                <a:solidFill>
+                  <a:srgbClr val="1A1A1A"/>
+                </a:solidFill>
+                <a:latin typeface="Lexend"/>
+              </a:rPr>
+              <a:t>−1/4</a:t>
+            </a:r>
+          </a:p>
+        </p:txBody>
+      </p:sp>
       <p:sp>
         <p:nvSpPr>
           <p:cNvPr id="11" name="TextBox 10"/>
@@ -10118,57 +9928,86 @@
         </p:nvSpPr>
         <p:spPr>
           <a:xfrm>
-            <a:off x="4052316" y="4679011"/>
-            <a:ext cx="927639" cy="457200"/>
-          </a:xfrm>
-          <a:prstGeom prst="rect">
-            <a:avLst/>
-          </a:prstGeom>
-          <a:noFill/>
-        </p:spPr>
-        <p:txBody>
-          <a:bodyPr wrap="none" lIns="45720" rIns="45720" tIns="18288" bIns="18288" anchor="ctr">
-            <a:noAutofit/>
+            <a:off x="6629400" y="3924631"/>
+            <a:ext cx="4572000" cy="548640"/>
+          </a:xfrm>
+          <a:prstGeom prst="rect">
+            <a:avLst/>
+          </a:prstGeom>
+          <a:noFill/>
+        </p:spPr>
+        <p:txBody>
+          <a:bodyPr wrap="square" lIns="45720" rIns="45720" tIns="18288" bIns="18288" anchor="t">
+            <a:spAutoFit/>
           </a:bodyPr>
           <a:lstStyle/>
           <a:p>
             <a:pPr algn="l"/>
             <a:r>
-              <a:rPr sz="2750" b="0" i="0">
+              <a:rPr sz="2280" b="1" i="0">
                 <a:solidFill>
                   <a:srgbClr val="1A1A1A"/>
                 </a:solidFill>
                 <a:latin typeface="Lexend"/>
               </a:rPr>
-              <a:t>so   </a:t>
-            </a:r>
-          </a:p>
-        </p:txBody>
-      </p:sp>
-      <p:pic>
-        <p:nvPicPr>
-          <p:cNvPr id="12" name="Picture 11" descr="712e2a339e91aae2.png"/>
-          <p:cNvPicPr>
-            <a:picLocks noChangeAspect="1"/>
-          </p:cNvPicPr>
-          <p:nvPr/>
-        </p:nvPicPr>
-        <p:blipFill>
-          <a:blip r:embed="rId4"/>
-          <a:stretch>
-            <a:fillRect/>
-          </a:stretch>
-        </p:blipFill>
-        <p:spPr>
-          <a:xfrm>
-            <a:off x="4842795" y="4549471"/>
-            <a:ext cx="1786128" cy="716280"/>
-          </a:xfrm>
-          <a:prstGeom prst="rect">
-            <a:avLst/>
-          </a:prstGeom>
-        </p:spPr>
-      </p:pic>
+              <a:t>B.   </a:t>
+            </a:r>
+            <a:r>
+              <a:rPr sz="2280" b="0" i="0">
+                <a:solidFill>
+                  <a:srgbClr val="1A1A1A"/>
+                </a:solidFill>
+                <a:latin typeface="Lexend"/>
+              </a:rPr>
+              <a:t>not a real number</a:t>
+            </a:r>
+          </a:p>
+        </p:txBody>
+      </p:sp>
+      <p:sp>
+        <p:nvSpPr>
+          <p:cNvPr id="12" name="TextBox 11"/>
+          <p:cNvSpPr txBox="1"/>
+          <p:nvPr/>
+        </p:nvSpPr>
+        <p:spPr>
+          <a:xfrm>
+            <a:off x="1874519" y="4610431"/>
+            <a:ext cx="4572000" cy="548640"/>
+          </a:xfrm>
+          <a:prstGeom prst="rect">
+            <a:avLst/>
+          </a:prstGeom>
+          <a:noFill/>
+        </p:spPr>
+        <p:txBody>
+          <a:bodyPr wrap="square" lIns="45720" rIns="45720" tIns="18288" bIns="18288" anchor="t">
+            <a:spAutoFit/>
+          </a:bodyPr>
+          <a:lstStyle/>
+          <a:p>
+            <a:pPr algn="l"/>
+            <a:r>
+              <a:rPr sz="2280" b="1" i="0">
+                <a:solidFill>
+                  <a:srgbClr val="1A1A1A"/>
+                </a:solidFill>
+                <a:latin typeface="Lexend"/>
+              </a:rPr>
+              <a:t>C.   </a:t>
+            </a:r>
+            <a:r>
+              <a:rPr sz="2280" b="0" i="0">
+                <a:solidFill>
+                  <a:srgbClr val="1A1A1A"/>
+                </a:solidFill>
+                <a:latin typeface="Lexend"/>
+              </a:rPr>
+              <a:t>−1/8</a:t>
+            </a:r>
+          </a:p>
+        </p:txBody>
+      </p:sp>
       <p:sp>
         <p:nvSpPr>
           <p:cNvPr id="13" name="TextBox 12"/>
@@ -10177,8 +10016,8 @@
         </p:nvSpPr>
         <p:spPr>
           <a:xfrm>
-            <a:off x="777240" y="5402911"/>
-            <a:ext cx="10607040" cy="548640"/>
+            <a:off x="6629400" y="4610431"/>
+            <a:ext cx="4572000" cy="548640"/>
           </a:xfrm>
           <a:prstGeom prst="rect">
             <a:avLst/>
@@ -10191,15 +10030,59 @@
           </a:bodyPr>
           <a:lstStyle/>
           <a:p>
+            <a:pPr algn="l"/>
+            <a:r>
+              <a:rPr sz="2280" b="1" i="0">
+                <a:solidFill>
+                  <a:srgbClr val="1A1A1A"/>
+                </a:solidFill>
+                <a:latin typeface="Lexend"/>
+              </a:rPr>
+              <a:t>D.   </a:t>
+            </a:r>
+            <a:r>
+              <a:rPr sz="2280" b="0" i="0">
+                <a:solidFill>
+                  <a:srgbClr val="1A1A1A"/>
+                </a:solidFill>
+                <a:latin typeface="Lexend"/>
+              </a:rPr>
+              <a:t>1/4</a:t>
+            </a:r>
+          </a:p>
+        </p:txBody>
+      </p:sp>
+      <p:sp>
+        <p:nvSpPr>
+          <p:cNvPr id="14" name="TextBox 13"/>
+          <p:cNvSpPr txBox="1"/>
+          <p:nvPr/>
+        </p:nvSpPr>
+        <p:spPr>
+          <a:xfrm>
+            <a:off x="777240" y="5616271"/>
+            <a:ext cx="10607040" cy="457200"/>
+          </a:xfrm>
+          <a:prstGeom prst="rect">
+            <a:avLst/>
+          </a:prstGeom>
+          <a:noFill/>
+        </p:spPr>
+        <p:txBody>
+          <a:bodyPr wrap="square" lIns="45720" rIns="45720" tIns="18288" bIns="18288" anchor="t">
+            <a:spAutoFit/>
+          </a:bodyPr>
+          <a:lstStyle/>
+          <a:p>
             <a:pPr algn="ctr"/>
             <a:r>
-              <a:rPr sz="3040" b="1" i="0">
-                <a:solidFill>
-                  <a:srgbClr val="9E1B32"/>
-                </a:solidFill>
-                <a:latin typeface="Lexend"/>
-              </a:rPr>
-              <a:t>Answer:   A — −1/4</a:t>
+              <a:rPr sz="2470" b="1" i="0">
+                <a:solidFill>
+                  <a:srgbClr val="1A1A1A"/>
+                </a:solidFill>
+                <a:latin typeface="Lexend"/>
+              </a:rPr>
+              <a:t>Answer it.</a:t>
             </a:r>
           </a:p>
         </p:txBody>
@@ -10252,7 +10135,7 @@
                 </a:solidFill>
                 <a:latin typeface="Lexend"/>
               </a:rPr>
-              <a:t>Whiteboards   ·   Question 7 of 9</a:t>
+              <a:t>Whiteboards   ·   Question 6 of 9</a:t>
             </a:r>
           </a:p>
         </p:txBody>
@@ -10434,7 +10317,7 @@
       </p:sp>
       <p:pic>
         <p:nvPicPr>
-          <p:cNvPr id="8" name="Picture 7" descr="13bd5897204bf8fd.png"/>
+          <p:cNvPr id="8" name="Picture 7" descr="3d615a9b7c2dc05a.png"/>
           <p:cNvPicPr>
             <a:picLocks noChangeAspect="1"/>
           </p:cNvPicPr>
@@ -10448,8 +10331,8 @@
         </p:blipFill>
         <p:spPr>
           <a:xfrm>
-            <a:off x="5117591" y="2194560"/>
-            <a:ext cx="1926335" cy="789432"/>
+            <a:off x="5506212" y="2103120"/>
+            <a:ext cx="1149096" cy="789432"/>
           </a:xfrm>
           <a:prstGeom prst="rect">
             <a:avLst/>
@@ -10464,8 +10347,8 @@
         </p:nvSpPr>
         <p:spPr>
           <a:xfrm>
-            <a:off x="777240" y="4343400"/>
-            <a:ext cx="10607040" cy="457200"/>
+            <a:off x="777240" y="3166871"/>
+            <a:ext cx="10607040" cy="465151"/>
           </a:xfrm>
           <a:prstGeom prst="rect">
             <a:avLst/>
@@ -10480,13 +10363,131 @@
           <a:p>
             <a:pPr algn="ctr"/>
             <a:r>
-              <a:rPr sz="2470" b="1" i="0">
+              <a:rPr sz="2470" b="0" i="0">
                 <a:solidFill>
                   <a:srgbClr val="1A1A1A"/>
                 </a:solidFill>
                 <a:latin typeface="Lexend"/>
               </a:rPr>
-              <a:t>Answer it.</a:t>
+              <a:t>Which is the value?</a:t>
+            </a:r>
+          </a:p>
+        </p:txBody>
+      </p:sp>
+      <p:pic>
+        <p:nvPicPr>
+          <p:cNvPr id="10" name="Picture 9" descr="44ca813e0eef5cc0.png"/>
+          <p:cNvPicPr>
+            <a:picLocks noChangeAspect="1"/>
+          </p:cNvPicPr>
+          <p:nvPr/>
+        </p:nvPicPr>
+        <p:blipFill>
+          <a:blip r:embed="rId3"/>
+          <a:stretch>
+            <a:fillRect/>
+          </a:stretch>
+        </p:blipFill>
+        <p:spPr>
+          <a:xfrm>
+            <a:off x="4107179" y="3814903"/>
+            <a:ext cx="4053840" cy="606552"/>
+          </a:xfrm>
+          <a:prstGeom prst="rect">
+            <a:avLst/>
+          </a:prstGeom>
+        </p:spPr>
+      </p:pic>
+      <p:sp>
+        <p:nvSpPr>
+          <p:cNvPr id="11" name="TextBox 10"/>
+          <p:cNvSpPr txBox="1"/>
+          <p:nvPr/>
+        </p:nvSpPr>
+        <p:spPr>
+          <a:xfrm>
+            <a:off x="4052316" y="4679011"/>
+            <a:ext cx="927639" cy="457200"/>
+          </a:xfrm>
+          <a:prstGeom prst="rect">
+            <a:avLst/>
+          </a:prstGeom>
+          <a:noFill/>
+        </p:spPr>
+        <p:txBody>
+          <a:bodyPr wrap="none" lIns="45720" rIns="45720" tIns="18288" bIns="18288" anchor="ctr">
+            <a:noAutofit/>
+          </a:bodyPr>
+          <a:lstStyle/>
+          <a:p>
+            <a:pPr algn="l"/>
+            <a:r>
+              <a:rPr sz="2750" b="0" i="0">
+                <a:solidFill>
+                  <a:srgbClr val="1A1A1A"/>
+                </a:solidFill>
+                <a:latin typeface="Lexend"/>
+              </a:rPr>
+              <a:t>so   </a:t>
+            </a:r>
+          </a:p>
+        </p:txBody>
+      </p:sp>
+      <p:pic>
+        <p:nvPicPr>
+          <p:cNvPr id="12" name="Picture 11" descr="712e2a339e91aae2.png"/>
+          <p:cNvPicPr>
+            <a:picLocks noChangeAspect="1"/>
+          </p:cNvPicPr>
+          <p:nvPr/>
+        </p:nvPicPr>
+        <p:blipFill>
+          <a:blip r:embed="rId4"/>
+          <a:stretch>
+            <a:fillRect/>
+          </a:stretch>
+        </p:blipFill>
+        <p:spPr>
+          <a:xfrm>
+            <a:off x="4842795" y="4549471"/>
+            <a:ext cx="1786128" cy="716280"/>
+          </a:xfrm>
+          <a:prstGeom prst="rect">
+            <a:avLst/>
+          </a:prstGeom>
+        </p:spPr>
+      </p:pic>
+      <p:sp>
+        <p:nvSpPr>
+          <p:cNvPr id="13" name="TextBox 12"/>
+          <p:cNvSpPr txBox="1"/>
+          <p:nvPr/>
+        </p:nvSpPr>
+        <p:spPr>
+          <a:xfrm>
+            <a:off x="777240" y="5402911"/>
+            <a:ext cx="10607040" cy="548640"/>
+          </a:xfrm>
+          <a:prstGeom prst="rect">
+            <a:avLst/>
+          </a:prstGeom>
+          <a:noFill/>
+        </p:spPr>
+        <p:txBody>
+          <a:bodyPr wrap="square" lIns="45720" rIns="45720" tIns="18288" bIns="18288" anchor="t">
+            <a:spAutoFit/>
+          </a:bodyPr>
+          <a:lstStyle/>
+          <a:p>
+            <a:pPr algn="ctr"/>
+            <a:r>
+              <a:rPr sz="3040" b="1" i="0">
+                <a:solidFill>
+                  <a:srgbClr val="9E1B32"/>
+                </a:solidFill>
+                <a:latin typeface="Lexend"/>
+              </a:rPr>
+              <a:t>Answer:   A — −1/4</a:t>
             </a:r>
           </a:p>
         </p:txBody>
@@ -10721,7 +10722,7 @@
       </p:sp>
       <p:pic>
         <p:nvPicPr>
-          <p:cNvPr id="8" name="Picture 7" descr="e6bc0b83f8afa4f2.png"/>
+          <p:cNvPr id="8" name="Picture 7" descr="13bd5897204bf8fd.png"/>
           <p:cNvPicPr>
             <a:picLocks noChangeAspect="1"/>
           </p:cNvPicPr>
@@ -10735,152 +10736,45 @@
         </p:blipFill>
         <p:spPr>
           <a:xfrm>
-            <a:off x="5119115" y="2103120"/>
-            <a:ext cx="1923288" cy="789432"/>
+            <a:off x="5117591" y="2194560"/>
+            <a:ext cx="1926335" cy="789432"/>
           </a:xfrm>
           <a:prstGeom prst="rect">
             <a:avLst/>
           </a:prstGeom>
         </p:spPr>
       </p:pic>
-      <p:pic>
-        <p:nvPicPr>
-          <p:cNvPr id="9" name="Picture 8" descr="ab1c6f19d3960fbb.png"/>
-          <p:cNvPicPr>
-            <a:picLocks noChangeAspect="1"/>
-          </p:cNvPicPr>
-          <p:nvPr/>
-        </p:nvPicPr>
-        <p:blipFill>
-          <a:blip r:embed="rId3"/>
-          <a:stretch>
-            <a:fillRect/>
-          </a:stretch>
-        </p:blipFill>
-        <p:spPr>
-          <a:xfrm>
-            <a:off x="3986317" y="3240023"/>
-            <a:ext cx="1161288" cy="716280"/>
-          </a:xfrm>
-          <a:prstGeom prst="rect">
-            <a:avLst/>
-          </a:prstGeom>
-        </p:spPr>
-      </p:pic>
-      <p:sp>
-        <p:nvSpPr>
-          <p:cNvPr id="10" name="TextBox 9"/>
-          <p:cNvSpPr txBox="1"/>
-          <p:nvPr/>
-        </p:nvSpPr>
-        <p:spPr>
-          <a:xfrm>
-            <a:off x="5147605" y="3369563"/>
-            <a:ext cx="1939461" cy="457200"/>
-          </a:xfrm>
-          <a:prstGeom prst="rect">
-            <a:avLst/>
-          </a:prstGeom>
-          <a:noFill/>
-        </p:spPr>
-        <p:txBody>
-          <a:bodyPr wrap="none" lIns="45720" rIns="45720" tIns="18288" bIns="18288" anchor="ctr">
-            <a:noAutofit/>
-          </a:bodyPr>
-          <a:lstStyle/>
-          <a:p>
-            <a:pPr algn="l"/>
-            <a:r>
-              <a:rPr sz="2750" b="0" i="0">
+      <p:sp>
+        <p:nvSpPr>
+          <p:cNvPr id="9" name="TextBox 8"/>
+          <p:cNvSpPr txBox="1"/>
+          <p:nvPr/>
+        </p:nvSpPr>
+        <p:spPr>
+          <a:xfrm>
+            <a:off x="777240" y="4343400"/>
+            <a:ext cx="10607040" cy="457200"/>
+          </a:xfrm>
+          <a:prstGeom prst="rect">
+            <a:avLst/>
+          </a:prstGeom>
+          <a:noFill/>
+        </p:spPr>
+        <p:txBody>
+          <a:bodyPr wrap="square" lIns="45720" rIns="45720" tIns="18288" bIns="18288" anchor="t">
+            <a:spAutoFit/>
+          </a:bodyPr>
+          <a:lstStyle/>
+          <a:p>
+            <a:pPr algn="ctr"/>
+            <a:r>
+              <a:rPr sz="2470" b="1" i="0">
                 <a:solidFill>
                   <a:srgbClr val="1A1A1A"/>
                 </a:solidFill>
                 <a:latin typeface="Lexend"/>
               </a:rPr>
-              <a:t>     and     </a:t>
-            </a:r>
-          </a:p>
-        </p:txBody>
-      </p:sp>
-      <p:pic>
-        <p:nvPicPr>
-          <p:cNvPr id="11" name="Picture 10" descr="7b48005c9016cda3.png"/>
-          <p:cNvPicPr>
-            <a:picLocks noChangeAspect="1"/>
-          </p:cNvPicPr>
-          <p:nvPr/>
-        </p:nvPicPr>
-        <p:blipFill>
-          <a:blip r:embed="rId4"/>
-          <a:stretch>
-            <a:fillRect/>
-          </a:stretch>
-        </p:blipFill>
-        <p:spPr>
-          <a:xfrm>
-            <a:off x="6949906" y="3240023"/>
-            <a:ext cx="1322832" cy="716280"/>
-          </a:xfrm>
-          <a:prstGeom prst="rect">
-            <a:avLst/>
-          </a:prstGeom>
-        </p:spPr>
-      </p:pic>
-      <p:pic>
-        <p:nvPicPr>
-          <p:cNvPr id="12" name="Picture 11" descr="27befd5d16127212.png"/>
-          <p:cNvPicPr>
-            <a:picLocks noChangeAspect="1"/>
-          </p:cNvPicPr>
-          <p:nvPr/>
-        </p:nvPicPr>
-        <p:blipFill>
-          <a:blip r:embed="rId5"/>
-          <a:stretch>
-            <a:fillRect/>
-          </a:stretch>
-        </p:blipFill>
-        <p:spPr>
-          <a:xfrm>
-            <a:off x="3986317" y="4084320"/>
-            <a:ext cx="1350264" cy="606552"/>
-          </a:xfrm>
-          <a:prstGeom prst="rect">
-            <a:avLst/>
-          </a:prstGeom>
-        </p:spPr>
-      </p:pic>
-      <p:sp>
-        <p:nvSpPr>
-          <p:cNvPr id="13" name="TextBox 12"/>
-          <p:cNvSpPr txBox="1"/>
-          <p:nvPr/>
-        </p:nvSpPr>
-        <p:spPr>
-          <a:xfrm>
-            <a:off x="777240" y="4828032"/>
-            <a:ext cx="10607040" cy="548640"/>
-          </a:xfrm>
-          <a:prstGeom prst="rect">
-            <a:avLst/>
-          </a:prstGeom>
-          <a:noFill/>
-        </p:spPr>
-        <p:txBody>
-          <a:bodyPr wrap="square" lIns="45720" rIns="45720" tIns="18288" bIns="18288" anchor="t">
-            <a:spAutoFit/>
-          </a:bodyPr>
-          <a:lstStyle/>
-          <a:p>
-            <a:pPr algn="ctr"/>
-            <a:r>
-              <a:rPr sz="3040" b="1" i="0">
-                <a:solidFill>
-                  <a:srgbClr val="9E1B32"/>
-                </a:solidFill>
-                <a:latin typeface="Lexend"/>
-              </a:rPr>
-              <a:t>Answer:   4/3</a:t>
+              <a:t>Answer it.</a:t>
             </a:r>
           </a:p>
         </p:txBody>
@@ -10933,7 +10827,7 @@
                 </a:solidFill>
                 <a:latin typeface="Lexend"/>
               </a:rPr>
-              <a:t>Whiteboards   ·   Question 8 of 9</a:t>
+              <a:t>Whiteboards   ·   Question 7 of 9</a:t>
             </a:r>
           </a:p>
         </p:txBody>
@@ -11115,7 +11009,7 @@
       </p:sp>
       <p:pic>
         <p:nvPicPr>
-          <p:cNvPr id="8" name="Picture 7" descr="7513eedb387e9335.png"/>
+          <p:cNvPr id="8" name="Picture 7" descr="e6bc0b83f8afa4f2.png"/>
           <p:cNvPicPr>
             <a:picLocks noChangeAspect="1"/>
           </p:cNvPicPr>
@@ -11129,24 +11023,131 @@
         </p:blipFill>
         <p:spPr>
           <a:xfrm>
-            <a:off x="4809744" y="2194560"/>
-            <a:ext cx="2542032" cy="478536"/>
+            <a:off x="5119115" y="2103120"/>
+            <a:ext cx="1923288" cy="789432"/>
           </a:xfrm>
           <a:prstGeom prst="rect">
             <a:avLst/>
           </a:prstGeom>
         </p:spPr>
       </p:pic>
-      <p:sp>
-        <p:nvSpPr>
-          <p:cNvPr id="9" name="TextBox 8"/>
-          <p:cNvSpPr txBox="1"/>
-          <p:nvPr/>
-        </p:nvSpPr>
-        <p:spPr>
-          <a:xfrm>
-            <a:off x="777240" y="4343400"/>
-            <a:ext cx="10607040" cy="457200"/>
+      <p:pic>
+        <p:nvPicPr>
+          <p:cNvPr id="9" name="Picture 8" descr="ab1c6f19d3960fbb.png"/>
+          <p:cNvPicPr>
+            <a:picLocks noChangeAspect="1"/>
+          </p:cNvPicPr>
+          <p:nvPr/>
+        </p:nvPicPr>
+        <p:blipFill>
+          <a:blip r:embed="rId3"/>
+          <a:stretch>
+            <a:fillRect/>
+          </a:stretch>
+        </p:blipFill>
+        <p:spPr>
+          <a:xfrm>
+            <a:off x="3986317" y="3240023"/>
+            <a:ext cx="1161288" cy="716280"/>
+          </a:xfrm>
+          <a:prstGeom prst="rect">
+            <a:avLst/>
+          </a:prstGeom>
+        </p:spPr>
+      </p:pic>
+      <p:sp>
+        <p:nvSpPr>
+          <p:cNvPr id="10" name="TextBox 9"/>
+          <p:cNvSpPr txBox="1"/>
+          <p:nvPr/>
+        </p:nvSpPr>
+        <p:spPr>
+          <a:xfrm>
+            <a:off x="5147605" y="3369563"/>
+            <a:ext cx="1939461" cy="457200"/>
+          </a:xfrm>
+          <a:prstGeom prst="rect">
+            <a:avLst/>
+          </a:prstGeom>
+          <a:noFill/>
+        </p:spPr>
+        <p:txBody>
+          <a:bodyPr wrap="none" lIns="45720" rIns="45720" tIns="18288" bIns="18288" anchor="ctr">
+            <a:noAutofit/>
+          </a:bodyPr>
+          <a:lstStyle/>
+          <a:p>
+            <a:pPr algn="l"/>
+            <a:r>
+              <a:rPr sz="2750" b="0" i="0">
+                <a:solidFill>
+                  <a:srgbClr val="1A1A1A"/>
+                </a:solidFill>
+                <a:latin typeface="Lexend"/>
+              </a:rPr>
+              <a:t>     and     </a:t>
+            </a:r>
+          </a:p>
+        </p:txBody>
+      </p:sp>
+      <p:pic>
+        <p:nvPicPr>
+          <p:cNvPr id="11" name="Picture 10" descr="7b48005c9016cda3.png"/>
+          <p:cNvPicPr>
+            <a:picLocks noChangeAspect="1"/>
+          </p:cNvPicPr>
+          <p:nvPr/>
+        </p:nvPicPr>
+        <p:blipFill>
+          <a:blip r:embed="rId4"/>
+          <a:stretch>
+            <a:fillRect/>
+          </a:stretch>
+        </p:blipFill>
+        <p:spPr>
+          <a:xfrm>
+            <a:off x="6949906" y="3240023"/>
+            <a:ext cx="1322832" cy="716280"/>
+          </a:xfrm>
+          <a:prstGeom prst="rect">
+            <a:avLst/>
+          </a:prstGeom>
+        </p:spPr>
+      </p:pic>
+      <p:pic>
+        <p:nvPicPr>
+          <p:cNvPr id="12" name="Picture 11" descr="27befd5d16127212.png"/>
+          <p:cNvPicPr>
+            <a:picLocks noChangeAspect="1"/>
+          </p:cNvPicPr>
+          <p:nvPr/>
+        </p:nvPicPr>
+        <p:blipFill>
+          <a:blip r:embed="rId5"/>
+          <a:stretch>
+            <a:fillRect/>
+          </a:stretch>
+        </p:blipFill>
+        <p:spPr>
+          <a:xfrm>
+            <a:off x="3986317" y="4084320"/>
+            <a:ext cx="1350264" cy="606552"/>
+          </a:xfrm>
+          <a:prstGeom prst="rect">
+            <a:avLst/>
+          </a:prstGeom>
+        </p:spPr>
+      </p:pic>
+      <p:sp>
+        <p:nvSpPr>
+          <p:cNvPr id="13" name="TextBox 12"/>
+          <p:cNvSpPr txBox="1"/>
+          <p:nvPr/>
+        </p:nvSpPr>
+        <p:spPr>
+          <a:xfrm>
+            <a:off x="777240" y="4828032"/>
+            <a:ext cx="10607040" cy="548640"/>
           </a:xfrm>
           <a:prstGeom prst="rect">
             <a:avLst/>
@@ -11161,13 +11162,13 @@
           <a:p>
             <a:pPr algn="ctr"/>
             <a:r>
-              <a:rPr sz="2470" b="1" i="0">
-                <a:solidFill>
-                  <a:srgbClr val="1A1A1A"/>
-                </a:solidFill>
-                <a:latin typeface="Lexend"/>
-              </a:rPr>
-              <a:t>Answer it.</a:t>
+              <a:rPr sz="3040" b="1" i="0">
+                <a:solidFill>
+                  <a:srgbClr val="9E1B32"/>
+                </a:solidFill>
+                <a:latin typeface="Lexend"/>
+              </a:rPr>
+              <a:t>Answer:   4/3</a:t>
             </a:r>
           </a:p>
         </p:txBody>
@@ -11991,7 +11992,7 @@
       </p:sp>
       <p:pic>
         <p:nvPicPr>
-          <p:cNvPr id="8" name="Picture 7" descr="41217f15035bee5c.png"/>
+          <p:cNvPr id="8" name="Picture 7" descr="7513eedb387e9335.png"/>
           <p:cNvPicPr>
             <a:picLocks noChangeAspect="1"/>
           </p:cNvPicPr>
@@ -12005,96 +12006,24 @@
         </p:blipFill>
         <p:spPr>
           <a:xfrm>
-            <a:off x="4808220" y="2103120"/>
-            <a:ext cx="2545080" cy="478536"/>
+            <a:off x="4809744" y="2194560"/>
+            <a:ext cx="2542032" cy="478536"/>
           </a:xfrm>
           <a:prstGeom prst="rect">
             <a:avLst/>
           </a:prstGeom>
         </p:spPr>
       </p:pic>
-      <p:pic>
-        <p:nvPicPr>
-          <p:cNvPr id="9" name="Picture 8" descr="3837c1f0f17629cf.png"/>
-          <p:cNvPicPr>
-            <a:picLocks noChangeAspect="1"/>
-          </p:cNvPicPr>
-          <p:nvPr/>
-        </p:nvPicPr>
-        <p:blipFill>
-          <a:blip r:embed="rId3"/>
-          <a:stretch>
-            <a:fillRect/>
-          </a:stretch>
-        </p:blipFill>
-        <p:spPr>
-          <a:xfrm>
-            <a:off x="3809999" y="2950464"/>
-            <a:ext cx="4651248" cy="368808"/>
-          </a:xfrm>
-          <a:prstGeom prst="rect">
-            <a:avLst/>
-          </a:prstGeom>
-        </p:spPr>
-      </p:pic>
-      <p:pic>
-        <p:nvPicPr>
-          <p:cNvPr id="10" name="Picture 9" descr="a0f3c47d5d7510d6.png"/>
-          <p:cNvPicPr>
-            <a:picLocks noChangeAspect="1"/>
-          </p:cNvPicPr>
-          <p:nvPr/>
-        </p:nvPicPr>
-        <p:blipFill>
-          <a:blip r:embed="rId4"/>
-          <a:stretch>
-            <a:fillRect/>
-          </a:stretch>
-        </p:blipFill>
-        <p:spPr>
-          <a:xfrm>
-            <a:off x="3809999" y="3432047"/>
-            <a:ext cx="1584960" cy="569976"/>
-          </a:xfrm>
-          <a:prstGeom prst="rect">
-            <a:avLst/>
-          </a:prstGeom>
-        </p:spPr>
-      </p:pic>
-      <p:pic>
-        <p:nvPicPr>
-          <p:cNvPr id="11" name="Picture 10" descr="894447109a3e5d6a.png"/>
-          <p:cNvPicPr>
-            <a:picLocks noChangeAspect="1"/>
-          </p:cNvPicPr>
-          <p:nvPr/>
-        </p:nvPicPr>
-        <p:blipFill>
-          <a:blip r:embed="rId5"/>
-          <a:stretch>
-            <a:fillRect/>
-          </a:stretch>
-        </p:blipFill>
-        <p:spPr>
-          <a:xfrm>
-            <a:off x="3809999" y="4093464"/>
-            <a:ext cx="3218688" cy="573024"/>
-          </a:xfrm>
-          <a:prstGeom prst="rect">
-            <a:avLst/>
-          </a:prstGeom>
-        </p:spPr>
-      </p:pic>
-      <p:sp>
-        <p:nvSpPr>
-          <p:cNvPr id="12" name="TextBox 11"/>
-          <p:cNvSpPr txBox="1"/>
-          <p:nvPr/>
-        </p:nvSpPr>
-        <p:spPr>
-          <a:xfrm>
-            <a:off x="777240" y="4803648"/>
-            <a:ext cx="10607040" cy="548640"/>
+      <p:sp>
+        <p:nvSpPr>
+          <p:cNvPr id="9" name="TextBox 8"/>
+          <p:cNvSpPr txBox="1"/>
+          <p:nvPr/>
+        </p:nvSpPr>
+        <p:spPr>
+          <a:xfrm>
+            <a:off x="777240" y="4343400"/>
+            <a:ext cx="10607040" cy="457200"/>
           </a:xfrm>
           <a:prstGeom prst="rect">
             <a:avLst/>
@@ -12109,13 +12038,13 @@
           <a:p>
             <a:pPr algn="ctr"/>
             <a:r>
-              <a:rPr sz="3040" b="1" i="0">
-                <a:solidFill>
-                  <a:srgbClr val="9E1B32"/>
-                </a:solidFill>
-                <a:latin typeface="Lexend"/>
-              </a:rPr>
-              <a:t>Answer:   1/100</a:t>
+              <a:rPr sz="2470" b="1" i="0">
+                <a:solidFill>
+                  <a:srgbClr val="1A1A1A"/>
+                </a:solidFill>
+                <a:latin typeface="Lexend"/>
+              </a:rPr>
+              <a:t>Answer it.</a:t>
             </a:r>
           </a:p>
         </p:txBody>
@@ -12168,7 +12097,7 @@
                 </a:solidFill>
                 <a:latin typeface="Lexend"/>
               </a:rPr>
-              <a:t>Whiteboards   ·   Question 9 of 9</a:t>
+              <a:t>Whiteboards   ·   Question 8 of 9</a:t>
             </a:r>
           </a:p>
         </p:txBody>
@@ -12348,44 +12277,9 @@
           </a:p>
         </p:txBody>
       </p:sp>
-      <p:sp>
-        <p:nvSpPr>
-          <p:cNvPr id="8" name="TextBox 7"/>
-          <p:cNvSpPr txBox="1"/>
-          <p:nvPr/>
-        </p:nvSpPr>
-        <p:spPr>
-          <a:xfrm>
-            <a:off x="2359886" y="2205228"/>
-            <a:ext cx="2969717" cy="457200"/>
-          </a:xfrm>
-          <a:prstGeom prst="rect">
-            <a:avLst/>
-          </a:prstGeom>
-          <a:noFill/>
-        </p:spPr>
-        <p:txBody>
-          <a:bodyPr wrap="none" lIns="45720" rIns="45720" tIns="18288" bIns="18288" anchor="ctr">
-            <a:noAutofit/>
-          </a:bodyPr>
-          <a:lstStyle/>
-          <a:p>
-            <a:pPr algn="l"/>
-            <a:r>
-              <a:rPr sz="2470" b="0" i="0">
-                <a:solidFill>
-                  <a:srgbClr val="1A1A1A"/>
-                </a:solidFill>
-                <a:latin typeface="Lexend"/>
-              </a:rPr>
-              <a:t>Simon says that  </a:t>
-            </a:r>
-          </a:p>
-        </p:txBody>
-      </p:sp>
       <p:pic>
         <p:nvPicPr>
-          <p:cNvPr id="9" name="Picture 8" descr="a849ea34284e1e08.png"/>
+          <p:cNvPr id="8" name="Picture 7" descr="41217f15035bee5c.png"/>
           <p:cNvPicPr>
             <a:picLocks noChangeAspect="1"/>
           </p:cNvPicPr>
@@ -12399,59 +12293,96 @@
         </p:blipFill>
         <p:spPr>
           <a:xfrm>
-            <a:off x="5192443" y="2194560"/>
-            <a:ext cx="1060704" cy="478536"/>
+            <a:off x="4808220" y="2103120"/>
+            <a:ext cx="2545080" cy="478536"/>
           </a:xfrm>
           <a:prstGeom prst="rect">
             <a:avLst/>
           </a:prstGeom>
         </p:spPr>
       </p:pic>
-      <p:sp>
-        <p:nvSpPr>
-          <p:cNvPr id="10" name="TextBox 9"/>
-          <p:cNvSpPr txBox="1"/>
-          <p:nvPr/>
-        </p:nvSpPr>
-        <p:spPr>
-          <a:xfrm>
-            <a:off x="6253147" y="2205228"/>
-            <a:ext cx="3685645" cy="457200"/>
-          </a:xfrm>
-          <a:prstGeom prst="rect">
-            <a:avLst/>
-          </a:prstGeom>
-          <a:noFill/>
-        </p:spPr>
-        <p:txBody>
-          <a:bodyPr wrap="none" lIns="45720" rIns="45720" tIns="18288" bIns="18288" anchor="ctr">
-            <a:noAutofit/>
-          </a:bodyPr>
-          <a:lstStyle/>
-          <a:p>
-            <a:pPr algn="l"/>
-            <a:r>
-              <a:rPr sz="2470" b="0" i="0">
-                <a:solidFill>
-                  <a:srgbClr val="1A1A1A"/>
-                </a:solidFill>
-                <a:latin typeface="Lexend"/>
-              </a:rPr>
-              <a:t>  is not a real number,</a:t>
-            </a:r>
-          </a:p>
-        </p:txBody>
-      </p:sp>
-      <p:sp>
-        <p:nvSpPr>
-          <p:cNvPr id="11" name="TextBox 10"/>
-          <p:cNvSpPr txBox="1"/>
-          <p:nvPr/>
-        </p:nvSpPr>
-        <p:spPr>
-          <a:xfrm>
-            <a:off x="777240" y="2947416"/>
-            <a:ext cx="10607040" cy="465151"/>
+      <p:pic>
+        <p:nvPicPr>
+          <p:cNvPr id="9" name="Picture 8" descr="3837c1f0f17629cf.png"/>
+          <p:cNvPicPr>
+            <a:picLocks noChangeAspect="1"/>
+          </p:cNvPicPr>
+          <p:nvPr/>
+        </p:nvPicPr>
+        <p:blipFill>
+          <a:blip r:embed="rId3"/>
+          <a:stretch>
+            <a:fillRect/>
+          </a:stretch>
+        </p:blipFill>
+        <p:spPr>
+          <a:xfrm>
+            <a:off x="3809999" y="2950464"/>
+            <a:ext cx="4651248" cy="368808"/>
+          </a:xfrm>
+          <a:prstGeom prst="rect">
+            <a:avLst/>
+          </a:prstGeom>
+        </p:spPr>
+      </p:pic>
+      <p:pic>
+        <p:nvPicPr>
+          <p:cNvPr id="10" name="Picture 9" descr="a0f3c47d5d7510d6.png"/>
+          <p:cNvPicPr>
+            <a:picLocks noChangeAspect="1"/>
+          </p:cNvPicPr>
+          <p:nvPr/>
+        </p:nvPicPr>
+        <p:blipFill>
+          <a:blip r:embed="rId4"/>
+          <a:stretch>
+            <a:fillRect/>
+          </a:stretch>
+        </p:blipFill>
+        <p:spPr>
+          <a:xfrm>
+            <a:off x="3809999" y="3432047"/>
+            <a:ext cx="1584960" cy="569976"/>
+          </a:xfrm>
+          <a:prstGeom prst="rect">
+            <a:avLst/>
+          </a:prstGeom>
+        </p:spPr>
+      </p:pic>
+      <p:pic>
+        <p:nvPicPr>
+          <p:cNvPr id="11" name="Picture 10" descr="894447109a3e5d6a.png"/>
+          <p:cNvPicPr>
+            <a:picLocks noChangeAspect="1"/>
+          </p:cNvPicPr>
+          <p:nvPr/>
+        </p:nvPicPr>
+        <p:blipFill>
+          <a:blip r:embed="rId5"/>
+          <a:stretch>
+            <a:fillRect/>
+          </a:stretch>
+        </p:blipFill>
+        <p:spPr>
+          <a:xfrm>
+            <a:off x="3809999" y="4093464"/>
+            <a:ext cx="3218688" cy="573024"/>
+          </a:xfrm>
+          <a:prstGeom prst="rect">
+            <a:avLst/>
+          </a:prstGeom>
+        </p:spPr>
+      </p:pic>
+      <p:sp>
+        <p:nvSpPr>
+          <p:cNvPr id="12" name="TextBox 11"/>
+          <p:cNvSpPr txBox="1"/>
+          <p:nvPr/>
+        </p:nvSpPr>
+        <p:spPr>
+          <a:xfrm>
+            <a:off x="777240" y="4803648"/>
+            <a:ext cx="10607040" cy="548640"/>
           </a:xfrm>
           <a:prstGeom prst="rect">
             <a:avLst/>
@@ -12466,83 +12397,13 @@
           <a:p>
             <a:pPr algn="ctr"/>
             <a:r>
-              <a:rPr sz="2470" b="0" i="0">
-                <a:solidFill>
-                  <a:srgbClr val="1A1A1A"/>
-                </a:solidFill>
-                <a:latin typeface="Lexend"/>
-              </a:rPr>
-              <a:t>because you cannot take the root of a negative.</a:t>
-            </a:r>
-          </a:p>
-        </p:txBody>
-      </p:sp>
-      <p:sp>
-        <p:nvSpPr>
-          <p:cNvPr id="12" name="TextBox 11"/>
-          <p:cNvSpPr txBox="1"/>
-          <p:nvPr/>
-        </p:nvSpPr>
-        <p:spPr>
-          <a:xfrm>
-            <a:off x="777240" y="3522295"/>
-            <a:ext cx="10607040" cy="465151"/>
-          </a:xfrm>
-          <a:prstGeom prst="rect">
-            <a:avLst/>
-          </a:prstGeom>
-          <a:noFill/>
-        </p:spPr>
-        <p:txBody>
-          <a:bodyPr wrap="square" lIns="45720" rIns="45720" tIns="18288" bIns="18288" anchor="t">
-            <a:spAutoFit/>
-          </a:bodyPr>
-          <a:lstStyle/>
-          <a:p>
-            <a:pPr algn="ctr"/>
-            <a:r>
-              <a:rPr sz="2470" b="0" i="0">
-                <a:solidFill>
-                  <a:srgbClr val="1A1A1A"/>
-                </a:solidFill>
-                <a:latin typeface="Lexend"/>
-              </a:rPr>
-              <a:t>Explain why he is wrong, and give the value.</a:t>
-            </a:r>
-          </a:p>
-        </p:txBody>
-      </p:sp>
-      <p:sp>
-        <p:nvSpPr>
-          <p:cNvPr id="13" name="TextBox 12"/>
-          <p:cNvSpPr txBox="1"/>
-          <p:nvPr/>
-        </p:nvSpPr>
-        <p:spPr>
-          <a:xfrm>
-            <a:off x="777240" y="4343400"/>
-            <a:ext cx="10607040" cy="457200"/>
-          </a:xfrm>
-          <a:prstGeom prst="rect">
-            <a:avLst/>
-          </a:prstGeom>
-          <a:noFill/>
-        </p:spPr>
-        <p:txBody>
-          <a:bodyPr wrap="square" lIns="45720" rIns="45720" tIns="18288" bIns="18288" anchor="t">
-            <a:spAutoFit/>
-          </a:bodyPr>
-          <a:lstStyle/>
-          <a:p>
-            <a:pPr algn="ctr"/>
-            <a:r>
-              <a:rPr sz="2470" b="1" i="0">
-                <a:solidFill>
-                  <a:srgbClr val="1A1A1A"/>
-                </a:solidFill>
-                <a:latin typeface="Lexend"/>
-              </a:rPr>
-              <a:t>Write your answer in sentences.</a:t>
+              <a:rPr sz="3040" b="1" i="0">
+                <a:solidFill>
+                  <a:srgbClr val="9E1B32"/>
+                </a:solidFill>
+                <a:latin typeface="Lexend"/>
+              </a:rPr>
+              <a:t>Answer:   1/100</a:t>
             </a:r>
           </a:p>
         </p:txBody>
@@ -12783,7 +12644,7 @@
         </p:nvSpPr>
         <p:spPr>
           <a:xfrm>
-            <a:off x="2361410" y="2113788"/>
+            <a:off x="2359886" y="2205228"/>
             <a:ext cx="2969717" cy="457200"/>
           </a:xfrm>
           <a:prstGeom prst="rect">
@@ -12812,7 +12673,7 @@
       </p:sp>
       <p:pic>
         <p:nvPicPr>
-          <p:cNvPr id="9" name="Picture 8" descr="dc8e0a2c2f29ccd6.png"/>
+          <p:cNvPr id="9" name="Picture 8" descr="a849ea34284e1e08.png"/>
           <p:cNvPicPr>
             <a:picLocks noChangeAspect="1"/>
           </p:cNvPicPr>
@@ -12826,8 +12687,8 @@
         </p:blipFill>
         <p:spPr>
           <a:xfrm>
-            <a:off x="5193967" y="2103120"/>
-            <a:ext cx="1057656" cy="478536"/>
+            <a:off x="5192443" y="2194560"/>
+            <a:ext cx="1060704" cy="478536"/>
           </a:xfrm>
           <a:prstGeom prst="rect">
             <a:avLst/>
@@ -12842,7 +12703,7 @@
         </p:nvSpPr>
         <p:spPr>
           <a:xfrm>
-            <a:off x="6251623" y="2113788"/>
+            <a:off x="6253147" y="2205228"/>
             <a:ext cx="3685645" cy="457200"/>
           </a:xfrm>
           <a:prstGeom prst="rect">
@@ -12877,7 +12738,7 @@
         </p:nvSpPr>
         <p:spPr>
           <a:xfrm>
-            <a:off x="777240" y="2855975"/>
+            <a:off x="777240" y="2947416"/>
             <a:ext cx="10607040" cy="465151"/>
           </a:xfrm>
           <a:prstGeom prst="rect">
@@ -12912,7 +12773,7 @@
         </p:nvSpPr>
         <p:spPr>
           <a:xfrm>
-            <a:off x="777240" y="3430855"/>
+            <a:off x="777240" y="3522295"/>
             <a:ext cx="10607040" cy="465151"/>
           </a:xfrm>
           <a:prstGeom prst="rect">
@@ -12947,147 +12808,29 @@
         </p:nvSpPr>
         <p:spPr>
           <a:xfrm>
-            <a:off x="893154" y="4056026"/>
-            <a:ext cx="10512370" cy="457200"/>
-          </a:xfrm>
-          <a:prstGeom prst="rect">
-            <a:avLst/>
-          </a:prstGeom>
-          <a:noFill/>
-        </p:spPr>
-        <p:txBody>
-          <a:bodyPr wrap="none" lIns="45720" rIns="45720" tIns="18288" bIns="18288" anchor="ctr">
-            <a:noAutofit/>
-          </a:bodyPr>
-          <a:lstStyle/>
-          <a:p>
-            <a:pPr algn="l"/>
-            <a:r>
-              <a:rPr sz="2330" b="0" i="0">
+            <a:off x="777240" y="4343400"/>
+            <a:ext cx="10607040" cy="457200"/>
+          </a:xfrm>
+          <a:prstGeom prst="rect">
+            <a:avLst/>
+          </a:prstGeom>
+          <a:noFill/>
+        </p:spPr>
+        <p:txBody>
+          <a:bodyPr wrap="square" lIns="45720" rIns="45720" tIns="18288" bIns="18288" anchor="t">
+            <a:spAutoFit/>
+          </a:bodyPr>
+          <a:lstStyle/>
+          <a:p>
+            <a:pPr algn="ctr"/>
+            <a:r>
+              <a:rPr sz="2470" b="1" i="0">
                 <a:solidFill>
                   <a:srgbClr val="1A1A1A"/>
                 </a:solidFill>
                 <a:latin typeface="Lexend"/>
               </a:rPr>
-              <a:t>A cube root can be negative: three negatives multiply to a negative.</a:t>
-            </a:r>
-          </a:p>
-        </p:txBody>
-      </p:sp>
-      <p:pic>
-        <p:nvPicPr>
-          <p:cNvPr id="14" name="Picture 13" descr="cbf83985c3ed1e84.png"/>
-          <p:cNvPicPr>
-            <a:picLocks noChangeAspect="1"/>
-          </p:cNvPicPr>
-          <p:nvPr/>
-        </p:nvPicPr>
-        <p:blipFill>
-          <a:blip r:embed="rId3"/>
-          <a:stretch>
-            <a:fillRect/>
-          </a:stretch>
-        </p:blipFill>
-        <p:spPr>
-          <a:xfrm>
-            <a:off x="948018" y="4654958"/>
-            <a:ext cx="2889504" cy="265176"/>
-          </a:xfrm>
-          <a:prstGeom prst="rect">
-            <a:avLst/>
-          </a:prstGeom>
-        </p:spPr>
-      </p:pic>
-      <p:sp>
-        <p:nvSpPr>
-          <p:cNvPr id="15" name="TextBox 14"/>
-          <p:cNvSpPr txBox="1"/>
-          <p:nvPr/>
-        </p:nvSpPr>
-        <p:spPr>
-          <a:xfrm>
-            <a:off x="3837522" y="4558946"/>
-            <a:ext cx="1163085" cy="457200"/>
-          </a:xfrm>
-          <a:prstGeom prst="rect">
-            <a:avLst/>
-          </a:prstGeom>
-          <a:noFill/>
-        </p:spPr>
-        <p:txBody>
-          <a:bodyPr wrap="none" lIns="45720" rIns="45720" tIns="18288" bIns="18288" anchor="ctr">
-            <a:noAutofit/>
-          </a:bodyPr>
-          <a:lstStyle/>
-          <a:p>
-            <a:pPr algn="l"/>
-            <a:r>
-              <a:rPr sz="2330" b="0" i="0">
-                <a:solidFill>
-                  <a:srgbClr val="1A1A1A"/>
-                </a:solidFill>
-                <a:latin typeface="Lexend"/>
-              </a:rPr>
-              <a:t>,   so   </a:t>
-            </a:r>
-          </a:p>
-        </p:txBody>
-      </p:sp>
-      <p:pic>
-        <p:nvPicPr>
-          <p:cNvPr id="16" name="Picture 15" descr="590e54612c7e6e68.png"/>
-          <p:cNvPicPr>
-            <a:picLocks noChangeAspect="1"/>
-          </p:cNvPicPr>
-          <p:nvPr/>
-        </p:nvPicPr>
-        <p:blipFill>
-          <a:blip r:embed="rId4"/>
-          <a:stretch>
-            <a:fillRect/>
-          </a:stretch>
-        </p:blipFill>
-        <p:spPr>
-          <a:xfrm>
-            <a:off x="4863447" y="4603142"/>
-            <a:ext cx="1405128" cy="368808"/>
-          </a:xfrm>
-          <a:prstGeom prst="rect">
-            <a:avLst/>
-          </a:prstGeom>
-        </p:spPr>
-      </p:pic>
-      <p:sp>
-        <p:nvSpPr>
-          <p:cNvPr id="17" name="TextBox 16"/>
-          <p:cNvSpPr txBox="1"/>
-          <p:nvPr/>
-        </p:nvSpPr>
-        <p:spPr>
-          <a:xfrm>
-            <a:off x="777240" y="5130446"/>
-            <a:ext cx="10607040" cy="548640"/>
-          </a:xfrm>
-          <a:prstGeom prst="rect">
-            <a:avLst/>
-          </a:prstGeom>
-          <a:noFill/>
-        </p:spPr>
-        <p:txBody>
-          <a:bodyPr wrap="square" lIns="45720" rIns="45720" tIns="18288" bIns="18288" anchor="t">
-            <a:spAutoFit/>
-          </a:bodyPr>
-          <a:lstStyle/>
-          <a:p>
-            <a:pPr algn="ctr"/>
-            <a:r>
-              <a:rPr sz="3040" b="1" i="0">
-                <a:solidFill>
-                  <a:srgbClr val="9E1B32"/>
-                </a:solidFill>
-                <a:latin typeface="Lexend"/>
-              </a:rPr>
-              <a:t>Answer:   −3</a:t>
+              <a:t>Write your answer in sentences.</a:t>
             </a:r>
           </a:p>
         </p:txBody>
@@ -13134,13 +12877,13 @@
           <a:p>
             <a:pPr algn="l"/>
             <a:r>
-              <a:rPr sz="3420" b="1" i="0">
+              <a:rPr sz="3229" b="1" i="0">
                 <a:solidFill>
                   <a:srgbClr val="1A1A1A"/>
                 </a:solidFill>
                 <a:latin typeface="Lexend"/>
               </a:rPr>
-              <a:t>Independent Set</a:t>
+              <a:t>Whiteboards   ·   Question 9 of 9</a:t>
             </a:r>
           </a:p>
         </p:txBody>
@@ -13328,36 +13071,36 @@
         </p:nvSpPr>
         <p:spPr>
           <a:xfrm>
-            <a:off x="960120" y="1495043"/>
-            <a:ext cx="548640" cy="457200"/>
-          </a:xfrm>
-          <a:prstGeom prst="rect">
-            <a:avLst/>
-          </a:prstGeom>
-          <a:noFill/>
-        </p:spPr>
-        <p:txBody>
-          <a:bodyPr wrap="square" lIns="45720" rIns="45720" tIns="18288" bIns="18288" anchor="ctr">
-            <a:spAutoFit/>
+            <a:off x="2361410" y="2113788"/>
+            <a:ext cx="2969717" cy="457200"/>
+          </a:xfrm>
+          <a:prstGeom prst="rect">
+            <a:avLst/>
+          </a:prstGeom>
+          <a:noFill/>
+        </p:spPr>
+        <p:txBody>
+          <a:bodyPr wrap="none" lIns="45720" rIns="45720" tIns="18288" bIns="18288" anchor="ctr">
+            <a:noAutofit/>
           </a:bodyPr>
           <a:lstStyle/>
           <a:p>
             <a:pPr algn="l"/>
             <a:r>
-              <a:rPr sz="2180" b="1" i="0">
-                <a:solidFill>
-                  <a:srgbClr val="0B5394"/>
-                </a:solidFill>
-                <a:latin typeface="Lexend"/>
-              </a:rPr>
-              <a:t>1.</a:t>
+              <a:rPr sz="2470" b="0" i="0">
+                <a:solidFill>
+                  <a:srgbClr val="1A1A1A"/>
+                </a:solidFill>
+                <a:latin typeface="Lexend"/>
+              </a:rPr>
+              <a:t>Simon says that  </a:t>
             </a:r>
           </a:p>
         </p:txBody>
       </p:sp>
       <p:pic>
         <p:nvPicPr>
-          <p:cNvPr id="9" name="Picture 8" descr="e838230098c64976.png"/>
+          <p:cNvPr id="9" name="Picture 8" descr="dc8e0a2c2f29ccd6.png"/>
           <p:cNvPicPr>
             <a:picLocks noChangeAspect="1"/>
           </p:cNvPicPr>
@@ -13371,8 +13114,8 @@
         </p:blipFill>
         <p:spPr>
           <a:xfrm>
-            <a:off x="1627632" y="1528572"/>
-            <a:ext cx="862584" cy="390144"/>
+            <a:off x="5193967" y="2103120"/>
+            <a:ext cx="1057656" cy="478536"/>
           </a:xfrm>
           <a:prstGeom prst="rect">
             <a:avLst/>
@@ -13387,36 +13130,141 @@
         </p:nvSpPr>
         <p:spPr>
           <a:xfrm>
-            <a:off x="960120" y="2089403"/>
-            <a:ext cx="548640" cy="457200"/>
-          </a:xfrm>
-          <a:prstGeom prst="rect">
-            <a:avLst/>
-          </a:prstGeom>
-          <a:noFill/>
-        </p:spPr>
-        <p:txBody>
-          <a:bodyPr wrap="square" lIns="45720" rIns="45720" tIns="18288" bIns="18288" anchor="ctr">
-            <a:spAutoFit/>
+            <a:off x="6251623" y="2113788"/>
+            <a:ext cx="3685645" cy="457200"/>
+          </a:xfrm>
+          <a:prstGeom prst="rect">
+            <a:avLst/>
+          </a:prstGeom>
+          <a:noFill/>
+        </p:spPr>
+        <p:txBody>
+          <a:bodyPr wrap="none" lIns="45720" rIns="45720" tIns="18288" bIns="18288" anchor="ctr">
+            <a:noAutofit/>
           </a:bodyPr>
           <a:lstStyle/>
           <a:p>
             <a:pPr algn="l"/>
             <a:r>
-              <a:rPr sz="2180" b="1" i="0">
-                <a:solidFill>
-                  <a:srgbClr val="0B5394"/>
-                </a:solidFill>
-                <a:latin typeface="Lexend"/>
-              </a:rPr>
-              <a:t>2.</a:t>
+              <a:rPr sz="2470" b="0" i="0">
+                <a:solidFill>
+                  <a:srgbClr val="1A1A1A"/>
+                </a:solidFill>
+                <a:latin typeface="Lexend"/>
+              </a:rPr>
+              <a:t>  is not a real number,</a:t>
+            </a:r>
+          </a:p>
+        </p:txBody>
+      </p:sp>
+      <p:sp>
+        <p:nvSpPr>
+          <p:cNvPr id="11" name="TextBox 10"/>
+          <p:cNvSpPr txBox="1"/>
+          <p:nvPr/>
+        </p:nvSpPr>
+        <p:spPr>
+          <a:xfrm>
+            <a:off x="777240" y="2855975"/>
+            <a:ext cx="10607040" cy="465151"/>
+          </a:xfrm>
+          <a:prstGeom prst="rect">
+            <a:avLst/>
+          </a:prstGeom>
+          <a:noFill/>
+        </p:spPr>
+        <p:txBody>
+          <a:bodyPr wrap="square" lIns="45720" rIns="45720" tIns="18288" bIns="18288" anchor="t">
+            <a:spAutoFit/>
+          </a:bodyPr>
+          <a:lstStyle/>
+          <a:p>
+            <a:pPr algn="ctr"/>
+            <a:r>
+              <a:rPr sz="2470" b="0" i="0">
+                <a:solidFill>
+                  <a:srgbClr val="1A1A1A"/>
+                </a:solidFill>
+                <a:latin typeface="Lexend"/>
+              </a:rPr>
+              <a:t>because you cannot take the root of a negative.</a:t>
+            </a:r>
+          </a:p>
+        </p:txBody>
+      </p:sp>
+      <p:sp>
+        <p:nvSpPr>
+          <p:cNvPr id="12" name="TextBox 11"/>
+          <p:cNvSpPr txBox="1"/>
+          <p:nvPr/>
+        </p:nvSpPr>
+        <p:spPr>
+          <a:xfrm>
+            <a:off x="777240" y="3430855"/>
+            <a:ext cx="10607040" cy="465151"/>
+          </a:xfrm>
+          <a:prstGeom prst="rect">
+            <a:avLst/>
+          </a:prstGeom>
+          <a:noFill/>
+        </p:spPr>
+        <p:txBody>
+          <a:bodyPr wrap="square" lIns="45720" rIns="45720" tIns="18288" bIns="18288" anchor="t">
+            <a:spAutoFit/>
+          </a:bodyPr>
+          <a:lstStyle/>
+          <a:p>
+            <a:pPr algn="ctr"/>
+            <a:r>
+              <a:rPr sz="2470" b="0" i="0">
+                <a:solidFill>
+                  <a:srgbClr val="1A1A1A"/>
+                </a:solidFill>
+                <a:latin typeface="Lexend"/>
+              </a:rPr>
+              <a:t>Explain why he is wrong, and give the value.</a:t>
+            </a:r>
+          </a:p>
+        </p:txBody>
+      </p:sp>
+      <p:sp>
+        <p:nvSpPr>
+          <p:cNvPr id="13" name="TextBox 12"/>
+          <p:cNvSpPr txBox="1"/>
+          <p:nvPr/>
+        </p:nvSpPr>
+        <p:spPr>
+          <a:xfrm>
+            <a:off x="893154" y="4056026"/>
+            <a:ext cx="10512370" cy="457200"/>
+          </a:xfrm>
+          <a:prstGeom prst="rect">
+            <a:avLst/>
+          </a:prstGeom>
+          <a:noFill/>
+        </p:spPr>
+        <p:txBody>
+          <a:bodyPr wrap="none" lIns="45720" rIns="45720" tIns="18288" bIns="18288" anchor="ctr">
+            <a:noAutofit/>
+          </a:bodyPr>
+          <a:lstStyle/>
+          <a:p>
+            <a:pPr algn="l"/>
+            <a:r>
+              <a:rPr sz="2330" b="0" i="0">
+                <a:solidFill>
+                  <a:srgbClr val="1A1A1A"/>
+                </a:solidFill>
+                <a:latin typeface="Lexend"/>
+              </a:rPr>
+              <a:t>A cube root can be negative: three negatives multiply to a negative.</a:t>
             </a:r>
           </a:p>
         </p:txBody>
       </p:sp>
       <p:pic>
         <p:nvPicPr>
-          <p:cNvPr id="11" name="Picture 10" descr="c2339290e8681863.png"/>
+          <p:cNvPr id="14" name="Picture 13" descr="cbf83985c3ed1e84.png"/>
           <p:cNvPicPr>
             <a:picLocks noChangeAspect="1"/>
           </p:cNvPicPr>
@@ -13430,8 +13278,8 @@
         </p:blipFill>
         <p:spPr>
           <a:xfrm>
-            <a:off x="1627632" y="2122931"/>
-            <a:ext cx="676656" cy="390144"/>
+            <a:off x="948018" y="4654958"/>
+            <a:ext cx="2889504" cy="265176"/>
           </a:xfrm>
           <a:prstGeom prst="rect">
             <a:avLst/>
@@ -13440,42 +13288,42 @@
       </p:pic>
       <p:sp>
         <p:nvSpPr>
-          <p:cNvPr id="12" name="TextBox 11"/>
-          <p:cNvSpPr txBox="1"/>
-          <p:nvPr/>
-        </p:nvSpPr>
-        <p:spPr>
-          <a:xfrm>
-            <a:off x="960120" y="2683763"/>
-            <a:ext cx="548640" cy="457200"/>
-          </a:xfrm>
-          <a:prstGeom prst="rect">
-            <a:avLst/>
-          </a:prstGeom>
-          <a:noFill/>
-        </p:spPr>
-        <p:txBody>
-          <a:bodyPr wrap="square" lIns="45720" rIns="45720" tIns="18288" bIns="18288" anchor="ctr">
-            <a:spAutoFit/>
+          <p:cNvPr id="15" name="TextBox 14"/>
+          <p:cNvSpPr txBox="1"/>
+          <p:nvPr/>
+        </p:nvSpPr>
+        <p:spPr>
+          <a:xfrm>
+            <a:off x="3837522" y="4558946"/>
+            <a:ext cx="1163085" cy="457200"/>
+          </a:xfrm>
+          <a:prstGeom prst="rect">
+            <a:avLst/>
+          </a:prstGeom>
+          <a:noFill/>
+        </p:spPr>
+        <p:txBody>
+          <a:bodyPr wrap="none" lIns="45720" rIns="45720" tIns="18288" bIns="18288" anchor="ctr">
+            <a:noAutofit/>
           </a:bodyPr>
           <a:lstStyle/>
           <a:p>
             <a:pPr algn="l"/>
             <a:r>
-              <a:rPr sz="2180" b="1" i="0">
-                <a:solidFill>
-                  <a:srgbClr val="0B5394"/>
-                </a:solidFill>
-                <a:latin typeface="Lexend"/>
-              </a:rPr>
-              <a:t>3.</a:t>
+              <a:rPr sz="2330" b="0" i="0">
+                <a:solidFill>
+                  <a:srgbClr val="1A1A1A"/>
+                </a:solidFill>
+                <a:latin typeface="Lexend"/>
+              </a:rPr>
+              <a:t>,   so   </a:t>
             </a:r>
           </a:p>
         </p:txBody>
       </p:sp>
       <p:pic>
         <p:nvPicPr>
-          <p:cNvPr id="13" name="Picture 12" descr="ad02206568954f67.png"/>
+          <p:cNvPr id="16" name="Picture 15" descr="590e54612c7e6e68.png"/>
           <p:cNvPicPr>
             <a:picLocks noChangeAspect="1"/>
           </p:cNvPicPr>
@@ -13489,8 +13337,8 @@
         </p:blipFill>
         <p:spPr>
           <a:xfrm>
-            <a:off x="1627632" y="2717291"/>
-            <a:ext cx="1271016" cy="390144"/>
+            <a:off x="4863447" y="4603142"/>
+            <a:ext cx="1405128" cy="368808"/>
           </a:xfrm>
           <a:prstGeom prst="rect">
             <a:avLst/>
@@ -13499,181 +13347,39 @@
       </p:pic>
       <p:sp>
         <p:nvSpPr>
-          <p:cNvPr id="14" name="TextBox 13"/>
-          <p:cNvSpPr txBox="1"/>
-          <p:nvPr/>
-        </p:nvSpPr>
-        <p:spPr>
-          <a:xfrm>
-            <a:off x="960120" y="3392423"/>
-            <a:ext cx="548640" cy="457200"/>
-          </a:xfrm>
-          <a:prstGeom prst="rect">
-            <a:avLst/>
-          </a:prstGeom>
-          <a:noFill/>
-        </p:spPr>
-        <p:txBody>
-          <a:bodyPr wrap="square" lIns="45720" rIns="45720" tIns="18288" bIns="18288" anchor="ctr">
-            <a:spAutoFit/>
-          </a:bodyPr>
-          <a:lstStyle/>
-          <a:p>
-            <a:pPr algn="l"/>
-            <a:r>
-              <a:rPr sz="2180" b="1" i="0">
-                <a:solidFill>
-                  <a:srgbClr val="0B5394"/>
-                </a:solidFill>
-                <a:latin typeface="Lexend"/>
-              </a:rPr>
-              <a:t>4.</a:t>
-            </a:r>
-          </a:p>
-        </p:txBody>
-      </p:sp>
-      <p:pic>
-        <p:nvPicPr>
-          <p:cNvPr id="15" name="Picture 14" descr="64b69718fca3659e.png"/>
-          <p:cNvPicPr>
-            <a:picLocks noChangeAspect="1"/>
-          </p:cNvPicPr>
-          <p:nvPr/>
-        </p:nvPicPr>
-        <p:blipFill>
-          <a:blip r:embed="rId5"/>
-          <a:stretch>
-            <a:fillRect/>
-          </a:stretch>
-        </p:blipFill>
-        <p:spPr>
-          <a:xfrm>
-            <a:off x="1627632" y="3300983"/>
-            <a:ext cx="566928" cy="640080"/>
-          </a:xfrm>
-          <a:prstGeom prst="rect">
-            <a:avLst/>
-          </a:prstGeom>
-        </p:spPr>
-      </p:pic>
-      <p:sp>
-        <p:nvSpPr>
-          <p:cNvPr id="16" name="TextBox 15"/>
-          <p:cNvSpPr txBox="1"/>
-          <p:nvPr/>
-        </p:nvSpPr>
-        <p:spPr>
-          <a:xfrm>
-            <a:off x="960120" y="4101083"/>
-            <a:ext cx="548640" cy="457200"/>
-          </a:xfrm>
-          <a:prstGeom prst="rect">
-            <a:avLst/>
-          </a:prstGeom>
-          <a:noFill/>
-        </p:spPr>
-        <p:txBody>
-          <a:bodyPr wrap="square" lIns="45720" rIns="45720" tIns="18288" bIns="18288" anchor="ctr">
-            <a:spAutoFit/>
-          </a:bodyPr>
-          <a:lstStyle/>
-          <a:p>
-            <a:pPr algn="l"/>
-            <a:r>
-              <a:rPr sz="2180" b="1" i="0">
-                <a:solidFill>
-                  <a:srgbClr val="0B5394"/>
-                </a:solidFill>
-                <a:latin typeface="Lexend"/>
-              </a:rPr>
-              <a:t>5.</a:t>
-            </a:r>
-          </a:p>
-        </p:txBody>
-      </p:sp>
-      <p:pic>
-        <p:nvPicPr>
-          <p:cNvPr id="17" name="Picture 16" descr="3f6f87e04710f316.png"/>
-          <p:cNvPicPr>
-            <a:picLocks noChangeAspect="1"/>
-          </p:cNvPicPr>
-          <p:nvPr/>
-        </p:nvPicPr>
-        <p:blipFill>
-          <a:blip r:embed="rId6"/>
-          <a:stretch>
-            <a:fillRect/>
-          </a:stretch>
-        </p:blipFill>
-        <p:spPr>
-          <a:xfrm>
-            <a:off x="1627632" y="4134612"/>
-            <a:ext cx="1484376" cy="390144"/>
-          </a:xfrm>
-          <a:prstGeom prst="rect">
-            <a:avLst/>
-          </a:prstGeom>
-        </p:spPr>
-      </p:pic>
-      <p:sp>
-        <p:nvSpPr>
-          <p:cNvPr id="18" name="TextBox 17"/>
-          <p:cNvSpPr txBox="1"/>
-          <p:nvPr/>
-        </p:nvSpPr>
-        <p:spPr>
-          <a:xfrm>
-            <a:off x="960120" y="4760976"/>
-            <a:ext cx="548640" cy="457200"/>
-          </a:xfrm>
-          <a:prstGeom prst="rect">
-            <a:avLst/>
-          </a:prstGeom>
-          <a:noFill/>
-        </p:spPr>
-        <p:txBody>
-          <a:bodyPr wrap="square" lIns="45720" rIns="45720" tIns="18288" bIns="18288" anchor="ctr">
-            <a:spAutoFit/>
-          </a:bodyPr>
-          <a:lstStyle/>
-          <a:p>
-            <a:pPr algn="l"/>
-            <a:r>
-              <a:rPr sz="2180" b="1" i="0">
-                <a:solidFill>
-                  <a:srgbClr val="0B5394"/>
-                </a:solidFill>
-                <a:latin typeface="Lexend"/>
-              </a:rPr>
-              <a:t>6.</a:t>
-            </a:r>
-          </a:p>
-        </p:txBody>
-      </p:sp>
-      <p:pic>
-        <p:nvPicPr>
-          <p:cNvPr id="19" name="Picture 18" descr="07d37168da608794.png"/>
-          <p:cNvPicPr>
-            <a:picLocks noChangeAspect="1"/>
-          </p:cNvPicPr>
-          <p:nvPr/>
-        </p:nvPicPr>
-        <p:blipFill>
-          <a:blip r:embed="rId7"/>
-          <a:stretch>
-            <a:fillRect/>
-          </a:stretch>
-        </p:blipFill>
-        <p:spPr>
-          <a:xfrm>
-            <a:off x="1627632" y="4718304"/>
-            <a:ext cx="2304288" cy="542544"/>
-          </a:xfrm>
-          <a:prstGeom prst="rect">
-            <a:avLst/>
-          </a:prstGeom>
-        </p:spPr>
-      </p:pic>
+          <p:cNvPr id="17" name="TextBox 16"/>
+          <p:cNvSpPr txBox="1"/>
+          <p:nvPr/>
+        </p:nvSpPr>
+        <p:spPr>
+          <a:xfrm>
+            <a:off x="777240" y="5130446"/>
+            <a:ext cx="10607040" cy="548640"/>
+          </a:xfrm>
+          <a:prstGeom prst="rect">
+            <a:avLst/>
+          </a:prstGeom>
+          <a:noFill/>
+        </p:spPr>
+        <p:txBody>
+          <a:bodyPr wrap="square" lIns="45720" rIns="45720" tIns="18288" bIns="18288" anchor="t">
+            <a:spAutoFit/>
+          </a:bodyPr>
+          <a:lstStyle/>
+          <a:p>
+            <a:pPr algn="ctr"/>
+            <a:r>
+              <a:rPr sz="3040" b="1" i="0">
+                <a:solidFill>
+                  <a:srgbClr val="9E1B32"/>
+                </a:solidFill>
+                <a:latin typeface="Lexend"/>
+              </a:rPr>
+              <a:t>Answer:   −3</a:t>
+            </a:r>
+          </a:p>
+        </p:txBody>
+      </p:sp>
     </p:spTree>
   </p:cSld>
   <p:clrMapOvr>
@@ -13722,7 +13428,7 @@
                 </a:solidFill>
                 <a:latin typeface="Lexend"/>
               </a:rPr>
-              <a:t>IXL</a:t>
+              <a:t>Independent Set</a:t>
             </a:r>
           </a:p>
         </p:txBody>
@@ -13898,6 +13604,588 @@
                 <a:latin typeface="Lexend"/>
               </a:rPr>
               <a:t>34</a:t>
+            </a:r>
+          </a:p>
+        </p:txBody>
+      </p:sp>
+      <p:sp>
+        <p:nvSpPr>
+          <p:cNvPr id="8" name="TextBox 7"/>
+          <p:cNvSpPr txBox="1"/>
+          <p:nvPr/>
+        </p:nvSpPr>
+        <p:spPr>
+          <a:xfrm>
+            <a:off x="960120" y="1495043"/>
+            <a:ext cx="548640" cy="457200"/>
+          </a:xfrm>
+          <a:prstGeom prst="rect">
+            <a:avLst/>
+          </a:prstGeom>
+          <a:noFill/>
+        </p:spPr>
+        <p:txBody>
+          <a:bodyPr wrap="square" lIns="45720" rIns="45720" tIns="18288" bIns="18288" anchor="ctr">
+            <a:spAutoFit/>
+          </a:bodyPr>
+          <a:lstStyle/>
+          <a:p>
+            <a:pPr algn="l"/>
+            <a:r>
+              <a:rPr sz="2180" b="1" i="0">
+                <a:solidFill>
+                  <a:srgbClr val="0B5394"/>
+                </a:solidFill>
+                <a:latin typeface="Lexend"/>
+              </a:rPr>
+              <a:t>1.</a:t>
+            </a:r>
+          </a:p>
+        </p:txBody>
+      </p:sp>
+      <p:pic>
+        <p:nvPicPr>
+          <p:cNvPr id="9" name="Picture 8" descr="e838230098c64976.png"/>
+          <p:cNvPicPr>
+            <a:picLocks noChangeAspect="1"/>
+          </p:cNvPicPr>
+          <p:nvPr/>
+        </p:nvPicPr>
+        <p:blipFill>
+          <a:blip r:embed="rId2"/>
+          <a:stretch>
+            <a:fillRect/>
+          </a:stretch>
+        </p:blipFill>
+        <p:spPr>
+          <a:xfrm>
+            <a:off x="1627632" y="1528572"/>
+            <a:ext cx="862584" cy="390144"/>
+          </a:xfrm>
+          <a:prstGeom prst="rect">
+            <a:avLst/>
+          </a:prstGeom>
+        </p:spPr>
+      </p:pic>
+      <p:sp>
+        <p:nvSpPr>
+          <p:cNvPr id="10" name="TextBox 9"/>
+          <p:cNvSpPr txBox="1"/>
+          <p:nvPr/>
+        </p:nvSpPr>
+        <p:spPr>
+          <a:xfrm>
+            <a:off x="960120" y="2089403"/>
+            <a:ext cx="548640" cy="457200"/>
+          </a:xfrm>
+          <a:prstGeom prst="rect">
+            <a:avLst/>
+          </a:prstGeom>
+          <a:noFill/>
+        </p:spPr>
+        <p:txBody>
+          <a:bodyPr wrap="square" lIns="45720" rIns="45720" tIns="18288" bIns="18288" anchor="ctr">
+            <a:spAutoFit/>
+          </a:bodyPr>
+          <a:lstStyle/>
+          <a:p>
+            <a:pPr algn="l"/>
+            <a:r>
+              <a:rPr sz="2180" b="1" i="0">
+                <a:solidFill>
+                  <a:srgbClr val="0B5394"/>
+                </a:solidFill>
+                <a:latin typeface="Lexend"/>
+              </a:rPr>
+              <a:t>2.</a:t>
+            </a:r>
+          </a:p>
+        </p:txBody>
+      </p:sp>
+      <p:pic>
+        <p:nvPicPr>
+          <p:cNvPr id="11" name="Picture 10" descr="c2339290e8681863.png"/>
+          <p:cNvPicPr>
+            <a:picLocks noChangeAspect="1"/>
+          </p:cNvPicPr>
+          <p:nvPr/>
+        </p:nvPicPr>
+        <p:blipFill>
+          <a:blip r:embed="rId3"/>
+          <a:stretch>
+            <a:fillRect/>
+          </a:stretch>
+        </p:blipFill>
+        <p:spPr>
+          <a:xfrm>
+            <a:off x="1627632" y="2122931"/>
+            <a:ext cx="676656" cy="390144"/>
+          </a:xfrm>
+          <a:prstGeom prst="rect">
+            <a:avLst/>
+          </a:prstGeom>
+        </p:spPr>
+      </p:pic>
+      <p:sp>
+        <p:nvSpPr>
+          <p:cNvPr id="12" name="TextBox 11"/>
+          <p:cNvSpPr txBox="1"/>
+          <p:nvPr/>
+        </p:nvSpPr>
+        <p:spPr>
+          <a:xfrm>
+            <a:off x="960120" y="2683763"/>
+            <a:ext cx="548640" cy="457200"/>
+          </a:xfrm>
+          <a:prstGeom prst="rect">
+            <a:avLst/>
+          </a:prstGeom>
+          <a:noFill/>
+        </p:spPr>
+        <p:txBody>
+          <a:bodyPr wrap="square" lIns="45720" rIns="45720" tIns="18288" bIns="18288" anchor="ctr">
+            <a:spAutoFit/>
+          </a:bodyPr>
+          <a:lstStyle/>
+          <a:p>
+            <a:pPr algn="l"/>
+            <a:r>
+              <a:rPr sz="2180" b="1" i="0">
+                <a:solidFill>
+                  <a:srgbClr val="0B5394"/>
+                </a:solidFill>
+                <a:latin typeface="Lexend"/>
+              </a:rPr>
+              <a:t>3.</a:t>
+            </a:r>
+          </a:p>
+        </p:txBody>
+      </p:sp>
+      <p:pic>
+        <p:nvPicPr>
+          <p:cNvPr id="13" name="Picture 12" descr="ad02206568954f67.png"/>
+          <p:cNvPicPr>
+            <a:picLocks noChangeAspect="1"/>
+          </p:cNvPicPr>
+          <p:nvPr/>
+        </p:nvPicPr>
+        <p:blipFill>
+          <a:blip r:embed="rId4"/>
+          <a:stretch>
+            <a:fillRect/>
+          </a:stretch>
+        </p:blipFill>
+        <p:spPr>
+          <a:xfrm>
+            <a:off x="1627632" y="2717291"/>
+            <a:ext cx="1271016" cy="390144"/>
+          </a:xfrm>
+          <a:prstGeom prst="rect">
+            <a:avLst/>
+          </a:prstGeom>
+        </p:spPr>
+      </p:pic>
+      <p:sp>
+        <p:nvSpPr>
+          <p:cNvPr id="14" name="TextBox 13"/>
+          <p:cNvSpPr txBox="1"/>
+          <p:nvPr/>
+        </p:nvSpPr>
+        <p:spPr>
+          <a:xfrm>
+            <a:off x="960120" y="3392423"/>
+            <a:ext cx="548640" cy="457200"/>
+          </a:xfrm>
+          <a:prstGeom prst="rect">
+            <a:avLst/>
+          </a:prstGeom>
+          <a:noFill/>
+        </p:spPr>
+        <p:txBody>
+          <a:bodyPr wrap="square" lIns="45720" rIns="45720" tIns="18288" bIns="18288" anchor="ctr">
+            <a:spAutoFit/>
+          </a:bodyPr>
+          <a:lstStyle/>
+          <a:p>
+            <a:pPr algn="l"/>
+            <a:r>
+              <a:rPr sz="2180" b="1" i="0">
+                <a:solidFill>
+                  <a:srgbClr val="0B5394"/>
+                </a:solidFill>
+                <a:latin typeface="Lexend"/>
+              </a:rPr>
+              <a:t>4.</a:t>
+            </a:r>
+          </a:p>
+        </p:txBody>
+      </p:sp>
+      <p:pic>
+        <p:nvPicPr>
+          <p:cNvPr id="15" name="Picture 14" descr="64b69718fca3659e.png"/>
+          <p:cNvPicPr>
+            <a:picLocks noChangeAspect="1"/>
+          </p:cNvPicPr>
+          <p:nvPr/>
+        </p:nvPicPr>
+        <p:blipFill>
+          <a:blip r:embed="rId5"/>
+          <a:stretch>
+            <a:fillRect/>
+          </a:stretch>
+        </p:blipFill>
+        <p:spPr>
+          <a:xfrm>
+            <a:off x="1627632" y="3300983"/>
+            <a:ext cx="566928" cy="640080"/>
+          </a:xfrm>
+          <a:prstGeom prst="rect">
+            <a:avLst/>
+          </a:prstGeom>
+        </p:spPr>
+      </p:pic>
+      <p:sp>
+        <p:nvSpPr>
+          <p:cNvPr id="16" name="TextBox 15"/>
+          <p:cNvSpPr txBox="1"/>
+          <p:nvPr/>
+        </p:nvSpPr>
+        <p:spPr>
+          <a:xfrm>
+            <a:off x="960120" y="4101083"/>
+            <a:ext cx="548640" cy="457200"/>
+          </a:xfrm>
+          <a:prstGeom prst="rect">
+            <a:avLst/>
+          </a:prstGeom>
+          <a:noFill/>
+        </p:spPr>
+        <p:txBody>
+          <a:bodyPr wrap="square" lIns="45720" rIns="45720" tIns="18288" bIns="18288" anchor="ctr">
+            <a:spAutoFit/>
+          </a:bodyPr>
+          <a:lstStyle/>
+          <a:p>
+            <a:pPr algn="l"/>
+            <a:r>
+              <a:rPr sz="2180" b="1" i="0">
+                <a:solidFill>
+                  <a:srgbClr val="0B5394"/>
+                </a:solidFill>
+                <a:latin typeface="Lexend"/>
+              </a:rPr>
+              <a:t>5.</a:t>
+            </a:r>
+          </a:p>
+        </p:txBody>
+      </p:sp>
+      <p:pic>
+        <p:nvPicPr>
+          <p:cNvPr id="17" name="Picture 16" descr="3f6f87e04710f316.png"/>
+          <p:cNvPicPr>
+            <a:picLocks noChangeAspect="1"/>
+          </p:cNvPicPr>
+          <p:nvPr/>
+        </p:nvPicPr>
+        <p:blipFill>
+          <a:blip r:embed="rId6"/>
+          <a:stretch>
+            <a:fillRect/>
+          </a:stretch>
+        </p:blipFill>
+        <p:spPr>
+          <a:xfrm>
+            <a:off x="1627632" y="4134612"/>
+            <a:ext cx="1484376" cy="390144"/>
+          </a:xfrm>
+          <a:prstGeom prst="rect">
+            <a:avLst/>
+          </a:prstGeom>
+        </p:spPr>
+      </p:pic>
+      <p:sp>
+        <p:nvSpPr>
+          <p:cNvPr id="18" name="TextBox 17"/>
+          <p:cNvSpPr txBox="1"/>
+          <p:nvPr/>
+        </p:nvSpPr>
+        <p:spPr>
+          <a:xfrm>
+            <a:off x="960120" y="4760976"/>
+            <a:ext cx="548640" cy="457200"/>
+          </a:xfrm>
+          <a:prstGeom prst="rect">
+            <a:avLst/>
+          </a:prstGeom>
+          <a:noFill/>
+        </p:spPr>
+        <p:txBody>
+          <a:bodyPr wrap="square" lIns="45720" rIns="45720" tIns="18288" bIns="18288" anchor="ctr">
+            <a:spAutoFit/>
+          </a:bodyPr>
+          <a:lstStyle/>
+          <a:p>
+            <a:pPr algn="l"/>
+            <a:r>
+              <a:rPr sz="2180" b="1" i="0">
+                <a:solidFill>
+                  <a:srgbClr val="0B5394"/>
+                </a:solidFill>
+                <a:latin typeface="Lexend"/>
+              </a:rPr>
+              <a:t>6.</a:t>
+            </a:r>
+          </a:p>
+        </p:txBody>
+      </p:sp>
+      <p:pic>
+        <p:nvPicPr>
+          <p:cNvPr id="19" name="Picture 18" descr="07d37168da608794.png"/>
+          <p:cNvPicPr>
+            <a:picLocks noChangeAspect="1"/>
+          </p:cNvPicPr>
+          <p:nvPr/>
+        </p:nvPicPr>
+        <p:blipFill>
+          <a:blip r:embed="rId7"/>
+          <a:stretch>
+            <a:fillRect/>
+          </a:stretch>
+        </p:blipFill>
+        <p:spPr>
+          <a:xfrm>
+            <a:off x="1627632" y="4718304"/>
+            <a:ext cx="2304288" cy="542544"/>
+          </a:xfrm>
+          <a:prstGeom prst="rect">
+            <a:avLst/>
+          </a:prstGeom>
+        </p:spPr>
+      </p:pic>
+    </p:spTree>
+  </p:cSld>
+  <p:clrMapOvr>
+    <a:masterClrMapping/>
+  </p:clrMapOvr>
+</p:sld>
+</file>
+
+<file path=ppt/slides/slide35.xml><?xml version="1.0" encoding="utf-8"?>
+<p:sld xmlns:a="http://schemas.openxmlformats.org/drawingml/2006/main" xmlns:p="http://schemas.openxmlformats.org/presentationml/2006/main" xmlns:r="http://schemas.openxmlformats.org/officeDocument/2006/relationships">
+  <p:cSld>
+    <p:spTree>
+      <p:nvGrpSpPr>
+        <p:cNvPr id="1" name=""/>
+        <p:cNvGrpSpPr/>
+        <p:nvPr/>
+      </p:nvGrpSpPr>
+      <p:grpSpPr/>
+      <p:sp>
+        <p:nvSpPr>
+          <p:cNvPr id="2" name="TextBox 1"/>
+          <p:cNvSpPr txBox="1"/>
+          <p:nvPr/>
+        </p:nvSpPr>
+        <p:spPr>
+          <a:xfrm>
+            <a:off x="777240" y="365760"/>
+            <a:ext cx="10607040" cy="640080"/>
+          </a:xfrm>
+          <a:prstGeom prst="rect">
+            <a:avLst/>
+          </a:prstGeom>
+          <a:noFill/>
+        </p:spPr>
+        <p:txBody>
+          <a:bodyPr wrap="square" lIns="45720" rIns="45720" tIns="18288" bIns="18288" anchor="t">
+            <a:spAutoFit/>
+          </a:bodyPr>
+          <a:lstStyle/>
+          <a:p>
+            <a:pPr algn="l"/>
+            <a:r>
+              <a:rPr sz="3420" b="1" i="0">
+                <a:solidFill>
+                  <a:srgbClr val="1A1A1A"/>
+                </a:solidFill>
+                <a:latin typeface="Lexend"/>
+              </a:rPr>
+              <a:t>IXL</a:t>
+            </a:r>
+          </a:p>
+        </p:txBody>
+      </p:sp>
+      <p:cxnSp>
+        <p:nvCxnSpPr>
+          <p:cNvPr id="3" name="Connector 2"/>
+          <p:cNvCxnSpPr/>
+          <p:nvPr/>
+        </p:nvCxnSpPr>
+        <p:spPr>
+          <a:xfrm>
+            <a:off x="777240" y="1097280"/>
+            <a:ext cx="10607040" cy="0"/>
+          </a:xfrm>
+          <a:prstGeom prst="line">
+            <a:avLst/>
+          </a:prstGeom>
+          <a:ln w="19050">
+            <a:solidFill>
+              <a:srgbClr val="1A1A1A"/>
+            </a:solidFill>
+          </a:ln>
+        </p:spPr>
+        <p:style>
+          <a:lnRef idx="2">
+            <a:schemeClr val="accent1"/>
+          </a:lnRef>
+          <a:fillRef idx="0">
+            <a:schemeClr val="accent1"/>
+          </a:fillRef>
+          <a:effectRef idx="1">
+            <a:schemeClr val="accent1"/>
+          </a:effectRef>
+          <a:fontRef idx="minor">
+            <a:schemeClr val="tx1"/>
+          </a:fontRef>
+        </p:style>
+      </p:cxnSp>
+      <p:cxnSp>
+        <p:nvCxnSpPr>
+          <p:cNvPr id="4" name="Connector 3"/>
+          <p:cNvCxnSpPr/>
+          <p:nvPr/>
+        </p:nvCxnSpPr>
+        <p:spPr>
+          <a:xfrm>
+            <a:off x="777240" y="1179576"/>
+            <a:ext cx="10607040" cy="0"/>
+          </a:xfrm>
+          <a:prstGeom prst="line">
+            <a:avLst/>
+          </a:prstGeom>
+          <a:ln w="9525">
+            <a:solidFill>
+              <a:srgbClr val="1A1A1A"/>
+            </a:solidFill>
+          </a:ln>
+        </p:spPr>
+        <p:style>
+          <a:lnRef idx="2">
+            <a:schemeClr val="accent1"/>
+          </a:lnRef>
+          <a:fillRef idx="0">
+            <a:schemeClr val="accent1"/>
+          </a:fillRef>
+          <a:effectRef idx="1">
+            <a:schemeClr val="accent1"/>
+          </a:effectRef>
+          <a:fontRef idx="minor">
+            <a:schemeClr val="tx1"/>
+          </a:fontRef>
+        </p:style>
+      </p:cxnSp>
+      <p:cxnSp>
+        <p:nvCxnSpPr>
+          <p:cNvPr id="5" name="Connector 4"/>
+          <p:cNvCxnSpPr/>
+          <p:nvPr/>
+        </p:nvCxnSpPr>
+        <p:spPr>
+          <a:xfrm>
+            <a:off x="777240" y="6199632"/>
+            <a:ext cx="10607040" cy="0"/>
+          </a:xfrm>
+          <a:prstGeom prst="line">
+            <a:avLst/>
+          </a:prstGeom>
+          <a:ln w="9525">
+            <a:solidFill>
+              <a:srgbClr val="6B6B6B"/>
+            </a:solidFill>
+          </a:ln>
+        </p:spPr>
+        <p:style>
+          <a:lnRef idx="2">
+            <a:schemeClr val="accent1"/>
+          </a:lnRef>
+          <a:fillRef idx="0">
+            <a:schemeClr val="accent1"/>
+          </a:fillRef>
+          <a:effectRef idx="1">
+            <a:schemeClr val="accent1"/>
+          </a:effectRef>
+          <a:fontRef idx="minor">
+            <a:schemeClr val="tx1"/>
+          </a:fontRef>
+        </p:style>
+      </p:cxnSp>
+      <p:sp>
+        <p:nvSpPr>
+          <p:cNvPr id="6" name="TextBox 5"/>
+          <p:cNvSpPr txBox="1"/>
+          <p:nvPr/>
+        </p:nvSpPr>
+        <p:spPr>
+          <a:xfrm>
+            <a:off x="777240" y="6272784"/>
+            <a:ext cx="9692640" cy="274320"/>
+          </a:xfrm>
+          <a:prstGeom prst="rect">
+            <a:avLst/>
+          </a:prstGeom>
+          <a:noFill/>
+        </p:spPr>
+        <p:txBody>
+          <a:bodyPr wrap="square" lIns="45720" rIns="45720" tIns="18288" bIns="18288" anchor="t">
+            <a:spAutoFit/>
+          </a:bodyPr>
+          <a:lstStyle/>
+          <a:p>
+            <a:pPr algn="l"/>
+            <a:r>
+              <a:rPr sz="1040" b="0" i="0">
+                <a:solidFill>
+                  <a:srgbClr val="6B6B6B"/>
+                </a:solidFill>
+                <a:latin typeface="Lexend"/>
+              </a:rPr>
+              <a:t>Grade 7 Accelerated · Unit 4 · Lesson 5 — Evaluating Expressions with Radicals</a:t>
+            </a:r>
+          </a:p>
+        </p:txBody>
+      </p:sp>
+      <p:sp>
+        <p:nvSpPr>
+          <p:cNvPr id="7" name="TextBox 6"/>
+          <p:cNvSpPr txBox="1"/>
+          <p:nvPr/>
+        </p:nvSpPr>
+        <p:spPr>
+          <a:xfrm>
+            <a:off x="10744200" y="6272784"/>
+            <a:ext cx="640080" cy="274320"/>
+          </a:xfrm>
+          <a:prstGeom prst="rect">
+            <a:avLst/>
+          </a:prstGeom>
+          <a:noFill/>
+        </p:spPr>
+        <p:txBody>
+          <a:bodyPr wrap="square" lIns="45720" rIns="45720" tIns="18288" bIns="18288" anchor="t">
+            <a:spAutoFit/>
+          </a:bodyPr>
+          <a:lstStyle/>
+          <a:p>
+            <a:pPr algn="r"/>
+            <a:r>
+              <a:rPr sz="1040" b="0" i="0">
+                <a:solidFill>
+                  <a:srgbClr val="6B6B6B"/>
+                </a:solidFill>
+                <a:latin typeface="Lexend"/>
+              </a:rPr>
+              <a:t>35</a:t>
             </a:r>
           </a:p>
         </p:txBody>
@@ -14230,7 +14518,7 @@
                 </a:solidFill>
                 <a:latin typeface="Lexend"/>
               </a:rPr>
-              <a:t>Notes</a:t>
+              <a:t>Vocabulary</a:t>
             </a:r>
           </a:p>
         </p:txBody>
@@ -14418,8 +14706,8 @@
         </p:nvSpPr>
         <p:spPr>
           <a:xfrm>
-            <a:off x="777240" y="1389888"/>
-            <a:ext cx="10607040" cy="402336"/>
+            <a:off x="777240" y="1463040"/>
+            <a:ext cx="10607040" cy="429370"/>
           </a:xfrm>
           <a:prstGeom prst="rect">
             <a:avLst/>
@@ -14434,55 +14722,55 @@
           <a:p>
             <a:pPr algn="l"/>
             <a:r>
-              <a:rPr sz="2380" b="1" i="0">
+              <a:rPr sz="2280" b="1" i="0">
+                <a:solidFill>
+                  <a:srgbClr val="0B5394"/>
+                </a:solidFill>
+                <a:latin typeface="Lexend"/>
+              </a:rPr>
+              <a:t>radical</a:t>
+            </a:r>
+          </a:p>
+        </p:txBody>
+      </p:sp>
+      <p:sp>
+        <p:nvSpPr>
+          <p:cNvPr id="9" name="TextBox 8"/>
+          <p:cNvSpPr txBox="1"/>
+          <p:nvPr/>
+        </p:nvSpPr>
+        <p:spPr>
+          <a:xfrm>
+            <a:off x="1143000" y="1903078"/>
+            <a:ext cx="7515121" cy="457200"/>
+          </a:xfrm>
+          <a:prstGeom prst="rect">
+            <a:avLst/>
+          </a:prstGeom>
+          <a:noFill/>
+        </p:spPr>
+        <p:txBody>
+          <a:bodyPr wrap="none" lIns="45720" rIns="45720" tIns="18288" bIns="18288" anchor="ctr">
+            <a:noAutofit/>
+          </a:bodyPr>
+          <a:lstStyle/>
+          <a:p>
+            <a:pPr algn="l"/>
+            <a:r>
+              <a:rPr sz="2090" b="0" i="0">
                 <a:solidFill>
                   <a:srgbClr val="1A1A1A"/>
                 </a:solidFill>
                 <a:latin typeface="Lexend"/>
               </a:rPr>
-              <a:t>I.  The radical bar is a grouping symbol</a:t>
-            </a:r>
-          </a:p>
-        </p:txBody>
-      </p:sp>
-      <p:cxnSp>
-        <p:nvCxnSpPr>
-          <p:cNvPr id="9" name="Connector 8"/>
-          <p:cNvCxnSpPr/>
-          <p:nvPr/>
-        </p:nvCxnSpPr>
-        <p:spPr>
-          <a:xfrm>
-            <a:off x="777240" y="1828800"/>
-            <a:ext cx="10607040" cy="0"/>
-          </a:xfrm>
-          <a:prstGeom prst="line">
-            <a:avLst/>
-          </a:prstGeom>
-          <a:ln w="9525">
-            <a:solidFill>
-              <a:srgbClr val="1A1A1A"/>
-            </a:solidFill>
-          </a:ln>
-        </p:spPr>
-        <p:style>
-          <a:lnRef idx="2">
-            <a:schemeClr val="accent1"/>
-          </a:lnRef>
-          <a:fillRef idx="0">
-            <a:schemeClr val="accent1"/>
-          </a:fillRef>
-          <a:effectRef idx="1">
-            <a:schemeClr val="accent1"/>
-          </a:effectRef>
-          <a:fontRef idx="minor">
-            <a:schemeClr val="tx1"/>
-          </a:fontRef>
-        </p:style>
-      </p:cxnSp>
+              <a:t>a root symbol together with everything under its bar: </a:t>
+            </a:r>
+          </a:p>
+        </p:txBody>
+      </p:sp>
       <p:pic>
         <p:nvPicPr>
-          <p:cNvPr id="10" name="Picture 9" descr="f0301447559f2620.png"/>
+          <p:cNvPr id="10" name="Picture 9" descr="7fc2ce39b1027aa6.png"/>
           <p:cNvPicPr>
             <a:picLocks noChangeAspect="1"/>
           </p:cNvPicPr>
@@ -14496,17 +14784,87 @@
         </p:blipFill>
         <p:spPr>
           <a:xfrm>
-            <a:off x="3377184" y="1993392"/>
-            <a:ext cx="5407152" cy="478536"/>
+            <a:off x="8520961" y="1892410"/>
+            <a:ext cx="835152" cy="478536"/>
           </a:xfrm>
           <a:prstGeom prst="rect">
             <a:avLst/>
           </a:prstGeom>
         </p:spPr>
       </p:pic>
+      <p:sp>
+        <p:nvSpPr>
+          <p:cNvPr id="11" name="TextBox 10"/>
+          <p:cNvSpPr txBox="1"/>
+          <p:nvPr/>
+        </p:nvSpPr>
+        <p:spPr>
+          <a:xfrm>
+            <a:off x="9356113" y="1903078"/>
+            <a:ext cx="1770158" cy="457200"/>
+          </a:xfrm>
+          <a:prstGeom prst="rect">
+            <a:avLst/>
+          </a:prstGeom>
+          <a:noFill/>
+        </p:spPr>
+        <p:txBody>
+          <a:bodyPr wrap="none" lIns="45720" rIns="45720" tIns="18288" bIns="18288" anchor="ctr">
+            <a:noAutofit/>
+          </a:bodyPr>
+          <a:lstStyle/>
+          <a:p>
+            <a:pPr algn="l"/>
+            <a:r>
+              <a:rPr sz="2090" b="0" i="0">
+                <a:solidFill>
+                  <a:srgbClr val="1A1A1A"/>
+                </a:solidFill>
+                <a:latin typeface="Lexend"/>
+              </a:rPr>
+              <a:t> is a square</a:t>
+            </a:r>
+          </a:p>
+        </p:txBody>
+      </p:sp>
+      <p:sp>
+        <p:nvSpPr>
+          <p:cNvPr id="12" name="TextBox 11"/>
+          <p:cNvSpPr txBox="1"/>
+          <p:nvPr/>
+        </p:nvSpPr>
+        <p:spPr>
+          <a:xfrm>
+            <a:off x="1143000" y="2454766"/>
+            <a:ext cx="919946" cy="457200"/>
+          </a:xfrm>
+          <a:prstGeom prst="rect">
+            <a:avLst/>
+          </a:prstGeom>
+          <a:noFill/>
+        </p:spPr>
+        <p:txBody>
+          <a:bodyPr wrap="none" lIns="45720" rIns="45720" tIns="18288" bIns="18288" anchor="ctr">
+            <a:noAutofit/>
+          </a:bodyPr>
+          <a:lstStyle/>
+          <a:p>
+            <a:pPr algn="l"/>
+            <a:r>
+              <a:rPr sz="2090" b="0" i="0">
+                <a:solidFill>
+                  <a:srgbClr val="1A1A1A"/>
+                </a:solidFill>
+                <a:latin typeface="Lexend"/>
+              </a:rPr>
+              <a:t>root, </a:t>
+            </a:r>
+          </a:p>
+        </p:txBody>
+      </p:sp>
       <p:pic>
         <p:nvPicPr>
-          <p:cNvPr id="11" name="Picture 10" descr="3737ed6aaf20179f.png"/>
+          <p:cNvPr id="13" name="Picture 12" descr="5f7b58e3a9782353.png"/>
           <p:cNvPicPr>
             <a:picLocks noChangeAspect="1"/>
           </p:cNvPicPr>
@@ -14520,17 +14878,192 @@
         </p:blipFill>
         <p:spPr>
           <a:xfrm>
-            <a:off x="4488180" y="2746248"/>
-            <a:ext cx="3185160" cy="478536"/>
+            <a:off x="1925786" y="2444098"/>
+            <a:ext cx="871728" cy="478536"/>
           </a:xfrm>
           <a:prstGeom prst="rect">
             <a:avLst/>
           </a:prstGeom>
         </p:spPr>
       </p:pic>
+      <p:sp>
+        <p:nvSpPr>
+          <p:cNvPr id="14" name="TextBox 13"/>
+          <p:cNvSpPr txBox="1"/>
+          <p:nvPr/>
+        </p:nvSpPr>
+        <p:spPr>
+          <a:xfrm>
+            <a:off x="2797514" y="2454766"/>
+            <a:ext cx="2140736" cy="457200"/>
+          </a:xfrm>
+          <a:prstGeom prst="rect">
+            <a:avLst/>
+          </a:prstGeom>
+          <a:noFill/>
+        </p:spPr>
+        <p:txBody>
+          <a:bodyPr wrap="none" lIns="45720" rIns="45720" tIns="18288" bIns="18288" anchor="ctr">
+            <a:noAutofit/>
+          </a:bodyPr>
+          <a:lstStyle/>
+          <a:p>
+            <a:pPr algn="l"/>
+            <a:r>
+              <a:rPr sz="2090" b="0" i="0">
+                <a:solidFill>
+                  <a:srgbClr val="1A1A1A"/>
+                </a:solidFill>
+                <a:latin typeface="Lexend"/>
+              </a:rPr>
+              <a:t> is a cube root</a:t>
+            </a:r>
+          </a:p>
+        </p:txBody>
+      </p:sp>
+      <p:sp>
+        <p:nvSpPr>
+          <p:cNvPr id="15" name="TextBox 14"/>
+          <p:cNvSpPr txBox="1"/>
+          <p:nvPr/>
+        </p:nvSpPr>
+        <p:spPr>
+          <a:xfrm>
+            <a:off x="777240" y="3123802"/>
+            <a:ext cx="10607040" cy="429370"/>
+          </a:xfrm>
+          <a:prstGeom prst="rect">
+            <a:avLst/>
+          </a:prstGeom>
+          <a:noFill/>
+        </p:spPr>
+        <p:txBody>
+          <a:bodyPr wrap="square" lIns="45720" rIns="45720" tIns="18288" bIns="18288" anchor="t">
+            <a:spAutoFit/>
+          </a:bodyPr>
+          <a:lstStyle/>
+          <a:p>
+            <a:pPr algn="l"/>
+            <a:r>
+              <a:rPr sz="2280" b="1" i="0">
+                <a:solidFill>
+                  <a:srgbClr val="0B5394"/>
+                </a:solidFill>
+                <a:latin typeface="Lexend"/>
+              </a:rPr>
+              <a:t>radicand</a:t>
+            </a:r>
+          </a:p>
+        </p:txBody>
+      </p:sp>
+      <p:sp>
+        <p:nvSpPr>
+          <p:cNvPr id="16" name="TextBox 15"/>
+          <p:cNvSpPr txBox="1"/>
+          <p:nvPr/>
+        </p:nvSpPr>
+        <p:spPr>
+          <a:xfrm>
+            <a:off x="1143000" y="3553172"/>
+            <a:ext cx="10241280" cy="787179"/>
+          </a:xfrm>
+          <a:prstGeom prst="rect">
+            <a:avLst/>
+          </a:prstGeom>
+          <a:noFill/>
+        </p:spPr>
+        <p:txBody>
+          <a:bodyPr wrap="square" lIns="45720" rIns="45720" tIns="18288" bIns="18288" anchor="t">
+            <a:spAutoFit/>
+          </a:bodyPr>
+          <a:lstStyle/>
+          <a:p>
+            <a:pPr algn="l"/>
+            <a:r>
+              <a:rPr sz="2090" b="0" i="0">
+                <a:solidFill>
+                  <a:srgbClr val="1A1A1A"/>
+                </a:solidFill>
+                <a:latin typeface="Lexend"/>
+              </a:rPr>
+              <a:t>the number under the radical bar. The bar groups it, so whatever is under it is evaluated before the root is taken</a:t>
+            </a:r>
+          </a:p>
+        </p:txBody>
+      </p:sp>
+      <p:sp>
+        <p:nvSpPr>
+          <p:cNvPr id="17" name="TextBox 16"/>
+          <p:cNvSpPr txBox="1"/>
+          <p:nvPr/>
+        </p:nvSpPr>
+        <p:spPr>
+          <a:xfrm>
+            <a:off x="777240" y="4578096"/>
+            <a:ext cx="10607040" cy="429370"/>
+          </a:xfrm>
+          <a:prstGeom prst="rect">
+            <a:avLst/>
+          </a:prstGeom>
+          <a:noFill/>
+        </p:spPr>
+        <p:txBody>
+          <a:bodyPr wrap="square" lIns="45720" rIns="45720" tIns="18288" bIns="18288" anchor="t">
+            <a:spAutoFit/>
+          </a:bodyPr>
+          <a:lstStyle/>
+          <a:p>
+            <a:pPr algn="l"/>
+            <a:r>
+              <a:rPr sz="2280" b="1" i="0">
+                <a:solidFill>
+                  <a:srgbClr val="0B5394"/>
+                </a:solidFill>
+                <a:latin typeface="Lexend"/>
+              </a:rPr>
+              <a:t>principal square root</a:t>
+            </a:r>
+          </a:p>
+        </p:txBody>
+      </p:sp>
+      <p:sp>
+        <p:nvSpPr>
+          <p:cNvPr id="18" name="TextBox 17"/>
+          <p:cNvSpPr txBox="1"/>
+          <p:nvPr/>
+        </p:nvSpPr>
+        <p:spPr>
+          <a:xfrm>
+            <a:off x="1143000" y="5018134"/>
+            <a:ext cx="3163998" cy="457200"/>
+          </a:xfrm>
+          <a:prstGeom prst="rect">
+            <a:avLst/>
+          </a:prstGeom>
+          <a:noFill/>
+        </p:spPr>
+        <p:txBody>
+          <a:bodyPr wrap="none" lIns="45720" rIns="45720" tIns="18288" bIns="18288" anchor="ctr">
+            <a:noAutofit/>
+          </a:bodyPr>
+          <a:lstStyle/>
+          <a:p>
+            <a:pPr algn="l"/>
+            <a:r>
+              <a:rPr sz="2090" b="0" i="0">
+                <a:solidFill>
+                  <a:srgbClr val="1A1A1A"/>
+                </a:solidFill>
+                <a:latin typeface="Lexend"/>
+              </a:rPr>
+              <a:t>the nonnegative one. </a:t>
+            </a:r>
+          </a:p>
+        </p:txBody>
+      </p:sp>
       <p:pic>
         <p:nvPicPr>
-          <p:cNvPr id="12" name="Picture 11" descr="4a07f45d5d9ca5f4.png"/>
+          <p:cNvPr id="19" name="Picture 18" descr="66ed9a548d73b0d9.png"/>
           <p:cNvPicPr>
             <a:picLocks noChangeAspect="1"/>
           </p:cNvPicPr>
@@ -14544,8 +15077,8 @@
         </p:blipFill>
         <p:spPr>
           <a:xfrm>
-            <a:off x="3221035" y="3499104"/>
-            <a:ext cx="3209544" cy="478536"/>
+            <a:off x="4169838" y="5007466"/>
+            <a:ext cx="868680" cy="478536"/>
           </a:xfrm>
           <a:prstGeom prst="rect">
             <a:avLst/>
@@ -14554,14 +15087,14 @@
       </p:pic>
       <p:sp>
         <p:nvSpPr>
-          <p:cNvPr id="13" name="TextBox 12"/>
-          <p:cNvSpPr txBox="1"/>
-          <p:nvPr/>
-        </p:nvSpPr>
-        <p:spPr>
-          <a:xfrm>
-            <a:off x="6430579" y="3509772"/>
-            <a:ext cx="1854584" cy="457200"/>
+          <p:cNvPr id="20" name="TextBox 19"/>
+          <p:cNvSpPr txBox="1"/>
+          <p:nvPr/>
+        </p:nvSpPr>
+        <p:spPr>
+          <a:xfrm>
+            <a:off x="5038518" y="5018134"/>
+            <a:ext cx="3934879" cy="457200"/>
           </a:xfrm>
           <a:prstGeom prst="rect">
             <a:avLst/>
@@ -14576,20 +15109,55 @@
           <a:p>
             <a:pPr algn="l"/>
             <a:r>
-              <a:rPr sz="2470" b="0" i="0">
+              <a:rPr sz="2090" b="0" i="0">
                 <a:solidFill>
                   <a:srgbClr val="1A1A1A"/>
                 </a:solidFill>
                 <a:latin typeface="Lexend"/>
               </a:rPr>
-              <a:t>,    never   </a:t>
+              <a:t> is 7 — not −7, and not both,</a:t>
+            </a:r>
+          </a:p>
+        </p:txBody>
+      </p:sp>
+      <p:sp>
+        <p:nvSpPr>
+          <p:cNvPr id="21" name="TextBox 20"/>
+          <p:cNvSpPr txBox="1"/>
+          <p:nvPr/>
+        </p:nvSpPr>
+        <p:spPr>
+          <a:xfrm>
+            <a:off x="1143000" y="5536294"/>
+            <a:ext cx="1985121" cy="457200"/>
+          </a:xfrm>
+          <a:prstGeom prst="rect">
+            <a:avLst/>
+          </a:prstGeom>
+          <a:noFill/>
+        </p:spPr>
+        <p:txBody>
+          <a:bodyPr wrap="none" lIns="45720" rIns="45720" tIns="18288" bIns="18288" anchor="ctr">
+            <a:noAutofit/>
+          </a:bodyPr>
+          <a:lstStyle/>
+          <a:p>
+            <a:pPr algn="l"/>
+            <a:r>
+              <a:rPr sz="2090" b="0" i="0">
+                <a:solidFill>
+                  <a:srgbClr val="1A1A1A"/>
+                </a:solidFill>
+                <a:latin typeface="Lexend"/>
+              </a:rPr>
+              <a:t>even though </a:t>
             </a:r>
           </a:p>
         </p:txBody>
       </p:sp>
       <p:pic>
         <p:nvPicPr>
-          <p:cNvPr id="14" name="Picture 13" descr="fbd6d5a320033c4a.png"/>
+          <p:cNvPr id="22" name="Picture 21" descr="9557533875022529.png"/>
           <p:cNvPicPr>
             <a:picLocks noChangeAspect="1"/>
           </p:cNvPicPr>
@@ -14603,8 +15171,8 @@
         </p:blipFill>
         <p:spPr>
           <a:xfrm>
-            <a:off x="8148004" y="3601212"/>
-            <a:ext cx="792480" cy="274320"/>
+            <a:off x="2990961" y="5559154"/>
+            <a:ext cx="841248" cy="411480"/>
           </a:xfrm>
           <a:prstGeom prst="rect">
             <a:avLst/>
@@ -14613,35 +15181,35 @@
       </p:pic>
       <p:sp>
         <p:nvSpPr>
-          <p:cNvPr id="15" name="TextBox 14"/>
-          <p:cNvSpPr txBox="1"/>
-          <p:nvPr/>
-        </p:nvSpPr>
-        <p:spPr>
-          <a:xfrm>
-            <a:off x="987552" y="4315968"/>
-            <a:ext cx="10131551" cy="475488"/>
-          </a:xfrm>
-          <a:prstGeom prst="rect">
-            <a:avLst/>
-          </a:prstGeom>
-          <a:noFill/>
-        </p:spPr>
-        <p:txBody>
-          <a:bodyPr wrap="square" lIns="45720" rIns="45720" tIns="18288" bIns="18288" anchor="t">
-            <a:spAutoFit/>
+          <p:cNvPr id="23" name="TextBox 22"/>
+          <p:cNvSpPr txBox="1"/>
+          <p:nvPr/>
+        </p:nvSpPr>
+        <p:spPr>
+          <a:xfrm>
+            <a:off x="3832209" y="5536294"/>
+            <a:ext cx="1545702" cy="457200"/>
+          </a:xfrm>
+          <a:prstGeom prst="rect">
+            <a:avLst/>
+          </a:prstGeom>
+          <a:noFill/>
+        </p:spPr>
+        <p:txBody>
+          <a:bodyPr wrap="none" lIns="45720" rIns="45720" tIns="18288" bIns="18288" anchor="ctr">
+            <a:noAutofit/>
           </a:bodyPr>
           <a:lstStyle/>
           <a:p>
             <a:pPr algn="l"/>
             <a:r>
-              <a:rPr sz="2180" b="1" i="0">
+              <a:rPr sz="2090" b="0" i="0">
                 <a:solidFill>
                   <a:srgbClr val="1A1A1A"/>
                 </a:solidFill>
                 <a:latin typeface="Lexend"/>
               </a:rPr>
-              <a:t>Everything under the bar is evaluated before the root is taken.</a:t>
+              <a:t> is also 49</a:t>
             </a:r>
           </a:p>
         </p:txBody>
@@ -14904,7 +15472,7 @@
                 </a:solidFill>
                 <a:latin typeface="Lexend"/>
               </a:rPr>
-              <a:t>II.  Square roots and cube roots are not the same shape</a:t>
+              <a:t>I.  The radical bar is a grouping symbol</a:t>
             </a:r>
           </a:p>
         </p:txBody>
@@ -14946,7 +15514,7 @@
       </p:cxnSp>
       <p:pic>
         <p:nvPicPr>
-          <p:cNvPr id="10" name="Picture 9" descr="14243ac5c29f503b.png"/>
+          <p:cNvPr id="10" name="Picture 9" descr="f0301447559f2620.png"/>
           <p:cNvPicPr>
             <a:picLocks noChangeAspect="1"/>
           </p:cNvPicPr>
@@ -14960,52 +15528,17 @@
         </p:blipFill>
         <p:spPr>
           <a:xfrm>
-            <a:off x="2686784" y="1993392"/>
-            <a:ext cx="1423416" cy="478536"/>
+            <a:off x="3377184" y="1993392"/>
+            <a:ext cx="5407152" cy="478536"/>
           </a:xfrm>
           <a:prstGeom prst="rect">
             <a:avLst/>
           </a:prstGeom>
         </p:spPr>
       </p:pic>
-      <p:sp>
-        <p:nvSpPr>
-          <p:cNvPr id="11" name="TextBox 10"/>
-          <p:cNvSpPr txBox="1"/>
-          <p:nvPr/>
-        </p:nvSpPr>
-        <p:spPr>
-          <a:xfrm>
-            <a:off x="4110200" y="2004060"/>
-            <a:ext cx="1141503" cy="457200"/>
-          </a:xfrm>
-          <a:prstGeom prst="rect">
-            <a:avLst/>
-          </a:prstGeom>
-          <a:noFill/>
-        </p:spPr>
-        <p:txBody>
-          <a:bodyPr wrap="none" lIns="45720" rIns="45720" tIns="18288" bIns="18288" anchor="ctr">
-            <a:noAutofit/>
-          </a:bodyPr>
-          <a:lstStyle/>
-          <a:p>
-            <a:pPr algn="l"/>
-            <a:r>
-              <a:rPr sz="2470" b="0" i="0">
-                <a:solidFill>
-                  <a:srgbClr val="1A1A1A"/>
-                </a:solidFill>
-                <a:latin typeface="Lexend"/>
-              </a:rPr>
-              <a:t>          </a:t>
-            </a:r>
-          </a:p>
-        </p:txBody>
-      </p:sp>
       <p:pic>
         <p:nvPicPr>
-          <p:cNvPr id="12" name="Picture 11" descr="59fd66553504e964.png"/>
+          <p:cNvPr id="11" name="Picture 10" descr="3737ed6aaf20179f.png"/>
           <p:cNvPicPr>
             <a:picLocks noChangeAspect="1"/>
           </p:cNvPicPr>
@@ -15019,52 +15552,17 @@
         </p:blipFill>
         <p:spPr>
           <a:xfrm>
-            <a:off x="5114543" y="1993392"/>
-            <a:ext cx="1453896" cy="478536"/>
+            <a:off x="4488180" y="2746248"/>
+            <a:ext cx="3185160" cy="478536"/>
           </a:xfrm>
           <a:prstGeom prst="rect">
             <a:avLst/>
           </a:prstGeom>
         </p:spPr>
       </p:pic>
-      <p:sp>
-        <p:nvSpPr>
-          <p:cNvPr id="13" name="TextBox 12"/>
-          <p:cNvSpPr txBox="1"/>
-          <p:nvPr/>
-        </p:nvSpPr>
-        <p:spPr>
-          <a:xfrm>
-            <a:off x="6568439" y="2004060"/>
-            <a:ext cx="1141503" cy="457200"/>
-          </a:xfrm>
-          <a:prstGeom prst="rect">
-            <a:avLst/>
-          </a:prstGeom>
-          <a:noFill/>
-        </p:spPr>
-        <p:txBody>
-          <a:bodyPr wrap="none" lIns="45720" rIns="45720" tIns="18288" bIns="18288" anchor="ctr">
-            <a:noAutofit/>
-          </a:bodyPr>
-          <a:lstStyle/>
-          <a:p>
-            <a:pPr algn="l"/>
-            <a:r>
-              <a:rPr sz="2470" b="0" i="0">
-                <a:solidFill>
-                  <a:srgbClr val="1A1A1A"/>
-                </a:solidFill>
-                <a:latin typeface="Lexend"/>
-              </a:rPr>
-              <a:t>          </a:t>
-            </a:r>
-          </a:p>
-        </p:txBody>
-      </p:sp>
       <p:pic>
         <p:nvPicPr>
-          <p:cNvPr id="14" name="Picture 13" descr="138d560710ac33e5.png"/>
+          <p:cNvPr id="12" name="Picture 11" descr="4a07f45d5d9ca5f4.png"/>
           <p:cNvPicPr>
             <a:picLocks noChangeAspect="1"/>
           </p:cNvPicPr>
@@ -15078,17 +15576,52 @@
         </p:blipFill>
         <p:spPr>
           <a:xfrm>
-            <a:off x="7572783" y="1993392"/>
-            <a:ext cx="1901952" cy="478536"/>
+            <a:off x="3221035" y="3499104"/>
+            <a:ext cx="3209544" cy="478536"/>
           </a:xfrm>
           <a:prstGeom prst="rect">
             <a:avLst/>
           </a:prstGeom>
         </p:spPr>
       </p:pic>
+      <p:sp>
+        <p:nvSpPr>
+          <p:cNvPr id="13" name="TextBox 12"/>
+          <p:cNvSpPr txBox="1"/>
+          <p:nvPr/>
+        </p:nvSpPr>
+        <p:spPr>
+          <a:xfrm>
+            <a:off x="6430579" y="3509772"/>
+            <a:ext cx="1854584" cy="457200"/>
+          </a:xfrm>
+          <a:prstGeom prst="rect">
+            <a:avLst/>
+          </a:prstGeom>
+          <a:noFill/>
+        </p:spPr>
+        <p:txBody>
+          <a:bodyPr wrap="none" lIns="45720" rIns="45720" tIns="18288" bIns="18288" anchor="ctr">
+            <a:noAutofit/>
+          </a:bodyPr>
+          <a:lstStyle/>
+          <a:p>
+            <a:pPr algn="l"/>
+            <a:r>
+              <a:rPr sz="2470" b="0" i="0">
+                <a:solidFill>
+                  <a:srgbClr val="1A1A1A"/>
+                </a:solidFill>
+                <a:latin typeface="Lexend"/>
+              </a:rPr>
+              <a:t>,    never   </a:t>
+            </a:r>
+          </a:p>
+        </p:txBody>
+      </p:sp>
       <p:pic>
         <p:nvPicPr>
-          <p:cNvPr id="15" name="Picture 14" descr="b169188f81dcb70b.png"/>
+          <p:cNvPr id="14" name="Picture 13" descr="fbd6d5a320033c4a.png"/>
           <p:cNvPicPr>
             <a:picLocks noChangeAspect="1"/>
           </p:cNvPicPr>
@@ -15102,8 +15635,8 @@
         </p:blipFill>
         <p:spPr>
           <a:xfrm>
-            <a:off x="4118596" y="2750820"/>
-            <a:ext cx="1246632" cy="789432"/>
+            <a:off x="8148004" y="3601212"/>
+            <a:ext cx="792480" cy="274320"/>
           </a:xfrm>
           <a:prstGeom prst="rect">
             <a:avLst/>
@@ -15112,94 +15645,35 @@
       </p:pic>
       <p:sp>
         <p:nvSpPr>
-          <p:cNvPr id="16" name="TextBox 15"/>
-          <p:cNvSpPr txBox="1"/>
-          <p:nvPr/>
-        </p:nvSpPr>
-        <p:spPr>
-          <a:xfrm>
-            <a:off x="5365228" y="2916936"/>
-            <a:ext cx="1141503" cy="457200"/>
-          </a:xfrm>
-          <a:prstGeom prst="rect">
-            <a:avLst/>
-          </a:prstGeom>
-          <a:noFill/>
-        </p:spPr>
-        <p:txBody>
-          <a:bodyPr wrap="none" lIns="45720" rIns="45720" tIns="18288" bIns="18288" anchor="ctr">
-            <a:noAutofit/>
+          <p:cNvPr id="15" name="TextBox 14"/>
+          <p:cNvSpPr txBox="1"/>
+          <p:nvPr/>
+        </p:nvSpPr>
+        <p:spPr>
+          <a:xfrm>
+            <a:off x="987552" y="4315968"/>
+            <a:ext cx="10131551" cy="475488"/>
+          </a:xfrm>
+          <a:prstGeom prst="rect">
+            <a:avLst/>
+          </a:prstGeom>
+          <a:noFill/>
+        </p:spPr>
+        <p:txBody>
+          <a:bodyPr wrap="square" lIns="45720" rIns="45720" tIns="18288" bIns="18288" anchor="t">
+            <a:spAutoFit/>
           </a:bodyPr>
           <a:lstStyle/>
           <a:p>
             <a:pPr algn="l"/>
             <a:r>
-              <a:rPr sz="2470" b="0" i="0">
+              <a:rPr sz="2180" b="1" i="0">
                 <a:solidFill>
                   <a:srgbClr val="1A1A1A"/>
                 </a:solidFill>
                 <a:latin typeface="Lexend"/>
               </a:rPr>
-              <a:t>          </a:t>
-            </a:r>
-          </a:p>
-        </p:txBody>
-      </p:sp>
-      <p:pic>
-        <p:nvPicPr>
-          <p:cNvPr id="17" name="Picture 16" descr="df602f9237f1cbdf.png"/>
-          <p:cNvPicPr>
-            <a:picLocks noChangeAspect="1"/>
-          </p:cNvPicPr>
-          <p:nvPr/>
-        </p:nvPicPr>
-        <p:blipFill>
-          <a:blip r:embed="rId6"/>
-          <a:stretch>
-            <a:fillRect/>
-          </a:stretch>
-        </p:blipFill>
-        <p:spPr>
-          <a:xfrm>
-            <a:off x="6369571" y="2746248"/>
-            <a:ext cx="1673352" cy="798576"/>
-          </a:xfrm>
-          <a:prstGeom prst="rect">
-            <a:avLst/>
-          </a:prstGeom>
-        </p:spPr>
-      </p:pic>
-      <p:sp>
-        <p:nvSpPr>
-          <p:cNvPr id="18" name="TextBox 17"/>
-          <p:cNvSpPr txBox="1"/>
-          <p:nvPr/>
-        </p:nvSpPr>
-        <p:spPr>
-          <a:xfrm>
-            <a:off x="987552" y="3883152"/>
-            <a:ext cx="10131551" cy="950976"/>
-          </a:xfrm>
-          <a:prstGeom prst="rect">
-            <a:avLst/>
-          </a:prstGeom>
-          <a:noFill/>
-        </p:spPr>
-        <p:txBody>
-          <a:bodyPr wrap="square" lIns="45720" rIns="45720" tIns="18288" bIns="18288" anchor="t">
-            <a:spAutoFit/>
-          </a:bodyPr>
-          <a:lstStyle/>
-          <a:p>
-            <a:pPr algn="l"/>
-            <a:r>
-              <a:rPr sz="2180" b="1" i="0">
-                <a:solidFill>
-                  <a:srgbClr val="1A1A1A"/>
-                </a:solidFill>
-                <a:latin typeface="Lexend"/>
-              </a:rPr>
-              <a:t>An odd root keeps the sign of its radicand. A square root sign never gives a negative value.</a:t>
+              <a:t>Everything under the bar is evaluated before the root is taken.</a:t>
             </a:r>
           </a:p>
         </p:txBody>
@@ -15462,7 +15936,7 @@
                 </a:solidFill>
                 <a:latin typeface="Lexend"/>
               </a:rPr>
-              <a:t>III.  Radicals alongside exponents</a:t>
+              <a:t>II.  Square roots and cube roots are not the same shape</a:t>
             </a:r>
           </a:p>
         </p:txBody>
@@ -15504,7 +15978,7 @@
       </p:cxnSp>
       <p:pic>
         <p:nvPicPr>
-          <p:cNvPr id="10" name="Picture 9" descr="d5f3f835e2d87209.png"/>
+          <p:cNvPr id="10" name="Picture 9" descr="14243ac5c29f503b.png"/>
           <p:cNvPicPr>
             <a:picLocks noChangeAspect="1"/>
           </p:cNvPicPr>
@@ -15518,8 +15992,8 @@
         </p:blipFill>
         <p:spPr>
           <a:xfrm>
-            <a:off x="2736328" y="1993392"/>
-            <a:ext cx="2286000" cy="731520"/>
+            <a:off x="2686784" y="1993392"/>
+            <a:ext cx="1423416" cy="478536"/>
           </a:xfrm>
           <a:prstGeom prst="rect">
             <a:avLst/>
@@ -15534,7 +16008,7 @@
         </p:nvSpPr>
         <p:spPr>
           <a:xfrm>
-            <a:off x="5022328" y="2130552"/>
+            <a:off x="4110200" y="2004060"/>
             <a:ext cx="1141503" cy="457200"/>
           </a:xfrm>
           <a:prstGeom prst="rect">
@@ -15563,7 +16037,7 @@
       </p:sp>
       <p:pic>
         <p:nvPicPr>
-          <p:cNvPr id="12" name="Picture 11" descr="24b3a5f09066cb84.png"/>
+          <p:cNvPr id="12" name="Picture 11" descr="59fd66553504e964.png"/>
           <p:cNvPicPr>
             <a:picLocks noChangeAspect="1"/>
           </p:cNvPicPr>
@@ -15577,17 +16051,52 @@
         </p:blipFill>
         <p:spPr>
           <a:xfrm>
-            <a:off x="6026671" y="2119884"/>
-            <a:ext cx="3398520" cy="478536"/>
+            <a:off x="5114543" y="1993392"/>
+            <a:ext cx="1453896" cy="478536"/>
           </a:xfrm>
           <a:prstGeom prst="rect">
             <a:avLst/>
           </a:prstGeom>
         </p:spPr>
       </p:pic>
+      <p:sp>
+        <p:nvSpPr>
+          <p:cNvPr id="13" name="TextBox 12"/>
+          <p:cNvSpPr txBox="1"/>
+          <p:nvPr/>
+        </p:nvSpPr>
+        <p:spPr>
+          <a:xfrm>
+            <a:off x="6568439" y="2004060"/>
+            <a:ext cx="1141503" cy="457200"/>
+          </a:xfrm>
+          <a:prstGeom prst="rect">
+            <a:avLst/>
+          </a:prstGeom>
+          <a:noFill/>
+        </p:spPr>
+        <p:txBody>
+          <a:bodyPr wrap="none" lIns="45720" rIns="45720" tIns="18288" bIns="18288" anchor="ctr">
+            <a:noAutofit/>
+          </a:bodyPr>
+          <a:lstStyle/>
+          <a:p>
+            <a:pPr algn="l"/>
+            <a:r>
+              <a:rPr sz="2470" b="0" i="0">
+                <a:solidFill>
+                  <a:srgbClr val="1A1A1A"/>
+                </a:solidFill>
+                <a:latin typeface="Lexend"/>
+              </a:rPr>
+              <a:t>          </a:t>
+            </a:r>
+          </a:p>
+        </p:txBody>
+      </p:sp>
       <p:pic>
         <p:nvPicPr>
-          <p:cNvPr id="13" name="Picture 12" descr="0416a625cfa02c4b.png"/>
+          <p:cNvPr id="14" name="Picture 13" descr="138d560710ac33e5.png"/>
           <p:cNvPicPr>
             <a:picLocks noChangeAspect="1"/>
           </p:cNvPicPr>
@@ -15601,24 +16110,107 @@
         </p:blipFill>
         <p:spPr>
           <a:xfrm>
-            <a:off x="3761232" y="2999232"/>
-            <a:ext cx="4639056" cy="673608"/>
+            <a:off x="7572783" y="1993392"/>
+            <a:ext cx="1901952" cy="478536"/>
           </a:xfrm>
           <a:prstGeom prst="rect">
             <a:avLst/>
           </a:prstGeom>
         </p:spPr>
       </p:pic>
-      <p:sp>
-        <p:nvSpPr>
-          <p:cNvPr id="14" name="TextBox 13"/>
-          <p:cNvSpPr txBox="1"/>
-          <p:nvPr/>
-        </p:nvSpPr>
-        <p:spPr>
-          <a:xfrm>
-            <a:off x="987552" y="4011168"/>
-            <a:ext cx="10131551" cy="475488"/>
+      <p:pic>
+        <p:nvPicPr>
+          <p:cNvPr id="15" name="Picture 14" descr="b169188f81dcb70b.png"/>
+          <p:cNvPicPr>
+            <a:picLocks noChangeAspect="1"/>
+          </p:cNvPicPr>
+          <p:nvPr/>
+        </p:nvPicPr>
+        <p:blipFill>
+          <a:blip r:embed="rId5"/>
+          <a:stretch>
+            <a:fillRect/>
+          </a:stretch>
+        </p:blipFill>
+        <p:spPr>
+          <a:xfrm>
+            <a:off x="4118596" y="2750820"/>
+            <a:ext cx="1246632" cy="789432"/>
+          </a:xfrm>
+          <a:prstGeom prst="rect">
+            <a:avLst/>
+          </a:prstGeom>
+        </p:spPr>
+      </p:pic>
+      <p:sp>
+        <p:nvSpPr>
+          <p:cNvPr id="16" name="TextBox 15"/>
+          <p:cNvSpPr txBox="1"/>
+          <p:nvPr/>
+        </p:nvSpPr>
+        <p:spPr>
+          <a:xfrm>
+            <a:off x="5365228" y="2916936"/>
+            <a:ext cx="1141503" cy="457200"/>
+          </a:xfrm>
+          <a:prstGeom prst="rect">
+            <a:avLst/>
+          </a:prstGeom>
+          <a:noFill/>
+        </p:spPr>
+        <p:txBody>
+          <a:bodyPr wrap="none" lIns="45720" rIns="45720" tIns="18288" bIns="18288" anchor="ctr">
+            <a:noAutofit/>
+          </a:bodyPr>
+          <a:lstStyle/>
+          <a:p>
+            <a:pPr algn="l"/>
+            <a:r>
+              <a:rPr sz="2470" b="0" i="0">
+                <a:solidFill>
+                  <a:srgbClr val="1A1A1A"/>
+                </a:solidFill>
+                <a:latin typeface="Lexend"/>
+              </a:rPr>
+              <a:t>          </a:t>
+            </a:r>
+          </a:p>
+        </p:txBody>
+      </p:sp>
+      <p:pic>
+        <p:nvPicPr>
+          <p:cNvPr id="17" name="Picture 16" descr="df602f9237f1cbdf.png"/>
+          <p:cNvPicPr>
+            <a:picLocks noChangeAspect="1"/>
+          </p:cNvPicPr>
+          <p:nvPr/>
+        </p:nvPicPr>
+        <p:blipFill>
+          <a:blip r:embed="rId6"/>
+          <a:stretch>
+            <a:fillRect/>
+          </a:stretch>
+        </p:blipFill>
+        <p:spPr>
+          <a:xfrm>
+            <a:off x="6369571" y="2746248"/>
+            <a:ext cx="1673352" cy="798576"/>
+          </a:xfrm>
+          <a:prstGeom prst="rect">
+            <a:avLst/>
+          </a:prstGeom>
+        </p:spPr>
+      </p:pic>
+      <p:sp>
+        <p:nvSpPr>
+          <p:cNvPr id="18" name="TextBox 17"/>
+          <p:cNvSpPr txBox="1"/>
+          <p:nvPr/>
+        </p:nvSpPr>
+        <p:spPr>
+          <a:xfrm>
+            <a:off x="987552" y="3883152"/>
+            <a:ext cx="10131551" cy="950976"/>
           </a:xfrm>
           <a:prstGeom prst="rect">
             <a:avLst/>
@@ -15639,7 +16231,7 @@
                 </a:solidFill>
                 <a:latin typeface="Lexend"/>
               </a:rPr>
-              <a:t>Finish each piece — the radical, the power — and only then put them together.</a:t>
+              <a:t>An odd root keeps the sign of its radicand. A square root sign never gives a negative value.</a:t>
             </a:r>
           </a:p>
         </p:txBody>
@@ -15692,7 +16284,7 @@
                 </a:solidFill>
                 <a:latin typeface="Lexend"/>
               </a:rPr>
-              <a:t>Example 1</a:t>
+              <a:t>Notes</a:t>
             </a:r>
           </a:p>
         </p:txBody>
@@ -15872,9 +16464,79 @@
           </a:p>
         </p:txBody>
       </p:sp>
+      <p:sp>
+        <p:nvSpPr>
+          <p:cNvPr id="8" name="TextBox 7"/>
+          <p:cNvSpPr txBox="1"/>
+          <p:nvPr/>
+        </p:nvSpPr>
+        <p:spPr>
+          <a:xfrm>
+            <a:off x="777240" y="1389888"/>
+            <a:ext cx="10607040" cy="402336"/>
+          </a:xfrm>
+          <a:prstGeom prst="rect">
+            <a:avLst/>
+          </a:prstGeom>
+          <a:noFill/>
+        </p:spPr>
+        <p:txBody>
+          <a:bodyPr wrap="square" lIns="45720" rIns="45720" tIns="18288" bIns="18288" anchor="t">
+            <a:spAutoFit/>
+          </a:bodyPr>
+          <a:lstStyle/>
+          <a:p>
+            <a:pPr algn="l"/>
+            <a:r>
+              <a:rPr sz="2380" b="1" i="0">
+                <a:solidFill>
+                  <a:srgbClr val="1A1A1A"/>
+                </a:solidFill>
+                <a:latin typeface="Lexend"/>
+              </a:rPr>
+              <a:t>III.  Radicals alongside exponents</a:t>
+            </a:r>
+          </a:p>
+        </p:txBody>
+      </p:sp>
+      <p:cxnSp>
+        <p:nvCxnSpPr>
+          <p:cNvPr id="9" name="Connector 8"/>
+          <p:cNvCxnSpPr/>
+          <p:nvPr/>
+        </p:nvCxnSpPr>
+        <p:spPr>
+          <a:xfrm>
+            <a:off x="777240" y="1828800"/>
+            <a:ext cx="10607040" cy="0"/>
+          </a:xfrm>
+          <a:prstGeom prst="line">
+            <a:avLst/>
+          </a:prstGeom>
+          <a:ln w="9525">
+            <a:solidFill>
+              <a:srgbClr val="1A1A1A"/>
+            </a:solidFill>
+          </a:ln>
+        </p:spPr>
+        <p:style>
+          <a:lnRef idx="2">
+            <a:schemeClr val="accent1"/>
+          </a:lnRef>
+          <a:fillRef idx="0">
+            <a:schemeClr val="accent1"/>
+          </a:fillRef>
+          <a:effectRef idx="1">
+            <a:schemeClr val="accent1"/>
+          </a:effectRef>
+          <a:fontRef idx="minor">
+            <a:schemeClr val="tx1"/>
+          </a:fontRef>
+        </p:style>
+      </p:cxnSp>
       <p:pic>
         <p:nvPicPr>
-          <p:cNvPr id="8" name="Picture 7" descr="5e47ed58306c9a9f.png"/>
+          <p:cNvPr id="10" name="Picture 9" descr="d5f3f835e2d87209.png"/>
           <p:cNvPicPr>
             <a:picLocks noChangeAspect="1"/>
           </p:cNvPicPr>
@@ -15888,8 +16550,8 @@
         </p:blipFill>
         <p:spPr>
           <a:xfrm>
-            <a:off x="4671059" y="2103120"/>
-            <a:ext cx="2819400" cy="667512"/>
+            <a:off x="2736328" y="1993392"/>
+            <a:ext cx="2286000" cy="731520"/>
           </a:xfrm>
           <a:prstGeom prst="rect">
             <a:avLst/>
@@ -15898,14 +16560,97 @@
       </p:pic>
       <p:sp>
         <p:nvSpPr>
-          <p:cNvPr id="9" name="TextBox 8"/>
-          <p:cNvSpPr txBox="1"/>
-          <p:nvPr/>
-        </p:nvSpPr>
-        <p:spPr>
-          <a:xfrm>
-            <a:off x="777240" y="3273552"/>
-            <a:ext cx="10607040" cy="429370"/>
+          <p:cNvPr id="11" name="TextBox 10"/>
+          <p:cNvSpPr txBox="1"/>
+          <p:nvPr/>
+        </p:nvSpPr>
+        <p:spPr>
+          <a:xfrm>
+            <a:off x="5022328" y="2130552"/>
+            <a:ext cx="1141503" cy="457200"/>
+          </a:xfrm>
+          <a:prstGeom prst="rect">
+            <a:avLst/>
+          </a:prstGeom>
+          <a:noFill/>
+        </p:spPr>
+        <p:txBody>
+          <a:bodyPr wrap="none" lIns="45720" rIns="45720" tIns="18288" bIns="18288" anchor="ctr">
+            <a:noAutofit/>
+          </a:bodyPr>
+          <a:lstStyle/>
+          <a:p>
+            <a:pPr algn="l"/>
+            <a:r>
+              <a:rPr sz="2470" b="0" i="0">
+                <a:solidFill>
+                  <a:srgbClr val="1A1A1A"/>
+                </a:solidFill>
+                <a:latin typeface="Lexend"/>
+              </a:rPr>
+              <a:t>          </a:t>
+            </a:r>
+          </a:p>
+        </p:txBody>
+      </p:sp>
+      <p:pic>
+        <p:nvPicPr>
+          <p:cNvPr id="12" name="Picture 11" descr="24b3a5f09066cb84.png"/>
+          <p:cNvPicPr>
+            <a:picLocks noChangeAspect="1"/>
+          </p:cNvPicPr>
+          <p:nvPr/>
+        </p:nvPicPr>
+        <p:blipFill>
+          <a:blip r:embed="rId3"/>
+          <a:stretch>
+            <a:fillRect/>
+          </a:stretch>
+        </p:blipFill>
+        <p:spPr>
+          <a:xfrm>
+            <a:off x="6026671" y="2119884"/>
+            <a:ext cx="3398520" cy="478536"/>
+          </a:xfrm>
+          <a:prstGeom prst="rect">
+            <a:avLst/>
+          </a:prstGeom>
+        </p:spPr>
+      </p:pic>
+      <p:pic>
+        <p:nvPicPr>
+          <p:cNvPr id="13" name="Picture 12" descr="0416a625cfa02c4b.png"/>
+          <p:cNvPicPr>
+            <a:picLocks noChangeAspect="1"/>
+          </p:cNvPicPr>
+          <p:nvPr/>
+        </p:nvPicPr>
+        <p:blipFill>
+          <a:blip r:embed="rId4"/>
+          <a:stretch>
+            <a:fillRect/>
+          </a:stretch>
+        </p:blipFill>
+        <p:spPr>
+          <a:xfrm>
+            <a:off x="3761232" y="2999232"/>
+            <a:ext cx="4639056" cy="673608"/>
+          </a:xfrm>
+          <a:prstGeom prst="rect">
+            <a:avLst/>
+          </a:prstGeom>
+        </p:spPr>
+      </p:pic>
+      <p:sp>
+        <p:nvSpPr>
+          <p:cNvPr id="14" name="TextBox 13"/>
+          <p:cNvSpPr txBox="1"/>
+          <p:nvPr/>
+        </p:nvSpPr>
+        <p:spPr>
+          <a:xfrm>
+            <a:off x="987552" y="4011168"/>
+            <a:ext cx="10131551" cy="475488"/>
           </a:xfrm>
           <a:prstGeom prst="rect">
             <a:avLst/>
@@ -15918,15 +16663,15 @@
           </a:bodyPr>
           <a:lstStyle/>
           <a:p>
-            <a:pPr algn="ctr"/>
-            <a:r>
-              <a:rPr sz="2280" b="1" i="0">
+            <a:pPr algn="l"/>
+            <a:r>
+              <a:rPr sz="2180" b="1" i="0">
                 <a:solidFill>
                   <a:srgbClr val="1A1A1A"/>
                 </a:solidFill>
                 <a:latin typeface="Lexend"/>
               </a:rPr>
-              <a:t>Evaluate.</a:t>
+              <a:t>Finish each piece — the radical, the power — and only then put them together.</a:t>
             </a:r>
           </a:p>
         </p:txBody>
@@ -16161,7 +16906,7 @@
       </p:sp>
       <p:pic>
         <p:nvPicPr>
-          <p:cNvPr id="8" name="Picture 7" descr="0d6c9f96a3ec0d88.png"/>
+          <p:cNvPr id="8" name="Picture 7" descr="5e47ed58306c9a9f.png"/>
           <p:cNvPicPr>
             <a:picLocks noChangeAspect="1"/>
           </p:cNvPicPr>
@@ -16175,72 +16920,24 @@
         </p:blipFill>
         <p:spPr>
           <a:xfrm>
-            <a:off x="1828800" y="1920240"/>
-            <a:ext cx="1630680" cy="673608"/>
+            <a:off x="4671059" y="2103120"/>
+            <a:ext cx="2819400" cy="667512"/>
           </a:xfrm>
           <a:prstGeom prst="rect">
             <a:avLst/>
           </a:prstGeom>
         </p:spPr>
       </p:pic>
-      <p:pic>
-        <p:nvPicPr>
-          <p:cNvPr id="9" name="Picture 8" descr="3737ed6aaf20179f.png"/>
-          <p:cNvPicPr>
-            <a:picLocks noChangeAspect="1"/>
-          </p:cNvPicPr>
-          <p:nvPr/>
-        </p:nvPicPr>
-        <p:blipFill>
-          <a:blip r:embed="rId3"/>
-          <a:stretch>
-            <a:fillRect/>
-          </a:stretch>
-        </p:blipFill>
-        <p:spPr>
-          <a:xfrm>
-            <a:off x="1828800" y="2868168"/>
-            <a:ext cx="3185160" cy="478536"/>
-          </a:xfrm>
-          <a:prstGeom prst="rect">
-            <a:avLst/>
-          </a:prstGeom>
-        </p:spPr>
-      </p:pic>
-      <p:pic>
-        <p:nvPicPr>
-          <p:cNvPr id="10" name="Picture 9" descr="48d618d0a819b8c5.png"/>
-          <p:cNvPicPr>
-            <a:picLocks noChangeAspect="1"/>
-          </p:cNvPicPr>
-          <p:nvPr/>
-        </p:nvPicPr>
-        <p:blipFill>
-          <a:blip r:embed="rId4"/>
-          <a:stretch>
-            <a:fillRect/>
-          </a:stretch>
-        </p:blipFill>
-        <p:spPr>
-          <a:xfrm>
-            <a:off x="1828800" y="3621024"/>
-            <a:ext cx="1661160" cy="667512"/>
-          </a:xfrm>
-          <a:prstGeom prst="rect">
-            <a:avLst/>
-          </a:prstGeom>
-        </p:spPr>
-      </p:pic>
-      <p:sp>
-        <p:nvSpPr>
-          <p:cNvPr id="11" name="TextBox 10"/>
-          <p:cNvSpPr txBox="1"/>
-          <p:nvPr/>
-        </p:nvSpPr>
-        <p:spPr>
-          <a:xfrm>
-            <a:off x="777240" y="4745736"/>
-            <a:ext cx="10607040" cy="548640"/>
+      <p:sp>
+        <p:nvSpPr>
+          <p:cNvPr id="9" name="TextBox 8"/>
+          <p:cNvSpPr txBox="1"/>
+          <p:nvPr/>
+        </p:nvSpPr>
+        <p:spPr>
+          <a:xfrm>
+            <a:off x="777240" y="3273552"/>
+            <a:ext cx="10607040" cy="429370"/>
           </a:xfrm>
           <a:prstGeom prst="rect">
             <a:avLst/>
@@ -16255,13 +16952,13 @@
           <a:p>
             <a:pPr algn="ctr"/>
             <a:r>
-              <a:rPr sz="3040" b="1" i="0">
-                <a:solidFill>
-                  <a:srgbClr val="9E1B32"/>
-                </a:solidFill>
-                <a:latin typeface="Lexend"/>
-              </a:rPr>
-              <a:t>Answer:   17/4</a:t>
+              <a:rPr sz="2280" b="1" i="0">
+                <a:solidFill>
+                  <a:srgbClr val="1A1A1A"/>
+                </a:solidFill>
+                <a:latin typeface="Lexend"/>
+              </a:rPr>
+              <a:t>Evaluate.</a:t>
             </a:r>
           </a:p>
         </p:txBody>
@@ -16314,7 +17011,7 @@
                 </a:solidFill>
                 <a:latin typeface="Lexend"/>
               </a:rPr>
-              <a:t>Your Turn</a:t>
+              <a:t>Example 1</a:t>
             </a:r>
           </a:p>
         </p:txBody>
@@ -16496,7 +17193,7 @@
       </p:sp>
       <p:pic>
         <p:nvPicPr>
-          <p:cNvPr id="8" name="Picture 7" descr="b20bcbb3e5acef31.png"/>
+          <p:cNvPr id="8" name="Picture 7" descr="0d6c9f96a3ec0d88.png"/>
           <p:cNvPicPr>
             <a:picLocks noChangeAspect="1"/>
           </p:cNvPicPr>
@@ -16510,24 +17207,72 @@
         </p:blipFill>
         <p:spPr>
           <a:xfrm>
-            <a:off x="4360163" y="1600200"/>
-            <a:ext cx="3441192" cy="841248"/>
+            <a:off x="1828800" y="1920240"/>
+            <a:ext cx="1630680" cy="673608"/>
           </a:xfrm>
           <a:prstGeom prst="rect">
             <a:avLst/>
           </a:prstGeom>
         </p:spPr>
       </p:pic>
-      <p:sp>
-        <p:nvSpPr>
-          <p:cNvPr id="9" name="TextBox 8"/>
-          <p:cNvSpPr txBox="1"/>
-          <p:nvPr/>
-        </p:nvSpPr>
-        <p:spPr>
-          <a:xfrm>
-            <a:off x="777240" y="2944368"/>
-            <a:ext cx="10607040" cy="429370"/>
+      <p:pic>
+        <p:nvPicPr>
+          <p:cNvPr id="9" name="Picture 8" descr="3737ed6aaf20179f.png"/>
+          <p:cNvPicPr>
+            <a:picLocks noChangeAspect="1"/>
+          </p:cNvPicPr>
+          <p:nvPr/>
+        </p:nvPicPr>
+        <p:blipFill>
+          <a:blip r:embed="rId3"/>
+          <a:stretch>
+            <a:fillRect/>
+          </a:stretch>
+        </p:blipFill>
+        <p:spPr>
+          <a:xfrm>
+            <a:off x="1828800" y="2868168"/>
+            <a:ext cx="3185160" cy="478536"/>
+          </a:xfrm>
+          <a:prstGeom prst="rect">
+            <a:avLst/>
+          </a:prstGeom>
+        </p:spPr>
+      </p:pic>
+      <p:pic>
+        <p:nvPicPr>
+          <p:cNvPr id="10" name="Picture 9" descr="48d618d0a819b8c5.png"/>
+          <p:cNvPicPr>
+            <a:picLocks noChangeAspect="1"/>
+          </p:cNvPicPr>
+          <p:nvPr/>
+        </p:nvPicPr>
+        <p:blipFill>
+          <a:blip r:embed="rId4"/>
+          <a:stretch>
+            <a:fillRect/>
+          </a:stretch>
+        </p:blipFill>
+        <p:spPr>
+          <a:xfrm>
+            <a:off x="1828800" y="3621024"/>
+            <a:ext cx="1661160" cy="667512"/>
+          </a:xfrm>
+          <a:prstGeom prst="rect">
+            <a:avLst/>
+          </a:prstGeom>
+        </p:spPr>
+      </p:pic>
+      <p:sp>
+        <p:nvSpPr>
+          <p:cNvPr id="11" name="TextBox 10"/>
+          <p:cNvSpPr txBox="1"/>
+          <p:nvPr/>
+        </p:nvSpPr>
+        <p:spPr>
+          <a:xfrm>
+            <a:off x="777240" y="4745736"/>
+            <a:ext cx="10607040" cy="548640"/>
           </a:xfrm>
           <a:prstGeom prst="rect">
             <a:avLst/>
@@ -16542,13 +17287,13 @@
           <a:p>
             <a:pPr algn="ctr"/>
             <a:r>
-              <a:rPr sz="2280" b="1" i="0">
-                <a:solidFill>
-                  <a:srgbClr val="1A1A1A"/>
-                </a:solidFill>
-                <a:latin typeface="Lexend"/>
-              </a:rPr>
-              <a:t>Evaluate.</a:t>
+              <a:rPr sz="3040" b="1" i="0">
+                <a:solidFill>
+                  <a:srgbClr val="9E1B32"/>
+                </a:solidFill>
+                <a:latin typeface="Lexend"/>
+              </a:rPr>
+              <a:t>Answer:   17/4</a:t>
             </a:r>
           </a:p>
         </p:txBody>

--- a/a7/packages/A7 Unit 4 - Solving Problems with Rational Numbers/Lessons/4.05/A7 4.05 Evaluating Expressions with Radicals - Slides.pptx
+++ b/a7/packages/A7 Unit 4 - Solving Problems with Rational Numbers/Lessons/4.05/A7 4.05 Evaluating Expressions with Radicals - Slides.pptx
@@ -4051,7 +4051,7 @@
         </p:blipFill>
         <p:spPr>
           <a:xfrm>
-            <a:off x="5020055" y="4184506"/>
+            <a:off x="5020055" y="4196031"/>
             <a:ext cx="2234184" cy="368808"/>
           </a:xfrm>
           <a:prstGeom prst="rect">
@@ -5330,7 +5330,7 @@
         </p:blipFill>
         <p:spPr>
           <a:xfrm>
-            <a:off x="4591811" y="3361546"/>
+            <a:off x="4591811" y="3373071"/>
             <a:ext cx="1261872" cy="368808"/>
           </a:xfrm>
           <a:prstGeom prst="rect">
@@ -5354,7 +5354,7 @@
         </p:blipFill>
         <p:spPr>
           <a:xfrm>
-            <a:off x="4591811" y="3864466"/>
+            <a:off x="4591811" y="3875991"/>
             <a:ext cx="2438400" cy="368808"/>
           </a:xfrm>
           <a:prstGeom prst="rect">
@@ -5378,7 +5378,7 @@
         </p:blipFill>
         <p:spPr>
           <a:xfrm>
-            <a:off x="4591811" y="4445110"/>
+            <a:off x="4591811" y="4461207"/>
             <a:ext cx="3087624" cy="213360"/>
           </a:xfrm>
           <a:prstGeom prst="rect">
@@ -5962,7 +5962,7 @@
       </p:pic>
       <p:pic>
         <p:nvPicPr>
-          <p:cNvPr id="9" name="Picture 8" descr="e345b1c8704f7bb5.png"/>
+          <p:cNvPr id="9" name="Picture 8" descr="ac1e77065a05d76c.png"/>
           <p:cNvPicPr>
             <a:picLocks noChangeAspect="1"/>
           </p:cNvPicPr>
@@ -5976,8 +5976,8 @@
         </p:blipFill>
         <p:spPr>
           <a:xfrm>
-            <a:off x="3840399" y="3020568"/>
-            <a:ext cx="1819656" cy="249935"/>
+            <a:off x="3843209" y="3035474"/>
+            <a:ext cx="1814798" cy="248602"/>
           </a:xfrm>
           <a:prstGeom prst="rect">
             <a:avLst/>
@@ -5992,7 +5992,7 @@
         </p:nvSpPr>
         <p:spPr>
           <a:xfrm>
-            <a:off x="5660055" y="2916936"/>
+            <a:off x="5658007" y="2917364"/>
             <a:ext cx="1338233" cy="457200"/>
           </a:xfrm>
           <a:prstGeom prst="rect">
@@ -6021,7 +6021,7 @@
       </p:sp>
       <p:pic>
         <p:nvPicPr>
-          <p:cNvPr id="11" name="Picture 10" descr="ca3e1ca339eb783d.png"/>
+          <p:cNvPr id="11" name="Picture 10" descr="5c398753ce4ec6c2.png"/>
           <p:cNvPicPr>
             <a:picLocks noChangeAspect="1"/>
           </p:cNvPicPr>
@@ -6035,8 +6035,8 @@
         </p:blipFill>
         <p:spPr>
           <a:xfrm>
-            <a:off x="6861128" y="2929128"/>
-            <a:ext cx="1572768" cy="432816"/>
+            <a:off x="6859080" y="2929128"/>
+            <a:ext cx="1574482" cy="433673"/>
           </a:xfrm>
           <a:prstGeom prst="rect">
             <a:avLst/>
@@ -6787,7 +6787,7 @@
         </p:nvSpPr>
         <p:spPr>
           <a:xfrm>
-            <a:off x="3739815" y="3587827"/>
+            <a:off x="3742768" y="3587827"/>
             <a:ext cx="3131776" cy="457200"/>
           </a:xfrm>
           <a:prstGeom prst="rect">
@@ -6816,7 +6816,7 @@
       </p:sp>
       <p:pic>
         <p:nvPicPr>
-          <p:cNvPr id="12" name="Picture 11" descr="389a35c8a608274e.png"/>
+          <p:cNvPr id="12" name="Picture 11" descr="02c22c2952ba0902.png"/>
           <p:cNvPicPr>
             <a:picLocks noChangeAspect="1"/>
           </p:cNvPicPr>
@@ -6830,8 +6830,8 @@
         </p:blipFill>
         <p:spPr>
           <a:xfrm>
-            <a:off x="3794679" y="4238575"/>
-            <a:ext cx="1868424" cy="256032"/>
+            <a:off x="3797632" y="4256529"/>
+            <a:ext cx="1864518" cy="254126"/>
           </a:xfrm>
           <a:prstGeom prst="rect">
             <a:avLst/>
@@ -6846,7 +6846,7 @@
         </p:nvSpPr>
         <p:spPr>
           <a:xfrm>
-            <a:off x="5663103" y="4137991"/>
+            <a:off x="5662150" y="4138419"/>
             <a:ext cx="1338233" cy="457200"/>
           </a:xfrm>
           <a:prstGeom prst="rect">
@@ -6875,7 +6875,7 @@
       </p:sp>
       <p:pic>
         <p:nvPicPr>
-          <p:cNvPr id="14" name="Picture 13" descr="296c25346e41fa21.png"/>
+          <p:cNvPr id="14" name="Picture 13" descr="8a48b6ab05ac2afa.png"/>
           <p:cNvPicPr>
             <a:picLocks noChangeAspect="1"/>
           </p:cNvPicPr>
@@ -6889,8 +6889,8 @@
         </p:blipFill>
         <p:spPr>
           <a:xfrm>
-            <a:off x="6864176" y="4150183"/>
-            <a:ext cx="1612392" cy="432816"/>
+            <a:off x="6863224" y="4150183"/>
+            <a:ext cx="1613154" cy="433673"/>
           </a:xfrm>
           <a:prstGeom prst="rect">
             <a:avLst/>
@@ -6905,7 +6905,7 @@
         </p:nvSpPr>
         <p:spPr>
           <a:xfrm>
-            <a:off x="777240" y="4720159"/>
+            <a:off x="777240" y="4721016"/>
             <a:ext cx="10607040" cy="548640"/>
           </a:xfrm>
           <a:prstGeom prst="rect">
@@ -7246,7 +7246,7 @@
         </p:blipFill>
         <p:spPr>
           <a:xfrm>
-            <a:off x="2423059" y="2116836"/>
+            <a:off x="2423059" y="2122741"/>
             <a:ext cx="2404872" cy="329184"/>
           </a:xfrm>
           <a:prstGeom prst="rect">
@@ -7291,7 +7291,7 @@
       </p:sp>
       <p:pic>
         <p:nvPicPr>
-          <p:cNvPr id="12" name="Picture 11" descr="97c530a75d29d302.png"/>
+          <p:cNvPr id="12" name="Picture 11" descr="25d82099734b37e3.png"/>
           <p:cNvPicPr>
             <a:picLocks noChangeAspect="1"/>
           </p:cNvPicPr>
@@ -7305,8 +7305,8 @@
         </p:blipFill>
         <p:spPr>
           <a:xfrm>
-            <a:off x="4667711" y="2699004"/>
-            <a:ext cx="844296" cy="390144"/>
+            <a:off x="4667711" y="2709322"/>
+            <a:ext cx="806926" cy="372610"/>
           </a:xfrm>
           <a:prstGeom prst="rect">
             <a:avLst/>
@@ -7350,7 +7350,7 @@
       </p:sp>
       <p:pic>
         <p:nvPicPr>
-          <p:cNvPr id="14" name="Picture 13" descr="b791e832d65b0b80.png"/>
+          <p:cNvPr id="14" name="Picture 13" descr="fa7316af9afa4f7e.png"/>
           <p:cNvPicPr>
             <a:picLocks noChangeAspect="1"/>
           </p:cNvPicPr>
@@ -7364,8 +7364,8 @@
         </p:blipFill>
         <p:spPr>
           <a:xfrm>
-            <a:off x="3922957" y="3393948"/>
-            <a:ext cx="1182624" cy="225552"/>
+            <a:off x="3922957" y="3405036"/>
+            <a:ext cx="1134443" cy="215971"/>
           </a:xfrm>
           <a:prstGeom prst="rect">
             <a:avLst/>
@@ -7913,7 +7913,7 @@
       </p:pic>
       <p:pic>
         <p:nvPicPr>
-          <p:cNvPr id="9" name="Picture 8" descr="6b0304793847f9ae.png"/>
+          <p:cNvPr id="9" name="Picture 8" descr="b0df40523fe93d35.png"/>
           <p:cNvPicPr>
             <a:picLocks noChangeAspect="1"/>
           </p:cNvPicPr>
@@ -7927,8 +7927,8 @@
         </p:blipFill>
         <p:spPr>
           <a:xfrm>
-            <a:off x="2794935" y="2987040"/>
-            <a:ext cx="3630168" cy="316992"/>
+            <a:off x="2796316" y="3032712"/>
+            <a:ext cx="3632358" cy="317658"/>
           </a:xfrm>
           <a:prstGeom prst="rect">
             <a:avLst/>
@@ -7943,7 +7943,7 @@
         </p:nvSpPr>
         <p:spPr>
           <a:xfrm>
-            <a:off x="6425103" y="2916936"/>
+            <a:off x="6428675" y="2917364"/>
             <a:ext cx="1338233" cy="457200"/>
           </a:xfrm>
           <a:prstGeom prst="rect">
@@ -7972,7 +7972,7 @@
       </p:sp>
       <p:pic>
         <p:nvPicPr>
-          <p:cNvPr id="11" name="Picture 10" descr="754dfe5956abcf18.png"/>
+          <p:cNvPr id="11" name="Picture 10" descr="c1de8963302adf8e.png"/>
           <p:cNvPicPr>
             <a:picLocks noChangeAspect="1"/>
           </p:cNvPicPr>
@@ -7986,8 +7986,8 @@
         </p:blipFill>
         <p:spPr>
           <a:xfrm>
-            <a:off x="7626176" y="2929128"/>
-            <a:ext cx="1853184" cy="432816"/>
+            <a:off x="7629748" y="2929128"/>
+            <a:ext cx="1853469" cy="433673"/>
           </a:xfrm>
           <a:prstGeom prst="rect">
             <a:avLst/>
@@ -8576,7 +8576,7 @@
         </p:nvSpPr>
         <p:spPr>
           <a:xfrm>
-            <a:off x="2763194" y="2906268"/>
+            <a:off x="2764480" y="2906268"/>
             <a:ext cx="3827922" cy="457200"/>
           </a:xfrm>
           <a:prstGeom prst="rect">
@@ -8605,7 +8605,7 @@
       </p:sp>
       <p:pic>
         <p:nvPicPr>
-          <p:cNvPr id="10" name="Picture 9" descr="5105a5010efd4535.png"/>
+          <p:cNvPr id="10" name="Picture 9" descr="f5329d2eda710a06.png"/>
           <p:cNvPicPr>
             <a:picLocks noChangeAspect="1"/>
           </p:cNvPicPr>
@@ -8619,8 +8619,8 @@
         </p:blipFill>
         <p:spPr>
           <a:xfrm>
-            <a:off x="6453957" y="2982468"/>
-            <a:ext cx="2944368" cy="304800"/>
+            <a:off x="6455242" y="2969133"/>
+            <a:ext cx="2947320" cy="306609"/>
           </a:xfrm>
           <a:prstGeom prst="rect">
             <a:avLst/>
@@ -8643,7 +8643,7 @@
         </p:blipFill>
         <p:spPr>
           <a:xfrm>
-            <a:off x="2818058" y="3468623"/>
+            <a:off x="2819344" y="3468624"/>
             <a:ext cx="1271016" cy="432816"/>
           </a:xfrm>
           <a:prstGeom prst="rect">
@@ -9479,7 +9479,7 @@
         </p:nvSpPr>
         <p:spPr>
           <a:xfrm>
-            <a:off x="3136574" y="3481147"/>
+            <a:off x="3137384" y="3481147"/>
             <a:ext cx="3827922" cy="457200"/>
           </a:xfrm>
           <a:prstGeom prst="rect">
@@ -9508,7 +9508,7 @@
       </p:sp>
       <p:pic>
         <p:nvPicPr>
-          <p:cNvPr id="11" name="Picture 10" descr="d050f197a4a44d9d.png"/>
+          <p:cNvPr id="11" name="Picture 10" descr="6f0e461534c4fda4.png"/>
           <p:cNvPicPr>
             <a:picLocks noChangeAspect="1"/>
           </p:cNvPicPr>
@@ -9522,8 +9522,8 @@
         </p:blipFill>
         <p:spPr>
           <a:xfrm>
-            <a:off x="6827337" y="3581731"/>
-            <a:ext cx="2197608" cy="256032"/>
+            <a:off x="6828146" y="3596495"/>
+            <a:ext cx="2198751" cy="254126"/>
           </a:xfrm>
           <a:prstGeom prst="rect">
             <a:avLst/>
@@ -9546,7 +9546,7 @@
         </p:blipFill>
         <p:spPr>
           <a:xfrm>
-            <a:off x="3191438" y="4043503"/>
+            <a:off x="3192248" y="4043503"/>
             <a:ext cx="1612392" cy="432816"/>
           </a:xfrm>
           <a:prstGeom prst="rect">
@@ -10406,7 +10406,7 @@
         </p:nvSpPr>
         <p:spPr>
           <a:xfrm>
-            <a:off x="4052316" y="4679011"/>
+            <a:off x="4052316" y="4678582"/>
             <a:ext cx="927639" cy="457200"/>
           </a:xfrm>
           <a:prstGeom prst="rect">
@@ -10435,7 +10435,7 @@
       </p:sp>
       <p:pic>
         <p:nvPicPr>
-          <p:cNvPr id="12" name="Picture 11" descr="712e2a339e91aae2.png"/>
+          <p:cNvPr id="12" name="Picture 11" descr="057b68cb0facbc9c.png"/>
           <p:cNvPicPr>
             <a:picLocks noChangeAspect="1"/>
           </p:cNvPicPr>
@@ -10450,7 +10450,7 @@
         <p:spPr>
           <a:xfrm>
             <a:off x="4842795" y="4549471"/>
-            <a:ext cx="1786128" cy="716280"/>
+            <a:ext cx="1787175" cy="715422"/>
           </a:xfrm>
           <a:prstGeom prst="rect">
             <a:avLst/>
@@ -10465,7 +10465,7 @@
         </p:nvSpPr>
         <p:spPr>
           <a:xfrm>
-            <a:off x="777240" y="5402911"/>
+            <a:off x="777240" y="5402054"/>
             <a:ext cx="10607040" cy="548640"/>
           </a:xfrm>
           <a:prstGeom prst="rect">
@@ -11033,7 +11033,7 @@
       </p:pic>
       <p:pic>
         <p:nvPicPr>
-          <p:cNvPr id="9" name="Picture 8" descr="ab1c6f19d3960fbb.png"/>
+          <p:cNvPr id="9" name="Picture 8" descr="7f97372ca3358ffb.png"/>
           <p:cNvPicPr>
             <a:picLocks noChangeAspect="1"/>
           </p:cNvPicPr>
@@ -11047,8 +11047,8 @@
         </p:blipFill>
         <p:spPr>
           <a:xfrm>
-            <a:off x="3986317" y="3240023"/>
-            <a:ext cx="1161288" cy="716280"/>
+            <a:off x="3988698" y="3240023"/>
+            <a:ext cx="1157382" cy="715422"/>
           </a:xfrm>
           <a:prstGeom prst="rect">
             <a:avLst/>
@@ -11063,7 +11063,7 @@
         </p:nvSpPr>
         <p:spPr>
           <a:xfrm>
-            <a:off x="5147605" y="3369563"/>
+            <a:off x="5146081" y="3369135"/>
             <a:ext cx="1939461" cy="457200"/>
           </a:xfrm>
           <a:prstGeom prst="rect">
@@ -11092,7 +11092,7 @@
       </p:sp>
       <p:pic>
         <p:nvPicPr>
-          <p:cNvPr id="11" name="Picture 10" descr="7b48005c9016cda3.png"/>
+          <p:cNvPr id="11" name="Picture 10" descr="814fb0376044ab20.png"/>
           <p:cNvPicPr>
             <a:picLocks noChangeAspect="1"/>
           </p:cNvPicPr>
@@ -11106,8 +11106,8 @@
         </p:blipFill>
         <p:spPr>
           <a:xfrm>
-            <a:off x="6949906" y="3240023"/>
-            <a:ext cx="1322832" cy="716280"/>
+            <a:off x="6948382" y="3240023"/>
+            <a:ext cx="1325880" cy="715422"/>
           </a:xfrm>
           <a:prstGeom prst="rect">
             <a:avLst/>
@@ -11130,7 +11130,7 @@
         </p:blipFill>
         <p:spPr>
           <a:xfrm>
-            <a:off x="3986317" y="4084320"/>
+            <a:off x="3988698" y="4083462"/>
             <a:ext cx="1350264" cy="606552"/>
           </a:xfrm>
           <a:prstGeom prst="rect">
@@ -11146,7 +11146,7 @@
         </p:nvSpPr>
         <p:spPr>
           <a:xfrm>
-            <a:off x="777240" y="4828032"/>
+            <a:off x="777240" y="4827174"/>
             <a:ext cx="10607040" cy="548640"/>
           </a:xfrm>
           <a:prstGeom prst="rect">
@@ -11522,7 +11522,7 @@
         </p:blipFill>
         <p:spPr>
           <a:xfrm>
-            <a:off x="2423059" y="2116836"/>
+            <a:off x="2423059" y="2122741"/>
             <a:ext cx="2404872" cy="329184"/>
           </a:xfrm>
           <a:prstGeom prst="rect">
@@ -11611,7 +11611,7 @@
       </p:sp>
       <p:pic>
         <p:nvPicPr>
-          <p:cNvPr id="14" name="Picture 13" descr="97c530a75d29d302.png"/>
+          <p:cNvPr id="14" name="Picture 13" descr="25d82099734b37e3.png"/>
           <p:cNvPicPr>
             <a:picLocks noChangeAspect="1"/>
           </p:cNvPicPr>
@@ -11625,8 +11625,8 @@
         </p:blipFill>
         <p:spPr>
           <a:xfrm>
-            <a:off x="4667711" y="2699004"/>
-            <a:ext cx="844296" cy="390144"/>
+            <a:off x="4667711" y="2709322"/>
+            <a:ext cx="806926" cy="372610"/>
           </a:xfrm>
           <a:prstGeom prst="rect">
             <a:avLst/>
@@ -11641,7 +11641,7 @@
         </p:nvSpPr>
         <p:spPr>
           <a:xfrm>
-            <a:off x="6060647" y="2665476"/>
+            <a:off x="6023277" y="2665476"/>
             <a:ext cx="570049" cy="457200"/>
           </a:xfrm>
           <a:prstGeom prst="rect">
@@ -11705,7 +11705,7 @@
       </p:sp>
       <p:pic>
         <p:nvPicPr>
-          <p:cNvPr id="17" name="Picture 16" descr="b791e832d65b0b80.png"/>
+          <p:cNvPr id="17" name="Picture 16" descr="fa7316af9afa4f7e.png"/>
           <p:cNvPicPr>
             <a:picLocks noChangeAspect="1"/>
           </p:cNvPicPr>
@@ -11719,8 +11719,8 @@
         </p:blipFill>
         <p:spPr>
           <a:xfrm>
-            <a:off x="3922957" y="3393948"/>
-            <a:ext cx="1182624" cy="225552"/>
+            <a:off x="3922957" y="3405036"/>
+            <a:ext cx="1134443" cy="215971"/>
           </a:xfrm>
           <a:prstGeom prst="rect">
             <a:avLst/>
@@ -11735,7 +11735,7 @@
         </p:nvSpPr>
         <p:spPr>
           <a:xfrm>
-            <a:off x="5654221" y="3278124"/>
+            <a:off x="5606040" y="3278124"/>
             <a:ext cx="386509" cy="457200"/>
           </a:xfrm>
           <a:prstGeom prst="rect">
@@ -12317,7 +12317,7 @@
         </p:blipFill>
         <p:spPr>
           <a:xfrm>
-            <a:off x="3809999" y="2950464"/>
+            <a:off x="3809999" y="2961989"/>
             <a:ext cx="4651248" cy="368808"/>
           </a:xfrm>
           <a:prstGeom prst="rect">
@@ -12644,8 +12644,8 @@
         </p:nvSpPr>
         <p:spPr>
           <a:xfrm>
-            <a:off x="2359886" y="2205228"/>
-            <a:ext cx="2969717" cy="457200"/>
+            <a:off x="2699094" y="2171700"/>
+            <a:ext cx="2757551" cy="457200"/>
           </a:xfrm>
           <a:prstGeom prst="rect">
             <a:avLst/>
@@ -12660,7 +12660,7 @@
           <a:p>
             <a:pPr algn="l"/>
             <a:r>
-              <a:rPr sz="2470" b="0" i="0">
+              <a:rPr sz="2280" b="0" i="0">
                 <a:solidFill>
                   <a:srgbClr val="1A1A1A"/>
                 </a:solidFill>
@@ -12687,8 +12687,8 @@
         </p:blipFill>
         <p:spPr>
           <a:xfrm>
-            <a:off x="5192443" y="2194560"/>
-            <a:ext cx="1060704" cy="478536"/>
+            <a:off x="5319485" y="2207514"/>
+            <a:ext cx="861821" cy="388810"/>
           </a:xfrm>
           <a:prstGeom prst="rect">
             <a:avLst/>
@@ -12703,8 +12703,8 @@
         </p:nvSpPr>
         <p:spPr>
           <a:xfrm>
-            <a:off x="6253147" y="2205228"/>
-            <a:ext cx="3685645" cy="457200"/>
+            <a:off x="6181307" y="2171700"/>
+            <a:ext cx="3418277" cy="457200"/>
           </a:xfrm>
           <a:prstGeom prst="rect">
             <a:avLst/>
@@ -12719,47 +12719,47 @@
           <a:p>
             <a:pPr algn="l"/>
             <a:r>
+              <a:rPr sz="2280" b="0" i="0">
+                <a:solidFill>
+                  <a:srgbClr val="1A1A1A"/>
+                </a:solidFill>
+                <a:latin typeface="Lexend"/>
+              </a:rPr>
+              <a:t>  is not a real number,</a:t>
+            </a:r>
+          </a:p>
+        </p:txBody>
+      </p:sp>
+      <p:sp>
+        <p:nvSpPr>
+          <p:cNvPr id="11" name="TextBox 10"/>
+          <p:cNvSpPr txBox="1"/>
+          <p:nvPr/>
+        </p:nvSpPr>
+        <p:spPr>
+          <a:xfrm>
+            <a:off x="777240" y="2880360"/>
+            <a:ext cx="10607040" cy="465151"/>
+          </a:xfrm>
+          <a:prstGeom prst="rect">
+            <a:avLst/>
+          </a:prstGeom>
+          <a:noFill/>
+        </p:spPr>
+        <p:txBody>
+          <a:bodyPr wrap="square" lIns="45720" rIns="45720" tIns="18288" bIns="18288" anchor="t">
+            <a:spAutoFit/>
+          </a:bodyPr>
+          <a:lstStyle/>
+          <a:p>
+            <a:pPr algn="ctr"/>
+            <a:r>
               <a:rPr sz="2470" b="0" i="0">
                 <a:solidFill>
                   <a:srgbClr val="1A1A1A"/>
                 </a:solidFill>
                 <a:latin typeface="Lexend"/>
               </a:rPr>
-              <a:t>  is not a real number,</a:t>
-            </a:r>
-          </a:p>
-        </p:txBody>
-      </p:sp>
-      <p:sp>
-        <p:nvSpPr>
-          <p:cNvPr id="11" name="TextBox 10"/>
-          <p:cNvSpPr txBox="1"/>
-          <p:nvPr/>
-        </p:nvSpPr>
-        <p:spPr>
-          <a:xfrm>
-            <a:off x="777240" y="2947416"/>
-            <a:ext cx="10607040" cy="465151"/>
-          </a:xfrm>
-          <a:prstGeom prst="rect">
-            <a:avLst/>
-          </a:prstGeom>
-          <a:noFill/>
-        </p:spPr>
-        <p:txBody>
-          <a:bodyPr wrap="square" lIns="45720" rIns="45720" tIns="18288" bIns="18288" anchor="t">
-            <a:spAutoFit/>
-          </a:bodyPr>
-          <a:lstStyle/>
-          <a:p>
-            <a:pPr algn="ctr"/>
-            <a:r>
-              <a:rPr sz="2470" b="0" i="0">
-                <a:solidFill>
-                  <a:srgbClr val="1A1A1A"/>
-                </a:solidFill>
-                <a:latin typeface="Lexend"/>
-              </a:rPr>
               <a:t>because you cannot take the root of a negative.</a:t>
             </a:r>
           </a:p>
@@ -12773,7 +12773,7 @@
         </p:nvSpPr>
         <p:spPr>
           <a:xfrm>
-            <a:off x="777240" y="3522295"/>
+            <a:off x="777240" y="3455239"/>
             <a:ext cx="10607040" cy="465151"/>
           </a:xfrm>
           <a:prstGeom prst="rect">
@@ -13071,8 +13071,8 @@
         </p:nvSpPr>
         <p:spPr>
           <a:xfrm>
-            <a:off x="2361410" y="2113788"/>
-            <a:ext cx="2969717" cy="457200"/>
+            <a:off x="2700332" y="2080260"/>
+            <a:ext cx="2757551" cy="457200"/>
           </a:xfrm>
           <a:prstGeom prst="rect">
             <a:avLst/>
@@ -13087,7 +13087,7 @@
           <a:p>
             <a:pPr algn="l"/>
             <a:r>
-              <a:rPr sz="2470" b="0" i="0">
+              <a:rPr sz="2280" b="0" i="0">
                 <a:solidFill>
                   <a:srgbClr val="1A1A1A"/>
                 </a:solidFill>
@@ -13114,8 +13114,8 @@
         </p:blipFill>
         <p:spPr>
           <a:xfrm>
-            <a:off x="5193967" y="2103120"/>
-            <a:ext cx="1057656" cy="478536"/>
+            <a:off x="5320723" y="2116074"/>
+            <a:ext cx="859345" cy="388810"/>
           </a:xfrm>
           <a:prstGeom prst="rect">
             <a:avLst/>
@@ -13130,8 +13130,8 @@
         </p:nvSpPr>
         <p:spPr>
           <a:xfrm>
-            <a:off x="6251623" y="2113788"/>
-            <a:ext cx="3685645" cy="457200"/>
+            <a:off x="6180069" y="2080260"/>
+            <a:ext cx="3418277" cy="457200"/>
           </a:xfrm>
           <a:prstGeom prst="rect">
             <a:avLst/>
@@ -13146,26 +13146,61 @@
           <a:p>
             <a:pPr algn="l"/>
             <a:r>
+              <a:rPr sz="2280" b="0" i="0">
+                <a:solidFill>
+                  <a:srgbClr val="1A1A1A"/>
+                </a:solidFill>
+                <a:latin typeface="Lexend"/>
+              </a:rPr>
+              <a:t>  is not a real number,</a:t>
+            </a:r>
+          </a:p>
+        </p:txBody>
+      </p:sp>
+      <p:sp>
+        <p:nvSpPr>
+          <p:cNvPr id="11" name="TextBox 10"/>
+          <p:cNvSpPr txBox="1"/>
+          <p:nvPr/>
+        </p:nvSpPr>
+        <p:spPr>
+          <a:xfrm>
+            <a:off x="777240" y="2788920"/>
+            <a:ext cx="10607040" cy="465151"/>
+          </a:xfrm>
+          <a:prstGeom prst="rect">
+            <a:avLst/>
+          </a:prstGeom>
+          <a:noFill/>
+        </p:spPr>
+        <p:txBody>
+          <a:bodyPr wrap="square" lIns="45720" rIns="45720" tIns="18288" bIns="18288" anchor="t">
+            <a:spAutoFit/>
+          </a:bodyPr>
+          <a:lstStyle/>
+          <a:p>
+            <a:pPr algn="ctr"/>
+            <a:r>
               <a:rPr sz="2470" b="0" i="0">
                 <a:solidFill>
                   <a:srgbClr val="1A1A1A"/>
                 </a:solidFill>
                 <a:latin typeface="Lexend"/>
               </a:rPr>
-              <a:t>  is not a real number,</a:t>
-            </a:r>
-          </a:p>
-        </p:txBody>
-      </p:sp>
-      <p:sp>
-        <p:nvSpPr>
-          <p:cNvPr id="11" name="TextBox 10"/>
-          <p:cNvSpPr txBox="1"/>
-          <p:nvPr/>
-        </p:nvSpPr>
-        <p:spPr>
-          <a:xfrm>
-            <a:off x="777240" y="2855975"/>
+              <a:t>because you cannot take the root of a negative.</a:t>
+            </a:r>
+          </a:p>
+        </p:txBody>
+      </p:sp>
+      <p:sp>
+        <p:nvSpPr>
+          <p:cNvPr id="12" name="TextBox 11"/>
+          <p:cNvSpPr txBox="1"/>
+          <p:nvPr/>
+        </p:nvSpPr>
+        <p:spPr>
+          <a:xfrm>
+            <a:off x="777240" y="3363799"/>
             <a:ext cx="10607040" cy="465151"/>
           </a:xfrm>
           <a:prstGeom prst="rect">
@@ -13187,41 +13222,6 @@
                 </a:solidFill>
                 <a:latin typeface="Lexend"/>
               </a:rPr>
-              <a:t>because you cannot take the root of a negative.</a:t>
-            </a:r>
-          </a:p>
-        </p:txBody>
-      </p:sp>
-      <p:sp>
-        <p:nvSpPr>
-          <p:cNvPr id="12" name="TextBox 11"/>
-          <p:cNvSpPr txBox="1"/>
-          <p:nvPr/>
-        </p:nvSpPr>
-        <p:spPr>
-          <a:xfrm>
-            <a:off x="777240" y="3430855"/>
-            <a:ext cx="10607040" cy="465151"/>
-          </a:xfrm>
-          <a:prstGeom prst="rect">
-            <a:avLst/>
-          </a:prstGeom>
-          <a:noFill/>
-        </p:spPr>
-        <p:txBody>
-          <a:bodyPr wrap="square" lIns="45720" rIns="45720" tIns="18288" bIns="18288" anchor="t">
-            <a:spAutoFit/>
-          </a:bodyPr>
-          <a:lstStyle/>
-          <a:p>
-            <a:pPr algn="ctr"/>
-            <a:r>
-              <a:rPr sz="2470" b="0" i="0">
-                <a:solidFill>
-                  <a:srgbClr val="1A1A1A"/>
-                </a:solidFill>
-                <a:latin typeface="Lexend"/>
-              </a:rPr>
               <a:t>Explain why he is wrong, and give the value.</a:t>
             </a:r>
           </a:p>
@@ -13235,7 +13235,7 @@
         </p:nvSpPr>
         <p:spPr>
           <a:xfrm>
-            <a:off x="893154" y="4056026"/>
+            <a:off x="893154" y="3988970"/>
             <a:ext cx="10512370" cy="457200"/>
           </a:xfrm>
           <a:prstGeom prst="rect">
@@ -13264,7 +13264,7 @@
       </p:sp>
       <p:pic>
         <p:nvPicPr>
-          <p:cNvPr id="14" name="Picture 13" descr="cbf83985c3ed1e84.png"/>
+          <p:cNvPr id="14" name="Picture 13" descr="32fe0726ff7037f5.png"/>
           <p:cNvPicPr>
             <a:picLocks noChangeAspect="1"/>
           </p:cNvPicPr>
@@ -13278,8 +13278,8 @@
         </p:blipFill>
         <p:spPr>
           <a:xfrm>
-            <a:off x="948018" y="4654958"/>
-            <a:ext cx="2889504" cy="265176"/>
+            <a:off x="948018" y="4624811"/>
+            <a:ext cx="2886694" cy="268366"/>
           </a:xfrm>
           <a:prstGeom prst="rect">
             <a:avLst/>
@@ -13294,7 +13294,7 @@
         </p:nvSpPr>
         <p:spPr>
           <a:xfrm>
-            <a:off x="3837522" y="4558946"/>
+            <a:off x="3834712" y="4491890"/>
             <a:ext cx="1163085" cy="457200"/>
           </a:xfrm>
           <a:prstGeom prst="rect">
@@ -13323,7 +13323,7 @@
       </p:sp>
       <p:pic>
         <p:nvPicPr>
-          <p:cNvPr id="16" name="Picture 15" descr="590e54612c7e6e68.png"/>
+          <p:cNvPr id="16" name="Picture 15" descr="06859444d1f0d678.png"/>
           <p:cNvPicPr>
             <a:picLocks noChangeAspect="1"/>
           </p:cNvPicPr>
@@ -13337,8 +13337,8 @@
         </p:blipFill>
         <p:spPr>
           <a:xfrm>
-            <a:off x="4863447" y="4603142"/>
-            <a:ext cx="1405128" cy="368808"/>
+            <a:off x="4860637" y="4547802"/>
+            <a:ext cx="1404842" cy="366379"/>
           </a:xfrm>
           <a:prstGeom prst="rect">
             <a:avLst/>
@@ -13353,7 +13353,7 @@
         </p:nvSpPr>
         <p:spPr>
           <a:xfrm>
-            <a:off x="777240" y="5130446"/>
+            <a:off x="777240" y="5063390"/>
             <a:ext cx="10607040" cy="548640"/>
           </a:xfrm>
           <a:prstGeom prst="rect">
@@ -14741,7 +14741,7 @@
         </p:nvSpPr>
         <p:spPr>
           <a:xfrm>
-            <a:off x="1143000" y="1903078"/>
+            <a:off x="1143000" y="1869550"/>
             <a:ext cx="7515121" cy="457200"/>
           </a:xfrm>
           <a:prstGeom prst="rect">
@@ -14784,8 +14784,8 @@
         </p:blipFill>
         <p:spPr>
           <a:xfrm>
-            <a:off x="8520961" y="1892410"/>
-            <a:ext cx="835152" cy="478536"/>
+            <a:off x="8520961" y="1921429"/>
+            <a:ext cx="622014" cy="356409"/>
           </a:xfrm>
           <a:prstGeom prst="rect">
             <a:avLst/>
@@ -14800,7 +14800,7 @@
         </p:nvSpPr>
         <p:spPr>
           <a:xfrm>
-            <a:off x="9356113" y="1903078"/>
+            <a:off x="9142976" y="1869550"/>
             <a:ext cx="1770158" cy="457200"/>
           </a:xfrm>
           <a:prstGeom prst="rect">
@@ -14835,7 +14835,7 @@
         </p:nvSpPr>
         <p:spPr>
           <a:xfrm>
-            <a:off x="1143000" y="2454766"/>
+            <a:off x="1143000" y="2354182"/>
             <a:ext cx="919946" cy="457200"/>
           </a:xfrm>
           <a:prstGeom prst="rect">
@@ -14878,8 +14878,8 @@
         </p:blipFill>
         <p:spPr>
           <a:xfrm>
-            <a:off x="1925786" y="2444098"/>
-            <a:ext cx="871728" cy="478536"/>
+            <a:off x="1925786" y="2406061"/>
+            <a:ext cx="649255" cy="356409"/>
           </a:xfrm>
           <a:prstGeom prst="rect">
             <a:avLst/>
@@ -14894,7 +14894,7 @@
         </p:nvSpPr>
         <p:spPr>
           <a:xfrm>
-            <a:off x="2797514" y="2454766"/>
+            <a:off x="2575041" y="2354182"/>
             <a:ext cx="2140736" cy="457200"/>
           </a:xfrm>
           <a:prstGeom prst="rect">
@@ -14929,7 +14929,7 @@
         </p:nvSpPr>
         <p:spPr>
           <a:xfrm>
-            <a:off x="777240" y="3123802"/>
+            <a:off x="777240" y="2989690"/>
             <a:ext cx="10607040" cy="429370"/>
           </a:xfrm>
           <a:prstGeom prst="rect">
@@ -14964,7 +14964,7 @@
         </p:nvSpPr>
         <p:spPr>
           <a:xfrm>
-            <a:off x="1143000" y="3553172"/>
+            <a:off x="1143000" y="3419060"/>
             <a:ext cx="10241280" cy="787179"/>
           </a:xfrm>
           <a:prstGeom prst="rect">
@@ -14999,7 +14999,7 @@
         </p:nvSpPr>
         <p:spPr>
           <a:xfrm>
-            <a:off x="777240" y="4578096"/>
+            <a:off x="777240" y="4443984"/>
             <a:ext cx="10607040" cy="429370"/>
           </a:xfrm>
           <a:prstGeom prst="rect">
@@ -15034,7 +15034,7 @@
         </p:nvSpPr>
         <p:spPr>
           <a:xfrm>
-            <a:off x="1143000" y="5018134"/>
+            <a:off x="1143000" y="4850494"/>
             <a:ext cx="3163998" cy="457200"/>
           </a:xfrm>
           <a:prstGeom prst="rect">
@@ -15077,8 +15077,8 @@
         </p:blipFill>
         <p:spPr>
           <a:xfrm>
-            <a:off x="4169838" y="5007466"/>
-            <a:ext cx="868680" cy="478536"/>
+            <a:off x="4169838" y="4902373"/>
+            <a:ext cx="646985" cy="356409"/>
           </a:xfrm>
           <a:prstGeom prst="rect">
             <a:avLst/>
@@ -15093,7 +15093,7 @@
         </p:nvSpPr>
         <p:spPr>
           <a:xfrm>
-            <a:off x="5038518" y="5018134"/>
+            <a:off x="4816824" y="4850494"/>
             <a:ext cx="3934879" cy="457200"/>
           </a:xfrm>
           <a:prstGeom prst="rect">
@@ -15128,7 +15128,7 @@
         </p:nvSpPr>
         <p:spPr>
           <a:xfrm>
-            <a:off x="1143000" y="5536294"/>
+            <a:off x="1143000" y="5335126"/>
             <a:ext cx="1985121" cy="457200"/>
           </a:xfrm>
           <a:prstGeom prst="rect">
@@ -15171,8 +15171,8 @@
         </p:blipFill>
         <p:spPr>
           <a:xfrm>
-            <a:off x="2990961" y="5559154"/>
-            <a:ext cx="841248" cy="411480"/>
+            <a:off x="2990961" y="5416517"/>
+            <a:ext cx="626554" cy="306466"/>
           </a:xfrm>
           <a:prstGeom prst="rect">
             <a:avLst/>
@@ -15187,7 +15187,7 @@
         </p:nvSpPr>
         <p:spPr>
           <a:xfrm>
-            <a:off x="3832209" y="5536294"/>
+            <a:off x="3617516" y="5335126"/>
             <a:ext cx="1545702" cy="457200"/>
           </a:xfrm>
           <a:prstGeom prst="rect">
@@ -15528,7 +15528,7 @@
         </p:blipFill>
         <p:spPr>
           <a:xfrm>
-            <a:off x="3377184" y="1993392"/>
+            <a:off x="3377184" y="2194560"/>
             <a:ext cx="5407152" cy="478536"/>
           </a:xfrm>
           <a:prstGeom prst="rect">
@@ -15552,7 +15552,7 @@
         </p:blipFill>
         <p:spPr>
           <a:xfrm>
-            <a:off x="4488180" y="2746248"/>
+            <a:off x="4488180" y="3057144"/>
             <a:ext cx="3185160" cy="478536"/>
           </a:xfrm>
           <a:prstGeom prst="rect">
@@ -15576,8 +15576,8 @@
         </p:blipFill>
         <p:spPr>
           <a:xfrm>
-            <a:off x="3221035" y="3499104"/>
-            <a:ext cx="3209544" cy="478536"/>
+            <a:off x="3460740" y="3919728"/>
+            <a:ext cx="2825067" cy="421211"/>
           </a:xfrm>
           <a:prstGeom prst="rect">
             <a:avLst/>
@@ -15592,7 +15592,7 @@
         </p:nvSpPr>
         <p:spPr>
           <a:xfrm>
-            <a:off x="6430579" y="3509772"/>
+            <a:off x="6285807" y="3901733"/>
             <a:ext cx="1854584" cy="457200"/>
           </a:xfrm>
           <a:prstGeom prst="rect">
@@ -15635,8 +15635,8 @@
         </p:blipFill>
         <p:spPr>
           <a:xfrm>
-            <a:off x="8148004" y="3601212"/>
-            <a:ext cx="792480" cy="274320"/>
+            <a:off x="8003232" y="4018065"/>
+            <a:ext cx="697547" cy="241458"/>
           </a:xfrm>
           <a:prstGeom prst="rect">
             <a:avLst/>
@@ -15651,7 +15651,7 @@
         </p:nvSpPr>
         <p:spPr>
           <a:xfrm>
-            <a:off x="987552" y="4315968"/>
+            <a:off x="987552" y="4880435"/>
             <a:ext cx="10131551" cy="475488"/>
           </a:xfrm>
           <a:prstGeom prst="rect">
@@ -15992,7 +15992,7 @@
         </p:blipFill>
         <p:spPr>
           <a:xfrm>
-            <a:off x="2686784" y="1993392"/>
+            <a:off x="2686784" y="2194560"/>
             <a:ext cx="1423416" cy="478536"/>
           </a:xfrm>
           <a:prstGeom prst="rect">
@@ -16008,7 +16008,7 @@
         </p:nvSpPr>
         <p:spPr>
           <a:xfrm>
-            <a:off x="4110200" y="2004060"/>
+            <a:off x="4110200" y="2205228"/>
             <a:ext cx="1141503" cy="457200"/>
           </a:xfrm>
           <a:prstGeom prst="rect">
@@ -16051,7 +16051,7 @@
         </p:blipFill>
         <p:spPr>
           <a:xfrm>
-            <a:off x="5114543" y="1993392"/>
+            <a:off x="5114543" y="2194560"/>
             <a:ext cx="1453896" cy="478536"/>
           </a:xfrm>
           <a:prstGeom prst="rect">
@@ -16067,7 +16067,7 @@
         </p:nvSpPr>
         <p:spPr>
           <a:xfrm>
-            <a:off x="6568439" y="2004060"/>
+            <a:off x="6568439" y="2205228"/>
             <a:ext cx="1141503" cy="457200"/>
           </a:xfrm>
           <a:prstGeom prst="rect">
@@ -16110,7 +16110,7 @@
         </p:blipFill>
         <p:spPr>
           <a:xfrm>
-            <a:off x="7572783" y="1993392"/>
+            <a:off x="7572783" y="2194560"/>
             <a:ext cx="1901952" cy="478536"/>
           </a:xfrm>
           <a:prstGeom prst="rect">
@@ -16134,7 +16134,7 @@
         </p:blipFill>
         <p:spPr>
           <a:xfrm>
-            <a:off x="4118596" y="2750820"/>
+            <a:off x="4118596" y="3057144"/>
             <a:ext cx="1246632" cy="789432"/>
           </a:xfrm>
           <a:prstGeom prst="rect">
@@ -16150,7 +16150,7 @@
         </p:nvSpPr>
         <p:spPr>
           <a:xfrm>
-            <a:off x="5365228" y="2916936"/>
+            <a:off x="5365228" y="3227832"/>
             <a:ext cx="1141503" cy="457200"/>
           </a:xfrm>
           <a:prstGeom prst="rect">
@@ -16193,7 +16193,7 @@
         </p:blipFill>
         <p:spPr>
           <a:xfrm>
-            <a:off x="6369571" y="2746248"/>
+            <a:off x="6369571" y="3057144"/>
             <a:ext cx="1673352" cy="798576"/>
           </a:xfrm>
           <a:prstGeom prst="rect">
@@ -16209,7 +16209,7 @@
         </p:nvSpPr>
         <p:spPr>
           <a:xfrm>
-            <a:off x="987552" y="3883152"/>
+            <a:off x="987552" y="4395216"/>
             <a:ext cx="10131551" cy="950976"/>
           </a:xfrm>
           <a:prstGeom prst="rect">
@@ -16550,7 +16550,7 @@
         </p:blipFill>
         <p:spPr>
           <a:xfrm>
-            <a:off x="2736328" y="1993392"/>
+            <a:off x="2736328" y="2194560"/>
             <a:ext cx="2286000" cy="731520"/>
           </a:xfrm>
           <a:prstGeom prst="rect">
@@ -16566,7 +16566,7 @@
         </p:nvSpPr>
         <p:spPr>
           <a:xfrm>
-            <a:off x="5022328" y="2130552"/>
+            <a:off x="5022328" y="2331720"/>
             <a:ext cx="1141503" cy="457200"/>
           </a:xfrm>
           <a:prstGeom prst="rect">
@@ -16609,7 +16609,7 @@
         </p:blipFill>
         <p:spPr>
           <a:xfrm>
-            <a:off x="6026671" y="2119884"/>
+            <a:off x="6026671" y="2306193"/>
             <a:ext cx="3398520" cy="478536"/>
           </a:xfrm>
           <a:prstGeom prst="rect">
@@ -16633,7 +16633,7 @@
         </p:blipFill>
         <p:spPr>
           <a:xfrm>
-            <a:off x="3761232" y="2999232"/>
+            <a:off x="3761232" y="3310127"/>
             <a:ext cx="4639056" cy="673608"/>
           </a:xfrm>
           <a:prstGeom prst="rect">
@@ -16649,7 +16649,7 @@
         </p:nvSpPr>
         <p:spPr>
           <a:xfrm>
-            <a:off x="987552" y="4011168"/>
+            <a:off x="987552" y="4523232"/>
             <a:ext cx="10131551" cy="475488"/>
           </a:xfrm>
           <a:prstGeom prst="rect">
